--- a/fpga/sw/export/docs/slides/05_Secure_file_transfer_and_results.pptx
+++ b/fpga/sw/export/docs/slides/05_Secure_file_transfer_and_results.pptx
@@ -26198,7 +26198,7 @@
                 </a:solidFill>
                 <a:latin typeface="Consolas"/>
               </a:rPr>
-              <a:t>xferfix2 FAIL hs=1.236142s ... prk=match 122s no-APP-OK(xferfix2.res.log)</a:t>
+              <a:t>xferfix2 FAIL hs=1.236142s ... 122s no-APP-OK(xferfix2.res.log)</a:t>
             </a:r>
           </a:p>
         </p:txBody>
@@ -33242,7 +33242,7 @@
                           </a:solidFill>
                           <a:latin typeface="Times New Roman"/>
                         </a:rPr>
-                        <a:t>1. Clone [GitHub URL], build the bitstream, program both boards</a:t>
+                        <a:t>1. Clone (Lesson 1, (4/7)), build the bitstream, program both boards</a:t>
                       </a:r>
                     </a:p>
                   </a:txBody>
@@ -33490,7 +33490,7 @@
                           </a:solidFill>
                           <a:latin typeface="Times New Roman"/>
                         </a:rPr>
-                        <a:t>prk=match, REFERENCE MODEL: PASS</a:t>
+                        <a:t>PASS (prk=match with DEBUG=1), REFERENCE MODEL: PASS</a:t>
                       </a:r>
                     </a:p>
                   </a:txBody>

--- a/fpga/sw/export/docs/slides/05_Secure_file_transfer_and_results.pptx
+++ b/fpga/sw/export/docs/slides/05_Secure_file_transfer_and_results.pptx
@@ -18842,18 +18842,18 @@
               </a:buClr>
             </a:pPr>
             <a:r>
-              <a:rPr lang="en-US" sz="3600" b="1" spc="-1" dirty="0">
+              <a:rPr lang="en-US" sz="3500" b="1" spc="-1" dirty="0">
                 <a:latin typeface="Times New Roman" panose="02020603050405020304" pitchFamily="18" charset="0"/>
                 <a:cs typeface="Times New Roman" panose="02020603050405020304" pitchFamily="18" charset="0"/>
               </a:rPr>
               <a:t>3. SD Card &amp; FAT32 </a:t>
             </a:r>
             <a:r>
-              <a:rPr lang="en-US" sz="3600" spc="-1" dirty="0">
+              <a:rPr lang="en-US" sz="3500" spc="-1" dirty="0">
                 <a:latin typeface="Times New Roman" panose="02020603050405020304" pitchFamily="18" charset="0"/>
                 <a:cs typeface="Times New Roman" panose="02020603050405020304" pitchFamily="18" charset="0"/>
               </a:rPr>
-              <a:t>(5/8) The SD driver and two bugs</a:t>
+              <a:t>(5/8) The SD driver and three bugs</a:t>
             </a:r>
           </a:p>
         </p:txBody>
@@ -19189,8 +19189,8 @@
         </p:nvSpPr>
         <p:spPr>
           <a:xfrm>
-            <a:off x="365760" y="3291840"/>
-            <a:ext cx="11430000" cy="3017520"/>
+            <a:off x="365760" y="3200400"/>
+            <a:ext cx="11430000" cy="3200400"/>
           </a:xfrm>
           <a:prstGeom prst="rect">
             <a:avLst/>
@@ -19210,7 +19210,7 @@
               <a:buChar char="•"/>
             </a:pPr>
             <a:r>
-              <a:rPr sz="1600" b="1">
+              <a:rPr sz="1500" b="1">
                 <a:solidFill>
                   <a:srgbClr val="000000"/>
                 </a:solidFill>
@@ -19219,7 +19219,7 @@
               <a:t>Bug 1:</a:t>
             </a:r>
             <a:r>
-              <a:rPr sz="1600" b="0">
+              <a:rPr sz="1500" b="0">
                 <a:solidFill>
                   <a:srgbClr val="000000"/>
                 </a:solidFill>
@@ -19236,7 +19236,7 @@
               <a:buChar char="•"/>
             </a:pPr>
             <a:r>
-              <a:rPr sz="1600" b="1">
+              <a:rPr sz="1500" b="1">
                 <a:solidFill>
                   <a:srgbClr val="000000"/>
                 </a:solidFill>
@@ -19245,7 +19245,7 @@
               <a:t>Bug 2:</a:t>
             </a:r>
             <a:r>
-              <a:rPr sz="1600" b="0">
+              <a:rPr sz="1500" b="0">
                 <a:solidFill>
                   <a:srgbClr val="000000"/>
                 </a:solidFill>
@@ -19254,7 +19254,7 @@
               <a:t> after a write the card holds the data line low while busy. The code waited only while it read exactly 0x00; the line is released in the middle of a byte (e.g. 0x0f), so the next command was sent too early and failed. Fix: wait until it reads </a:t>
             </a:r>
             <a:r>
-              <a:rPr sz="1600" b="1">
+              <a:rPr sz="1500" b="1">
                 <a:solidFill>
                   <a:srgbClr val="000000"/>
                 </a:solidFill>
@@ -19263,7 +19263,7 @@
               <a:t>0xFF</a:t>
             </a:r>
             <a:r>
-              <a:rPr sz="1600" b="0">
+              <a:rPr sz="1500" b="0">
                 <a:solidFill>
                   <a:srgbClr val="000000"/>
                 </a:solidFill>
@@ -19280,13 +19280,58 @@
               <a:buChar char="•"/>
             </a:pPr>
             <a:r>
-              <a:rPr sz="1600" b="0">
+              <a:rPr sz="1500" b="1">
                 <a:solidFill>
                   <a:srgbClr val="000000"/>
                 </a:solidFill>
                 <a:latin typeface="Times New Roman"/>
               </a:rPr>
-              <a:t>Both found on the board with a 30-line diagnostic that printed every raw byte.</a:t>
+              <a:t>Bug 3:</a:t>
+            </a:r>
+            <a:r>
+              <a:rPr sz="1500" b="0">
+                <a:solidFill>
+                  <a:srgbClr val="000000"/>
+                </a:solidFill>
+                <a:latin typeface="Times New Roman"/>
+              </a:rPr>
+              <a:t> one card sometimes sends its write reply (data response, 05 = accepted) one byte late. Reading only the next byte saw FF and reported a failed write. Fix (</a:t>
+            </a:r>
+            <a:r>
+              <a:rPr sz="1500" b="0" i="1">
+                <a:solidFill>
+                  <a:srgbClr val="000000"/>
+                </a:solidFill>
+                <a:latin typeface="Times New Roman"/>
+              </a:rPr>
+              <a:t>data_response()</a:t>
+            </a:r>
+            <a:r>
+              <a:rPr sz="1500" b="0">
+                <a:solidFill>
+                  <a:srgbClr val="000000"/>
+                </a:solidFill>
+                <a:latin typeface="Times New Roman"/>
+              </a:rPr>
+              <a:t>, as Linux mmc_spi does): read 4 bytes and find the reply's start bit; each rejected sector is now retried and logged (</a:t>
+            </a:r>
+            <a:r>
+              <a:rPr sz="1300" b="0">
+                <a:solidFill>
+                  <a:srgbClr val="8B1A1A"/>
+                </a:solidFill>
+                <a:latin typeface="Consolas"/>
+              </a:rPr>
+              <a:t>SD: write …</a:t>
+            </a:r>
+            <a:r>
+              <a:rPr sz="1500" b="0">
+                <a:solidFill>
+                  <a:srgbClr val="000000"/>
+                </a:solidFill>
+                <a:latin typeface="Times New Roman"/>
+              </a:rPr>
+              <a:t>).</a:t>
             </a:r>
           </a:p>
           <a:p>
@@ -19297,7 +19342,7 @@
               <a:buChar char="•"/>
             </a:pPr>
             <a:r>
-              <a:rPr sz="1600" b="0">
+              <a:rPr sz="1500" b="0">
                 <a:solidFill>
                   <a:srgbClr val="000000"/>
                 </a:solidFill>
@@ -19306,7 +19351,7 @@
               <a:t>Check bug 1: let CMD0 run once (</a:t>
             </a:r>
             <a:r>
-              <a:rPr sz="1400" b="0">
+              <a:rPr sz="1300" b="0">
                 <a:solidFill>
                   <a:srgbClr val="8B1A1A"/>
                 </a:solidFill>
@@ -19315,7 +19360,7 @@
               <a:t>t &lt; 1</a:t>
             </a:r>
             <a:r>
-              <a:rPr sz="1600" b="0">
+              <a:rPr sz="1500" b="0">
                 <a:solidFill>
                   <a:srgbClr val="000000"/>
                 </a:solidFill>
@@ -19324,7 +19369,7 @@
               <a:t> in </a:t>
             </a:r>
             <a:r>
-              <a:rPr sz="1600" b="0" i="1">
+              <a:rPr sz="1500" b="0" i="1">
                 <a:solidFill>
                   <a:srgbClr val="000000"/>
                 </a:solidFill>
@@ -19333,16 +19378,16 @@
               <a:t>tests/src/periph_spi.c</a:t>
             </a:r>
             <a:r>
-              <a:rPr sz="1600" b="0">
+              <a:rPr sz="1500" b="0">
                 <a:solidFill>
                   <a:srgbClr val="000000"/>
                 </a:solidFill>
                 <a:latin typeface="Times New Roman"/>
               </a:rPr>
-              <a:t>), pull the card out and push it back in (this power-cycles only the card), run spi_test → R1 = 3f FAIL. Restore with </a:t>
-            </a:r>
-            <a:r>
-              <a:rPr sz="1400" b="0">
+              <a:t>), pull the card out and in, run spi_test → R1 = 3f FAIL; restore with </a:t>
+            </a:r>
+            <a:r>
+              <a:rPr sz="1300" b="0">
                 <a:solidFill>
                   <a:srgbClr val="8B1A1A"/>
                 </a:solidFill>
@@ -19351,13 +19396,31 @@
               <a:t>git checkout</a:t>
             </a:r>
             <a:r>
-              <a:rPr sz="1600" b="0">
+              <a:rPr sz="1500" b="0">
                 <a:solidFill>
                   <a:srgbClr val="000000"/>
                 </a:solidFill>
                 <a:latin typeface="Times New Roman"/>
               </a:rPr>
-              <a:t>. Check bug 2: sd_prep's verify reads back every written sector (section 4).</a:t>
+              <a:t>. Bugs 2 and 3: run several 1 MiB transfers — no </a:t>
+            </a:r>
+            <a:r>
+              <a:rPr sz="1300" b="0">
+                <a:solidFill>
+                  <a:srgbClr val="8B1A1A"/>
+                </a:solidFill>
+                <a:latin typeface="Consolas"/>
+              </a:rPr>
+              <a:t>SD:</a:t>
+            </a:r>
+            <a:r>
+              <a:rPr sz="1500" b="0">
+                <a:solidFill>
+                  <a:srgbClr val="000000"/>
+                </a:solidFill>
+                <a:latin typeface="Times New Roman"/>
+              </a:rPr>
+              <a:t> lines, and the read-back matches (section 4).</a:t>
             </a:r>
           </a:p>
         </p:txBody>
@@ -23975,7 +24038,7 @@
                 </a:solidFill>
                 <a:latin typeface="Times New Roman"/>
               </a:rPr>
-              <a:t>every byte compared</a:t>
+              <a:t>every byte; delete the old file first</a:t>
             </a:r>
           </a:p>
         </p:txBody>
@@ -26047,7 +26110,7 @@
                 </a:solidFill>
                 <a:latin typeface="Consolas"/>
               </a:rPr>
-              <a:t>Example output — board B, same run</a:t>
+              <a:t>Example output — board B, same run (before the bug 3 fix)</a:t>
             </a:r>
           </a:p>
           <a:p>
@@ -26232,7 +26295,7 @@
               <a:buChar char="•"/>
             </a:pPr>
             <a:r>
-              <a:rPr sz="1600" b="0">
+              <a:rPr sz="1500" b="0">
                 <a:solidFill>
                   <a:srgbClr val="000000"/>
                 </a:solidFill>
@@ -26241,7 +26304,7 @@
               <a:t>The communication path worked: the handshake, every record and the file CRC are fine. </a:t>
             </a:r>
             <a:r>
-              <a:rPr sz="1600" b="1">
+              <a:rPr sz="1500" b="1">
                 <a:solidFill>
                   <a:srgbClr val="000000"/>
                 </a:solidFill>
@@ -26250,13 +26313,13 @@
               <a:t>Storage failed</a:t>
             </a:r>
             <a:r>
-              <a:rPr sz="1600" b="0">
+              <a:rPr sz="1500" b="0">
                 <a:solidFill>
                   <a:srgbClr val="000000"/>
                 </a:solidFill>
                 <a:latin typeface="Times New Roman"/>
               </a:rPr>
-              <a:t>: the first sector write (offset 618 = 3 records, past 512 B) was refused, so B kept receiving and checking but did not store.</a:t>
+              <a:t>: the first sector write (offset 618 = 3 records, past 512 B) was reported as refused, so B kept receiving and checking but did not store.</a:t>
             </a:r>
           </a:p>
           <a:p>
@@ -26267,7 +26330,7 @@
               <a:buChar char="•"/>
             </a:pPr>
             <a:r>
-              <a:rPr sz="1600" b="0">
+              <a:rPr sz="1500" b="0">
                 <a:solidFill>
                   <a:srgbClr val="000000"/>
                 </a:solidFill>
@@ -26284,13 +26347,48 @@
               <a:buChar char="•"/>
             </a:pPr>
             <a:r>
-              <a:rPr sz="1600" b="0">
+              <a:rPr sz="1500" b="0">
                 <a:solidFill>
                   <a:srgbClr val="000000"/>
                 </a:solidFill>
                 <a:latin typeface="Times New Roman"/>
               </a:rPr>
-              <a:t>Next steps: power-cycle and rerun; if it repeats, try another card or reformat it (sd_prep -DSD_PREP_FORMAT). Such failures can be intermittent — a card that failed once may pass the next run, which is why the readback step exists.</a:t>
+              <a:t>Cause, found by logging the card's reply: its data response came one byte late (section 3, bug 3). Current firmware prints </a:t>
+            </a:r>
+            <a:r>
+              <a:rPr sz="1300" b="0">
+                <a:solidFill>
+                  <a:srgbClr val="8B1A1A"/>
+                </a:solidFill>
+                <a:latin typeface="Consolas"/>
+              </a:rPr>
+              <a:t>SD: write &lt;sector&gt;: &lt;reason&gt;</a:t>
+            </a:r>
+            <a:r>
+              <a:rPr sz="1500" b="0">
+                <a:solidFill>
+                  <a:srgbClr val="000000"/>
+                </a:solidFill>
+                <a:latin typeface="Times New Roman"/>
+              </a:rPr>
+              <a:t> for every rejected try — read those lines before blaming the card.</a:t>
+            </a:r>
+          </a:p>
+          <a:p>
+            <a:pPr marL="256032" indent="-219456">
+              <a:spcAft>
+                <a:spcPts val="400"/>
+              </a:spcAft>
+              <a:buChar char="•"/>
+            </a:pPr>
+            <a:r>
+              <a:rPr sz="1500" b="0">
+                <a:solidFill>
+                  <a:srgbClr val="000000"/>
+                </a:solidFill>
+                <a:latin typeface="Times New Roman"/>
+              </a:rPr>
+              <a:t>Read-back trap: rename or delete the old RECV.BIN before a run. Otherwise a failed run leaves the previous, identical file in place and the read-back still says 0 bytes differ.</a:t>
             </a:r>
           </a:p>
         </p:txBody>
@@ -31077,7 +31175,25 @@
                 </a:solidFill>
                 <a:latin typeface="Times New Roman"/>
               </a:rPr>
-              <a:t>Much faster needs different hardware, e.g. a wired link between the boards (UART on PMOD JB at Mbaud rates).</a:t>
+              <a:t>The wired UART link on PMOD JB (TRANSPORT=uart) is </a:t>
+            </a:r>
+            <a:r>
+              <a:rPr sz="1800" b="1">
+                <a:solidFill>
+                  <a:srgbClr val="000000"/>
+                </a:solidFill>
+                <a:latin typeface="Times New Roman"/>
+              </a:rPr>
+              <a:t>slower</a:t>
+            </a:r>
+            <a:r>
+              <a:rPr sz="1800" b="0">
+                <a:solidFill>
+                  <a:srgbClr val="000000"/>
+                </a:solidFill>
+                <a:latin typeface="Times New Roman"/>
+              </a:rPr>
+              <a:t>, measured 2.4 KB/s: the receiver polls UART1 without a usable FIFO, so the sender waits after every byte. Faster needs buffered hardware (FIFO + interrupts, or DMA).</a:t>
             </a:r>
           </a:p>
         </p:txBody>
@@ -32770,7 +32886,7 @@
                           </a:solidFill>
                           <a:latin typeface="Times New Roman"/>
                         </a:rPr>
-                        <a:t>a wired link (UART on PMOD JB) for much more</a:t>
+                        <a:t>the wired UART link as built is slower (2.4 KB/s); faster needs other hardware</a:t>
                       </a:r>
                     </a:p>
                   </a:txBody>
@@ -35563,7 +35679,7 @@
                 </a:solidFill>
                 <a:latin typeface="Times New Roman"/>
               </a:rPr>
-              <a:t>Radio link made reliable with a CRC per frame, a 2-second radio watchdog and reading the FIFO while repeating; SD driver fixed (CMD0 retry, busy wait).</a:t>
+              <a:t>Radio link made reliable with a CRC per frame, a 2-second radio watchdog and reading the FIFO while repeating; SD driver fixed (CMD0 retry, busy wait, late write reply).</a:t>
             </a:r>
           </a:p>
           <a:p>
@@ -36018,7 +36134,7 @@
                 <a:latin typeface="Times New Roman"/>
                 <a:ea typeface="DejaVu Sans"/>
               </a:rPr>
-              <a:t>[YYYY/MM]</a:t>
+              <a:t>2026/12</a:t>
             </a:r>
             <a:endParaRPr lang="en-US" sz="3200" b="0" strike="noStrike" spc="-1" dirty="0">
               <a:latin typeface="Arial"/>
@@ -36182,7 +36298,7 @@
                 <a:latin typeface="Times New Roman"/>
                 <a:ea typeface="DejaVu Sans"/>
               </a:rPr>
-              <a:t>[YYYY/MM]</a:t>
+              <a:t>2026/12</a:t>
             </a:r>
             <a:endParaRPr lang="en-US" sz="3200" b="0" strike="noStrike" spc="-1" dirty="0">
               <a:latin typeface="Arial"/>
@@ -36284,7 +36400,7 @@
                 <a:latin typeface="Times New Roman"/>
                 <a:ea typeface="DejaVu Sans"/>
               </a:rPr>
-              <a:t>[Course name]</a:t>
+              <a:t>EDHOC on a Rocket RV64 SoC</a:t>
             </a:r>
             <a:r>
               <a:rPr lang="en-US" sz="4800" spc="-1" dirty="0">
@@ -36509,7 +36625,7 @@
                 <a:latin typeface="Times New Roman" panose="02020603050405020304" pitchFamily="18" charset="0"/>
                 <a:cs typeface="Times New Roman" panose="02020603050405020304" pitchFamily="18" charset="0"/>
               </a:rPr>
-              <a:t>[Author]</a:t>
+              <a:t>Khai-Duy Nguyen</a:t>
             </a:r>
           </a:p>
         </p:txBody>

--- a/fpga/sw/export/docs/slides/05_Secure_file_transfer_and_results.pptx
+++ b/fpga/sw/export/docs/slides/05_Secure_file_transfer_and_results.pptx
@@ -60,6 +60,7 @@
     <p:sldId id="917" r:id="rId64"/>
     <p:sldId id="918" r:id="rId65"/>
     <p:sldId id="919" r:id="rId66"/>
+    <p:sldId id="920" r:id="rId67"/>
   </p:sldIdLst>
   <p:sldSz cx="12192000" cy="6858000"/>
   <p:notesSz cx="7559675" cy="10691813"/>
@@ -27685,7 +27686,7 @@
                 <a:latin typeface="Times New Roman" panose="02020603050405020304" pitchFamily="18" charset="0"/>
                 <a:cs typeface="Times New Roman" panose="02020603050405020304" pitchFamily="18" charset="0"/>
               </a:rPr>
-              <a:t>(1/6) Measure first</a:t>
+              <a:t>(1/7) Measure first</a:t>
             </a:r>
           </a:p>
         </p:txBody>
@@ -28344,7 +28345,7 @@
                 <a:latin typeface="Times New Roman" panose="02020603050405020304" pitchFamily="18" charset="0"/>
                 <a:cs typeface="Times New Roman" panose="02020603050405020304" pitchFamily="18" charset="0"/>
               </a:rPr>
-              <a:t>(2/6) The multiply trap</a:t>
+              <a:t>(2/7) The multiply trap</a:t>
             </a:r>
           </a:p>
         </p:txBody>
@@ -28847,7 +28848,7 @@
                 <a:latin typeface="Times New Roman" panose="02020603050405020304" pitchFamily="18" charset="0"/>
                 <a:cs typeface="Times New Roman" panose="02020603050405020304" pitchFamily="18" charset="0"/>
               </a:rPr>
-              <a:t>(3/6) Table-based AES</a:t>
+              <a:t>(3/7) Table-based AES</a:t>
             </a:r>
           </a:p>
         </p:txBody>
@@ -29552,7 +29553,7 @@
                 <a:latin typeface="Times New Roman" panose="02020603050405020304" pitchFamily="18" charset="0"/>
                 <a:cs typeface="Times New Roman" panose="02020603050405020304" pitchFamily="18" charset="0"/>
               </a:rPr>
-              <a:t>(4/6) The radio side</a:t>
+              <a:t>(4/7) The radio side</a:t>
             </a:r>
           </a:p>
         </p:txBody>
@@ -30244,7 +30245,7 @@
                 <a:latin typeface="Times New Roman" panose="02020603050405020304" pitchFamily="18" charset="0"/>
                 <a:cs typeface="Times New Roman" panose="02020603050405020304" pitchFamily="18" charset="0"/>
               </a:rPr>
-              <a:t>(5/6) Result</a:t>
+              <a:t>(5/7) Result</a:t>
             </a:r>
           </a:p>
         </p:txBody>
@@ -30753,7 +30754,7 @@
                 </a:solidFill>
                 <a:latin typeface="Times New Roman"/>
               </a:rPr>
-              <a:t>Check yourself: a TIMING=1 build prints PERF encrypt / decrypt in B/s; compare with the micro-benchmark of (1/6).</a:t>
+              <a:t>Check yourself: a TIMING=1 build prints PERF encrypt / decrypt in B/s; compare with the micro-benchmark of (1/7).</a:t>
             </a:r>
           </a:p>
         </p:txBody>
@@ -30844,7 +30845,7 @@
                 <a:latin typeface="Times New Roman" panose="02020603050405020304" pitchFamily="18" charset="0"/>
                 <a:cs typeface="Times New Roman" panose="02020603050405020304" pitchFamily="18" charset="0"/>
               </a:rPr>
-              <a:t>(6/6) Where the limit is now</a:t>
+              <a:t>(6/7) Where the limit is now</a:t>
             </a:r>
           </a:p>
         </p:txBody>
@@ -31175,25 +31176,7 @@
                 </a:solidFill>
                 <a:latin typeface="Times New Roman"/>
               </a:rPr>
-              <a:t>The wired UART link on PMOD JB (TRANSPORT=uart) is </a:t>
-            </a:r>
-            <a:r>
-              <a:rPr sz="1800" b="1">
-                <a:solidFill>
-                  <a:srgbClr val="000000"/>
-                </a:solidFill>
-                <a:latin typeface="Times New Roman"/>
-              </a:rPr>
-              <a:t>slower</a:t>
-            </a:r>
-            <a:r>
-              <a:rPr sz="1800" b="0">
-                <a:solidFill>
-                  <a:srgbClr val="000000"/>
-                </a:solidFill>
-                <a:latin typeface="Times New Roman"/>
-              </a:rPr>
-              <a:t>, measured 2.4 KB/s: the receiver polls UART1 without a usable FIFO, so the sender waits after every byte. Faster needs buffered hardware (FIFO + interrupts, or DMA).</a:t>
+              <a:t>Faster needs a faster link: three wires between the PMOD JB ports give 3× the radio's speed (next slide).</a:t>
             </a:r>
           </a:p>
         </p:txBody>
@@ -31207,6 +31190,706 @@
 </file>
 
 <file path=ppt/slides/slide49.xml><?xml version="1.0" encoding="utf-8"?>
+<p:sld xmlns:a="http://schemas.openxmlformats.org/drawingml/2006/main" xmlns:p="http://schemas.openxmlformats.org/presentationml/2006/main" xmlns:r="http://schemas.openxmlformats.org/officeDocument/2006/relationships">
+  <p:cSld>
+    <p:spTree>
+      <p:nvGrpSpPr>
+        <p:cNvPr id="1" name=""/>
+        <p:cNvGrpSpPr/>
+        <p:nvPr/>
+      </p:nvGrpSpPr>
+      <p:grpSpPr/>
+      <p:sp>
+        <p:nvSpPr>
+          <p:cNvPr id="10" name="CustomShape 6">
+            <a:extLst>
+              <a:ext uri="{FF2B5EF4-FFF2-40B4-BE49-F238E27FC236}">
+                <a16:creationId xmlns:a16="http://schemas.microsoft.com/office/drawing/2014/main" id="{CB76DC60-C0C9-436D-8956-EE4CA394869E}"/>
+              </a:ext>
+            </a:extLst>
+          </p:cNvPr>
+          <p:cNvSpPr/>
+          <p:nvPr/>
+        </p:nvSpPr>
+        <p:spPr>
+          <a:xfrm>
+            <a:off x="-6000" y="0"/>
+            <a:ext cx="12198000" cy="644877"/>
+          </a:xfrm>
+          <a:prstGeom prst="rect">
+            <a:avLst/>
+          </a:prstGeom>
+          <a:solidFill>
+            <a:schemeClr val="accent6">
+              <a:lumMod val="40000"/>
+              <a:lumOff val="60000"/>
+            </a:schemeClr>
+          </a:solidFill>
+          <a:ln>
+            <a:noFill/>
+          </a:ln>
+        </p:spPr>
+        <p:style>
+          <a:lnRef idx="0">
+            <a:scrgbClr r="0" g="0" b="0"/>
+          </a:lnRef>
+          <a:fillRef idx="0">
+            <a:scrgbClr r="0" g="0" b="0"/>
+          </a:fillRef>
+          <a:effectRef idx="0">
+            <a:scrgbClr r="0" g="0" b="0"/>
+          </a:effectRef>
+          <a:fontRef idx="minor"/>
+        </p:style>
+        <p:txBody>
+          <a:bodyPr wrap="square" lIns="90000" tIns="45000" rIns="90000" bIns="45000">
+            <a:spAutoFit/>
+          </a:bodyPr>
+          <a:lstStyle/>
+          <a:p>
+            <a:pPr marL="360" algn="ctr">
+              <a:lnSpc>
+                <a:spcPct val="100000"/>
+              </a:lnSpc>
+              <a:buClr>
+                <a:srgbClr val="000000"/>
+              </a:buClr>
+            </a:pPr>
+            <a:r>
+              <a:rPr lang="en-US" sz="3000" b="1" spc="-1" dirty="0">
+                <a:latin typeface="Times New Roman" panose="02020603050405020304" pitchFamily="18" charset="0"/>
+                <a:cs typeface="Times New Roman" panose="02020603050405020304" pitchFamily="18" charset="0"/>
+              </a:rPr>
+              <a:t>5. Making It Faster </a:t>
+            </a:r>
+            <a:r>
+              <a:rPr lang="en-US" sz="3000" spc="-1" dirty="0">
+                <a:latin typeface="Times New Roman" panose="02020603050405020304" pitchFamily="18" charset="0"/>
+                <a:cs typeface="Times New Roman" panose="02020603050405020304" pitchFamily="18" charset="0"/>
+              </a:rPr>
+              <a:t>(7/7) A wired link: UART1 at 921,600 baud</a:t>
+            </a:r>
+          </a:p>
+        </p:txBody>
+      </p:sp>
+      <p:sp>
+        <p:nvSpPr>
+          <p:cNvPr id="62" name="CustomShape 2"/>
+          <p:cNvSpPr/>
+          <p:nvPr/>
+        </p:nvSpPr>
+        <p:spPr>
+          <a:xfrm>
+            <a:off x="11291400" y="6492960"/>
+            <a:ext cx="894600" cy="358920"/>
+          </a:xfrm>
+          <a:prstGeom prst="rect">
+            <a:avLst/>
+          </a:prstGeom>
+          <a:noFill/>
+          <a:ln>
+            <a:noFill/>
+          </a:ln>
+        </p:spPr>
+        <p:style>
+          <a:lnRef idx="0">
+            <a:scrgbClr r="0" g="0" b="0"/>
+          </a:lnRef>
+          <a:fillRef idx="0">
+            <a:scrgbClr r="0" g="0" b="0"/>
+          </a:fillRef>
+          <a:effectRef idx="0">
+            <a:scrgbClr r="0" g="0" b="0"/>
+          </a:effectRef>
+          <a:fontRef idx="minor"/>
+        </p:style>
+        <p:txBody>
+          <a:bodyPr lIns="90000" tIns="45000" rIns="90000" bIns="45000" anchor="ctr">
+            <a:noAutofit/>
+          </a:bodyPr>
+          <a:lstStyle/>
+          <a:p>
+            <a:pPr algn="ctr">
+              <a:lnSpc>
+                <a:spcPct val="100000"/>
+              </a:lnSpc>
+            </a:pPr>
+            <a:fld id="{32452110-F6D1-439F-92C4-7A3912DA20B0}" type="slidenum">
+              <a:rPr lang="en-US" sz="1600" b="1" strike="noStrike" spc="-1">
+                <a:solidFill>
+                  <a:srgbClr val="000000"/>
+                </a:solidFill>
+                <a:latin typeface="Times New Roman"/>
+                <a:ea typeface="DejaVu Sans"/>
+              </a:rPr>
+              <a:t>43</a:t>
+            </a:fld>
+            <a:endParaRPr lang="en-US" sz="1600" b="0" strike="noStrike" spc="-1">
+              <a:latin typeface="Arial"/>
+            </a:endParaRPr>
+          </a:p>
+        </p:txBody>
+      </p:sp>
+      <p:graphicFrame>
+        <p:nvGraphicFramePr>
+          <p:cNvPr id="63" name="Table 62"/>
+          <p:cNvGraphicFramePr>
+            <a:graphicFrameLocks noGrp="1"/>
+          </p:cNvGraphicFramePr>
+          <p:nvPr/>
+        </p:nvGraphicFramePr>
+        <p:xfrm>
+          <a:off x="365760" y="868680"/>
+          <a:ext cx="11430000" cy="2011680"/>
+        </p:xfrm>
+        <a:graphic>
+          <a:graphicData uri="http://schemas.openxmlformats.org/drawingml/2006/table">
+            <a:tbl>
+              <a:tblPr firstRow="1" bandRow="1">
+                <a:tableStyleId>{5C22544A-7EE6-4342-B048-85BDC9FD1C3A}</a:tableStyleId>
+              </a:tblPr>
+              <a:tblGrid>
+                <a:gridCol w="3291840"/>
+                <a:gridCol w="2377440"/>
+                <a:gridCol w="2834640"/>
+                <a:gridCol w="2926080"/>
+              </a:tblGrid>
+              <a:tr h="502920">
+                <a:tc>
+                  <a:txBody>
+                    <a:bodyPr wrap="square"/>
+                    <a:lstStyle/>
+                    <a:p>
+                      <a:r>
+                        <a:rPr sz="1500" b="1">
+                          <a:solidFill>
+                            <a:srgbClr val="000000"/>
+                          </a:solidFill>
+                          <a:latin typeface="Times New Roman"/>
+                        </a:rPr>
+                        <a:t>TBD3, measured on the boards</a:t>
+                      </a:r>
+                    </a:p>
+                  </a:txBody>
+                  <a:tcPr marL="54864" marR="54864" marT="27432" marB="27432">
+                    <a:solidFill>
+                      <a:srgbClr val="C5E0B4"/>
+                    </a:solidFill>
+                  </a:tcPr>
+                </a:tc>
+                <a:tc>
+                  <a:txBody>
+                    <a:bodyPr wrap="square"/>
+                    <a:lstStyle/>
+                    <a:p>
+                      <a:r>
+                        <a:rPr sz="1500" b="1">
+                          <a:solidFill>
+                            <a:srgbClr val="000000"/>
+                          </a:solidFill>
+                          <a:latin typeface="Times New Roman"/>
+                        </a:rPr>
+                        <a:t>Radio (MRF24J40)</a:t>
+                      </a:r>
+                    </a:p>
+                  </a:txBody>
+                  <a:tcPr marL="54864" marR="54864" marT="27432" marB="27432">
+                    <a:solidFill>
+                      <a:srgbClr val="C5E0B4"/>
+                    </a:solidFill>
+                  </a:tcPr>
+                </a:tc>
+                <a:tc>
+                  <a:txBody>
+                    <a:bodyPr wrap="square"/>
+                    <a:lstStyle/>
+                    <a:p>
+                      <a:r>
+                        <a:rPr sz="1500" b="1">
+                          <a:solidFill>
+                            <a:srgbClr val="000000"/>
+                          </a:solidFill>
+                          <a:latin typeface="Times New Roman"/>
+                        </a:rPr>
+                        <a:t>UART, 57,600 baud, byte pacing</a:t>
+                      </a:r>
+                    </a:p>
+                  </a:txBody>
+                  <a:tcPr marL="54864" marR="54864" marT="27432" marB="27432">
+                    <a:solidFill>
+                      <a:srgbClr val="C5E0B4"/>
+                    </a:solidFill>
+                  </a:tcPr>
+                </a:tc>
+                <a:tc>
+                  <a:txBody>
+                    <a:bodyPr wrap="square"/>
+                    <a:lstStyle/>
+                    <a:p>
+                      <a:r>
+                        <a:rPr sz="1500" b="1">
+                          <a:solidFill>
+                            <a:srgbClr val="000000"/>
+                          </a:solidFill>
+                          <a:latin typeface="Times New Roman"/>
+                        </a:rPr>
+                        <a:t>UART, 921,600 baud, flow control</a:t>
+                      </a:r>
+                    </a:p>
+                  </a:txBody>
+                  <a:tcPr marL="54864" marR="54864" marT="27432" marB="27432">
+                    <a:solidFill>
+                      <a:srgbClr val="C5E0B4"/>
+                    </a:solidFill>
+                  </a:tcPr>
+                </a:tc>
+              </a:tr>
+              <a:tr h="502920">
+                <a:tc>
+                  <a:txBody>
+                    <a:bodyPr wrap="square"/>
+                    <a:lstStyle/>
+                    <a:p>
+                      <a:r>
+                        <a:rPr sz="1500" b="0">
+                          <a:solidFill>
+                            <a:srgbClr val="000000"/>
+                          </a:solidFill>
+                          <a:latin typeface="Times New Roman"/>
+                        </a:rPr>
+                        <a:t>Handshake</a:t>
+                      </a:r>
+                    </a:p>
+                  </a:txBody>
+                  <a:tcPr marL="54864" marR="54864" marT="27432" marB="27432">
+                    <a:solidFill>
+                      <a:srgbClr val="FFFFFF"/>
+                    </a:solidFill>
+                  </a:tcPr>
+                </a:tc>
+                <a:tc>
+                  <a:txBody>
+                    <a:bodyPr wrap="square"/>
+                    <a:lstStyle/>
+                    <a:p>
+                      <a:r>
+                        <a:rPr sz="1500" b="0">
+                          <a:solidFill>
+                            <a:srgbClr val="000000"/>
+                          </a:solidFill>
+                          <a:latin typeface="Times New Roman"/>
+                        </a:rPr>
+                        <a:t>1.25 s</a:t>
+                      </a:r>
+                    </a:p>
+                  </a:txBody>
+                  <a:tcPr marL="54864" marR="54864" marT="27432" marB="27432">
+                    <a:solidFill>
+                      <a:srgbClr val="FFFFFF"/>
+                    </a:solidFill>
+                  </a:tcPr>
+                </a:tc>
+                <a:tc>
+                  <a:txBody>
+                    <a:bodyPr wrap="square"/>
+                    <a:lstStyle/>
+                    <a:p>
+                      <a:r>
+                        <a:rPr sz="1500" b="0">
+                          <a:solidFill>
+                            <a:srgbClr val="000000"/>
+                          </a:solidFill>
+                          <a:latin typeface="Times New Roman"/>
+                        </a:rPr>
+                        <a:t>3.07 s</a:t>
+                      </a:r>
+                    </a:p>
+                  </a:txBody>
+                  <a:tcPr marL="54864" marR="54864" marT="27432" marB="27432">
+                    <a:solidFill>
+                      <a:srgbClr val="FFFFFF"/>
+                    </a:solidFill>
+                  </a:tcPr>
+                </a:tc>
+                <a:tc>
+                  <a:txBody>
+                    <a:bodyPr wrap="square"/>
+                    <a:lstStyle/>
+                    <a:p>
+                      <a:r>
+                        <a:rPr sz="1500" b="0">
+                          <a:solidFill>
+                            <a:srgbClr val="000000"/>
+                          </a:solidFill>
+                          <a:latin typeface="Times New Roman"/>
+                        </a:rPr>
+                        <a:t>0.77 s</a:t>
+                      </a:r>
+                    </a:p>
+                  </a:txBody>
+                  <a:tcPr marL="54864" marR="54864" marT="27432" marB="27432">
+                    <a:solidFill>
+                      <a:srgbClr val="FFFFFF"/>
+                    </a:solidFill>
+                  </a:tcPr>
+                </a:tc>
+              </a:tr>
+              <a:tr h="502920">
+                <a:tc>
+                  <a:txBody>
+                    <a:bodyPr wrap="square"/>
+                    <a:lstStyle/>
+                    <a:p>
+                      <a:r>
+                        <a:rPr sz="1500" b="0">
+                          <a:solidFill>
+                            <a:srgbClr val="000000"/>
+                          </a:solidFill>
+                          <a:latin typeface="Times New Roman"/>
+                        </a:rPr>
+                        <a:t>256 KiB generated data</a:t>
+                      </a:r>
+                    </a:p>
+                  </a:txBody>
+                  <a:tcPr marL="54864" marR="54864" marT="27432" marB="27432">
+                    <a:solidFill>
+                      <a:srgbClr val="F2F8EE"/>
+                    </a:solidFill>
+                  </a:tcPr>
+                </a:tc>
+                <a:tc>
+                  <a:txBody>
+                    <a:bodyPr wrap="square"/>
+                    <a:lstStyle/>
+                    <a:p>
+                      <a:r>
+                        <a:rPr sz="1500" b="0">
+                          <a:solidFill>
+                            <a:srgbClr val="000000"/>
+                          </a:solidFill>
+                          <a:latin typeface="Times New Roman"/>
+                        </a:rPr>
+                        <a:t>—</a:t>
+                      </a:r>
+                    </a:p>
+                  </a:txBody>
+                  <a:tcPr marL="54864" marR="54864" marT="27432" marB="27432">
+                    <a:solidFill>
+                      <a:srgbClr val="F2F8EE"/>
+                    </a:solidFill>
+                  </a:tcPr>
+                </a:tc>
+                <a:tc>
+                  <a:txBody>
+                    <a:bodyPr wrap="square"/>
+                    <a:lstStyle/>
+                    <a:p>
+                      <a:r>
+                        <a:rPr sz="1500" b="0">
+                          <a:solidFill>
+                            <a:srgbClr val="000000"/>
+                          </a:solidFill>
+                          <a:latin typeface="Times New Roman"/>
+                        </a:rPr>
+                        <a:t>2.4 KB/s</a:t>
+                      </a:r>
+                    </a:p>
+                  </a:txBody>
+                  <a:tcPr marL="54864" marR="54864" marT="27432" marB="27432">
+                    <a:solidFill>
+                      <a:srgbClr val="F2F8EE"/>
+                    </a:solidFill>
+                  </a:tcPr>
+                </a:tc>
+                <a:tc>
+                  <a:txBody>
+                    <a:bodyPr wrap="square"/>
+                    <a:lstStyle/>
+                    <a:p>
+                      <a:r>
+                        <a:rPr sz="1500" b="0">
+                          <a:solidFill>
+                            <a:srgbClr val="000000"/>
+                          </a:solidFill>
+                          <a:latin typeface="Times New Roman"/>
+                        </a:rPr>
+                        <a:t>49.5 KB/s</a:t>
+                      </a:r>
+                    </a:p>
+                  </a:txBody>
+                  <a:tcPr marL="54864" marR="54864" marT="27432" marB="27432">
+                    <a:solidFill>
+                      <a:srgbClr val="F2F8EE"/>
+                    </a:solidFill>
+                  </a:tcPr>
+                </a:tc>
+              </a:tr>
+              <a:tr h="502920">
+                <a:tc>
+                  <a:txBody>
+                    <a:bodyPr wrap="square"/>
+                    <a:lstStyle/>
+                    <a:p>
+                      <a:r>
+                        <a:rPr sz="1500" b="0">
+                          <a:solidFill>
+                            <a:srgbClr val="000000"/>
+                          </a:solidFill>
+                          <a:latin typeface="Times New Roman"/>
+                        </a:rPr>
+                        <a:t>1 MiB, SD card A → SD card B</a:t>
+                      </a:r>
+                    </a:p>
+                  </a:txBody>
+                  <a:tcPr marL="54864" marR="54864" marT="27432" marB="27432">
+                    <a:solidFill>
+                      <a:srgbClr val="FFFFFF"/>
+                    </a:solidFill>
+                  </a:tcPr>
+                </a:tc>
+                <a:tc>
+                  <a:txBody>
+                    <a:bodyPr wrap="square"/>
+                    <a:lstStyle/>
+                    <a:p>
+                      <a:r>
+                        <a:rPr sz="1500" b="0">
+                          <a:solidFill>
+                            <a:srgbClr val="000000"/>
+                          </a:solidFill>
+                          <a:latin typeface="Times New Roman"/>
+                        </a:rPr>
+                        <a:t>99.6 s (10.5 KB/s)</a:t>
+                      </a:r>
+                    </a:p>
+                  </a:txBody>
+                  <a:tcPr marL="54864" marR="54864" marT="27432" marB="27432">
+                    <a:solidFill>
+                      <a:srgbClr val="FFFFFF"/>
+                    </a:solidFill>
+                  </a:tcPr>
+                </a:tc>
+                <a:tc>
+                  <a:txBody>
+                    <a:bodyPr wrap="square"/>
+                    <a:lstStyle/>
+                    <a:p>
+                      <a:r>
+                        <a:rPr sz="1500" b="0">
+                          <a:solidFill>
+                            <a:srgbClr val="000000"/>
+                          </a:solidFill>
+                          <a:latin typeface="Times New Roman"/>
+                        </a:rPr>
+                        <a:t>—</a:t>
+                      </a:r>
+                    </a:p>
+                  </a:txBody>
+                  <a:tcPr marL="54864" marR="54864" marT="27432" marB="27432">
+                    <a:solidFill>
+                      <a:srgbClr val="FFFFFF"/>
+                    </a:solidFill>
+                  </a:tcPr>
+                </a:tc>
+                <a:tc>
+                  <a:txBody>
+                    <a:bodyPr wrap="square"/>
+                    <a:lstStyle/>
+                    <a:p>
+                      <a:r>
+                        <a:rPr sz="1500" b="0">
+                          <a:solidFill>
+                            <a:srgbClr val="000000"/>
+                          </a:solidFill>
+                          <a:latin typeface="Times New Roman"/>
+                        </a:rPr>
+                        <a:t>32.2 s (32.6 KB/s)</a:t>
+                      </a:r>
+                    </a:p>
+                  </a:txBody>
+                  <a:tcPr marL="54864" marR="54864" marT="27432" marB="27432">
+                    <a:solidFill>
+                      <a:srgbClr val="FFFFFF"/>
+                    </a:solidFill>
+                  </a:tcPr>
+                </a:tc>
+              </a:tr>
+            </a:tbl>
+          </a:graphicData>
+        </a:graphic>
+      </p:graphicFrame>
+      <p:sp>
+        <p:nvSpPr>
+          <p:cNvPr id="64" name="TextBox 63"/>
+          <p:cNvSpPr txBox="1"/>
+          <p:nvPr/>
+        </p:nvSpPr>
+        <p:spPr>
+          <a:xfrm>
+            <a:off x="365760" y="3108960"/>
+            <a:ext cx="11430000" cy="3200400"/>
+          </a:xfrm>
+          <a:prstGeom prst="rect">
+            <a:avLst/>
+          </a:prstGeom>
+          <a:noFill/>
+        </p:spPr>
+        <p:txBody>
+          <a:bodyPr wrap="square" anchor="t">
+            <a:spAutoFit/>
+          </a:bodyPr>
+          <a:lstStyle/>
+          <a:p>
+            <a:pPr marL="256032" indent="-219456">
+              <a:spcAft>
+                <a:spcPts val="400"/>
+              </a:spcAft>
+              <a:buChar char="•"/>
+            </a:pPr>
+            <a:r>
+              <a:rPr sz="1600" b="0">
+                <a:solidFill>
+                  <a:srgbClr val="000000"/>
+                </a:solidFill>
+                <a:latin typeface="Times New Roman"/>
+              </a:rPr>
+              <a:t>Wiring: A's JB2 (TX) → B's JB1 (RX), B's JB2 (TX) → A's JB1 (RX), JB5 GND ↔ JB5 GND (Lesson 1, section 4). Build both images with </a:t>
+            </a:r>
+            <a:r>
+              <a:rPr sz="1400" b="0">
+                <a:solidFill>
+                  <a:srgbClr val="8B1A1A"/>
+                </a:solidFill>
+                <a:latin typeface="Consolas"/>
+              </a:rPr>
+              <a:t>TRANSPORT=uart</a:t>
+            </a:r>
+            <a:r>
+              <a:rPr sz="1600" b="0">
+                <a:solidFill>
+                  <a:srgbClr val="000000"/>
+                </a:solidFill>
+                <a:latin typeface="Times New Roman"/>
+              </a:rPr>
+              <a:t>; </a:t>
+            </a:r>
+            <a:r>
+              <a:rPr sz="1400" b="0">
+                <a:solidFill>
+                  <a:srgbClr val="8B1A1A"/>
+                </a:solidFill>
+                <a:latin typeface="Consolas"/>
+              </a:rPr>
+              <a:t>UART1_BAUD=&lt;baud&gt;</a:t>
+            </a:r>
+            <a:r>
+              <a:rPr sz="1600" b="0">
+                <a:solidFill>
+                  <a:srgbClr val="000000"/>
+                </a:solidFill>
+                <a:latin typeface="Times New Roman"/>
+              </a:rPr>
+              <a:t> changes the speed.</a:t>
+            </a:r>
+          </a:p>
+          <a:p>
+            <a:pPr marL="256032" indent="-219456">
+              <a:spcAft>
+                <a:spcPts val="400"/>
+              </a:spcAft>
+              <a:buChar char="•"/>
+            </a:pPr>
+            <a:r>
+              <a:rPr sz="1600" b="0">
+                <a:solidFill>
+                  <a:srgbClr val="000000"/>
+                </a:solidFill>
+                <a:latin typeface="Times New Roman"/>
+              </a:rPr>
+              <a:t>The receiver polls UART1 and is busy between frames (AEAD, SD writes), so a sender that just transmits loses bytes. The first version waited after </a:t>
+            </a:r>
+            <a:r>
+              <a:rPr sz="1600" b="1">
+                <a:solidFill>
+                  <a:srgbClr val="000000"/>
+                </a:solidFill>
+                <a:latin typeface="Times New Roman"/>
+              </a:rPr>
+              <a:t>every byte</a:t>
+            </a:r>
+            <a:r>
+              <a:rPr sz="1600" b="0">
+                <a:solidFill>
+                  <a:srgbClr val="000000"/>
+                </a:solidFill>
+                <a:latin typeface="Times New Roman"/>
+              </a:rPr>
+              <a:t>.</a:t>
+            </a:r>
+          </a:p>
+          <a:p>
+            <a:pPr marL="256032" indent="-219456">
+              <a:spcAft>
+                <a:spcPts val="400"/>
+              </a:spcAft>
+              <a:buChar char="•"/>
+            </a:pPr>
+            <a:r>
+              <a:rPr sz="1600" b="0">
+                <a:solidFill>
+                  <a:srgbClr val="000000"/>
+                </a:solidFill>
+                <a:latin typeface="Times New Roman"/>
+              </a:rPr>
+              <a:t>Now the receiver sends one READY byte every 0.2 ms while it waits for a frame; the sender drops old READYs, waits for a fresh one, then sends the frame at line rate (</a:t>
+            </a:r>
+            <a:r>
+              <a:rPr sz="1600" b="0" i="1">
+                <a:solidFill>
+                  <a:srgbClr val="000000"/>
+                </a:solidFill>
+                <a:latin typeface="Times New Roman"/>
+              </a:rPr>
+              <a:t>edhoc_transport.c</a:t>
+            </a:r>
+            <a:r>
+              <a:rPr sz="1600" b="0">
+                <a:solidFill>
+                  <a:srgbClr val="000000"/>
+                </a:solidFill>
+                <a:latin typeface="Times New Roman"/>
+              </a:rPr>
+              <a:t>). With that, the baud rate sets the pace.</a:t>
+            </a:r>
+          </a:p>
+          <a:p>
+            <a:pPr marL="256032" indent="-219456">
+              <a:spcAft>
+                <a:spcPts val="400"/>
+              </a:spcAft>
+              <a:buChar char="•"/>
+            </a:pPr>
+            <a:r>
+              <a:rPr sz="1600" b="0">
+                <a:solidFill>
+                  <a:srgbClr val="000000"/>
+                </a:solidFill>
+                <a:latin typeface="Times New Roman"/>
+              </a:rPr>
+              <a:t>Card to card, AES and the SD card now take a larger share: 5.7 s of the 32.2 s is SD access on each board.</a:t>
+            </a:r>
+          </a:p>
+        </p:txBody>
+      </p:sp>
+    </p:spTree>
+  </p:cSld>
+  <p:clrMapOvr>
+    <a:masterClrMapping/>
+  </p:clrMapOvr>
+</p:sld>
+</file>
+
+<file path=ppt/slides/slide50.xml><?xml version="1.0" encoding="utf-8"?>
 <p:sld xmlns:a="http://schemas.openxmlformats.org/drawingml/2006/main" xmlns:p="http://schemas.openxmlformats.org/presentationml/2006/main" xmlns:r="http://schemas.openxmlformats.org/officeDocument/2006/relationships">
   <p:cSld>
     <p:spTree>
@@ -31392,7 +32075,7 @@
                 <a:latin typeface="Times New Roman"/>
                 <a:ea typeface="DejaVu Sans"/>
               </a:rPr>
-              <a:t>43</a:t>
+              <a:t>44</a:t>
             </a:fld>
             <a:endParaRPr lang="en-US" sz="1600" b="0" strike="noStrike" spc="-1">
               <a:latin typeface="Arial"/>
@@ -31684,7 +32367,7 @@
 </p:sld>
 </file>
 
-<file path=ppt/slides/slide50.xml><?xml version="1.0" encoding="utf-8"?>
+<file path=ppt/slides/slide51.xml><?xml version="1.0" encoding="utf-8"?>
 <p:sld xmlns:a="http://schemas.openxmlformats.org/drawingml/2006/main" xmlns:p="http://schemas.openxmlformats.org/presentationml/2006/main" xmlns:r="http://schemas.openxmlformats.org/officeDocument/2006/relationships">
   <p:cSld>
     <p:spTree>
@@ -31817,7 +32500,7 @@
                 <a:latin typeface="Times New Roman"/>
                 <a:ea typeface="DejaVu Sans"/>
               </a:rPr>
-              <a:t>44</a:t>
+              <a:t>45</a:t>
             </a:fld>
             <a:endParaRPr lang="en-US" sz="1600" b="0" strike="noStrike" spc="-1">
               <a:latin typeface="Arial"/>
@@ -32461,7 +33144,7 @@
 </p:sld>
 </file>
 
-<file path=ppt/slides/slide51.xml><?xml version="1.0" encoding="utf-8"?>
+<file path=ppt/slides/slide52.xml><?xml version="1.0" encoding="utf-8"?>
 <p:sld xmlns:a="http://schemas.openxmlformats.org/drawingml/2006/main" xmlns:p="http://schemas.openxmlformats.org/presentationml/2006/main" xmlns:r="http://schemas.openxmlformats.org/officeDocument/2006/relationships">
   <p:cSld>
     <p:spTree>
@@ -32594,7 +33277,7 @@
                 <a:latin typeface="Times New Roman"/>
                 <a:ea typeface="DejaVu Sans"/>
               </a:rPr>
-              <a:t>45</a:t>
+              <a:t>46</a:t>
             </a:fld>
             <a:endParaRPr lang="en-US" sz="1600" b="0" strike="noStrike" spc="-1">
               <a:latin typeface="Arial"/>
@@ -32886,7 +33569,7 @@
                           </a:solidFill>
                           <a:latin typeface="Times New Roman"/>
                         </a:rPr>
-                        <a:t>the wired UART link as built is slower (2.4 KB/s); faster needs other hardware</a:t>
+                        <a:t>TRANSPORT=uart over 3 wires on PMOD JB: 32.6 KB/s card to card</a:t>
                       </a:r>
                     </a:p>
                   </a:txBody>
@@ -33113,7 +33796,7 @@
 </p:sld>
 </file>
 
-<file path=ppt/slides/slide52.xml><?xml version="1.0" encoding="utf-8"?>
+<file path=ppt/slides/slide53.xml><?xml version="1.0" encoding="utf-8"?>
 <p:sld xmlns:a="http://schemas.openxmlformats.org/drawingml/2006/main" xmlns:p="http://schemas.openxmlformats.org/presentationml/2006/main" xmlns:r="http://schemas.openxmlformats.org/officeDocument/2006/relationships">
   <p:cSld>
     <p:spTree>
@@ -33246,7 +33929,7 @@
                 <a:latin typeface="Times New Roman"/>
                 <a:ea typeface="DejaVu Sans"/>
               </a:rPr>
-              <a:t>46</a:t>
+              <a:t>47</a:t>
             </a:fld>
             <a:endParaRPr lang="en-US" sz="1600" b="0" strike="noStrike" spc="-1">
               <a:latin typeface="Arial"/>
@@ -33763,7 +34446,7 @@
 </p:sld>
 </file>
 
-<file path=ppt/slides/slide53.xml><?xml version="1.0" encoding="utf-8"?>
+<file path=ppt/slides/slide54.xml><?xml version="1.0" encoding="utf-8"?>
 <p:sld xmlns:a="http://schemas.openxmlformats.org/drawingml/2006/main" xmlns:p="http://schemas.openxmlformats.org/presentationml/2006/main" xmlns:r="http://schemas.openxmlformats.org/officeDocument/2006/relationships">
   <p:cSld>
     <p:spTree>
@@ -33949,7 +34632,7 @@
                 <a:latin typeface="Times New Roman"/>
                 <a:ea typeface="DejaVu Sans"/>
               </a:rPr>
-              <a:t>47</a:t>
+              <a:t>48</a:t>
             </a:fld>
             <a:endParaRPr lang="en-US" sz="1600" b="0" strike="noStrike" spc="-1">
               <a:latin typeface="Arial"/>
@@ -34233,458 +34916,6 @@
           </a:prstGeom>
         </p:spPr>
       </p:pic>
-    </p:spTree>
-  </p:cSld>
-  <p:clrMapOvr>
-    <a:masterClrMapping/>
-  </p:clrMapOvr>
-</p:sld>
-</file>
-
-<file path=ppt/slides/slide54.xml><?xml version="1.0" encoding="utf-8"?>
-<p:sld xmlns:a="http://schemas.openxmlformats.org/drawingml/2006/main" xmlns:p="http://schemas.openxmlformats.org/presentationml/2006/main" xmlns:r="http://schemas.openxmlformats.org/officeDocument/2006/relationships">
-  <p:cSld>
-    <p:spTree>
-      <p:nvGrpSpPr>
-        <p:cNvPr id="1" name=""/>
-        <p:cNvGrpSpPr/>
-        <p:nvPr/>
-      </p:nvGrpSpPr>
-      <p:grpSpPr/>
-      <p:sp>
-        <p:nvSpPr>
-          <p:cNvPr id="10" name="CustomShape 6">
-            <a:extLst>
-              <a:ext uri="{FF2B5EF4-FFF2-40B4-BE49-F238E27FC236}">
-                <a16:creationId xmlns:a16="http://schemas.microsoft.com/office/drawing/2014/main" id="{CB76DC60-C0C9-436D-8956-EE4CA394869E}"/>
-              </a:ext>
-            </a:extLst>
-          </p:cNvPr>
-          <p:cNvSpPr/>
-          <p:nvPr/>
-        </p:nvSpPr>
-        <p:spPr>
-          <a:xfrm>
-            <a:off x="-6000" y="0"/>
-            <a:ext cx="12198000" cy="644877"/>
-          </a:xfrm>
-          <a:prstGeom prst="rect">
-            <a:avLst/>
-          </a:prstGeom>
-          <a:solidFill>
-            <a:schemeClr val="accent6">
-              <a:lumMod val="40000"/>
-              <a:lumOff val="60000"/>
-            </a:schemeClr>
-          </a:solidFill>
-          <a:ln>
-            <a:noFill/>
-          </a:ln>
-        </p:spPr>
-        <p:style>
-          <a:lnRef idx="0">
-            <a:scrgbClr r="0" g="0" b="0"/>
-          </a:lnRef>
-          <a:fillRef idx="0">
-            <a:scrgbClr r="0" g="0" b="0"/>
-          </a:fillRef>
-          <a:effectRef idx="0">
-            <a:scrgbClr r="0" g="0" b="0"/>
-          </a:effectRef>
-          <a:fontRef idx="minor"/>
-        </p:style>
-        <p:txBody>
-          <a:bodyPr wrap="square" lIns="90000" tIns="45000" rIns="90000" bIns="45000">
-            <a:spAutoFit/>
-          </a:bodyPr>
-          <a:lstStyle/>
-          <a:p>
-            <a:pPr marL="360" algn="ctr">
-              <a:lnSpc>
-                <a:spcPct val="100000"/>
-              </a:lnSpc>
-              <a:buClr>
-                <a:srgbClr val="000000"/>
-              </a:buClr>
-            </a:pPr>
-            <a:r>
-              <a:rPr lang="en-US" sz="3600" b="1" spc="-1" dirty="0">
-                <a:latin typeface="Times New Roman" panose="02020603050405020304" pitchFamily="18" charset="0"/>
-                <a:cs typeface="Times New Roman" panose="02020603050405020304" pitchFamily="18" charset="0"/>
-              </a:rPr>
-              <a:t>7. Practice </a:t>
-            </a:r>
-            <a:r>
-              <a:rPr lang="en-US" sz="3600" spc="-1" dirty="0">
-                <a:latin typeface="Times New Roman" panose="02020603050405020304" pitchFamily="18" charset="0"/>
-                <a:cs typeface="Times New Roman" panose="02020603050405020304" pitchFamily="18" charset="0"/>
-              </a:rPr>
-              <a:t>(1/3) Exercises</a:t>
-            </a:r>
-          </a:p>
-        </p:txBody>
-      </p:sp>
-      <p:sp>
-        <p:nvSpPr>
-          <p:cNvPr id="62" name="CustomShape 2"/>
-          <p:cNvSpPr/>
-          <p:nvPr/>
-        </p:nvSpPr>
-        <p:spPr>
-          <a:xfrm>
-            <a:off x="11291400" y="6492960"/>
-            <a:ext cx="894600" cy="358920"/>
-          </a:xfrm>
-          <a:prstGeom prst="rect">
-            <a:avLst/>
-          </a:prstGeom>
-          <a:noFill/>
-          <a:ln>
-            <a:noFill/>
-          </a:ln>
-        </p:spPr>
-        <p:style>
-          <a:lnRef idx="0">
-            <a:scrgbClr r="0" g="0" b="0"/>
-          </a:lnRef>
-          <a:fillRef idx="0">
-            <a:scrgbClr r="0" g="0" b="0"/>
-          </a:fillRef>
-          <a:effectRef idx="0">
-            <a:scrgbClr r="0" g="0" b="0"/>
-          </a:effectRef>
-          <a:fontRef idx="minor"/>
-        </p:style>
-        <p:txBody>
-          <a:bodyPr lIns="90000" tIns="45000" rIns="90000" bIns="45000" anchor="ctr">
-            <a:noAutofit/>
-          </a:bodyPr>
-          <a:lstStyle/>
-          <a:p>
-            <a:pPr algn="ctr">
-              <a:lnSpc>
-                <a:spcPct val="100000"/>
-              </a:lnSpc>
-            </a:pPr>
-            <a:fld id="{32452110-F6D1-439F-92C4-7A3912DA20B0}" type="slidenum">
-              <a:rPr lang="en-US" sz="1600" b="1" strike="noStrike" spc="-1">
-                <a:solidFill>
-                  <a:srgbClr val="000000"/>
-                </a:solidFill>
-                <a:latin typeface="Times New Roman"/>
-                <a:ea typeface="DejaVu Sans"/>
-              </a:rPr>
-              <a:t>48</a:t>
-            </a:fld>
-            <a:endParaRPr lang="en-US" sz="1600" b="0" strike="noStrike" spc="-1">
-              <a:latin typeface="Arial"/>
-            </a:endParaRPr>
-          </a:p>
-        </p:txBody>
-      </p:sp>
-      <p:sp>
-        <p:nvSpPr>
-          <p:cNvPr id="63" name="Rectangle 62"/>
-          <p:cNvSpPr/>
-          <p:nvPr/>
-        </p:nvSpPr>
-        <p:spPr>
-          <a:xfrm>
-            <a:off x="365760" y="914400"/>
-            <a:ext cx="1737360" cy="411480"/>
-          </a:xfrm>
-          <a:prstGeom prst="rect">
-            <a:avLst/>
-          </a:prstGeom>
-          <a:solidFill>
-            <a:srgbClr val="FFFFFF"/>
-          </a:solidFill>
-          <a:ln>
-            <a:solidFill>
-              <a:srgbClr val="C00000"/>
-            </a:solidFill>
-          </a:ln>
-          <a:effectLst/>
-        </p:spPr>
-        <p:style>
-          <a:lnRef idx="1">
-            <a:schemeClr val="accent1"/>
-          </a:lnRef>
-          <a:fillRef idx="3">
-            <a:schemeClr val="accent1"/>
-          </a:fillRef>
-          <a:effectRef idx="2">
-            <a:schemeClr val="accent1"/>
-          </a:effectRef>
-          <a:fontRef idx="minor">
-            <a:schemeClr val="lt1"/>
-          </a:fontRef>
-        </p:style>
-        <p:txBody>
-          <a:bodyPr rtlCol="0" anchor="ctr" wrap="square" lIns="36576" rIns="36576" tIns="36576" bIns="36576"/>
-          <a:lstStyle/>
-          <a:p>
-            <a:pPr algn="ctr"/>
-            <a:r>
-              <a:rPr sz="1800" b="0">
-                <a:solidFill>
-                  <a:srgbClr val="000000"/>
-                </a:solidFill>
-                <a:latin typeface="Times New Roman"/>
-              </a:rPr>
-              <a:t>Exercise 1:</a:t>
-            </a:r>
-          </a:p>
-        </p:txBody>
-      </p:sp>
-      <p:sp>
-        <p:nvSpPr>
-          <p:cNvPr id="64" name="TextBox 63"/>
-          <p:cNvSpPr txBox="1"/>
-          <p:nvPr/>
-        </p:nvSpPr>
-        <p:spPr>
-          <a:xfrm>
-            <a:off x="457200" y="1371600"/>
-            <a:ext cx="11430000" cy="1005840"/>
-          </a:xfrm>
-          <a:prstGeom prst="rect">
-            <a:avLst/>
-          </a:prstGeom>
-          <a:noFill/>
-        </p:spPr>
-        <p:txBody>
-          <a:bodyPr wrap="square" anchor="t">
-            <a:spAutoFit/>
-          </a:bodyPr>
-          <a:lstStyle/>
-          <a:p>
-            <a:pPr marL="256032" indent="-219456">
-              <a:spcAft>
-                <a:spcPts val="400"/>
-              </a:spcAft>
-              <a:buChar char="•"/>
-            </a:pPr>
-            <a:r>
-              <a:rPr sz="1800" b="0">
-                <a:solidFill>
-                  <a:srgbClr val="000000"/>
-                </a:solidFill>
-                <a:latin typeface="Times New Roman"/>
-              </a:rPr>
-              <a:t>Send a real file (a PDF, an image) from card A to card B with TBD3. Compare the two files on a PC (sha256sum).</a:t>
-            </a:r>
-          </a:p>
-        </p:txBody>
-      </p:sp>
-      <p:sp>
-        <p:nvSpPr>
-          <p:cNvPr id="65" name="Rectangle 64"/>
-          <p:cNvSpPr/>
-          <p:nvPr/>
-        </p:nvSpPr>
-        <p:spPr>
-          <a:xfrm>
-            <a:off x="365760" y="2377440"/>
-            <a:ext cx="1737360" cy="411480"/>
-          </a:xfrm>
-          <a:prstGeom prst="rect">
-            <a:avLst/>
-          </a:prstGeom>
-          <a:solidFill>
-            <a:srgbClr val="FFFFFF"/>
-          </a:solidFill>
-          <a:ln>
-            <a:solidFill>
-              <a:srgbClr val="C00000"/>
-            </a:solidFill>
-          </a:ln>
-          <a:effectLst/>
-        </p:spPr>
-        <p:style>
-          <a:lnRef idx="1">
-            <a:schemeClr val="accent1"/>
-          </a:lnRef>
-          <a:fillRef idx="3">
-            <a:schemeClr val="accent1"/>
-          </a:fillRef>
-          <a:effectRef idx="2">
-            <a:schemeClr val="accent1"/>
-          </a:effectRef>
-          <a:fontRef idx="minor">
-            <a:schemeClr val="lt1"/>
-          </a:fontRef>
-        </p:style>
-        <p:txBody>
-          <a:bodyPr rtlCol="0" anchor="ctr" wrap="square" lIns="36576" rIns="36576" tIns="36576" bIns="36576"/>
-          <a:lstStyle/>
-          <a:p>
-            <a:pPr algn="ctr"/>
-            <a:r>
-              <a:rPr sz="1800" b="0">
-                <a:solidFill>
-                  <a:srgbClr val="000000"/>
-                </a:solidFill>
-                <a:latin typeface="Times New Roman"/>
-              </a:rPr>
-              <a:t>Exercise 2:</a:t>
-            </a:r>
-          </a:p>
-        </p:txBody>
-      </p:sp>
-      <p:sp>
-        <p:nvSpPr>
-          <p:cNvPr id="66" name="TextBox 65"/>
-          <p:cNvSpPr txBox="1"/>
-          <p:nvPr/>
-        </p:nvSpPr>
-        <p:spPr>
-          <a:xfrm>
-            <a:off x="457200" y="2834640"/>
-            <a:ext cx="11430000" cy="1005840"/>
-          </a:xfrm>
-          <a:prstGeom prst="rect">
-            <a:avLst/>
-          </a:prstGeom>
-          <a:noFill/>
-        </p:spPr>
-        <p:txBody>
-          <a:bodyPr wrap="square" anchor="t">
-            <a:spAutoFit/>
-          </a:bodyPr>
-          <a:lstStyle/>
-          <a:p>
-            <a:pPr marL="256032" indent="-219456">
-              <a:spcAft>
-                <a:spcPts val="400"/>
-              </a:spcAft>
-              <a:buChar char="•"/>
-            </a:pPr>
-            <a:r>
-              <a:rPr sz="1800" b="0">
-                <a:solidFill>
-                  <a:srgbClr val="000000"/>
-                </a:solidFill>
-                <a:latin typeface="Times New Roman"/>
-              </a:rPr>
-              <a:t>Build the radio link without the CRC (remove </a:t>
-            </a:r>
-            <a:r>
-              <a:rPr sz="1600" b="0">
-                <a:solidFill>
-                  <a:srgbClr val="8B1A1A"/>
-                </a:solidFill>
-                <a:latin typeface="Consolas"/>
-              </a:rPr>
-              <a:t>seal</a:t>
-            </a:r>
-            <a:r>
-              <a:rPr sz="1800" b="0">
-                <a:solidFill>
-                  <a:srgbClr val="000000"/>
-                </a:solidFill>
-                <a:latin typeface="Times New Roman"/>
-              </a:rPr>
-              <a:t> and the check). Stream 1 MiB. What fails, after how long? Restore the file afterwards.</a:t>
-            </a:r>
-          </a:p>
-        </p:txBody>
-      </p:sp>
-      <p:sp>
-        <p:nvSpPr>
-          <p:cNvPr id="67" name="Rectangle 66"/>
-          <p:cNvSpPr/>
-          <p:nvPr/>
-        </p:nvSpPr>
-        <p:spPr>
-          <a:xfrm>
-            <a:off x="365760" y="3840480"/>
-            <a:ext cx="1737360" cy="411480"/>
-          </a:xfrm>
-          <a:prstGeom prst="rect">
-            <a:avLst/>
-          </a:prstGeom>
-          <a:solidFill>
-            <a:srgbClr val="FFFFFF"/>
-          </a:solidFill>
-          <a:ln>
-            <a:solidFill>
-              <a:srgbClr val="C00000"/>
-            </a:solidFill>
-          </a:ln>
-          <a:effectLst/>
-        </p:spPr>
-        <p:style>
-          <a:lnRef idx="1">
-            <a:schemeClr val="accent1"/>
-          </a:lnRef>
-          <a:fillRef idx="3">
-            <a:schemeClr val="accent1"/>
-          </a:fillRef>
-          <a:effectRef idx="2">
-            <a:schemeClr val="accent1"/>
-          </a:effectRef>
-          <a:fontRef idx="minor">
-            <a:schemeClr val="lt1"/>
-          </a:fontRef>
-        </p:style>
-        <p:txBody>
-          <a:bodyPr rtlCol="0" anchor="ctr" wrap="square" lIns="36576" rIns="36576" tIns="36576" bIns="36576"/>
-          <a:lstStyle/>
-          <a:p>
-            <a:pPr algn="ctr"/>
-            <a:r>
-              <a:rPr sz="1800" b="0">
-                <a:solidFill>
-                  <a:srgbClr val="000000"/>
-                </a:solidFill>
-                <a:latin typeface="Times New Roman"/>
-              </a:rPr>
-              <a:t>Exercise 3:</a:t>
-            </a:r>
-          </a:p>
-        </p:txBody>
-      </p:sp>
-      <p:sp>
-        <p:nvSpPr>
-          <p:cNvPr id="68" name="TextBox 67"/>
-          <p:cNvSpPr txBox="1"/>
-          <p:nvPr/>
-        </p:nvSpPr>
-        <p:spPr>
-          <a:xfrm>
-            <a:off x="457200" y="4297680"/>
-            <a:ext cx="11430000" cy="1005840"/>
-          </a:xfrm>
-          <a:prstGeom prst="rect">
-            <a:avLst/>
-          </a:prstGeom>
-          <a:noFill/>
-        </p:spPr>
-        <p:txBody>
-          <a:bodyPr wrap="square" anchor="t">
-            <a:spAutoFit/>
-          </a:bodyPr>
-          <a:lstStyle/>
-          <a:p>
-            <a:pPr marL="256032" indent="-219456">
-              <a:spcAft>
-                <a:spcPts val="400"/>
-              </a:spcAft>
-              <a:buChar char="•"/>
-            </a:pPr>
-            <a:r>
-              <a:rPr sz="1800" b="0">
-                <a:solidFill>
-                  <a:srgbClr val="000000"/>
-                </a:solidFill>
-                <a:latin typeface="Times New Roman"/>
-              </a:rPr>
-              <a:t>Measure KB/s for 64 KiB, 256 KiB and 1 MiB. Is the speed constant? Estimate the time for 100 MB.</a:t>
-            </a:r>
-          </a:p>
-        </p:txBody>
-      </p:sp>
     </p:spTree>
   </p:cSld>
   <p:clrMapOvr>
@@ -34771,7 +35002,7 @@
                 <a:latin typeface="Times New Roman" panose="02020603050405020304" pitchFamily="18" charset="0"/>
                 <a:cs typeface="Times New Roman" panose="02020603050405020304" pitchFamily="18" charset="0"/>
               </a:rPr>
-              <a:t>(2/3) What to put in the report</a:t>
+              <a:t>(1/3) Exercises</a:t>
             </a:r>
           </a:p>
         </p:txBody>
@@ -34836,14 +35067,69 @@
       </p:sp>
       <p:sp>
         <p:nvSpPr>
-          <p:cNvPr id="63" name="TextBox 62"/>
+          <p:cNvPr id="63" name="Rectangle 62"/>
+          <p:cNvSpPr/>
+          <p:nvPr/>
+        </p:nvSpPr>
+        <p:spPr>
+          <a:xfrm>
+            <a:off x="365760" y="914400"/>
+            <a:ext cx="1737360" cy="411480"/>
+          </a:xfrm>
+          <a:prstGeom prst="rect">
+            <a:avLst/>
+          </a:prstGeom>
+          <a:solidFill>
+            <a:srgbClr val="FFFFFF"/>
+          </a:solidFill>
+          <a:ln>
+            <a:solidFill>
+              <a:srgbClr val="C00000"/>
+            </a:solidFill>
+          </a:ln>
+          <a:effectLst/>
+        </p:spPr>
+        <p:style>
+          <a:lnRef idx="1">
+            <a:schemeClr val="accent1"/>
+          </a:lnRef>
+          <a:fillRef idx="3">
+            <a:schemeClr val="accent1"/>
+          </a:fillRef>
+          <a:effectRef idx="2">
+            <a:schemeClr val="accent1"/>
+          </a:effectRef>
+          <a:fontRef idx="minor">
+            <a:schemeClr val="lt1"/>
+          </a:fontRef>
+        </p:style>
+        <p:txBody>
+          <a:bodyPr rtlCol="0" anchor="ctr" wrap="square" lIns="36576" rIns="36576" tIns="36576" bIns="36576"/>
+          <a:lstStyle/>
+          <a:p>
+            <a:pPr algn="ctr"/>
+            <a:r>
+              <a:rPr sz="1800" b="0">
+                <a:solidFill>
+                  <a:srgbClr val="000000"/>
+                </a:solidFill>
+                <a:latin typeface="Times New Roman"/>
+              </a:rPr>
+              <a:t>Exercise 1:</a:t>
+            </a:r>
+          </a:p>
+        </p:txBody>
+      </p:sp>
+      <p:sp>
+        <p:nvSpPr>
+          <p:cNvPr id="64" name="TextBox 63"/>
           <p:cNvSpPr txBox="1"/>
           <p:nvPr/>
         </p:nvSpPr>
         <p:spPr>
           <a:xfrm>
-            <a:off x="457200" y="1005840"/>
-            <a:ext cx="11247120" cy="4572000"/>
+            <a:off x="457200" y="1371600"/>
+            <a:ext cx="11430000" cy="1005840"/>
           </a:xfrm>
           <a:prstGeom prst="rect">
             <a:avLst/>
@@ -34863,15 +35149,93 @@
               <a:buChar char="•"/>
             </a:pPr>
             <a:r>
-              <a:rPr sz="2000" b="0">
+              <a:rPr sz="1800" b="0">
                 <a:solidFill>
                   <a:srgbClr val="000000"/>
                 </a:solidFill>
                 <a:latin typeface="Times New Roman"/>
               </a:rPr>
-              <a:t>Exercise 1: both consoles, the two sha256 values, the time and KB/s.</a:t>
-            </a:r>
-          </a:p>
+              <a:t>Send a real file (a PDF, an image) from card A to card B with TBD3. Compare the two files on a PC (sha256sum).</a:t>
+            </a:r>
+          </a:p>
+        </p:txBody>
+      </p:sp>
+      <p:sp>
+        <p:nvSpPr>
+          <p:cNvPr id="65" name="Rectangle 64"/>
+          <p:cNvSpPr/>
+          <p:nvPr/>
+        </p:nvSpPr>
+        <p:spPr>
+          <a:xfrm>
+            <a:off x="365760" y="2377440"/>
+            <a:ext cx="1737360" cy="411480"/>
+          </a:xfrm>
+          <a:prstGeom prst="rect">
+            <a:avLst/>
+          </a:prstGeom>
+          <a:solidFill>
+            <a:srgbClr val="FFFFFF"/>
+          </a:solidFill>
+          <a:ln>
+            <a:solidFill>
+              <a:srgbClr val="C00000"/>
+            </a:solidFill>
+          </a:ln>
+          <a:effectLst/>
+        </p:spPr>
+        <p:style>
+          <a:lnRef idx="1">
+            <a:schemeClr val="accent1"/>
+          </a:lnRef>
+          <a:fillRef idx="3">
+            <a:schemeClr val="accent1"/>
+          </a:fillRef>
+          <a:effectRef idx="2">
+            <a:schemeClr val="accent1"/>
+          </a:effectRef>
+          <a:fontRef idx="minor">
+            <a:schemeClr val="lt1"/>
+          </a:fontRef>
+        </p:style>
+        <p:txBody>
+          <a:bodyPr rtlCol="0" anchor="ctr" wrap="square" lIns="36576" rIns="36576" tIns="36576" bIns="36576"/>
+          <a:lstStyle/>
+          <a:p>
+            <a:pPr algn="ctr"/>
+            <a:r>
+              <a:rPr sz="1800" b="0">
+                <a:solidFill>
+                  <a:srgbClr val="000000"/>
+                </a:solidFill>
+                <a:latin typeface="Times New Roman"/>
+              </a:rPr>
+              <a:t>Exercise 2:</a:t>
+            </a:r>
+          </a:p>
+        </p:txBody>
+      </p:sp>
+      <p:sp>
+        <p:nvSpPr>
+          <p:cNvPr id="66" name="TextBox 65"/>
+          <p:cNvSpPr txBox="1"/>
+          <p:nvPr/>
+        </p:nvSpPr>
+        <p:spPr>
+          <a:xfrm>
+            <a:off x="457200" y="2834640"/>
+            <a:ext cx="11430000" cy="1005840"/>
+          </a:xfrm>
+          <a:prstGeom prst="rect">
+            <a:avLst/>
+          </a:prstGeom>
+          <a:noFill/>
+        </p:spPr>
+        <p:txBody>
+          <a:bodyPr wrap="square" anchor="t">
+            <a:spAutoFit/>
+          </a:bodyPr>
+          <a:lstStyle/>
           <a:p>
             <a:pPr marL="256032" indent="-219456">
               <a:spcAft>
@@ -34880,15 +35244,111 @@
               <a:buChar char="•"/>
             </a:pPr>
             <a:r>
-              <a:rPr sz="2000" b="0">
+              <a:rPr sz="1800" b="0">
                 <a:solidFill>
                   <a:srgbClr val="000000"/>
                 </a:solidFill>
                 <a:latin typeface="Times New Roman"/>
               </a:rPr>
-              <a:t>Exercise 2: the console at the failure and your explanation.</a:t>
-            </a:r>
-          </a:p>
+              <a:t>Build the radio link without the CRC (remove </a:t>
+            </a:r>
+            <a:r>
+              <a:rPr sz="1600" b="0">
+                <a:solidFill>
+                  <a:srgbClr val="8B1A1A"/>
+                </a:solidFill>
+                <a:latin typeface="Consolas"/>
+              </a:rPr>
+              <a:t>seal</a:t>
+            </a:r>
+            <a:r>
+              <a:rPr sz="1800" b="0">
+                <a:solidFill>
+                  <a:srgbClr val="000000"/>
+                </a:solidFill>
+                <a:latin typeface="Times New Roman"/>
+              </a:rPr>
+              <a:t> and the check). Stream 1 MiB. What fails, after how long? Restore the file afterwards.</a:t>
+            </a:r>
+          </a:p>
+        </p:txBody>
+      </p:sp>
+      <p:sp>
+        <p:nvSpPr>
+          <p:cNvPr id="67" name="Rectangle 66"/>
+          <p:cNvSpPr/>
+          <p:nvPr/>
+        </p:nvSpPr>
+        <p:spPr>
+          <a:xfrm>
+            <a:off x="365760" y="3840480"/>
+            <a:ext cx="1737360" cy="411480"/>
+          </a:xfrm>
+          <a:prstGeom prst="rect">
+            <a:avLst/>
+          </a:prstGeom>
+          <a:solidFill>
+            <a:srgbClr val="FFFFFF"/>
+          </a:solidFill>
+          <a:ln>
+            <a:solidFill>
+              <a:srgbClr val="C00000"/>
+            </a:solidFill>
+          </a:ln>
+          <a:effectLst/>
+        </p:spPr>
+        <p:style>
+          <a:lnRef idx="1">
+            <a:schemeClr val="accent1"/>
+          </a:lnRef>
+          <a:fillRef idx="3">
+            <a:schemeClr val="accent1"/>
+          </a:fillRef>
+          <a:effectRef idx="2">
+            <a:schemeClr val="accent1"/>
+          </a:effectRef>
+          <a:fontRef idx="minor">
+            <a:schemeClr val="lt1"/>
+          </a:fontRef>
+        </p:style>
+        <p:txBody>
+          <a:bodyPr rtlCol="0" anchor="ctr" wrap="square" lIns="36576" rIns="36576" tIns="36576" bIns="36576"/>
+          <a:lstStyle/>
+          <a:p>
+            <a:pPr algn="ctr"/>
+            <a:r>
+              <a:rPr sz="1800" b="0">
+                <a:solidFill>
+                  <a:srgbClr val="000000"/>
+                </a:solidFill>
+                <a:latin typeface="Times New Roman"/>
+              </a:rPr>
+              <a:t>Exercise 3:</a:t>
+            </a:r>
+          </a:p>
+        </p:txBody>
+      </p:sp>
+      <p:sp>
+        <p:nvSpPr>
+          <p:cNvPr id="68" name="TextBox 67"/>
+          <p:cNvSpPr txBox="1"/>
+          <p:nvPr/>
+        </p:nvSpPr>
+        <p:spPr>
+          <a:xfrm>
+            <a:off x="457200" y="4297680"/>
+            <a:ext cx="11430000" cy="1005840"/>
+          </a:xfrm>
+          <a:prstGeom prst="rect">
+            <a:avLst/>
+          </a:prstGeom>
+          <a:noFill/>
+        </p:spPr>
+        <p:txBody>
+          <a:bodyPr wrap="square" anchor="t">
+            <a:spAutoFit/>
+          </a:bodyPr>
+          <a:lstStyle/>
           <a:p>
             <a:pPr marL="256032" indent="-219456">
               <a:spcAft>
@@ -34897,13 +35357,13 @@
               <a:buChar char="•"/>
             </a:pPr>
             <a:r>
-              <a:rPr sz="2000" b="0">
+              <a:rPr sz="1800" b="0">
                 <a:solidFill>
                   <a:srgbClr val="000000"/>
                 </a:solidFill>
                 <a:latin typeface="Times New Roman"/>
               </a:rPr>
-              <a:t>Exercise 3: a table and a chart of size vs. time; your 100 MB estimate.</a:t>
+              <a:t>Measure KB/s for 64 KiB, 256 KiB and 1 MiB. Is the speed constant? Estimate the time for 100 MB.</a:t>
             </a:r>
           </a:p>
         </p:txBody>
@@ -34994,7 +35454,7 @@
                 <a:latin typeface="Times New Roman" panose="02020603050405020304" pitchFamily="18" charset="0"/>
                 <a:cs typeface="Times New Roman" panose="02020603050405020304" pitchFamily="18" charset="0"/>
               </a:rPr>
-              <a:t>(3/3) Answer notes</a:t>
+              <a:t>(2/3) What to put in the report</a:t>
             </a:r>
           </a:p>
         </p:txBody>
@@ -35050,6 +35510,229 @@
                 <a:ea typeface="DejaVu Sans"/>
               </a:rPr>
               <a:t>50</a:t>
+            </a:fld>
+            <a:endParaRPr lang="en-US" sz="1600" b="0" strike="noStrike" spc="-1">
+              <a:latin typeface="Arial"/>
+            </a:endParaRPr>
+          </a:p>
+        </p:txBody>
+      </p:sp>
+      <p:sp>
+        <p:nvSpPr>
+          <p:cNvPr id="63" name="TextBox 62"/>
+          <p:cNvSpPr txBox="1"/>
+          <p:nvPr/>
+        </p:nvSpPr>
+        <p:spPr>
+          <a:xfrm>
+            <a:off x="457200" y="1005840"/>
+            <a:ext cx="11247120" cy="4572000"/>
+          </a:xfrm>
+          <a:prstGeom prst="rect">
+            <a:avLst/>
+          </a:prstGeom>
+          <a:noFill/>
+        </p:spPr>
+        <p:txBody>
+          <a:bodyPr wrap="square" anchor="t">
+            <a:spAutoFit/>
+          </a:bodyPr>
+          <a:lstStyle/>
+          <a:p>
+            <a:pPr marL="256032" indent="-219456">
+              <a:spcAft>
+                <a:spcPts val="400"/>
+              </a:spcAft>
+              <a:buChar char="•"/>
+            </a:pPr>
+            <a:r>
+              <a:rPr sz="2000" b="0">
+                <a:solidFill>
+                  <a:srgbClr val="000000"/>
+                </a:solidFill>
+                <a:latin typeface="Times New Roman"/>
+              </a:rPr>
+              <a:t>Exercise 1: both consoles, the two sha256 values, the time and KB/s.</a:t>
+            </a:r>
+          </a:p>
+          <a:p>
+            <a:pPr marL="256032" indent="-219456">
+              <a:spcAft>
+                <a:spcPts val="400"/>
+              </a:spcAft>
+              <a:buChar char="•"/>
+            </a:pPr>
+            <a:r>
+              <a:rPr sz="2000" b="0">
+                <a:solidFill>
+                  <a:srgbClr val="000000"/>
+                </a:solidFill>
+                <a:latin typeface="Times New Roman"/>
+              </a:rPr>
+              <a:t>Exercise 2: the console at the failure and your explanation.</a:t>
+            </a:r>
+          </a:p>
+          <a:p>
+            <a:pPr marL="256032" indent="-219456">
+              <a:spcAft>
+                <a:spcPts val="400"/>
+              </a:spcAft>
+              <a:buChar char="•"/>
+            </a:pPr>
+            <a:r>
+              <a:rPr sz="2000" b="0">
+                <a:solidFill>
+                  <a:srgbClr val="000000"/>
+                </a:solidFill>
+                <a:latin typeface="Times New Roman"/>
+              </a:rPr>
+              <a:t>Exercise 3: a table and a chart of size vs. time; your 100 MB estimate.</a:t>
+            </a:r>
+          </a:p>
+        </p:txBody>
+      </p:sp>
+    </p:spTree>
+  </p:cSld>
+  <p:clrMapOvr>
+    <a:masterClrMapping/>
+  </p:clrMapOvr>
+</p:sld>
+</file>
+
+<file path=ppt/slides/slide57.xml><?xml version="1.0" encoding="utf-8"?>
+<p:sld xmlns:a="http://schemas.openxmlformats.org/drawingml/2006/main" xmlns:p="http://schemas.openxmlformats.org/presentationml/2006/main" xmlns:r="http://schemas.openxmlformats.org/officeDocument/2006/relationships">
+  <p:cSld>
+    <p:spTree>
+      <p:nvGrpSpPr>
+        <p:cNvPr id="1" name=""/>
+        <p:cNvGrpSpPr/>
+        <p:nvPr/>
+      </p:nvGrpSpPr>
+      <p:grpSpPr/>
+      <p:sp>
+        <p:nvSpPr>
+          <p:cNvPr id="10" name="CustomShape 6">
+            <a:extLst>
+              <a:ext uri="{FF2B5EF4-FFF2-40B4-BE49-F238E27FC236}">
+                <a16:creationId xmlns:a16="http://schemas.microsoft.com/office/drawing/2014/main" id="{CB76DC60-C0C9-436D-8956-EE4CA394869E}"/>
+              </a:ext>
+            </a:extLst>
+          </p:cNvPr>
+          <p:cNvSpPr/>
+          <p:nvPr/>
+        </p:nvSpPr>
+        <p:spPr>
+          <a:xfrm>
+            <a:off x="-6000" y="0"/>
+            <a:ext cx="12198000" cy="644877"/>
+          </a:xfrm>
+          <a:prstGeom prst="rect">
+            <a:avLst/>
+          </a:prstGeom>
+          <a:solidFill>
+            <a:schemeClr val="accent6">
+              <a:lumMod val="40000"/>
+              <a:lumOff val="60000"/>
+            </a:schemeClr>
+          </a:solidFill>
+          <a:ln>
+            <a:noFill/>
+          </a:ln>
+        </p:spPr>
+        <p:style>
+          <a:lnRef idx="0">
+            <a:scrgbClr r="0" g="0" b="0"/>
+          </a:lnRef>
+          <a:fillRef idx="0">
+            <a:scrgbClr r="0" g="0" b="0"/>
+          </a:fillRef>
+          <a:effectRef idx="0">
+            <a:scrgbClr r="0" g="0" b="0"/>
+          </a:effectRef>
+          <a:fontRef idx="minor"/>
+        </p:style>
+        <p:txBody>
+          <a:bodyPr wrap="square" lIns="90000" tIns="45000" rIns="90000" bIns="45000">
+            <a:spAutoFit/>
+          </a:bodyPr>
+          <a:lstStyle/>
+          <a:p>
+            <a:pPr marL="360" algn="ctr">
+              <a:lnSpc>
+                <a:spcPct val="100000"/>
+              </a:lnSpc>
+              <a:buClr>
+                <a:srgbClr val="000000"/>
+              </a:buClr>
+            </a:pPr>
+            <a:r>
+              <a:rPr lang="en-US" sz="3600" b="1" spc="-1" dirty="0">
+                <a:latin typeface="Times New Roman" panose="02020603050405020304" pitchFamily="18" charset="0"/>
+                <a:cs typeface="Times New Roman" panose="02020603050405020304" pitchFamily="18" charset="0"/>
+              </a:rPr>
+              <a:t>7. Practice </a:t>
+            </a:r>
+            <a:r>
+              <a:rPr lang="en-US" sz="3600" spc="-1" dirty="0">
+                <a:latin typeface="Times New Roman" panose="02020603050405020304" pitchFamily="18" charset="0"/>
+                <a:cs typeface="Times New Roman" panose="02020603050405020304" pitchFamily="18" charset="0"/>
+              </a:rPr>
+              <a:t>(3/3) Answer notes</a:t>
+            </a:r>
+          </a:p>
+        </p:txBody>
+      </p:sp>
+      <p:sp>
+        <p:nvSpPr>
+          <p:cNvPr id="62" name="CustomShape 2"/>
+          <p:cNvSpPr/>
+          <p:nvPr/>
+        </p:nvSpPr>
+        <p:spPr>
+          <a:xfrm>
+            <a:off x="11291400" y="6492960"/>
+            <a:ext cx="894600" cy="358920"/>
+          </a:xfrm>
+          <a:prstGeom prst="rect">
+            <a:avLst/>
+          </a:prstGeom>
+          <a:noFill/>
+          <a:ln>
+            <a:noFill/>
+          </a:ln>
+        </p:spPr>
+        <p:style>
+          <a:lnRef idx="0">
+            <a:scrgbClr r="0" g="0" b="0"/>
+          </a:lnRef>
+          <a:fillRef idx="0">
+            <a:scrgbClr r="0" g="0" b="0"/>
+          </a:fillRef>
+          <a:effectRef idx="0">
+            <a:scrgbClr r="0" g="0" b="0"/>
+          </a:effectRef>
+          <a:fontRef idx="minor"/>
+        </p:style>
+        <p:txBody>
+          <a:bodyPr lIns="90000" tIns="45000" rIns="90000" bIns="45000" anchor="ctr">
+            <a:noAutofit/>
+          </a:bodyPr>
+          <a:lstStyle/>
+          <a:p>
+            <a:pPr algn="ctr">
+              <a:lnSpc>
+                <a:spcPct val="100000"/>
+              </a:lnSpc>
+            </a:pPr>
+            <a:fld id="{32452110-F6D1-439F-92C4-7A3912DA20B0}" type="slidenum">
+              <a:rPr lang="en-US" sz="1600" b="1" strike="noStrike" spc="-1">
+                <a:solidFill>
+                  <a:srgbClr val="000000"/>
+                </a:solidFill>
+                <a:latin typeface="Times New Roman"/>
+                <a:ea typeface="DejaVu Sans"/>
+              </a:rPr>
+              <a:t>51</a:t>
             </a:fld>
             <a:endParaRPr lang="en-US" sz="1600" b="0" strike="noStrike" spc="-1">
               <a:latin typeface="Arial"/>
@@ -35457,7 +36140,7 @@
 </p:sld>
 </file>
 
-<file path=ppt/slides/slide57.xml><?xml version="1.0" encoding="utf-8"?>
+<file path=ppt/slides/slide58.xml><?xml version="1.0" encoding="utf-8"?>
 <p:sld xmlns:a="http://schemas.openxmlformats.org/drawingml/2006/main" xmlns:p="http://schemas.openxmlformats.org/presentationml/2006/main" xmlns:r="http://schemas.openxmlformats.org/officeDocument/2006/relationships">
   <p:cSld>
     <p:spTree>
@@ -35585,7 +36268,7 @@
                 <a:latin typeface="Times New Roman"/>
                 <a:ea typeface="DejaVu Sans"/>
               </a:rPr>
-              <a:t>51</a:t>
+              <a:t>52</a:t>
             </a:fld>
             <a:endParaRPr lang="en-US" sz="1600" b="0" strike="noStrike" spc="-1">
               <a:latin typeface="Arial"/>
@@ -35826,7 +36509,7 @@
 </p:sld>
 </file>
 
-<file path=ppt/slides/slide58.xml><?xml version="1.0" encoding="utf-8"?>
+<file path=ppt/slides/slide59.xml><?xml version="1.0" encoding="utf-8"?>
 <p:sld xmlns:a="http://schemas.openxmlformats.org/drawingml/2006/main" xmlns:p="http://schemas.openxmlformats.org/presentationml/2006/main" xmlns:r="http://schemas.openxmlformats.org/officeDocument/2006/relationships">
   <p:cSld>
     <p:spTree>
@@ -35990,7 +36673,7 @@
                 <a:latin typeface="Times New Roman"/>
                 <a:ea typeface="DejaVu Sans"/>
               </a:rPr>
-              <a:t>52</a:t>
+              <a:t>53</a:t>
             </a:fld>
             <a:endParaRPr lang="en-US" sz="1600" b="0" strike="noStrike" spc="-1">
               <a:latin typeface="Arial"/>
@@ -36983,7 +37666,7 @@
                 </a:solidFill>
                 <a:latin typeface="Times New Roman"/>
               </a:rPr>
-              <a:t>Measure where the time goes, make it faster, and see how each question behind the project was answered.</a:t>
+              <a:t>Measure where the time goes, make it faster (radio, then a 3× faster wired link), and see how each question behind the project was answered.</a:t>
             </a:r>
           </a:p>
           <a:p>

--- a/fpga/sw/export/docs/slides/05_Secure_file_transfer_and_results.pptx
+++ b/fpga/sw/export/docs/slides/05_Secure_file_transfer_and_results.pptx
@@ -59,9 +59,6 @@
     <p:sldId id="916" r:id="rId63"/>
     <p:sldId id="917" r:id="rId64"/>
     <p:sldId id="918" r:id="rId65"/>
-    <p:sldId id="919" r:id="rId66"/>
-    <p:sldId id="920" r:id="rId67"/>
-    <p:sldId id="921" r:id="rId68"/>
   </p:sldIdLst>
   <p:sldSz cx="12192000" cy="6858000"/>
   <p:notesSz cx="7559675" cy="10691813"/>
@@ -3666,148 +3663,6 @@
     </pc:docChg>
   </pc:docChgLst>
 </pc:chgInfo>
-</file>
-
-<file path=ppt/charts/chart1.xml><?xml version="1.0" encoding="utf-8"?>
-<c:chartSpace xmlns:c="http://schemas.openxmlformats.org/drawingml/2006/chart" xmlns:a="http://schemas.openxmlformats.org/drawingml/2006/main" xmlns:r="http://schemas.openxmlformats.org/officeDocument/2006/relationships">
-  <c:date1904 val="0"/>
-  <c:chart>
-    <c:autoTitleDeleted val="0"/>
-    <c:plotArea>
-      <c:barChart>
-        <c:barDir val="col"/>
-        <c:grouping val="clustered"/>
-        <c:ser>
-          <c:idx val="0"/>
-          <c:order val="0"/>
-          <c:tx>
-            <c:strRef>
-              <c:f>Sheet1!$B$1</c:f>
-              <c:strCache>
-                <c:ptCount val="1"/>
-                <c:pt idx="0">
-                  <c:v>1 MiB card to card (KB/s)</c:v>
-                </c:pt>
-              </c:strCache>
-            </c:strRef>
-          </c:tx>
-          <c:cat>
-            <c:strRef>
-              <c:f>Sheet1!$A$2:$A$3</c:f>
-              <c:strCache>
-                <c:ptCount val="2"/>
-                <c:pt idx="0">
-                  <c:v>before</c:v>
-                </c:pt>
-                <c:pt idx="1">
-                  <c:v>after</c:v>
-                </c:pt>
-              </c:strCache>
-            </c:strRef>
-          </c:cat>
-          <c:val>
-            <c:numRef>
-              <c:f>Sheet1!$B$2:$B$3</c:f>
-              <c:numCache>
-                <c:formatCode>General</c:formatCode>
-                <c:ptCount val="2"/>
-                <c:pt idx="0">
-                  <c:v>7.37</c:v>
-                </c:pt>
-                <c:pt idx="1">
-                  <c:v>10.53</c:v>
-                </c:pt>
-              </c:numCache>
-            </c:numRef>
-          </c:val>
-        </c:ser>
-        <c:axId val="-2068027336"/>
-        <c:axId val="-2113994440"/>
-      </c:barChart>
-      <c:catAx>
-        <c:axId val="-2068027336"/>
-        <c:scaling>
-          <c:orientation val="minMax"/>
-        </c:scaling>
-        <c:delete val="0"/>
-        <c:axPos val="b"/>
-        <c:majorTickMark val="out"/>
-        <c:minorTickMark val="none"/>
-        <c:tickLblPos val="nextTo"/>
-        <c:txPr>
-          <a:bodyPr/>
-          <a:lstStyle/>
-          <a:p>
-            <a:pPr>
-              <a:defRPr sz="1200">
-                <a:latin typeface="Times New Roman"/>
-              </a:defRPr>
-            </a:pPr>
-          </a:p>
-        </c:txPr>
-        <c:crossAx val="-2113994440"/>
-        <c:crosses val="autoZero"/>
-        <c:auto val="1"/>
-        <c:lblAlgn val="ctr"/>
-        <c:lblOffset val="100"/>
-        <c:noMultiLvlLbl val="0"/>
-      </c:catAx>
-      <c:valAx>
-        <c:axId val="-2113994440"/>
-        <c:scaling/>
-        <c:delete val="0"/>
-        <c:axPos val="l"/>
-        <c:majorGridlines/>
-        <c:numFmt formatCode="0.0" sourceLinked="0"/>
-        <c:majorTickMark val="out"/>
-        <c:minorTickMark val="none"/>
-        <c:tickLblPos val="nextTo"/>
-        <c:txPr>
-          <a:bodyPr/>
-          <a:lstStyle/>
-          <a:p>
-            <a:pPr>
-              <a:defRPr sz="1200">
-                <a:latin typeface="Times New Roman"/>
-              </a:defRPr>
-            </a:pPr>
-          </a:p>
-        </c:txPr>
-        <c:crossAx val="-2068027336"/>
-        <c:crosses val="autoZero"/>
-      </c:valAx>
-    </c:plotArea>
-    <c:legend>
-      <c:legendPos val="t"/>
-      <c:overlay val="0"/>
-      <c:txPr>
-        <a:bodyPr/>
-        <a:lstStyle/>
-        <a:p>
-          <a:pPr>
-            <a:defRPr sz="1200">
-              <a:latin typeface="Times New Roman"/>
-            </a:defRPr>
-          </a:pPr>
-        </a:p>
-      </c:txPr>
-    </c:legend>
-    <c:dispBlanksAs val="gap"/>
-  </c:chart>
-  <c:txPr>
-    <a:bodyPr/>
-    <a:lstStyle/>
-    <a:p>
-      <a:pPr>
-        <a:defRPr sz="1800"/>
-      </a:pPr>
-      <a:endParaRPr lang="en-US"/>
-    </a:p>
-  </c:txPr>
-  <c:externalData r:id="rId1">
-    <c:autoUpdate val="0"/>
-  </c:externalData>
-</c:chartSpace>
 </file>
 
 <file path=ppt/notesMasters/notesMaster1.xml><?xml version="1.0" encoding="utf-8"?>
@@ -7509,7 +7364,7 @@
                 <a:ea typeface="DejaVu Sans"/>
                 <a:cs typeface="Times New Roman" panose="02020603050405020304" pitchFamily="18" charset="0"/>
               </a:rPr>
-              <a:t>Making It Faster</a:t>
+              <a:t>Speed: Measure and Choose a Link</a:t>
             </a:r>
             <a:endParaRPr lang="en-US" sz="4000" b="0" strike="noStrike" spc="-1" dirty="0">
               <a:solidFill>
@@ -7537,7 +7392,7 @@
                 <a:ea typeface="DejaVu Sans"/>
                 <a:cs typeface="Times New Roman" panose="02020603050405020304" pitchFamily="18" charset="0"/>
               </a:rPr>
-              <a:t>Questions Behind the Project</a:t>
+              <a:t>Choose and Reproduce</a:t>
             </a:r>
             <a:endParaRPr lang="en-US" sz="4000" b="0" strike="noStrike" spc="-1" dirty="0">
               <a:solidFill>
@@ -10188,7 +10043,7 @@
                 <a:ea typeface="DejaVu Sans"/>
                 <a:cs typeface="Times New Roman" panose="02020603050405020304" pitchFamily="18" charset="0"/>
               </a:rPr>
-              <a:t>Making It Faster</a:t>
+              <a:t>Speed: Measure and Choose a Link</a:t>
             </a:r>
             <a:endParaRPr lang="en-US" sz="4000" b="0" strike="noStrike" spc="-1" dirty="0">
               <a:solidFill>
@@ -10216,7 +10071,7 @@
                 <a:ea typeface="DejaVu Sans"/>
                 <a:cs typeface="Times New Roman" panose="02020603050405020304" pitchFamily="18" charset="0"/>
               </a:rPr>
-              <a:t>Questions Behind the Project</a:t>
+              <a:t>Choose and Reproduce</a:t>
             </a:r>
             <a:endParaRPr lang="en-US" sz="4000" b="0" strike="noStrike" spc="-1" dirty="0">
               <a:solidFill>
@@ -10947,7 +10802,7 @@
                 </a:solidFill>
                 <a:latin typeface="Times New Roman"/>
               </a:rPr>
-              <a:t> confirm the peer's software read it — that needs our own ACK.</a:t>
+              <a:t> confirm the peer's software read it — that needs the link's own ACK.</a:t>
             </a:r>
           </a:p>
         </p:txBody>
@@ -12512,7 +12367,7 @@
                 </a:solidFill>
                 <a:latin typeface="Times New Roman"/>
               </a:rPr>
-              <a:t>Two checksums: the FCS covers the air, our CRC-16 also covers the SPI wires on both sides (Problem 1). Our 'A' frame is 16 bytes: header, link header, CRC, FCS.</a:t>
+              <a:t>Two checksums: the FCS covers the air, the link's CRC-16 also covers the SPI wires on both sides (section 2, (5/8)). The 'A' frame is 16 bytes: header, link header, CRC, FCS.</a:t>
             </a:r>
           </a:p>
         </p:txBody>
@@ -13333,7 +13188,7 @@
                 </a:solidFill>
                 <a:latin typeface="Times New Roman"/>
               </a:rPr>
-              <a:t>The first fragment of the peer's next message also confirms our last one (implicit ACK, </a:t>
+              <a:t>The first fragment of the peer's next message also confirms the last one sent (implicit ACK, </a:t>
             </a:r>
             <a:r>
               <a:rPr sz="1700" b="0" i="1">
@@ -13431,18 +13286,18 @@
               </a:buClr>
             </a:pPr>
             <a:r>
-              <a:rPr lang="en-US" sz="3600" b="1" spc="-1" dirty="0">
+              <a:rPr lang="en-US" sz="2700" b="1" spc="-1" dirty="0">
                 <a:latin typeface="Times New Roman" panose="02020603050405020304" pitchFamily="18" charset="0"/>
                 <a:cs typeface="Times New Roman" panose="02020603050405020304" pitchFamily="18" charset="0"/>
               </a:rPr>
               <a:t>2. Radio Link </a:t>
             </a:r>
             <a:r>
-              <a:rPr lang="en-US" sz="3600" spc="-1" dirty="0">
+              <a:rPr lang="en-US" sz="2700" spc="-1" dirty="0">
                 <a:latin typeface="Times New Roman" panose="02020603050405020304" pitchFamily="18" charset="0"/>
                 <a:cs typeface="Times New Roman" panose="02020603050405020304" pitchFamily="18" charset="0"/>
               </a:rPr>
-              <a:t>(5/8) Problem 1: corrupted bytes</a:t>
+              <a:t>(5/8) If a long transfer fails with an AEAD error (113)</a:t>
             </a:r>
           </a:p>
         </p:txBody>
@@ -13524,8 +13379,8 @@
                 <a:tableStyleId>{5C22544A-7EE6-4342-B048-85BDC9FD1C3A}</a:tableStyleId>
               </a:tblPr>
               <a:tblGrid>
-                <a:gridCol w="1737360"/>
-                <a:gridCol w="9692640"/>
+                <a:gridCol w="1920240"/>
+                <a:gridCol w="9509760"/>
               </a:tblGrid>
               <a:tr h="853440">
                 <a:tc>
@@ -13540,7 +13395,7 @@
                           </a:solidFill>
                           <a:latin typeface="Times New Roman"/>
                         </a:rPr>
-                        <a:t>Symptom</a:t>
+                        <a:t>You see</a:t>
                       </a:r>
                     </a:p>
                   </a:txBody>
@@ -13562,7 +13417,7 @@
                           </a:solidFill>
                           <a:latin typeface="Times New Roman"/>
                         </a:rPr>
-                        <a:t>the first 1 MiB stream failed after ~80 s with an AEAD tag error (113) — no SD card involved</a:t>
+                        <a:t>XFER: record at &lt;n&gt; failed (113) on board B, after a few thousand records</a:t>
                       </a:r>
                     </a:p>
                   </a:txBody>
@@ -13586,7 +13441,7 @@
                           </a:solidFill>
                           <a:latin typeface="Times New Roman"/>
                         </a:rPr>
-                        <a:t>Observation</a:t>
+                        <a:t>It means</a:t>
                       </a:r>
                     </a:p>
                   </a:txBody>
@@ -13608,7 +13463,7 @@
                           </a:solidFill>
                           <a:latin typeface="Times New Roman"/>
                         </a:rPr>
-                        <a:t>the radio had acknowledged the frame, so its FCS was valid; the bytes the receiver decrypted were not the bytes sent</a:t>
+                        <a:t>a record arrived with wrong bytes. On PMOD wires a bit can flip on the SPI link between the CPU and the radio; the radio's own checksum (FCS) is computed after that, so it cannot see it</a:t>
                       </a:r>
                     </a:p>
                   </a:txBody>
@@ -13632,7 +13487,7 @@
                           </a:solidFill>
                           <a:latin typeface="Times New Roman"/>
                         </a:rPr>
-                        <a:t>Cause</a:t>
+                        <a:t>The code</a:t>
                       </a:r>
                     </a:p>
                   </a:txBody>
@@ -13654,7 +13509,7 @@
                           </a:solidFill>
                           <a:latin typeface="Times New Roman"/>
                         </a:rPr>
-                        <a:t>a bit flips now and then on the SPI wires between CPU and radio. The radio computes its FCS after the flip, so it cannot see it</a:t>
+                        <a:t>adds its own CRC-16 to every frame (seal() / poll_frame() in edhoc_rf_link.c): a bad frame gets no 'A' and is sent again</a:t>
                       </a:r>
                     </a:p>
                   </a:txBody>
@@ -13678,7 +13533,7 @@
                           </a:solidFill>
                           <a:latin typeface="Times New Roman"/>
                         </a:rPr>
-                        <a:t>Fix</a:t>
+                        <a:t>Check</a:t>
                       </a:r>
                     </a:p>
                   </a:txBody>
@@ -13700,7 +13555,7 @@
                           </a:solidFill>
                           <a:latin typeface="Times New Roman"/>
                         </a:rPr>
-                        <a:t>our own CRC-16 per frame (seal() / poll_frame() in edhoc_rf_link.c), computed before SPI on the way out and checked after SPI on the way in; a bad frame gets no 'A' and is sent again</a:t>
+                        <a:t>the RF: line at the end of the run: crc_err &gt; 0 with XFER RECV … OK means bad frames were caught and resent</a:t>
                       </a:r>
                     </a:p>
                   </a:txBody>
@@ -13724,7 +13579,7 @@
                           </a:solidFill>
                           <a:latin typeface="Times New Roman"/>
                         </a:rPr>
-                        <a:t>Check it</a:t>
+                        <a:t>Try it</a:t>
                       </a:r>
                     </a:p>
                   </a:txBody>
@@ -13746,7 +13601,7 @@
                           </a:solidFill>
                           <a:latin typeface="Times New Roman"/>
                         </a:rPr>
-                        <a:t>the RF: line at the end of every run counts crc_err. A long transfer with crc_err &gt; 0 that still ends in XFER RECV … OK shows the CRC catching and recovering</a:t>
+                        <a:t>Exercise 2 removes the CRC and shows the error; restore with git checkout</a:t>
                       </a:r>
                     </a:p>
                   </a:txBody>
@@ -13770,7 +13625,7 @@
                           </a:solidFill>
                           <a:latin typeface="Times New Roman"/>
                         </a:rPr>
-                        <a:t>Lesson</a:t>
+                        <a:t>Remember</a:t>
                       </a:r>
                     </a:p>
                   </a:txBody>
@@ -13792,7 +13647,7 @@
                           </a:solidFill>
                           <a:latin typeface="Times New Roman"/>
                         </a:rPr>
-                        <a:t>check data end to end yourself; a link layer's checksum covers only its own part of the path</a:t>
+                        <a:t>check data end to end; a chip's checksum covers only its own part of the path</a:t>
                       </a:r>
                     </a:p>
                   </a:txBody>
@@ -13882,18 +13737,18 @@
               </a:buClr>
             </a:pPr>
             <a:r>
-              <a:rPr lang="en-US" sz="3600" b="1" spc="-1" dirty="0">
+              <a:rPr lang="en-US" sz="3300" b="1" spc="-1" dirty="0">
                 <a:latin typeface="Times New Roman" panose="02020603050405020304" pitchFamily="18" charset="0"/>
                 <a:cs typeface="Times New Roman" panose="02020603050405020304" pitchFamily="18" charset="0"/>
               </a:rPr>
               <a:t>2. Radio Link </a:t>
             </a:r>
             <a:r>
-              <a:rPr lang="en-US" sz="3600" spc="-1" dirty="0">
+              <a:rPr lang="en-US" sz="3300" spc="-1" dirty="0">
                 <a:latin typeface="Times New Roman" panose="02020603050405020304" pitchFamily="18" charset="0"/>
                 <a:cs typeface="Times New Roman" panose="02020603050405020304" pitchFamily="18" charset="0"/>
               </a:rPr>
-              <a:t>(6/8) Problem 2: a radio goes deaf</a:t>
+              <a:t>(6/8) If one board stops hearing the other</a:t>
             </a:r>
           </a:p>
         </p:txBody>
@@ -13975,10 +13830,10 @@
                 <a:tableStyleId>{5C22544A-7EE6-4342-B048-85BDC9FD1C3A}</a:tableStyleId>
               </a:tblPr>
               <a:tblGrid>
-                <a:gridCol w="1737360"/>
-                <a:gridCol w="9692640"/>
+                <a:gridCol w="1920240"/>
+                <a:gridCol w="9509760"/>
               </a:tblGrid>
-              <a:tr h="853440">
+              <a:tr h="1024128">
                 <a:tc>
                   <a:txBody>
                     <a:bodyPr wrap="square"/>
@@ -13991,7 +13846,7 @@
                           </a:solidFill>
                           <a:latin typeface="Times New Roman"/>
                         </a:rPr>
-                        <a:t>Symptom</a:t>
+                        <a:t>You see</a:t>
                       </a:r>
                     </a:p>
                   </a:txBody>
@@ -14013,7 +13868,7 @@
                           </a:solidFill>
                           <a:latin typeface="Times New Roman"/>
                         </a:rPr>
-                        <a:t>with the CRC in place, the stream then stopped for good after ~420 KB</a:t>
+                        <a:t>the sender's repeats count climbs, the receiver gets nothing — for more than 2 s</a:t>
                       </a:r>
                     </a:p>
                   </a:txBody>
@@ -14024,7 +13879,7 @@
                   </a:tcPr>
                 </a:tc>
               </a:tr>
-              <a:tr h="853440">
+              <a:tr h="1024128">
                 <a:tc>
                   <a:txBody>
                     <a:bodyPr wrap="square"/>
@@ -14037,7 +13892,7 @@
                           </a:solidFill>
                           <a:latin typeface="Times New Roman"/>
                         </a:rPr>
-                        <a:t>Observation</a:t>
+                        <a:t>It means</a:t>
                       </a:r>
                     </a:p>
                   </a:txBody>
@@ -14059,7 +13914,7 @@
                           </a:solidFill>
                           <a:latin typeface="Times New Roman"/>
                         </a:rPr>
-                        <a:t>the sender repeated one fragment 9,140 times; the receiver received nothing at all</a:t>
+                        <a:t>probably a radio register changed by a flipped SPI write (e.g. the channel). Data CRCs cannot fix a radio that is no longer listening</a:t>
                       </a:r>
                     </a:p>
                   </a:txBody>
@@ -14070,7 +13925,7 @@
                   </a:tcPr>
                 </a:tc>
               </a:tr>
-              <a:tr h="853440">
+              <a:tr h="1024128">
                 <a:tc>
                   <a:txBody>
                     <a:bodyPr wrap="square"/>
@@ -14083,7 +13938,7 @@
                           </a:solidFill>
                           <a:latin typeface="Times New Roman"/>
                         </a:rPr>
-                        <a:t>Cause</a:t>
+                        <a:t>The code</a:t>
                       </a:r>
                     </a:p>
                   </a:txBody>
@@ -14105,7 +13960,7 @@
                           </a:solidFill>
                           <a:latin typeface="Times New Roman"/>
                         </a:rPr>
-                        <a:t>inference, not observed directly: a flipped SPI write left a radio control register wrong (e.g. the channel). A data CRC cannot repair that</a:t>
+                        <a:t>re-initialises its radio after 2 s without progress (heal_if_stuck(), in every waiting loop), keeping all sequence numbers</a:t>
                       </a:r>
                     </a:p>
                   </a:txBody>
@@ -14116,7 +13971,7 @@
                   </a:tcPr>
                 </a:tc>
               </a:tr>
-              <a:tr h="853440">
+              <a:tr h="1024128">
                 <a:tc>
                   <a:txBody>
                     <a:bodyPr wrap="square"/>
@@ -14129,7 +13984,7 @@
                           </a:solidFill>
                           <a:latin typeface="Times New Roman"/>
                         </a:rPr>
-                        <a:t>Fix</a:t>
+                        <a:t>Check</a:t>
                       </a:r>
                     </a:p>
                   </a:txBody>
@@ -14151,7 +14006,7 @@
                           </a:solidFill>
                           <a:latin typeface="Times New Roman"/>
                         </a:rPr>
-                        <a:t>a watchdog (heal_if_stuck): no progress for 2 s → reset and re-program the radio, keeping all sequence numbers. It must run in every waiting loop — the first version missed the transmit retry loop</a:t>
+                        <a:t>RF: … reinits=&lt;n&gt;. The responder shows a few while it waits for the initiator to be loaded (one per 2 s) — that is normal</a:t>
                       </a:r>
                     </a:p>
                   </a:txBody>
@@ -14162,7 +14017,7 @@
                   </a:tcPr>
                 </a:tc>
               </a:tr>
-              <a:tr h="853440">
+              <a:tr h="1024128">
                 <a:tc>
                   <a:txBody>
                     <a:bodyPr wrap="square"/>
@@ -14175,7 +14030,7 @@
                           </a:solidFill>
                           <a:latin typeface="Times New Roman"/>
                         </a:rPr>
-                        <a:t>Check it</a:t>
+                        <a:t>Remember</a:t>
                       </a:r>
                     </a:p>
                   </a:txBody>
@@ -14197,59 +14052,13 @@
                           </a:solidFill>
                           <a:latin typeface="Times New Roman"/>
                         </a:rPr>
-                        <a:t>the RF: line counts reinits. The responder shows a few while it waits for the initiator to be loaded (2 s each) — harmless; in a long transfer, reinits &gt; 0 with a completed transfer shows recovery</a:t>
+                        <a:t>every wait needs a way out</a:t>
                       </a:r>
                     </a:p>
                   </a:txBody>
                   <a:tcPr marL="54864" marR="54864" marT="27432" marB="27432">
                     <a:solidFill>
                       <a:srgbClr val="F2F8EE"/>
-                    </a:solidFill>
-                  </a:tcPr>
-                </a:tc>
-              </a:tr>
-              <a:tr h="853440">
-                <a:tc>
-                  <a:txBody>
-                    <a:bodyPr wrap="square"/>
-                    <a:lstStyle/>
-                    <a:p>
-                      <a:r>
-                        <a:rPr sz="1400" b="0">
-                          <a:solidFill>
-                            <a:srgbClr val="000000"/>
-                          </a:solidFill>
-                          <a:latin typeface="Times New Roman"/>
-                        </a:rPr>
-                        <a:t>Lesson</a:t>
-                      </a:r>
-                    </a:p>
-                  </a:txBody>
-                  <a:tcPr marL="54864" marR="54864" marT="27432" marB="27432">
-                    <a:solidFill>
-                      <a:srgbClr val="FFFFFF"/>
-                    </a:solidFill>
-                  </a:tcPr>
-                </a:tc>
-                <a:tc>
-                  <a:txBody>
-                    <a:bodyPr wrap="square"/>
-                    <a:lstStyle/>
-                    <a:p>
-                      <a:r>
-                        <a:rPr sz="1400" b="0">
-                          <a:solidFill>
-                            <a:srgbClr val="000000"/>
-                          </a:solidFill>
-                          <a:latin typeface="Times New Roman"/>
-                        </a:rPr>
-                        <a:t>recover from stuck hardware instead of trusting it: every wait needs a way out</a:t>
-                      </a:r>
-                    </a:p>
-                  </a:txBody>
-                  <a:tcPr marL="54864" marR="54864" marT="27432" marB="27432">
-                    <a:solidFill>
-                      <a:srgbClr val="FFFFFF"/>
                     </a:solidFill>
                   </a:tcPr>
                 </a:tc>
@@ -14333,18 +14142,18 @@
               </a:buClr>
             </a:pPr>
             <a:r>
-              <a:rPr lang="en-US" sz="3600" b="1" spc="-1" dirty="0">
+              <a:rPr lang="en-US" sz="2700" b="1" spc="-1" dirty="0">
                 <a:latin typeface="Times New Roman" panose="02020603050405020304" pitchFamily="18" charset="0"/>
                 <a:cs typeface="Times New Roman" panose="02020603050405020304" pitchFamily="18" charset="0"/>
               </a:rPr>
               <a:t>2. Radio Link </a:t>
             </a:r>
             <a:r>
-              <a:rPr lang="en-US" sz="3600" spc="-1" dirty="0">
+              <a:rPr lang="en-US" sz="2700" spc="-1" dirty="0">
                 <a:latin typeface="Times New Roman" panose="02020603050405020304" pitchFamily="18" charset="0"/>
                 <a:cs typeface="Times New Roman" panose="02020603050405020304" pitchFamily="18" charset="0"/>
               </a:rPr>
-              <a:t>(7/8) Problem 3: both sides repeating</a:t>
+              <a:t>(7/8) If both boards keep repeating after the handshake</a:t>
             </a:r>
           </a:p>
         </p:txBody>
@@ -14417,7 +14226,7 @@
         </p:nvGraphicFramePr>
         <p:xfrm>
           <a:off x="365760" y="868680"/>
-          <a:ext cx="11430000" cy="5303520"/>
+          <a:ext cx="11430000" cy="5120640"/>
         </p:xfrm>
         <a:graphic>
           <a:graphicData uri="http://schemas.openxmlformats.org/drawingml/2006/table">
@@ -14426,10 +14235,10 @@
                 <a:tableStyleId>{5C22544A-7EE6-4342-B048-85BDC9FD1C3A}</a:tableStyleId>
               </a:tblPr>
               <a:tblGrid>
-                <a:gridCol w="1737360"/>
-                <a:gridCol w="9692640"/>
+                <a:gridCol w="1920240"/>
+                <a:gridCol w="9509760"/>
               </a:tblGrid>
-              <a:tr h="757645">
+              <a:tr h="853440">
                 <a:tc>
                   <a:txBody>
                     <a:bodyPr wrap="square"/>
@@ -14442,7 +14251,7 @@
                           </a:solidFill>
                           <a:latin typeface="Times New Roman"/>
                         </a:rPr>
-                        <a:t>Symptom</a:t>
+                        <a:t>You see</a:t>
                       </a:r>
                     </a:p>
                   </a:txBody>
@@ -14464,7 +14273,7 @@
                           </a:solidFill>
                           <a:latin typeface="Times New Roman"/>
                         </a:rPr>
-                        <a:t>with DEBUG=1 builds the pair hung right after the handshake; also with a normal build when the initiator paused 0.5 s</a:t>
+                        <a:t>the pair stops right after EDHOC OK (often with DEBUG=1, whose prints slow one side down); both boards repeat one frame</a:t>
                       </a:r>
                     </a:p>
                   </a:txBody>
@@ -14475,7 +14284,7 @@
                   </a:tcPr>
                 </a:tc>
               </a:tr>
-              <a:tr h="757645">
+              <a:tr h="853440">
                 <a:tc>
                   <a:txBody>
                     <a:bodyPr wrap="square"/>
@@ -14488,7 +14297,7 @@
                           </a:solidFill>
                           <a:latin typeface="Times New Roman"/>
                         </a:rPr>
-                        <a:t>Observation</a:t>
+                        <a:t>It means</a:t>
                       </a:r>
                     </a:p>
                   </a:txBody>
@@ -14510,7 +14319,7 @@
                           </a:solidFill>
                           <a:latin typeface="Times New Roman"/>
                         </a:rPr>
-                        <a:t>read over JTAG: both boards in the transmit loop, each repeating one frame ~40 times a second, never acknowledged (TX status 0xC1); the watchdog did not help</a:t>
+                        <a:t>a radio that holds an unread frame acknowledges nothing; if both sides only transmit, neither ever gets an ACK</a:t>
                       </a:r>
                     </a:p>
                   </a:txBody>
@@ -14521,7 +14330,7 @@
                   </a:tcPr>
                 </a:tc>
               </a:tr>
-              <a:tr h="757645">
+              <a:tr h="853440">
                 <a:tc>
                   <a:txBody>
                     <a:bodyPr wrap="square"/>
@@ -14534,7 +14343,7 @@
                           </a:solidFill>
                           <a:latin typeface="Times New Roman"/>
                         </a:rPr>
-                        <a:t>Cause</a:t>
+                        <a:t>The code</a:t>
                       </a:r>
                     </a:p>
                   </a:txBody>
@@ -14556,7 +14365,7 @@
                           </a:solidFill>
                           <a:latin typeface="Times New Roman"/>
                         </a:rPr>
-                        <a:t>a radio holding an unread frame in its one-frame FIFO was seen to acknowledge nothing — and neither side read its FIFO while repeating. Same root: a board that had finished left its peer repeating the last frame forever</a:t>
+                        <a:t>take_reply() reads the FIFO between transmit attempts; a finished board keeps answering in transport_idle()</a:t>
                       </a:r>
                     </a:p>
                   </a:txBody>
@@ -14567,7 +14376,7 @@
                   </a:tcPr>
                 </a:tc>
               </a:tr>
-              <a:tr h="757645">
+              <a:tr h="853440">
                 <a:tc>
                   <a:txBody>
                     <a:bodyPr wrap="square"/>
@@ -14580,7 +14389,7 @@
                           </a:solidFill>
                           <a:latin typeface="Times New Roman"/>
                         </a:rPr>
-                        <a:t>Fix</a:t>
+                        <a:t>Try it</a:t>
                       </a:r>
                     </a:p>
                   </a:txBody>
@@ -14602,7 +14411,7 @@
                           </a:solidFill>
                           <a:latin typeface="Times New Roman"/>
                         </a:rPr>
-                        <a:t>take_reply() reads the FIFO between attempts (the peer's 'A' or next message ends the repeat); a finished board keeps answering (transport_idle())</a:t>
+                        <a:t>comment out the take_reply() call in transmit(), build suite 2 method 3 with DEBUG=1, run the pair: it stops in the first echo</a:t>
                       </a:r>
                     </a:p>
                   </a:txBody>
@@ -14613,7 +14422,7 @@
                   </a:tcPr>
                 </a:tc>
               </a:tr>
-              <a:tr h="757645">
+              <a:tr h="853440">
                 <a:tc>
                   <a:txBody>
                     <a:bodyPr wrap="square"/>
@@ -14626,7 +14435,7 @@
                           </a:solidFill>
                           <a:latin typeface="Times New Roman"/>
                         </a:rPr>
-                        <a:t>Check it</a:t>
+                        <a:t>Restore</a:t>
                       </a:r>
                     </a:p>
                   </a:txBody>
@@ -14648,7 +14457,7 @@
                           </a:solidFill>
                           <a:latin typeface="Times New Roman"/>
                         </a:rPr>
-                        <a:t>comment out the take_reply() call in transmit(), build suite 2 method 3 with DEBUG=1, run the pair: it stops in the first echo</a:t>
+                        <a:t>from fpga/sw/export: git checkout common/src/edhoc_rf_link.c, rebuild both images, rerun: PASS</a:t>
                       </a:r>
                     </a:p>
                   </a:txBody>
@@ -14659,7 +14468,7 @@
                   </a:tcPr>
                 </a:tc>
               </a:tr>
-              <a:tr h="757645">
+              <a:tr h="853440">
                 <a:tc>
                   <a:txBody>
                     <a:bodyPr wrap="square"/>
@@ -14672,7 +14481,7 @@
                           </a:solidFill>
                           <a:latin typeface="Times New Roman"/>
                         </a:rPr>
-                        <a:t>Restore</a:t>
+                        <a:t>Remember</a:t>
                       </a:r>
                     </a:p>
                   </a:txBody>
@@ -14694,59 +14503,13 @@
                           </a:solidFill>
                           <a:latin typeface="Times New Roman"/>
                         </a:rPr>
-                        <a:t>from fpga/sw/export: git checkout common/src/edhoc_rf_link.c, rebuild both images, rerun the same command: PASS. Compare the two logs at the point where the broken build stopped</a:t>
+                        <a:t>a link layer must keep listening while it waits</a:t>
                       </a:r>
                     </a:p>
                   </a:txBody>
                   <a:tcPr marL="54864" marR="54864" marT="27432" marB="27432">
                     <a:solidFill>
                       <a:srgbClr val="FFFFFF"/>
-                    </a:solidFill>
-                  </a:tcPr>
-                </a:tc>
-              </a:tr>
-              <a:tr h="757650">
-                <a:tc>
-                  <a:txBody>
-                    <a:bodyPr wrap="square"/>
-                    <a:lstStyle/>
-                    <a:p>
-                      <a:r>
-                        <a:rPr sz="1300" b="0">
-                          <a:solidFill>
-                            <a:srgbClr val="000000"/>
-                          </a:solidFill>
-                          <a:latin typeface="Times New Roman"/>
-                        </a:rPr>
-                        <a:t>Lesson</a:t>
-                      </a:r>
-                    </a:p>
-                  </a:txBody>
-                  <a:tcPr marL="54864" marR="54864" marT="27432" marB="27432">
-                    <a:solidFill>
-                      <a:srgbClr val="F2F8EE"/>
-                    </a:solidFill>
-                  </a:tcPr>
-                </a:tc>
-                <a:tc>
-                  <a:txBody>
-                    <a:bodyPr wrap="square"/>
-                    <a:lstStyle/>
-                    <a:p>
-                      <a:r>
-                        <a:rPr sz="1300" b="0">
-                          <a:solidFill>
-                            <a:srgbClr val="000000"/>
-                          </a:solidFill>
-                          <a:latin typeface="Times New Roman"/>
-                        </a:rPr>
-                        <a:t>a link layer must keep listening while it waits</a:t>
-                      </a:r>
-                    </a:p>
-                  </a:txBody>
-                  <a:tcPr marL="54864" marR="54864" marT="27432" marB="27432">
-                    <a:solidFill>
-                      <a:srgbClr val="F2F8EE"/>
                     </a:solidFill>
                   </a:tcPr>
                 </a:tc>
@@ -14841,7 +14604,7 @@
                 <a:latin typeface="Times New Roman" panose="02020603050405020304" pitchFamily="18" charset="0"/>
                 <a:cs typeface="Times New Roman" panose="02020603050405020304" pitchFamily="18" charset="0"/>
               </a:rPr>
-              <a:t>(8/8) What each fix changed</a:t>
+              <a:t>(8/8) Reading the RF: line</a:t>
             </a:r>
           </a:p>
         </p:txBody>
@@ -14904,17 +14667,104 @@
           </a:p>
         </p:txBody>
       </p:sp>
+      <p:sp>
+        <p:nvSpPr>
+          <p:cNvPr id="63" name="Rectangle 62"/>
+          <p:cNvSpPr/>
+          <p:nvPr/>
+        </p:nvSpPr>
+        <p:spPr>
+          <a:xfrm>
+            <a:off x="365760" y="868680"/>
+            <a:ext cx="11430000" cy="851916"/>
+          </a:xfrm>
+          <a:prstGeom prst="rect">
+            <a:avLst/>
+          </a:prstGeom>
+          <a:solidFill>
+            <a:srgbClr val="1E1E1E"/>
+          </a:solidFill>
+          <a:ln>
+            <a:solidFill>
+              <a:srgbClr val="C8C8C8"/>
+            </a:solidFill>
+          </a:ln>
+          <a:effectLst/>
+        </p:spPr>
+        <p:style>
+          <a:lnRef idx="1">
+            <a:schemeClr val="accent1"/>
+          </a:lnRef>
+          <a:fillRef idx="3">
+            <a:schemeClr val="accent1"/>
+          </a:fillRef>
+          <a:effectRef idx="2">
+            <a:schemeClr val="accent1"/>
+          </a:effectRef>
+          <a:fontRef idx="minor">
+            <a:schemeClr val="lt1"/>
+          </a:fontRef>
+        </p:style>
+        <p:txBody>
+          <a:bodyPr rtlCol="0" anchor="t" wrap="none" lIns="73152" rIns="73152" tIns="73152" bIns="73152"/>
+          <a:lstStyle/>
+          <a:p>
+            <a:pPr algn="l"/>
+            <a:r>
+              <a:rPr sz="1400" b="1">
+                <a:solidFill>
+                  <a:srgbClr val="AAAAAA"/>
+                </a:solidFill>
+                <a:latin typeface="Consolas"/>
+              </a:rPr>
+              <a:t>Example output — end of a radio run, after APP DATA OK</a:t>
+            </a:r>
+          </a:p>
+          <a:p>
+            <a:pPr algn="l">
+              <a:lnSpc>
+                <a:spcPct val="100000"/>
+              </a:lnSpc>
+            </a:pPr>
+            <a:r>
+              <a:rPr sz="1400">
+                <a:solidFill>
+                  <a:srgbClr val="E6E6E6"/>
+                </a:solidFill>
+                <a:latin typeface="Consolas"/>
+              </a:rPr>
+              <a:t>RF: frames=6 repeats=0 crc_err=0 reinits=0      &lt;- initiator, suite 2 method 3</a:t>
+            </a:r>
+          </a:p>
+          <a:p>
+            <a:pPr algn="l">
+              <a:lnSpc>
+                <a:spcPct val="100000"/>
+              </a:lnSpc>
+            </a:pPr>
+            <a:r>
+              <a:rPr sz="1400">
+                <a:solidFill>
+                  <a:srgbClr val="E6E6E6"/>
+                </a:solidFill>
+                <a:latin typeface="Consolas"/>
+              </a:rPr>
+              <a:t>RF: frames=5 repeats=0 crc_err=0 reinits=0      &lt;- responder</a:t>
+            </a:r>
+          </a:p>
+        </p:txBody>
+      </p:sp>
       <p:graphicFrame>
         <p:nvGraphicFramePr>
-          <p:cNvPr id="63" name="Table 62"/>
+          <p:cNvPr id="64" name="Table 63"/>
           <p:cNvGraphicFramePr>
             <a:graphicFrameLocks noGrp="1"/>
           </p:cNvGraphicFramePr>
           <p:nvPr/>
         </p:nvGraphicFramePr>
         <p:xfrm>
-          <a:off x="365760" y="868680"/>
-          <a:ext cx="11430000" cy="2560320"/>
+          <a:off x="365760" y="2103120"/>
+          <a:ext cx="11430000" cy="2651760"/>
         </p:xfrm>
         <a:graphic>
           <a:graphicData uri="http://schemas.openxmlformats.org/drawingml/2006/table">
@@ -14923,23 +14773,25 @@
                 <a:tableStyleId>{5C22544A-7EE6-4342-B048-85BDC9FD1C3A}</a:tableStyleId>
               </a:tblPr>
               <a:tblGrid>
-                <a:gridCol w="4754880"/>
-                <a:gridCol w="6675120"/>
+                <a:gridCol w="1463040"/>
+                <a:gridCol w="4023360"/>
+                <a:gridCol w="3108960"/>
+                <a:gridCol w="2834640"/>
               </a:tblGrid>
-              <a:tr h="512064">
+              <a:tr h="530352">
                 <a:tc>
                   <a:txBody>
                     <a:bodyPr wrap="square"/>
                     <a:lstStyle/>
                     <a:p>
                       <a:r>
-                        <a:rPr sz="1700" b="1">
+                        <a:rPr sz="1500" b="1">
                           <a:solidFill>
                             <a:srgbClr val="000000"/>
                           </a:solidFill>
                           <a:latin typeface="Times New Roman"/>
                         </a:rPr>
-                        <a:t>Link version</a:t>
+                        <a:t>Field</a:t>
                       </a:r>
                     </a:p>
                   </a:txBody>
@@ -14955,13 +14807,57 @@
                     <a:lstStyle/>
                     <a:p>
                       <a:r>
-                        <a:rPr sz="1700" b="1">
+                        <a:rPr sz="1500" b="1">
                           <a:solidFill>
                             <a:srgbClr val="000000"/>
                           </a:solidFill>
                           <a:latin typeface="Times New Roman"/>
                         </a:rPr>
-                        <a:t>1 MiB radio stream (TBD3)</a:t>
+                        <a:t>Counts</a:t>
+                      </a:r>
+                    </a:p>
+                  </a:txBody>
+                  <a:tcPr marL="54864" marR="54864" marT="27432" marB="27432">
+                    <a:solidFill>
+                      <a:srgbClr val="C5E0B4"/>
+                    </a:solidFill>
+                  </a:tcPr>
+                </a:tc>
+                <a:tc>
+                  <a:txBody>
+                    <a:bodyPr wrap="square"/>
+                    <a:lstStyle/>
+                    <a:p>
+                      <a:r>
+                        <a:rPr sz="1500" b="1">
+                          <a:solidFill>
+                            <a:srgbClr val="000000"/>
+                          </a:solidFill>
+                          <a:latin typeface="Times New Roman"/>
+                        </a:rPr>
+                        <a:t>Normal</a:t>
+                      </a:r>
+                    </a:p>
+                  </a:txBody>
+                  <a:tcPr marL="54864" marR="54864" marT="27432" marB="27432">
+                    <a:solidFill>
+                      <a:srgbClr val="C5E0B4"/>
+                    </a:solidFill>
+                  </a:tcPr>
+                </a:tc>
+                <a:tc>
+                  <a:txBody>
+                    <a:bodyPr wrap="square"/>
+                    <a:lstStyle/>
+                    <a:p>
+                      <a:r>
+                        <a:rPr sz="1500" b="1">
+                          <a:solidFill>
+                            <a:srgbClr val="000000"/>
+                          </a:solidFill>
+                          <a:latin typeface="Times New Roman"/>
+                        </a:rPr>
+                        <a:t>Worth a look</a:t>
                       </a:r>
                     </a:p>
                   </a:txBody>
@@ -14972,20 +14868,20 @@
                   </a:tcPr>
                 </a:tc>
               </a:tr>
-              <a:tr h="512064">
+              <a:tr h="530352">
                 <a:tc>
                   <a:txBody>
                     <a:bodyPr wrap="square"/>
                     <a:lstStyle/>
                     <a:p>
                       <a:r>
-                        <a:rPr sz="1700" b="0">
+                        <a:rPr sz="1500" b="0">
                           <a:solidFill>
                             <a:srgbClr val="000000"/>
                           </a:solidFill>
                           <a:latin typeface="Times New Roman"/>
                         </a:rPr>
-                        <a:t>no CRC, no watchdog</a:t>
+                        <a:t>frames</a:t>
                       </a:r>
                     </a:p>
                   </a:txBody>
@@ -15001,13 +14897,57 @@
                     <a:lstStyle/>
                     <a:p>
                       <a:r>
-                        <a:rPr sz="1700" b="0">
+                        <a:rPr sz="1500" b="0">
                           <a:solidFill>
                             <a:srgbClr val="000000"/>
                           </a:solidFill>
                           <a:latin typeface="Times New Roman"/>
                         </a:rPr>
-                        <a:t>AEAD error after ~80 s (Problem 1)</a:t>
+                        <a:t>data fragments sent, repeats included</a:t>
+                      </a:r>
+                    </a:p>
+                  </a:txBody>
+                  <a:tcPr marL="54864" marR="54864" marT="27432" marB="27432">
+                    <a:solidFill>
+                      <a:srgbClr val="FFFFFF"/>
+                    </a:solidFill>
+                  </a:tcPr>
+                </a:tc>
+                <a:tc>
+                  <a:txBody>
+                    <a:bodyPr wrap="square"/>
+                    <a:lstStyle/>
+                    <a:p>
+                      <a:r>
+                        <a:rPr sz="1500" b="0">
+                          <a:solidFill>
+                            <a:srgbClr val="000000"/>
+                          </a:solidFill>
+                          <a:latin typeface="Times New Roman"/>
+                        </a:rPr>
+                        <a:t>handshake: tens; 1 MiB: ≈ 10,000</a:t>
+                      </a:r>
+                    </a:p>
+                  </a:txBody>
+                  <a:tcPr marL="54864" marR="54864" marT="27432" marB="27432">
+                    <a:solidFill>
+                      <a:srgbClr val="FFFFFF"/>
+                    </a:solidFill>
+                  </a:tcPr>
+                </a:tc>
+                <a:tc>
+                  <a:txBody>
+                    <a:bodyPr wrap="square"/>
+                    <a:lstStyle/>
+                    <a:p>
+                      <a:r>
+                        <a:rPr sz="1500" b="0">
+                          <a:solidFill>
+                            <a:srgbClr val="000000"/>
+                          </a:solidFill>
+                          <a:latin typeface="Times New Roman"/>
+                        </a:rPr>
+                        <a:t>—</a:t>
                       </a:r>
                     </a:p>
                   </a:txBody>
@@ -15018,20 +14958,20 @@
                   </a:tcPr>
                 </a:tc>
               </a:tr>
-              <a:tr h="512064">
+              <a:tr h="530352">
                 <a:tc>
                   <a:txBody>
                     <a:bodyPr wrap="square"/>
                     <a:lstStyle/>
                     <a:p>
                       <a:r>
-                        <a:rPr sz="1700" b="0">
+                        <a:rPr sz="1500" b="0">
                           <a:solidFill>
                             <a:srgbClr val="000000"/>
                           </a:solidFill>
                           <a:latin typeface="Times New Roman"/>
                         </a:rPr>
-                        <a:t>+ CRC per frame</a:t>
+                        <a:t>repeats</a:t>
                       </a:r>
                     </a:p>
                   </a:txBody>
@@ -15047,13 +14987,57 @@
                     <a:lstStyle/>
                     <a:p>
                       <a:r>
-                        <a:rPr sz="1700" b="0">
+                        <a:rPr sz="1500" b="0">
                           <a:solidFill>
                             <a:srgbClr val="000000"/>
                           </a:solidFill>
                           <a:latin typeface="Times New Roman"/>
                         </a:rPr>
-                        <a:t>stalls after ~420 KB: deaf radio (Problem 2)</a:t>
+                        <a:t>fragments sent again (no 'A' in 30 ms)</a:t>
+                      </a:r>
+                    </a:p>
+                  </a:txBody>
+                  <a:tcPr marL="54864" marR="54864" marT="27432" marB="27432">
+                    <a:solidFill>
+                      <a:srgbClr val="F2F8EE"/>
+                    </a:solidFill>
+                  </a:tcPr>
+                </a:tc>
+                <a:tc>
+                  <a:txBody>
+                    <a:bodyPr wrap="square"/>
+                    <a:lstStyle/>
+                    <a:p>
+                      <a:r>
+                        <a:rPr sz="1500" b="0">
+                          <a:solidFill>
+                            <a:srgbClr val="000000"/>
+                          </a:solidFill>
+                          <a:latin typeface="Times New Roman"/>
+                        </a:rPr>
+                        <a:t>0 … a few %</a:t>
+                      </a:r>
+                    </a:p>
+                  </a:txBody>
+                  <a:tcPr marL="54864" marR="54864" marT="27432" marB="27432">
+                    <a:solidFill>
+                      <a:srgbClr val="F2F8EE"/>
+                    </a:solidFill>
+                  </a:tcPr>
+                </a:tc>
+                <a:tc>
+                  <a:txBody>
+                    <a:bodyPr wrap="square"/>
+                    <a:lstStyle/>
+                    <a:p>
+                      <a:r>
+                        <a:rPr sz="1500" b="0">
+                          <a:solidFill>
+                            <a:srgbClr val="000000"/>
+                          </a:solidFill>
+                          <a:latin typeface="Times New Roman"/>
+                        </a:rPr>
+                        <a:t>a large share: interference, distance</a:t>
                       </a:r>
                     </a:p>
                   </a:txBody>
@@ -15064,20 +15048,20 @@
                   </a:tcPr>
                 </a:tc>
               </a:tr>
-              <a:tr h="512064">
+              <a:tr h="530352">
                 <a:tc>
                   <a:txBody>
                     <a:bodyPr wrap="square"/>
                     <a:lstStyle/>
                     <a:p>
                       <a:r>
-                        <a:rPr sz="1700" b="0">
+                        <a:rPr sz="1500" b="0">
                           <a:solidFill>
                             <a:srgbClr val="000000"/>
                           </a:solidFill>
                           <a:latin typeface="Times New Roman"/>
                         </a:rPr>
-                        <a:t>+ 2 s watchdog</a:t>
+                        <a:t>crc_err</a:t>
                       </a:r>
                     </a:p>
                   </a:txBody>
@@ -15093,13 +15077,57 @@
                     <a:lstStyle/>
                     <a:p>
                       <a:r>
-                        <a:rPr sz="1700" b="0">
+                        <a:rPr sz="1500" b="0">
                           <a:solidFill>
                             <a:srgbClr val="000000"/>
                           </a:solidFill>
                           <a:latin typeface="Times New Roman"/>
                         </a:rPr>
-                        <a:t>completes (~135 s, 0 bad bytes) — hangs if both ends repeat</a:t>
+                        <a:t>received frames dropped by the CRC-16</a:t>
+                      </a:r>
+                    </a:p>
+                  </a:txBody>
+                  <a:tcPr marL="54864" marR="54864" marT="27432" marB="27432">
+                    <a:solidFill>
+                      <a:srgbClr val="FFFFFF"/>
+                    </a:solidFill>
+                  </a:tcPr>
+                </a:tc>
+                <a:tc>
+                  <a:txBody>
+                    <a:bodyPr wrap="square"/>
+                    <a:lstStyle/>
+                    <a:p>
+                      <a:r>
+                        <a:rPr sz="1500" b="0">
+                          <a:solidFill>
+                            <a:srgbClr val="000000"/>
+                          </a:solidFill>
+                          <a:latin typeface="Times New Roman"/>
+                        </a:rPr>
+                        <a:t>0 or a few</a:t>
+                      </a:r>
+                    </a:p>
+                  </a:txBody>
+                  <a:tcPr marL="54864" marR="54864" marT="27432" marB="27432">
+                    <a:solidFill>
+                      <a:srgbClr val="FFFFFF"/>
+                    </a:solidFill>
+                  </a:tcPr>
+                </a:tc>
+                <a:tc>
+                  <a:txBody>
+                    <a:bodyPr wrap="square"/>
+                    <a:lstStyle/>
+                    <a:p>
+                      <a:r>
+                        <a:rPr sz="1500" b="0">
+                          <a:solidFill>
+                            <a:srgbClr val="000000"/>
+                          </a:solidFill>
+                          <a:latin typeface="Times New Roman"/>
+                        </a:rPr>
+                        <a:t>many: check the JC wiring</a:t>
                       </a:r>
                     </a:p>
                   </a:txBody>
@@ -15110,20 +15138,20 @@
                   </a:tcPr>
                 </a:tc>
               </a:tr>
-              <a:tr h="512064">
+              <a:tr h="530352">
                 <a:tc>
                   <a:txBody>
                     <a:bodyPr wrap="square"/>
                     <a:lstStyle/>
                     <a:p>
                       <a:r>
-                        <a:rPr sz="1700" b="0">
+                        <a:rPr sz="1500" b="0">
                           <a:solidFill>
                             <a:srgbClr val="000000"/>
                           </a:solidFill>
                           <a:latin typeface="Times New Roman"/>
                         </a:rPr>
-                        <a:t>+ FIFO read while repeating</a:t>
+                        <a:t>reinits</a:t>
                       </a:r>
                     </a:p>
                   </a:txBody>
@@ -15139,13 +15167,57 @@
                     <a:lstStyle/>
                     <a:p>
                       <a:r>
-                        <a:rPr sz="1700" b="0">
+                        <a:rPr sz="1500" b="0">
                           <a:solidFill>
                             <a:srgbClr val="000000"/>
                           </a:solidFill>
                           <a:latin typeface="Times New Roman"/>
                         </a:rPr>
-                        <a:t>completes (~99 s), also with a slow peer (Problem 3)</a:t>
+                        <a:t>radio re-initialisations (2 s without progress)</a:t>
+                      </a:r>
+                    </a:p>
+                  </a:txBody>
+                  <a:tcPr marL="54864" marR="54864" marT="27432" marB="27432">
+                    <a:solidFill>
+                      <a:srgbClr val="F2F8EE"/>
+                    </a:solidFill>
+                  </a:tcPr>
+                </a:tc>
+                <a:tc>
+                  <a:txBody>
+                    <a:bodyPr wrap="square"/>
+                    <a:lstStyle/>
+                    <a:p>
+                      <a:r>
+                        <a:rPr sz="1500" b="0">
+                          <a:solidFill>
+                            <a:srgbClr val="000000"/>
+                          </a:solidFill>
+                          <a:latin typeface="Times New Roman"/>
+                        </a:rPr>
+                        <a:t>a few on the side that waited first</a:t>
+                      </a:r>
+                    </a:p>
+                  </a:txBody>
+                  <a:tcPr marL="54864" marR="54864" marT="27432" marB="27432">
+                    <a:solidFill>
+                      <a:srgbClr val="F2F8EE"/>
+                    </a:solidFill>
+                  </a:tcPr>
+                </a:tc>
+                <a:tc>
+                  <a:txBody>
+                    <a:bodyPr wrap="square"/>
+                    <a:lstStyle/>
+                    <a:p>
+                      <a:r>
+                        <a:rPr sz="1500" b="0">
+                          <a:solidFill>
+                            <a:srgbClr val="000000"/>
+                          </a:solidFill>
+                          <a:latin typeface="Times New Roman"/>
+                        </a:rPr>
+                        <a:t>during a transfer: (6/8)</a:t>
                       </a:r>
                     </a:p>
                   </a:txBody>
@@ -15162,14 +15234,14 @@
       </p:graphicFrame>
       <p:sp>
         <p:nvSpPr>
-          <p:cNvPr id="64" name="TextBox 63"/>
+          <p:cNvPr id="65" name="TextBox 64"/>
           <p:cNvSpPr txBox="1"/>
           <p:nvPr/>
         </p:nvSpPr>
         <p:spPr>
           <a:xfrm>
-            <a:off x="365760" y="3657600"/>
-            <a:ext cx="11430000" cy="2377440"/>
+            <a:off x="365760" y="5029200"/>
+            <a:ext cx="11430000" cy="731520"/>
           </a:xfrm>
           <a:prstGeom prst="rect">
             <a:avLst/>
@@ -15182,55 +15254,19 @@
           </a:bodyPr>
           <a:lstStyle/>
           <a:p>
-            <a:pPr marL="256032" indent="-219456">
+            <a:pPr>
               <a:spcAft>
                 <a:spcPts val="400"/>
               </a:spcAft>
-              <a:buChar char="•"/>
-            </a:pPr>
-            <a:r>
-              <a:rPr sz="1800" b="0">
-                <a:solidFill>
-                  <a:srgbClr val="000000"/>
+            </a:pPr>
+            <a:r>
+              <a:rPr sz="1600" b="0">
+                <a:solidFill>
+                  <a:srgbClr val="808080"/>
                 </a:solidFill>
                 <a:latin typeface="Times New Roman"/>
               </a:rPr>
-              <a:t>The same link carries the handshakes of Lessons 3 and 4, so every pair uses these fixes.</a:t>
-            </a:r>
-          </a:p>
-          <a:p>
-            <a:pPr marL="256032" indent="-219456">
-              <a:spcAft>
-                <a:spcPts val="400"/>
-              </a:spcAft>
-              <a:buChar char="•"/>
-            </a:pPr>
-            <a:r>
-              <a:rPr sz="1800" b="0">
-                <a:solidFill>
-                  <a:srgbClr val="000000"/>
-                </a:solidFill>
-                <a:latin typeface="Times New Roman"/>
-              </a:rPr>
-              <a:t>Lesson: on real wires, </a:t>
-            </a:r>
-            <a:r>
-              <a:rPr sz="1800" b="1">
-                <a:solidFill>
-                  <a:srgbClr val="000000"/>
-                </a:solidFill>
-                <a:latin typeface="Times New Roman"/>
-              </a:rPr>
-              <a:t>check data end to end and recover from stuck hardware</a:t>
-            </a:r>
-            <a:r>
-              <a:rPr sz="1800" b="0">
-                <a:solidFill>
-                  <a:srgbClr val="000000"/>
-                </a:solidFill>
-                <a:latin typeface="Times New Roman"/>
-              </a:rPr>
-              <a:t> — do not trust the link layer of the chip alone.</a:t>
+              <a:t>The same link carries the handshakes of Lessons 3 and 4, so every pair prints this line.</a:t>
             </a:r>
           </a:p>
         </p:txBody>
@@ -15608,7 +15644,7 @@
                 <a:ea typeface="DejaVu Sans"/>
                 <a:cs typeface="Times New Roman" panose="02020603050405020304" pitchFamily="18" charset="0"/>
               </a:rPr>
-              <a:t>Making It Faster</a:t>
+              <a:t>Speed: Measure and Choose a Link</a:t>
             </a:r>
             <a:endParaRPr lang="en-US" sz="4000" b="0" strike="noStrike" spc="-1" dirty="0">
               <a:solidFill>
@@ -15636,7 +15672,7 @@
                 <a:ea typeface="DejaVu Sans"/>
                 <a:cs typeface="Times New Roman" panose="02020603050405020304" pitchFamily="18" charset="0"/>
               </a:rPr>
-              <a:t>Questions Behind the Project</a:t>
+              <a:t>Choose and Reproduce</a:t>
             </a:r>
             <a:endParaRPr lang="en-US" sz="4000" b="0" strike="noStrike" spc="-1" dirty="0">
               <a:solidFill>
@@ -18876,18 +18912,18 @@
               </a:buClr>
             </a:pPr>
             <a:r>
-              <a:rPr lang="en-US" sz="2700" b="1" spc="-1" dirty="0">
+              <a:rPr lang="en-US" sz="2600" b="1" spc="-1" dirty="0">
                 <a:latin typeface="Times New Roman" panose="02020603050405020304" pitchFamily="18" charset="0"/>
                 <a:cs typeface="Times New Roman" panose="02020603050405020304" pitchFamily="18" charset="0"/>
               </a:rPr>
               <a:t>3. SD Card &amp; FAT32 </a:t>
             </a:r>
             <a:r>
-              <a:rPr lang="en-US" sz="2700" spc="-1" dirty="0">
+              <a:rPr lang="en-US" sz="2600" spc="-1" dirty="0">
                 <a:latin typeface="Times New Roman" panose="02020603050405020304" pitchFamily="18" charset="0"/>
                 <a:cs typeface="Times New Roman" panose="02020603050405020304" pitchFamily="18" charset="0"/>
               </a:rPr>
-              <a:t>(5/9) The SD driver and two power-up / busy bugs</a:t>
+              <a:t>(5/9) The SD driver: commands and two timing details</a:t>
             </a:r>
           </a:p>
         </p:txBody>
@@ -19062,7 +19098,7 @@
                           </a:solidFill>
                           <a:latin typeface="Times New Roman"/>
                         </a:rPr>
-                        <a:t>retried</a:t>
+                        <a:t>up to 10 times</a:t>
                       </a:r>
                     </a:p>
                   </a:txBody>
@@ -19244,22 +19280,22 @@
               <a:buChar char="•"/>
             </a:pPr>
             <a:r>
-              <a:rPr sz="1500" b="1">
+              <a:rPr sz="1600" b="1">
                 <a:solidFill>
                   <a:srgbClr val="000000"/>
                 </a:solidFill>
                 <a:latin typeface="Times New Roman"/>
               </a:rPr>
-              <a:t>Bug 1:</a:t>
-            </a:r>
-            <a:r>
-              <a:rPr sz="1500" b="0">
+              <a:t>CMD0 is retried:</a:t>
+            </a:r>
+            <a:r>
+              <a:rPr sz="1600" b="0">
                 <a:solidFill>
                   <a:srgbClr val="000000"/>
                 </a:solidFill>
                 <a:latin typeface="Times New Roman"/>
               </a:rPr>
-              <a:t> after power-up the card answers the first CMD0 with one junk byte (Lesson 2) → retry CMD0.</a:t>
+              <a:t> right after the card powers up, its first answer can be one junk byte (Lesson 2, “If spi_test shows R1 = 3f”).</a:t>
             </a:r>
           </a:p>
           <a:p>
@@ -19270,25 +19306,25 @@
               <a:buChar char="•"/>
             </a:pPr>
             <a:r>
-              <a:rPr sz="1500" b="1">
+              <a:rPr sz="1600" b="1">
                 <a:solidFill>
                   <a:srgbClr val="000000"/>
                 </a:solidFill>
                 <a:latin typeface="Times New Roman"/>
               </a:rPr>
-              <a:t>Bug 2:</a:t>
-            </a:r>
-            <a:r>
-              <a:rPr sz="1500" b="0">
+              <a:t>Busy ends in the middle of a byte:</a:t>
+            </a:r>
+            <a:r>
+              <a:rPr sz="1600" b="0">
                 <a:solidFill>
                   <a:srgbClr val="000000"/>
                 </a:solidFill>
                 <a:latin typeface="Times New Roman"/>
               </a:rPr>
-              <a:t> after a write the card holds the data line low while busy. The code waited only while it read exactly 0x00; the line is released in the middle of a byte (e.g. 0x0f), so the next command was sent too early and failed. Fix: wait until it reads </a:t>
-            </a:r>
-            <a:r>
-              <a:rPr sz="1500" b="1">
+              <a:t> after a write the card holds the data line low; the line can be released mid-byte (e.g. 0x0f), so the driver waits until a byte reads </a:t>
+            </a:r>
+            <a:r>
+              <a:rPr sz="1600" b="1">
                 <a:solidFill>
                   <a:srgbClr val="000000"/>
                 </a:solidFill>
@@ -19297,13 +19333,13 @@
               <a:t>0xFF</a:t>
             </a:r>
             <a:r>
-              <a:rPr sz="1500" b="0">
+              <a:rPr sz="1600" b="0">
                 <a:solidFill>
                   <a:srgbClr val="000000"/>
                 </a:solidFill>
                 <a:latin typeface="Times New Roman"/>
               </a:rPr>
-              <a:t>.</a:t>
+              <a:t>, not just until it stops reading 0x00.</a:t>
             </a:r>
           </a:p>
           <a:p>
@@ -19314,16 +19350,16 @@
               <a:buChar char="•"/>
             </a:pPr>
             <a:r>
-              <a:rPr sz="1500" b="0">
+              <a:rPr sz="1600" b="0">
                 <a:solidFill>
                   <a:srgbClr val="000000"/>
                 </a:solidFill>
                 <a:latin typeface="Times New Roman"/>
               </a:rPr>
-              <a:t>Check bug 1: let CMD0 run once (</a:t>
-            </a:r>
-            <a:r>
-              <a:rPr sz="1300" b="0">
+              <a:t>See the first one yourself: let CMD0 run once (</a:t>
+            </a:r>
+            <a:r>
+              <a:rPr sz="1400" b="0">
                 <a:solidFill>
                   <a:srgbClr val="8B1A1A"/>
                 </a:solidFill>
@@ -19332,7 +19368,7 @@
               <a:t>t &lt; 1</a:t>
             </a:r>
             <a:r>
-              <a:rPr sz="1500" b="0">
+              <a:rPr sz="1600" b="0">
                 <a:solidFill>
                   <a:srgbClr val="000000"/>
                 </a:solidFill>
@@ -19341,7 +19377,7 @@
               <a:t> in </a:t>
             </a:r>
             <a:r>
-              <a:rPr sz="1500" b="0" i="1">
+              <a:rPr sz="1600" b="0" i="1">
                 <a:solidFill>
                   <a:srgbClr val="000000"/>
                 </a:solidFill>
@@ -19350,16 +19386,16 @@
               <a:t>tests/src/periph_spi.c</a:t>
             </a:r>
             <a:r>
-              <a:rPr sz="1500" b="0">
+              <a:rPr sz="1600" b="0">
                 <a:solidFill>
                   <a:srgbClr val="000000"/>
                 </a:solidFill>
                 <a:latin typeface="Times New Roman"/>
               </a:rPr>
-              <a:t>), pull the card out and in, run spi_test → R1 = 3f FAIL; restore with </a:t>
-            </a:r>
-            <a:r>
-              <a:rPr sz="1300" b="0">
+              <a:t>), pull the card out and in, run spi_test → R1 = 3f FAIL. Restore with </a:t>
+            </a:r>
+            <a:r>
+              <a:rPr sz="1400" b="0">
                 <a:solidFill>
                   <a:srgbClr val="8B1A1A"/>
                 </a:solidFill>
@@ -19368,30 +19404,13 @@
               <a:t>git checkout</a:t>
             </a:r>
             <a:r>
-              <a:rPr sz="1500" b="0">
+              <a:rPr sz="1600" b="0">
                 <a:solidFill>
                   <a:srgbClr val="000000"/>
                 </a:solidFill>
                 <a:latin typeface="Times New Roman"/>
               </a:rPr>
-              <a:t>. Bug 2: every written sector must read back (sd_prep verify, section 4).</a:t>
-            </a:r>
-          </a:p>
-          <a:p>
-            <a:pPr marL="256032" indent="-219456">
-              <a:spcAft>
-                <a:spcPts val="400"/>
-              </a:spcAft>
-              <a:buChar char="•"/>
-            </a:pPr>
-            <a:r>
-              <a:rPr sz="1500" b="0">
-                <a:solidFill>
-                  <a:srgbClr val="000000"/>
-                </a:solidFill>
-                <a:latin typeface="Times New Roman"/>
-              </a:rPr>
-              <a:t>A third bug, a late write reply, has its own slide next.</a:t>
+              <a:t>.</a:t>
             </a:r>
           </a:p>
         </p:txBody>
@@ -19471,18 +19490,18 @@
               </a:buClr>
             </a:pPr>
             <a:r>
-              <a:rPr lang="en-US" sz="3100" b="1" spc="-1" dirty="0">
+              <a:rPr lang="en-US" sz="3000" b="1" spc="-1" dirty="0">
                 <a:latin typeface="Times New Roman" panose="02020603050405020304" pitchFamily="18" charset="0"/>
                 <a:cs typeface="Times New Roman" panose="02020603050405020304" pitchFamily="18" charset="0"/>
               </a:rPr>
               <a:t>3. SD Card &amp; FAT32 </a:t>
             </a:r>
             <a:r>
-              <a:rPr lang="en-US" sz="3100" spc="-1" dirty="0">
+              <a:rPr lang="en-US" sz="3000" spc="-1" dirty="0">
                 <a:latin typeface="Times New Roman" panose="02020603050405020304" pitchFamily="18" charset="0"/>
                 <a:cs typeface="Times New Roman" panose="02020603050405020304" pitchFamily="18" charset="0"/>
               </a:rPr>
-              <a:t>(6/9) Bug 3: a write reply one byte late</a:t>
+              <a:t>(6/9) If an SD write is reported as failed</a:t>
             </a:r>
           </a:p>
         </p:txBody>
@@ -19555,7 +19574,7 @@
         </p:nvGraphicFramePr>
         <p:xfrm>
           <a:off x="365760" y="868680"/>
-          <a:ext cx="11430000" cy="5303520"/>
+          <a:ext cx="11430000" cy="5120640"/>
         </p:xfrm>
         <a:graphic>
           <a:graphicData uri="http://schemas.openxmlformats.org/drawingml/2006/table">
@@ -19564,10 +19583,10 @@
                 <a:tableStyleId>{5C22544A-7EE6-4342-B048-85BDC9FD1C3A}</a:tableStyleId>
               </a:tblPr>
               <a:tblGrid>
-                <a:gridCol w="1737360"/>
-                <a:gridCol w="9692640"/>
+                <a:gridCol w="1920240"/>
+                <a:gridCol w="9509760"/>
               </a:tblGrid>
-              <a:tr h="883920">
+              <a:tr h="853440">
                 <a:tc>
                   <a:txBody>
                     <a:bodyPr wrap="square"/>
@@ -19580,7 +19599,7 @@
                           </a:solidFill>
                           <a:latin typeface="Times New Roman"/>
                         </a:rPr>
-                        <a:t>Symptom</a:t>
+                        <a:t>You see</a:t>
                       </a:r>
                     </a:p>
                   </a:txBody>
@@ -19602,7 +19621,7 @@
                           </a:solidFill>
                           <a:latin typeface="Times New Roman"/>
                         </a:rPr>
-                        <a:t>now and then a 1 MiB transfer ended “XFER: SD write failed at 618”: the transfer CRC was fine, but RECV.BIN was not stored</a:t>
+                        <a:t>SD: write &lt;sector&gt;: &lt;reason&gt; lines on board B, maybe “XFER: SD write failed” and “not stored”</a:t>
                       </a:r>
                     </a:p>
                   </a:txBody>
@@ -19613,7 +19632,7 @@
                   </a:tcPr>
                 </a:tc>
               </a:tr>
-              <a:tr h="883920">
+              <a:tr h="853440">
                 <a:tc>
                   <a:txBody>
                     <a:bodyPr wrap="square"/>
@@ -19626,7 +19645,7 @@
                           </a:solidFill>
                           <a:latin typeface="Times New Roman"/>
                         </a:rPr>
-                        <a:t>Observation</a:t>
+                        <a:t>Reasons</a:t>
                       </a:r>
                     </a:p>
                   </a:txBody>
@@ -19648,25 +19667,7 @@
                           </a:solidFill>
                           <a:latin typeface="Times New Roman"/>
                         </a:rPr>
-                        <a:t>with logging added: </a:t>
-                      </a:r>
-                      <a:r>
-                        <a:rPr sz="1200" b="0">
-                          <a:solidFill>
-                            <a:srgbClr val="8B1A1A"/>
-                          </a:solidFill>
-                          <a:latin typeface="Consolas"/>
-                        </a:rPr>
-                        <a:t>SD: write 84310: data response 1f</a:t>
-                      </a:r>
-                      <a:r>
-                        <a:rPr sz="1400" b="0">
-                          <a:solidFill>
-                            <a:srgbClr val="000000"/>
-                          </a:solidFill>
-                          <a:latin typeface="Times New Roman"/>
-                        </a:rPr>
-                        <a:t> three times — the byte read where the card's reply belongs was FF</a:t>
+                        <a:t>data response 0b = the card saw a CRC error (bits flipped on the wires); 0d = the card could not write; busy timeout = the card never finished</a:t>
                       </a:r>
                     </a:p>
                   </a:txBody>
@@ -19677,7 +19678,7 @@
                   </a:tcPr>
                 </a:tc>
               </a:tr>
-              <a:tr h="883920">
+              <a:tr h="853440">
                 <a:tc>
                   <a:txBody>
                     <a:bodyPr wrap="square"/>
@@ -19690,7 +19691,7 @@
                           </a:solidFill>
                           <a:latin typeface="Times New Roman"/>
                         </a:rPr>
-                        <a:t>Cause</a:t>
+                        <a:t>The code</a:t>
                       </a:r>
                     </a:p>
                   </a:txBody>
@@ -19712,7 +19713,7 @@
                           </a:solidFill>
                           <a:latin typeface="Times New Roman"/>
                         </a:rPr>
-                        <a:t>the card sent its data response (xxx0 0101 = accepted) one byte later than the driver read it. A traced build showed 8 bits late in 2 of 4 runs, on time in the others — so the write had worked and was misreported</a:t>
+                        <a:t>retries each sector up to 3 times. It also reads the card's reply (data response, 05 = accepted) from 4 bytes, because some cards send it a byte late — read one byte too early, a good write looks failed</a:t>
                       </a:r>
                     </a:p>
                   </a:txBody>
@@ -19723,7 +19724,7 @@
                   </a:tcPr>
                 </a:tc>
               </a:tr>
-              <a:tr h="883920">
+              <a:tr h="853440">
                 <a:tc>
                   <a:txBody>
                     <a:bodyPr wrap="square"/>
@@ -19736,7 +19737,7 @@
                           </a:solidFill>
                           <a:latin typeface="Times New Roman"/>
                         </a:rPr>
-                        <a:t>Fix</a:t>
+                        <a:t>Check</a:t>
                       </a:r>
                     </a:p>
                   </a:txBody>
@@ -19758,7 +19759,7 @@
                           </a:solidFill>
                           <a:latin typeface="Times New Roman"/>
                         </a:rPr>
-                        <a:t>data_response() in sd_card.c reads 4 bytes and takes the 5 bits starting at the first 0 bit (as Linux mmc_spi does); each rejected sector is retried up to 3 times and logged</a:t>
+                        <a:t>a few 1 MiB transfers: no SD: lines, XFER RECV … OK, and the read-back with the right length passes (section 4)</a:t>
                       </a:r>
                     </a:p>
                   </a:txBody>
@@ -19769,7 +19770,7 @@
                   </a:tcPr>
                 </a:tc>
               </a:tr>
-              <a:tr h="883920">
+              <a:tr h="853440">
                 <a:tc>
                   <a:txBody>
                     <a:bodyPr wrap="square"/>
@@ -19782,7 +19783,7 @@
                           </a:solidFill>
                           <a:latin typeface="Times New Roman"/>
                         </a:rPr>
-                        <a:t>Check it</a:t>
+                        <a:t>If it stays</a:t>
                       </a:r>
                     </a:p>
                   </a:txBody>
@@ -19804,25 +19805,7 @@
                           </a:solidFill>
                           <a:latin typeface="Times New Roman"/>
                         </a:rPr>
-                        <a:t>several 1 MiB transfers: no </a:t>
-                      </a:r>
-                      <a:r>
-                        <a:rPr sz="1200" b="0">
-                          <a:solidFill>
-                            <a:srgbClr val="8B1A1A"/>
-                          </a:solidFill>
-                          <a:latin typeface="Consolas"/>
-                        </a:rPr>
-                        <a:t>SD:</a:t>
-                      </a:r>
-                      <a:r>
-                        <a:rPr sz="1400" b="0">
-                          <a:solidFill>
-                            <a:srgbClr val="000000"/>
-                          </a:solidFill>
-                          <a:latin typeface="Times New Roman"/>
-                        </a:rPr>
-                        <a:t> lines, XFER RECV … OK, and the read-back with the right length passes (section 4)</a:t>
+                        <a:t>reseat the card, try another card, reformat it (sd_prep -DSD_PREP_FORMAT)</a:t>
                       </a:r>
                     </a:p>
                   </a:txBody>
@@ -19833,7 +19816,7 @@
                   </a:tcPr>
                 </a:tc>
               </a:tr>
-              <a:tr h="883920">
+              <a:tr h="853440">
                 <a:tc>
                   <a:txBody>
                     <a:bodyPr wrap="square"/>
@@ -19846,7 +19829,7 @@
                           </a:solidFill>
                           <a:latin typeface="Times New Roman"/>
                         </a:rPr>
-                        <a:t>Lesson</a:t>
+                        <a:t>Remember</a:t>
                       </a:r>
                     </a:p>
                   </a:txBody>
@@ -19868,7 +19851,7 @@
                           </a:solidFill>
                           <a:latin typeface="Times New Roman"/>
                         </a:rPr>
-                        <a:t>log the device's raw reply before deciding who failed; SPI devices may answer later than the minimum the specification allows</a:t>
+                        <a:t>log the device's raw reply before deciding who failed</a:t>
                       </a:r>
                     </a:p>
                   </a:txBody>
@@ -20146,7 +20129,7 @@
                 </a:solidFill>
                 <a:latin typeface="Consolas"/>
               </a:rPr>
-              <a:t>&lt;- 512 data bytes, CRC-16     we check the CRC-16 ourselves</a:t>
+              <a:t>&lt;- 512 data bytes, CRC-16     the driver checks the CRC-16</a:t>
             </a:r>
           </a:p>
           <a:p>
@@ -21996,7 +21979,7 @@
                 <a:ea typeface="DejaVu Sans"/>
                 <a:cs typeface="Times New Roman" panose="02020603050405020304" pitchFamily="18" charset="0"/>
               </a:rPr>
-              <a:t>Making It Faster</a:t>
+              <a:t>Speed: Measure and Choose a Link</a:t>
             </a:r>
             <a:endParaRPr lang="en-US" sz="4000" b="0" strike="noStrike" spc="-1" dirty="0">
               <a:solidFill>
@@ -22024,7 +22007,7 @@
                 <a:ea typeface="DejaVu Sans"/>
                 <a:cs typeface="Times New Roman" panose="02020603050405020304" pitchFamily="18" charset="0"/>
               </a:rPr>
-              <a:t>Questions Behind the Project</a:t>
+              <a:t>Choose and Reproduce</a:t>
             </a:r>
             <a:endParaRPr lang="en-US" sz="4000" b="0" strike="noStrike" spc="-1" dirty="0">
               <a:solidFill>
@@ -26505,18 +26488,18 @@
               </a:buClr>
             </a:pPr>
             <a:r>
-              <a:rPr lang="en-US" sz="3100" b="1" spc="-1" dirty="0">
+              <a:rPr lang="en-US" sz="3200" b="1" spc="-1" dirty="0">
                 <a:latin typeface="Times New Roman" panose="02020603050405020304" pitchFamily="18" charset="0"/>
                 <a:cs typeface="Times New Roman" panose="02020603050405020304" pitchFamily="18" charset="0"/>
               </a:rPr>
               <a:t>4. End-to-End Transfer </a:t>
             </a:r>
             <a:r>
-              <a:rPr lang="en-US" sz="3100" spc="-1" dirty="0">
+              <a:rPr lang="en-US" sz="3200" spc="-1" dirty="0">
                 <a:latin typeface="Times New Roman" panose="02020603050405020304" pitchFamily="18" charset="0"/>
                 <a:cs typeface="Times New Roman" panose="02020603050405020304" pitchFamily="18" charset="0"/>
               </a:rPr>
-              <a:t>(7/8) When storage fails: a real run</a:t>
+              <a:t>(7/8) If board B says “not stored”</a:t>
             </a:r>
           </a:p>
         </p:txBody>
@@ -26732,7 +26715,7 @@
                 </a:solidFill>
                 <a:latin typeface="Consolas"/>
               </a:rPr>
-              <a:t>Example output — board B, same run (before the bug 3 fix)</a:t>
+              <a:t>Example output — board B, same run</a:t>
             </a:r>
           </a:p>
           <a:p>
@@ -26764,7 +26747,7 @@
                 </a:solidFill>
                 <a:latin typeface="Consolas"/>
               </a:rPr>
-              <a:t>XFER: SD write failed at 618 (-1)</a:t>
+              <a:t>SD: write 84310: data response 1f      (three tries)</a:t>
             </a:r>
           </a:p>
           <a:p>
@@ -26780,7 +26763,7 @@
                 </a:solidFill>
                 <a:latin typeface="Consolas"/>
               </a:rPr>
-              <a:t>XFER: received 1048576 bytes, CRC cffbfb2e OK, not stored (-1)</a:t>
+              <a:t>XFER: SD write failed at 618 (-1)</a:t>
             </a:r>
           </a:p>
           <a:p>
@@ -26792,11 +26775,11 @@
             <a:r>
               <a:rPr sz="1180">
                 <a:solidFill>
-                  <a:srgbClr val="FF8080"/>
+                  <a:srgbClr val="E6E6E6"/>
                 </a:solidFill>
                 <a:latin typeface="Consolas"/>
               </a:rPr>
-              <a:t>XFER FAIL 3</a:t>
+              <a:t>XFER: received 1048576 bytes, CRC cffbfb2e OK, not stored (-1)</a:t>
             </a:r>
           </a:p>
           <a:p>
@@ -26812,92 +26795,21 @@
                 </a:solidFill>
                 <a:latin typeface="Consolas"/>
               </a:rPr>
-              <a:t>APP DATA FAIL: 3</a:t>
+              <a:t>XFER FAIL 3</a:t>
             </a:r>
           </a:p>
         </p:txBody>
       </p:sp>
       <p:sp>
         <p:nvSpPr>
-          <p:cNvPr id="65" name="Rectangle 64"/>
-          <p:cNvSpPr/>
+          <p:cNvPr id="65" name="TextBox 64"/>
+          <p:cNvSpPr txBox="1"/>
           <p:nvPr/>
         </p:nvSpPr>
         <p:spPr>
           <a:xfrm>
             <a:off x="365760" y="2651760"/>
-            <a:ext cx="11430000" cy="548640"/>
-          </a:xfrm>
-          <a:prstGeom prst="rect">
-            <a:avLst/>
-          </a:prstGeom>
-          <a:solidFill>
-            <a:srgbClr val="1E1E1E"/>
-          </a:solidFill>
-          <a:ln>
-            <a:solidFill>
-              <a:srgbClr val="C8C8C8"/>
-            </a:solidFill>
-          </a:ln>
-          <a:effectLst/>
-        </p:spPr>
-        <p:style>
-          <a:lnRef idx="1">
-            <a:schemeClr val="accent1"/>
-          </a:lnRef>
-          <a:fillRef idx="3">
-            <a:schemeClr val="accent1"/>
-          </a:fillRef>
-          <a:effectRef idx="2">
-            <a:schemeClr val="accent1"/>
-          </a:effectRef>
-          <a:fontRef idx="minor">
-            <a:schemeClr val="lt1"/>
-          </a:fontRef>
-        </p:style>
-        <p:txBody>
-          <a:bodyPr rtlCol="0" anchor="t" wrap="none" lIns="73152" rIns="73152" tIns="73152" bIns="73152"/>
-          <a:lstStyle/>
-          <a:p>
-            <a:pPr algn="l"/>
-            <a:r>
-              <a:rPr sz="1180" b="1">
-                <a:solidFill>
-                  <a:srgbClr val="AAAAAA"/>
-                </a:solidFill>
-                <a:latin typeface="Consolas"/>
-              </a:rPr>
-              <a:t>Example output — run_pair.sh</a:t>
-            </a:r>
-          </a:p>
-          <a:p>
-            <a:pPr algn="l">
-              <a:lnSpc>
-                <a:spcPct val="100000"/>
-              </a:lnSpc>
-            </a:pPr>
-            <a:r>
-              <a:rPr sz="1180">
-                <a:solidFill>
-                  <a:srgbClr val="FF8080"/>
-                </a:solidFill>
-                <a:latin typeface="Consolas"/>
-              </a:rPr>
-              <a:t>xferfix2 FAIL hs=1.236142s ... 122s no-APP-OK(xferfix2.res.log)</a:t>
-            </a:r>
-          </a:p>
-        </p:txBody>
-      </p:sp>
-      <p:sp>
-        <p:nvSpPr>
-          <p:cNvPr id="66" name="TextBox 65"/>
-          <p:cNvSpPr txBox="1"/>
-          <p:nvPr/>
-        </p:nvSpPr>
-        <p:spPr>
-          <a:xfrm>
-            <a:off x="365760" y="3429000"/>
-            <a:ext cx="11430000" cy="2926080"/>
+            <a:ext cx="11430000" cy="3657600"/>
           </a:xfrm>
           <a:prstGeom prst="rect">
             <a:avLst/>
@@ -26917,16 +26829,16 @@
               <a:buChar char="•"/>
             </a:pPr>
             <a:r>
-              <a:rPr sz="1500" b="0">
+              <a:rPr sz="1600" b="0">
                 <a:solidFill>
                   <a:srgbClr val="000000"/>
                 </a:solidFill>
                 <a:latin typeface="Times New Roman"/>
               </a:rPr>
-              <a:t>The communication path worked: the handshake, every record and the file CRC are fine. </a:t>
-            </a:r>
-            <a:r>
-              <a:rPr sz="1500" b="1">
+              <a:t>The link worked: handshake, every record and the transfer CRC are fine. </a:t>
+            </a:r>
+            <a:r>
+              <a:rPr sz="1600" b="1">
                 <a:solidFill>
                   <a:srgbClr val="000000"/>
                 </a:solidFill>
@@ -26935,13 +26847,13 @@
               <a:t>Storage failed</a:t>
             </a:r>
             <a:r>
-              <a:rPr sz="1500" b="0">
+              <a:rPr sz="1600" b="0">
                 <a:solidFill>
                   <a:srgbClr val="000000"/>
                 </a:solidFill>
                 <a:latin typeface="Times New Roman"/>
               </a:rPr>
-              <a:t>: the first sector write (offset 618 = 3 records, past 512 B) was reported as refused, so B kept receiving and checking but did not store.</a:t>
+              <a:t>: the first sector write of RECV.BIN was refused three times, so B kept receiving and checking but did not store.</a:t>
             </a:r>
           </a:p>
           <a:p>
@@ -26952,13 +26864,13 @@
               <a:buChar char="•"/>
             </a:pPr>
             <a:r>
-              <a:rPr sz="1500" b="0">
+              <a:rPr sz="1600" b="0">
                 <a:solidFill>
                   <a:srgbClr val="000000"/>
                 </a:solidFill>
                 <a:latin typeface="Times New Roman"/>
               </a:rPr>
-              <a:t>Board A's “XFER SENT … APP DATA OK” is true and still not success. Judge a transfer by board B's last lines — and then read the file back (sd_prep verify).</a:t>
+              <a:t>Board A's “XFER SENT … APP DATA OK” is true and still not success: judge a transfer by board B's last lines, then read the file back (section 4, (4/8)). run_pair.sh reports this run as FAIL (no-APP-OK on B).</a:t>
             </a:r>
           </a:p>
           <a:p>
@@ -26969,31 +26881,13 @@
               <a:buChar char="•"/>
             </a:pPr>
             <a:r>
-              <a:rPr sz="1500" b="0">
+              <a:rPr sz="1600" b="0">
                 <a:solidFill>
                   <a:srgbClr val="000000"/>
                 </a:solidFill>
                 <a:latin typeface="Times New Roman"/>
               </a:rPr>
-              <a:t>Cause, found by logging the card's reply: its data response came one byte late (section 3, bug 3). Current firmware prints </a:t>
-            </a:r>
-            <a:r>
-              <a:rPr sz="1300" b="0">
-                <a:solidFill>
-                  <a:srgbClr val="8B1A1A"/>
-                </a:solidFill>
-                <a:latin typeface="Consolas"/>
-              </a:rPr>
-              <a:t>SD: write &lt;sector&gt;: &lt;reason&gt;</a:t>
-            </a:r>
-            <a:r>
-              <a:rPr sz="1500" b="0">
-                <a:solidFill>
-                  <a:srgbClr val="000000"/>
-                </a:solidFill>
-                <a:latin typeface="Times New Roman"/>
-              </a:rPr>
-              <a:t> for every rejected try — read those lines before blaming the card.</a:t>
+              <a:t>What the SD: reason means and what to do: section 3, (6/9).</a:t>
             </a:r>
           </a:p>
           <a:p>
@@ -27004,13 +26898,13 @@
               <a:buChar char="•"/>
             </a:pPr>
             <a:r>
-              <a:rPr sz="1500" b="0">
+              <a:rPr sz="1600" b="0">
                 <a:solidFill>
                   <a:srgbClr val="000000"/>
                 </a:solidFill>
                 <a:latin typeface="Times New Roman"/>
               </a:rPr>
-              <a:t>Read-back trap: remove the old RECV.BIN before a run (PC, or reformat card B). Otherwise a failed run leaves the previous, identical file in place and the read-back still says 0 bytes differ.</a:t>
+              <a:t>Remove the old RECV.BIN before a run (PC, or reformat card B), or a failed run leaves the previous, identical file and the read-back still says 0 bytes differ.</a:t>
             </a:r>
           </a:p>
         </p:txBody>
@@ -28116,7 +28010,7 @@
                 <a:ea typeface="DejaVu Sans"/>
                 <a:cs typeface="Times New Roman" panose="02020603050405020304" pitchFamily="18" charset="0"/>
               </a:rPr>
-              <a:t>Making It Faster</a:t>
+              <a:t>Speed: Measure and Choose a Link</a:t>
             </a:r>
             <a:endParaRPr lang="en-US" sz="4000" b="0" strike="noStrike" spc="-1" dirty="0">
               <a:solidFill>
@@ -28144,7 +28038,7 @@
                 <a:ea typeface="DejaVu Sans"/>
                 <a:cs typeface="Times New Roman" panose="02020603050405020304" pitchFamily="18" charset="0"/>
               </a:rPr>
-              <a:t>Questions Behind the Project</a:t>
+              <a:t>Choose and Reproduce</a:t>
             </a:r>
             <a:endParaRPr lang="en-US" sz="4000" b="0" strike="noStrike" spc="-1" dirty="0">
               <a:solidFill>
@@ -28296,18 +28190,18 @@
               </a:buClr>
             </a:pPr>
             <a:r>
-              <a:rPr lang="en-US" sz="3600" b="1" spc="-1" dirty="0">
+              <a:rPr lang="en-US" sz="2700" b="1" spc="-1" dirty="0">
                 <a:latin typeface="Times New Roman" panose="02020603050405020304" pitchFamily="18" charset="0"/>
                 <a:cs typeface="Times New Roman" panose="02020603050405020304" pitchFamily="18" charset="0"/>
               </a:rPr>
-              <a:t>5. Making It Faster </a:t>
-            </a:r>
-            <a:r>
-              <a:rPr lang="en-US" sz="3600" spc="-1" dirty="0">
+              <a:t>5. Speed: Measure and Choose a Link </a:t>
+            </a:r>
+            <a:r>
+              <a:rPr lang="en-US" sz="2700" spc="-1" dirty="0">
                 <a:latin typeface="Times New Roman" panose="02020603050405020304" pitchFamily="18" charset="0"/>
                 <a:cs typeface="Times New Roman" panose="02020603050405020304" pitchFamily="18" charset="0"/>
               </a:rPr>
-              <a:t>(1/7) Measure first</a:t>
+              <a:t>(1/4) Measure the speed yourself</a:t>
             </a:r>
           </a:p>
         </p:txBody>
@@ -28370,17 +28264,152 @@
           </a:p>
         </p:txBody>
       </p:sp>
+      <p:sp>
+        <p:nvSpPr>
+          <p:cNvPr id="63" name="Rectangle 62"/>
+          <p:cNvSpPr/>
+          <p:nvPr/>
+        </p:nvSpPr>
+        <p:spPr>
+          <a:xfrm>
+            <a:off x="365760" y="868680"/>
+            <a:ext cx="11430000" cy="1502664"/>
+          </a:xfrm>
+          <a:prstGeom prst="rect">
+            <a:avLst/>
+          </a:prstGeom>
+          <a:solidFill>
+            <a:srgbClr val="F4F4F4"/>
+          </a:solidFill>
+          <a:ln>
+            <a:solidFill>
+              <a:srgbClr val="C8C8C8"/>
+            </a:solidFill>
+          </a:ln>
+          <a:effectLst/>
+        </p:spPr>
+        <p:style>
+          <a:lnRef idx="1">
+            <a:schemeClr val="accent1"/>
+          </a:lnRef>
+          <a:fillRef idx="3">
+            <a:schemeClr val="accent1"/>
+          </a:fillRef>
+          <a:effectRef idx="2">
+            <a:schemeClr val="accent1"/>
+          </a:effectRef>
+          <a:fontRef idx="minor">
+            <a:schemeClr val="lt1"/>
+          </a:fontRef>
+        </p:style>
+        <p:txBody>
+          <a:bodyPr rtlCol="0" anchor="t" wrap="none" lIns="73152" rIns="73152" tIns="73152" bIns="73152"/>
+          <a:lstStyle/>
+          <a:p>
+            <a:pPr algn="l"/>
+            <a:r>
+              <a:rPr sz="1400" b="1">
+                <a:solidFill>
+                  <a:srgbClr val="808080"/>
+                </a:solidFill>
+                <a:latin typeface="Consolas"/>
+              </a:rPr>
+              <a:t>Run this — from the repository root (add TRANSPORT=uart for the wired link)</a:t>
+            </a:r>
+          </a:p>
+          <a:p>
+            <a:pPr algn="l">
+              <a:lnSpc>
+                <a:spcPct val="100000"/>
+              </a:lnSpc>
+            </a:pPr>
+            <a:r>
+              <a:rPr sz="1400">
+                <a:solidFill>
+                  <a:srgbClr val="1F1F1F"/>
+                </a:solidFill>
+                <a:latin typeface="Consolas"/>
+              </a:rPr>
+              <a:t>cd fpga/sw/export/edhoc-authkem</a:t>
+            </a:r>
+          </a:p>
+          <a:p>
+            <a:pPr algn="l">
+              <a:lnSpc>
+                <a:spcPct val="100000"/>
+              </a:lnSpc>
+            </a:pPr>
+            <a:r>
+              <a:rPr sz="1400">
+                <a:solidFill>
+                  <a:srgbClr val="1F1F1F"/>
+                </a:solidFill>
+                <a:latin typeface="Consolas"/>
+              </a:rPr>
+              <a:t>make edhoc_authkem_initiator edhoc_authkem_responder SUITE=TBD3 EXTRA_CFLAGS=-DAPP_SD_XFER</a:t>
+            </a:r>
+          </a:p>
+          <a:p>
+            <a:pPr algn="l">
+              <a:lnSpc>
+                <a:spcPct val="100000"/>
+              </a:lnSpc>
+            </a:pPr>
+            <a:r>
+              <a:rPr sz="1400">
+                <a:solidFill>
+                  <a:srgbClr val="1F1F1F"/>
+                </a:solidFill>
+                <a:latin typeface="Consolas"/>
+              </a:rPr>
+              <a:t>../common/board/run_pair.sh xfer build-tbd3/edhoc_authkem_initiator.elf \</a:t>
+            </a:r>
+          </a:p>
+          <a:p>
+            <a:pPr algn="l">
+              <a:lnSpc>
+                <a:spcPct val="100000"/>
+              </a:lnSpc>
+            </a:pPr>
+            <a:r>
+              <a:rPr sz="1400">
+                <a:solidFill>
+                  <a:srgbClr val="1F1F1F"/>
+                </a:solidFill>
+                <a:latin typeface="Consolas"/>
+              </a:rPr>
+              <a:t>                                  build-tbd3/edhoc_authkem_responder.elf 300</a:t>
+            </a:r>
+          </a:p>
+          <a:p>
+            <a:pPr algn="l">
+              <a:lnSpc>
+                <a:spcPct val="100000"/>
+              </a:lnSpc>
+            </a:pPr>
+            <a:r>
+              <a:rPr sz="1400">
+                <a:solidFill>
+                  <a:srgbClr val="1F1F1F"/>
+                </a:solidFill>
+                <a:latin typeface="Consolas"/>
+              </a:rPr>
+              <a:t>grep -h "PERF xfer\|PERF handshake_total" boardlogs/xfer.*.log</a:t>
+            </a:r>
+          </a:p>
+        </p:txBody>
+      </p:sp>
       <p:graphicFrame>
         <p:nvGraphicFramePr>
-          <p:cNvPr id="63" name="Table 62"/>
+          <p:cNvPr id="64" name="Table 63"/>
           <p:cNvGraphicFramePr>
             <a:graphicFrameLocks noGrp="1"/>
           </p:cNvGraphicFramePr>
           <p:nvPr/>
         </p:nvGraphicFramePr>
         <p:xfrm>
-          <a:off x="365760" y="868680"/>
-          <a:ext cx="7315200" cy="1828800"/>
+          <a:off x="365760" y="2645664"/>
+          <a:ext cx="11430000" cy="1828800"/>
         </p:xfrm>
         <a:graphic>
           <a:graphicData uri="http://schemas.openxmlformats.org/drawingml/2006/table">
@@ -28389,8 +28418,9 @@
                 <a:tableStyleId>{5C22544A-7EE6-4342-B048-85BDC9FD1C3A}</a:tableStyleId>
               </a:tblPr>
               <a:tblGrid>
-                <a:gridCol w="5120640"/>
-                <a:gridCol w="2194560"/>
+                <a:gridCol w="5394960"/>
+                <a:gridCol w="2743200"/>
+                <a:gridCol w="3291840"/>
               </a:tblGrid>
               <a:tr h="457200">
                 <a:tc>
@@ -28399,13 +28429,13 @@
                     <a:lstStyle/>
                     <a:p>
                       <a:r>
-                        <a:rPr sz="1700" b="1">
+                        <a:rPr sz="1500" b="1">
                           <a:solidFill>
                             <a:srgbClr val="000000"/>
                           </a:solidFill>
                           <a:latin typeface="Times New Roman"/>
                         </a:rPr>
-                        <a:t>Per radio frame (sender, 111 B of data)</a:t>
+                        <a:t>TBD3, measured on the boards</a:t>
                       </a:r>
                     </a:p>
                   </a:txBody>
@@ -28421,13 +28451,35 @@
                     <a:lstStyle/>
                     <a:p>
                       <a:r>
-                        <a:rPr sz="1700" b="1">
+                        <a:rPr sz="1500" b="1">
                           <a:solidFill>
                             <a:srgbClr val="000000"/>
                           </a:solidFill>
                           <a:latin typeface="Times New Roman"/>
                         </a:rPr>
-                        <a:t>Time</a:t>
+                        <a:t>Radio (default)</a:t>
+                      </a:r>
+                    </a:p>
+                  </a:txBody>
+                  <a:tcPr marL="54864" marR="54864" marT="27432" marB="27432">
+                    <a:solidFill>
+                      <a:srgbClr val="C5E0B4"/>
+                    </a:solidFill>
+                  </a:tcPr>
+                </a:tc>
+                <a:tc>
+                  <a:txBody>
+                    <a:bodyPr wrap="square"/>
+                    <a:lstStyle/>
+                    <a:p>
+                      <a:r>
+                        <a:rPr sz="1500" b="1">
+                          <a:solidFill>
+                            <a:srgbClr val="000000"/>
+                          </a:solidFill>
+                          <a:latin typeface="Times New Roman"/>
+                        </a:rPr>
+                        <a:t>UART1, 921,600 baud</a:t>
                       </a:r>
                     </a:p>
                   </a:txBody>
@@ -28445,13 +28497,13 @@
                     <a:lstStyle/>
                     <a:p>
                       <a:r>
-                        <a:rPr sz="1700" b="0">
+                        <a:rPr sz="1500" b="0">
                           <a:solidFill>
                             <a:srgbClr val="000000"/>
                           </a:solidFill>
                           <a:latin typeface="Times New Roman"/>
                         </a:rPr>
-                        <a:t>radio TX + hardware ACK</a:t>
+                        <a:t>Handshake (PERF handshake_total, initiator)</a:t>
                       </a:r>
                     </a:p>
                   </a:txBody>
@@ -28467,13 +28519,35 @@
                     <a:lstStyle/>
                     <a:p>
                       <a:r>
-                        <a:rPr sz="1700" b="0">
+                        <a:rPr sz="1500" b="0">
                           <a:solidFill>
                             <a:srgbClr val="000000"/>
                           </a:solidFill>
                           <a:latin typeface="Times New Roman"/>
                         </a:rPr>
-                        <a:t>7.0 ms</a:t>
+                        <a:t>1.25 s</a:t>
+                      </a:r>
+                    </a:p>
+                  </a:txBody>
+                  <a:tcPr marL="54864" marR="54864" marT="27432" marB="27432">
+                    <a:solidFill>
+                      <a:srgbClr val="FFFFFF"/>
+                    </a:solidFill>
+                  </a:tcPr>
+                </a:tc>
+                <a:tc>
+                  <a:txBody>
+                    <a:bodyPr wrap="square"/>
+                    <a:lstStyle/>
+                    <a:p>
+                      <a:r>
+                        <a:rPr sz="1500" b="0">
+                          <a:solidFill>
+                            <a:srgbClr val="000000"/>
+                          </a:solidFill>
+                          <a:latin typeface="Times New Roman"/>
+                        </a:rPr>
+                        <a:t>0.77 s</a:t>
                       </a:r>
                     </a:p>
                   </a:txBody>
@@ -28491,13 +28565,13 @@
                     <a:lstStyle/>
                     <a:p>
                       <a:r>
-                        <a:rPr sz="1700" b="0">
+                        <a:rPr sz="1500" b="0">
                           <a:solidFill>
                             <a:srgbClr val="000000"/>
                           </a:solidFill>
                           <a:latin typeface="Times New Roman"/>
                         </a:rPr>
-                        <a:t>waiting for our 'A'</a:t>
+                        <a:t>1 MiB, SD card A → SD card B (PERF xfer_recv)</a:t>
                       </a:r>
                     </a:p>
                   </a:txBody>
@@ -28513,13 +28587,35 @@
                     <a:lstStyle/>
                     <a:p>
                       <a:r>
-                        <a:rPr sz="1700" b="0">
+                        <a:rPr sz="1500" b="0">
                           <a:solidFill>
                             <a:srgbClr val="000000"/>
                           </a:solidFill>
                           <a:latin typeface="Times New Roman"/>
                         </a:rPr>
-                        <a:t>1.75 ms</a:t>
+                        <a:t>99.6 s, 10.5 KB/s</a:t>
+                      </a:r>
+                    </a:p>
+                  </a:txBody>
+                  <a:tcPr marL="54864" marR="54864" marT="27432" marB="27432">
+                    <a:solidFill>
+                      <a:srgbClr val="F2F8EE"/>
+                    </a:solidFill>
+                  </a:tcPr>
+                </a:tc>
+                <a:tc>
+                  <a:txBody>
+                    <a:bodyPr wrap="square"/>
+                    <a:lstStyle/>
+                    <a:p>
+                      <a:r>
+                        <a:rPr sz="1500" b="0">
+                          <a:solidFill>
+                            <a:srgbClr val="000000"/>
+                          </a:solidFill>
+                          <a:latin typeface="Times New Roman"/>
+                        </a:rPr>
+                        <a:t>32.2 s, 32.6 KB/s</a:t>
                       </a:r>
                     </a:p>
                   </a:txBody>
@@ -28537,13 +28633,13 @@
                     <a:lstStyle/>
                     <a:p>
                       <a:r>
-                        <a:rPr sz="1700" b="0">
+                        <a:rPr sz="1500" b="0">
                           <a:solidFill>
                             <a:srgbClr val="000000"/>
                           </a:solidFill>
                           <a:latin typeface="Times New Roman"/>
                         </a:rPr>
-                        <a:t>AES-256-GCM encryption (before tuning)</a:t>
+                        <a:t>256 KiB generated data (APP_FILE_BYTES=262144)</a:t>
                       </a:r>
                     </a:p>
                   </a:txBody>
@@ -28559,13 +28655,35 @@
                     <a:lstStyle/>
                     <a:p>
                       <a:r>
-                        <a:rPr sz="1700" b="0">
+                        <a:rPr sz="1500" b="0">
                           <a:solidFill>
                             <a:srgbClr val="000000"/>
                           </a:solidFill>
                           <a:latin typeface="Times New Roman"/>
                         </a:rPr>
-                        <a:t>3.1 ms</a:t>
+                        <a:t>—</a:t>
+                      </a:r>
+                    </a:p>
+                  </a:txBody>
+                  <a:tcPr marL="54864" marR="54864" marT="27432" marB="27432">
+                    <a:solidFill>
+                      <a:srgbClr val="FFFFFF"/>
+                    </a:solidFill>
+                  </a:tcPr>
+                </a:tc>
+                <a:tc>
+                  <a:txBody>
+                    <a:bodyPr wrap="square"/>
+                    <a:lstStyle/>
+                    <a:p>
+                      <a:r>
+                        <a:rPr sz="1500" b="0">
+                          <a:solidFill>
+                            <a:srgbClr val="000000"/>
+                          </a:solidFill>
+                          <a:latin typeface="Times New Roman"/>
+                        </a:rPr>
+                        <a:t>49.5 KB/s</a:t>
                       </a:r>
                     </a:p>
                   </a:txBody>
@@ -28582,14 +28700,14 @@
       </p:graphicFrame>
       <p:sp>
         <p:nvSpPr>
-          <p:cNvPr id="64" name="TextBox 63"/>
+          <p:cNvPr id="65" name="TextBox 64"/>
           <p:cNvSpPr txBox="1"/>
           <p:nvPr/>
         </p:nvSpPr>
         <p:spPr>
           <a:xfrm>
-            <a:off x="365760" y="2926080"/>
-            <a:ext cx="11430000" cy="1737360"/>
+            <a:off x="365760" y="4800600"/>
+            <a:ext cx="11430000" cy="1554480"/>
           </a:xfrm>
           <a:prstGeom prst="rect">
             <a:avLst/>
@@ -28609,13 +28727,13 @@
               <a:buChar char="•"/>
             </a:pPr>
             <a:r>
-              <a:rPr sz="1800" b="0">
+              <a:rPr sz="1600" b="0">
                 <a:solidFill>
                   <a:srgbClr val="000000"/>
                 </a:solidFill>
                 <a:latin typeface="Times New Roman"/>
               </a:rPr>
-              <a:t>Cycle counters around each step, in a temporary instrumented build — not guesses. Numbers on this slide come from that build, not from TIMING=1.</a:t>
+              <a:t>PERF xfer_send / xfer_recv: time from the first to the last file record, SD access included (xfer_sd_part shows the SD share). Units: KB/s = 1,000 B/s.</a:t>
             </a:r>
           </a:p>
           <a:p>
@@ -28626,260 +28744,17 @@
               <a:buChar char="•"/>
             </a:pPr>
             <a:r>
-              <a:rPr sz="1800" b="0">
+              <a:rPr sz="1600" b="0">
                 <a:solidFill>
                   <a:srgbClr val="000000"/>
                 </a:solidFill>
                 <a:latin typeface="Times New Roman"/>
               </a:rPr>
-              <a:t>Encrypting one 206-byte record took </a:t>
-            </a:r>
-            <a:r>
-              <a:rPr sz="1800" b="1">
-                <a:solidFill>
-                  <a:srgbClr val="000000"/>
-                </a:solidFill>
-                <a:latin typeface="Times New Roman"/>
-              </a:rPr>
-              <a:t>6.5 ms = 490,000 cycles</a:t>
-            </a:r>
-            <a:r>
-              <a:rPr sz="1800" b="0">
-                <a:solidFill>
-                  <a:srgbClr val="000000"/>
-                </a:solidFill>
-                <a:latin typeface="Times New Roman"/>
-              </a:rPr>
-              <a:t>. That is far too slow for AES: something was wrong.</a:t>
-            </a:r>
-          </a:p>
-          <a:p>
-            <a:pPr marL="256032" indent="-219456">
-              <a:spcAft>
-                <a:spcPts val="400"/>
-              </a:spcAft>
-              <a:buChar char="•"/>
-            </a:pPr>
-            <a:r>
-              <a:rPr sz="1800" b="0">
-                <a:solidFill>
-                  <a:srgbClr val="000000"/>
-                </a:solidFill>
-                <a:latin typeface="Times New Roman"/>
-              </a:rPr>
-              <a:t>On-board micro-benchmark:</a:t>
+              <a:t>Your numbers should be within a few %; the radio varies more (interference on channel 11).</a:t>
             </a:r>
           </a:p>
         </p:txBody>
       </p:sp>
-      <p:graphicFrame>
-        <p:nvGraphicFramePr>
-          <p:cNvPr id="65" name="Table 64"/>
-          <p:cNvGraphicFramePr>
-            <a:graphicFrameLocks noGrp="1"/>
-          </p:cNvGraphicFramePr>
-          <p:nvPr/>
-        </p:nvGraphicFramePr>
-        <p:xfrm>
-          <a:off x="365760" y="4754880"/>
-          <a:ext cx="11430000" cy="914400"/>
-        </p:xfrm>
-        <a:graphic>
-          <a:graphicData uri="http://schemas.openxmlformats.org/drawingml/2006/table">
-            <a:tbl>
-              <a:tblPr firstRow="1" bandRow="1">
-                <a:tableStyleId>{5C22544A-7EE6-4342-B048-85BDC9FD1C3A}</a:tableStyleId>
-              </a:tblPr>
-              <a:tblGrid>
-                <a:gridCol w="2857500"/>
-                <a:gridCol w="2857500"/>
-                <a:gridCol w="2857500"/>
-                <a:gridCol w="2857500"/>
-              </a:tblGrid>
-              <a:tr h="457200">
-                <a:tc>
-                  <a:txBody>
-                    <a:bodyPr wrap="square"/>
-                    <a:lstStyle/>
-                    <a:p>
-                      <a:r>
-                        <a:rPr sz="1700" b="1">
-                          <a:solidFill>
-                            <a:srgbClr val="000000"/>
-                          </a:solidFill>
-                          <a:latin typeface="Times New Roman"/>
-                        </a:rPr>
-                        <a:t>AES-256 block</a:t>
-                      </a:r>
-                    </a:p>
-                  </a:txBody>
-                  <a:tcPr marL="54864" marR="54864" marT="27432" marB="27432">
-                    <a:solidFill>
-                      <a:srgbClr val="C5E0B4"/>
-                    </a:solidFill>
-                  </a:tcPr>
-                </a:tc>
-                <a:tc>
-                  <a:txBody>
-                    <a:bodyPr wrap="square"/>
-                    <a:lstStyle/>
-                    <a:p>
-                      <a:r>
-                        <a:rPr sz="1700" b="1">
-                          <a:solidFill>
-                            <a:srgbClr val="000000"/>
-                          </a:solidFill>
-                          <a:latin typeface="Times New Roman"/>
-                        </a:rPr>
-                        <a:t>GHASH multiply</a:t>
-                      </a:r>
-                    </a:p>
-                  </a:txBody>
-                  <a:tcPr marL="54864" marR="54864" marT="27432" marB="27432">
-                    <a:solidFill>
-                      <a:srgbClr val="C5E0B4"/>
-                    </a:solidFill>
-                  </a:tcPr>
-                </a:tc>
-                <a:tc>
-                  <a:txBody>
-                    <a:bodyPr wrap="square"/>
-                    <a:lstStyle/>
-                    <a:p>
-                      <a:r>
-                        <a:rPr sz="1700" b="1">
-                          <a:solidFill>
-                            <a:srgbClr val="000000"/>
-                          </a:solidFill>
-                          <a:latin typeface="Times New Roman"/>
-                        </a:rPr>
-                        <a:t>Key schedule</a:t>
-                      </a:r>
-                    </a:p>
-                  </a:txBody>
-                  <a:tcPr marL="54864" marR="54864" marT="27432" marB="27432">
-                    <a:solidFill>
-                      <a:srgbClr val="C5E0B4"/>
-                    </a:solidFill>
-                  </a:tcPr>
-                </a:tc>
-                <a:tc>
-                  <a:txBody>
-                    <a:bodyPr wrap="square"/>
-                    <a:lstStyle/>
-                    <a:p>
-                      <a:r>
-                        <a:rPr sz="1700" b="1">
-                          <a:solidFill>
-                            <a:srgbClr val="000000"/>
-                          </a:solidFill>
-                          <a:latin typeface="Times New Roman"/>
-                        </a:rPr>
-                        <a:t>GCM, 192 B</a:t>
-                      </a:r>
-                    </a:p>
-                  </a:txBody>
-                  <a:tcPr marL="54864" marR="54864" marT="27432" marB="27432">
-                    <a:solidFill>
-                      <a:srgbClr val="C5E0B4"/>
-                    </a:solidFill>
-                  </a:tcPr>
-                </a:tc>
-              </a:tr>
-              <a:tr h="457200">
-                <a:tc>
-                  <a:txBody>
-                    <a:bodyPr wrap="square"/>
-                    <a:lstStyle/>
-                    <a:p>
-                      <a:r>
-                        <a:rPr sz="1700" b="0">
-                          <a:solidFill>
-                            <a:srgbClr val="000000"/>
-                          </a:solidFill>
-                          <a:latin typeface="Times New Roman"/>
-                        </a:rPr>
-                        <a:t>14,123 cyc</a:t>
-                      </a:r>
-                    </a:p>
-                  </a:txBody>
-                  <a:tcPr marL="54864" marR="54864" marT="27432" marB="27432">
-                    <a:solidFill>
-                      <a:srgbClr val="FFFFFF"/>
-                    </a:solidFill>
-                  </a:tcPr>
-                </a:tc>
-                <a:tc>
-                  <a:txBody>
-                    <a:bodyPr wrap="square"/>
-                    <a:lstStyle/>
-                    <a:p>
-                      <a:r>
-                        <a:rPr sz="1700" b="0">
-                          <a:solidFill>
-                            <a:srgbClr val="000000"/>
-                          </a:solidFill>
-                          <a:latin typeface="Times New Roman"/>
-                        </a:rPr>
-                        <a:t>19,777 cyc</a:t>
-                      </a:r>
-                    </a:p>
-                  </a:txBody>
-                  <a:tcPr marL="54864" marR="54864" marT="27432" marB="27432">
-                    <a:solidFill>
-                      <a:srgbClr val="FFFFFF"/>
-                    </a:solidFill>
-                  </a:tcPr>
-                </a:tc>
-                <a:tc>
-                  <a:txBody>
-                    <a:bodyPr wrap="square"/>
-                    <a:lstStyle/>
-                    <a:p>
-                      <a:r>
-                        <a:rPr sz="1700" b="0">
-                          <a:solidFill>
-                            <a:srgbClr val="000000"/>
-                          </a:solidFill>
-                          <a:latin typeface="Times New Roman"/>
-                        </a:rPr>
-                        <a:t>6,231 cyc</a:t>
-                      </a:r>
-                    </a:p>
-                  </a:txBody>
-                  <a:tcPr marL="54864" marR="54864" marT="27432" marB="27432">
-                    <a:solidFill>
-                      <a:srgbClr val="FFFFFF"/>
-                    </a:solidFill>
-                  </a:tcPr>
-                </a:tc>
-                <a:tc>
-                  <a:txBody>
-                    <a:bodyPr wrap="square"/>
-                    <a:lstStyle/>
-                    <a:p>
-                      <a:r>
-                        <a:rPr sz="1700" b="0">
-                          <a:solidFill>
-                            <a:srgbClr val="000000"/>
-                          </a:solidFill>
-                          <a:latin typeface="Times New Roman"/>
-                        </a:rPr>
-                        <a:t>490,695 cyc</a:t>
-                      </a:r>
-                    </a:p>
-                  </a:txBody>
-                  <a:tcPr marL="54864" marR="54864" marT="27432" marB="27432">
-                    <a:solidFill>
-                      <a:srgbClr val="FFFFFF"/>
-                    </a:solidFill>
-                  </a:tcPr>
-                </a:tc>
-              </a:tr>
-            </a:tbl>
-          </a:graphicData>
-        </a:graphic>
-      </p:graphicFrame>
     </p:spTree>
   </p:cSld>
   <p:clrMapOvr>
@@ -28955,18 +28830,18 @@
               </a:buClr>
             </a:pPr>
             <a:r>
-              <a:rPr lang="en-US" sz="3600" b="1" spc="-1" dirty="0">
+              <a:rPr lang="en-US" sz="2700" b="1" spc="-1" dirty="0">
                 <a:latin typeface="Times New Roman" panose="02020603050405020304" pitchFamily="18" charset="0"/>
                 <a:cs typeface="Times New Roman" panose="02020603050405020304" pitchFamily="18" charset="0"/>
               </a:rPr>
-              <a:t>5. Making It Faster </a:t>
-            </a:r>
-            <a:r>
-              <a:rPr lang="en-US" sz="3600" spc="-1" dirty="0">
+              <a:t>5. Speed: Measure and Choose a Link </a:t>
+            </a:r>
+            <a:r>
+              <a:rPr lang="en-US" sz="2700" spc="-1" dirty="0">
                 <a:latin typeface="Times New Roman" panose="02020603050405020304" pitchFamily="18" charset="0"/>
                 <a:cs typeface="Times New Roman" panose="02020603050405020304" pitchFamily="18" charset="0"/>
               </a:rPr>
-              <a:t>(2/7) The multiply trap</a:t>
+              <a:t>(2/4) Where the radio time goes</a:t>
             </a:r>
           </a:p>
         </p:txBody>
@@ -29029,196 +28904,610 @@
           </a:p>
         </p:txBody>
       </p:sp>
-      <p:sp>
-        <p:nvSpPr>
-          <p:cNvPr id="63" name="Rectangle 62"/>
-          <p:cNvSpPr/>
+      <p:graphicFrame>
+        <p:nvGraphicFramePr>
+          <p:cNvPr id="63" name="Table 62"/>
+          <p:cNvGraphicFramePr>
+            <a:graphicFrameLocks noGrp="1"/>
+          </p:cNvGraphicFramePr>
           <p:nvPr/>
-        </p:nvSpPr>
-        <p:spPr>
-          <a:xfrm>
-            <a:off x="365760" y="868680"/>
-            <a:ext cx="11430000" cy="898397"/>
-          </a:xfrm>
-          <a:prstGeom prst="rect">
-            <a:avLst/>
-          </a:prstGeom>
-          <a:solidFill>
-            <a:srgbClr val="F4F4F4"/>
-          </a:solidFill>
-          <a:ln>
-            <a:solidFill>
-              <a:srgbClr val="C8C8C8"/>
-            </a:solidFill>
-          </a:ln>
-          <a:effectLst/>
-        </p:spPr>
-        <p:style>
-          <a:lnRef idx="1">
-            <a:schemeClr val="accent1"/>
-          </a:lnRef>
-          <a:fillRef idx="3">
-            <a:schemeClr val="accent1"/>
-          </a:fillRef>
-          <a:effectRef idx="2">
-            <a:schemeClr val="accent1"/>
-          </a:effectRef>
-          <a:fontRef idx="minor">
-            <a:schemeClr val="lt1"/>
-          </a:fontRef>
-        </p:style>
-        <p:txBody>
-          <a:bodyPr rtlCol="0" anchor="t" wrap="none" lIns="73152" rIns="73152" tIns="73152" bIns="73152"/>
-          <a:lstStyle/>
-          <a:p>
-            <a:pPr algn="l"/>
-            <a:r>
-              <a:rPr sz="1500" b="1">
-                <a:solidFill>
-                  <a:srgbClr val="808080"/>
-                </a:solidFill>
-                <a:latin typeface="Consolas"/>
-              </a:rPr>
-              <a:t>before (GHASH, aes_gcm.c)</a:t>
-            </a:r>
-          </a:p>
-          <a:p>
-            <a:pPr algn="l">
-              <a:lnSpc>
-                <a:spcPct val="100000"/>
-              </a:lnSpc>
-            </a:pPr>
-            <a:r>
-              <a:rPr sz="1500">
-                <a:solidFill>
-                  <a:srgbClr val="1F1F1F"/>
-                </a:solidFill>
-                <a:latin typeface="Consolas"/>
-              </a:rPr>
-              <a:t>uint64_t m = 0 - (bit &amp; 1);      // all ones if bit is set</a:t>
-            </a:r>
-          </a:p>
-          <a:p>
-            <a:pPr algn="l">
-              <a:lnSpc>
-                <a:spcPct val="100000"/>
-              </a:lnSpc>
-            </a:pPr>
-            <a:r>
-              <a:rPr sz="1500">
-                <a:solidFill>
-                  <a:srgbClr val="1F1F1F"/>
-                </a:solidFill>
-                <a:latin typeface="Consolas"/>
-              </a:rPr>
-              <a:t>zh ^= vh &amp; m;                    // GCC turns this into  bit * vh  -&gt; mul</a:t>
-            </a:r>
-          </a:p>
-        </p:txBody>
-      </p:sp>
-      <p:sp>
-        <p:nvSpPr>
-          <p:cNvPr id="64" name="Rectangle 63"/>
-          <p:cNvSpPr/>
+        </p:nvGraphicFramePr>
+        <p:xfrm>
+          <a:off x="365760" y="868680"/>
+          <a:ext cx="5669280" cy="2834640"/>
+        </p:xfrm>
+        <a:graphic>
+          <a:graphicData uri="http://schemas.openxmlformats.org/drawingml/2006/table">
+            <a:tbl>
+              <a:tblPr firstRow="1" bandRow="1">
+                <a:tableStyleId>{5C22544A-7EE6-4342-B048-85BDC9FD1C3A}</a:tableStyleId>
+              </a:tblPr>
+              <a:tblGrid>
+                <a:gridCol w="3840480"/>
+                <a:gridCol w="1828800"/>
+              </a:tblGrid>
+              <a:tr h="472440">
+                <a:tc>
+                  <a:txBody>
+                    <a:bodyPr wrap="square"/>
+                    <a:lstStyle/>
+                    <a:p>
+                      <a:r>
+                        <a:rPr sz="1600" b="1">
+                          <a:solidFill>
+                            <a:srgbClr val="000000"/>
+                          </a:solidFill>
+                          <a:latin typeface="Times New Roman"/>
+                        </a:rPr>
+                        <a:t>Per radio frame</a:t>
+                      </a:r>
+                    </a:p>
+                  </a:txBody>
+                  <a:tcPr marL="54864" marR="54864" marT="27432" marB="27432">
+                    <a:solidFill>
+                      <a:srgbClr val="C5E0B4"/>
+                    </a:solidFill>
+                  </a:tcPr>
+                </a:tc>
+                <a:tc>
+                  <a:txBody>
+                    <a:bodyPr wrap="square"/>
+                    <a:lstStyle/>
+                    <a:p>
+                      <a:r>
+                        <a:rPr sz="1600" b="1">
+                          <a:solidFill>
+                            <a:srgbClr val="000000"/>
+                          </a:solidFill>
+                          <a:latin typeface="Times New Roman"/>
+                        </a:rPr>
+                        <a:t>Time</a:t>
+                      </a:r>
+                    </a:p>
+                  </a:txBody>
+                  <a:tcPr marL="54864" marR="54864" marT="27432" marB="27432">
+                    <a:solidFill>
+                      <a:srgbClr val="C5E0B4"/>
+                    </a:solidFill>
+                  </a:tcPr>
+                </a:tc>
+              </a:tr>
+              <a:tr h="472440">
+                <a:tc>
+                  <a:txBody>
+                    <a:bodyPr wrap="square"/>
+                    <a:lstStyle/>
+                    <a:p>
+                      <a:r>
+                        <a:rPr sz="1600" b="0">
+                          <a:solidFill>
+                            <a:srgbClr val="000000"/>
+                          </a:solidFill>
+                          <a:latin typeface="Times New Roman"/>
+                        </a:rPr>
+                        <a:t>full frame on air (116 B payload)</a:t>
+                      </a:r>
+                    </a:p>
+                  </a:txBody>
+                  <a:tcPr marL="54864" marR="54864" marT="27432" marB="27432">
+                    <a:solidFill>
+                      <a:srgbClr val="FFFFFF"/>
+                    </a:solidFill>
+                  </a:tcPr>
+                </a:tc>
+                <a:tc>
+                  <a:txBody>
+                    <a:bodyPr wrap="square"/>
+                    <a:lstStyle/>
+                    <a:p>
+                      <a:r>
+                        <a:rPr sz="1600" b="0">
+                          <a:solidFill>
+                            <a:srgbClr val="000000"/>
+                          </a:solidFill>
+                          <a:latin typeface="Times New Roman"/>
+                        </a:rPr>
+                        <a:t>6.3 ms</a:t>
+                      </a:r>
+                    </a:p>
+                  </a:txBody>
+                  <a:tcPr marL="54864" marR="54864" marT="27432" marB="27432">
+                    <a:solidFill>
+                      <a:srgbClr val="FFFFFF"/>
+                    </a:solidFill>
+                  </a:tcPr>
+                </a:tc>
+              </a:tr>
+              <a:tr h="472440">
+                <a:tc>
+                  <a:txBody>
+                    <a:bodyPr wrap="square"/>
+                    <a:lstStyle/>
+                    <a:p>
+                      <a:r>
+                        <a:rPr sz="1600" b="0">
+                          <a:solidFill>
+                            <a:srgbClr val="000000"/>
+                          </a:solidFill>
+                          <a:latin typeface="Times New Roman"/>
+                        </a:rPr>
+                        <a:t>tiny frame (5 B payload)</a:t>
+                      </a:r>
+                    </a:p>
+                  </a:txBody>
+                  <a:tcPr marL="54864" marR="54864" marT="27432" marB="27432">
+                    <a:solidFill>
+                      <a:srgbClr val="F2F8EE"/>
+                    </a:solidFill>
+                  </a:tcPr>
+                </a:tc>
+                <a:tc>
+                  <a:txBody>
+                    <a:bodyPr wrap="square"/>
+                    <a:lstStyle/>
+                    <a:p>
+                      <a:r>
+                        <a:rPr sz="1600" b="0">
+                          <a:solidFill>
+                            <a:srgbClr val="000000"/>
+                          </a:solidFill>
+                          <a:latin typeface="Times New Roman"/>
+                        </a:rPr>
+                        <a:t>2.5 ms</a:t>
+                      </a:r>
+                    </a:p>
+                  </a:txBody>
+                  <a:tcPr marL="54864" marR="54864" marT="27432" marB="27432">
+                    <a:solidFill>
+                      <a:srgbClr val="F2F8EE"/>
+                    </a:solidFill>
+                  </a:tcPr>
+                </a:tc>
+              </a:tr>
+              <a:tr h="472440">
+                <a:tc>
+                  <a:txBody>
+                    <a:bodyPr wrap="square"/>
+                    <a:lstStyle/>
+                    <a:p>
+                      <a:r>
+                        <a:rPr sz="1600" b="0">
+                          <a:solidFill>
+                            <a:srgbClr val="000000"/>
+                          </a:solidFill>
+                          <a:latin typeface="Times New Roman"/>
+                        </a:rPr>
+                        <a:t>→ fixed cost inside the radio chip</a:t>
+                      </a:r>
+                    </a:p>
+                  </a:txBody>
+                  <a:tcPr marL="54864" marR="54864" marT="27432" marB="27432">
+                    <a:solidFill>
+                      <a:srgbClr val="FFFFFF"/>
+                    </a:solidFill>
+                  </a:tcPr>
+                </a:tc>
+                <a:tc>
+                  <a:txBody>
+                    <a:bodyPr wrap="square"/>
+                    <a:lstStyle/>
+                    <a:p>
+                      <a:r>
+                        <a:rPr sz="1600" b="0">
+                          <a:solidFill>
+                            <a:srgbClr val="000000"/>
+                          </a:solidFill>
+                          <a:latin typeface="Times New Roman"/>
+                        </a:rPr>
+                        <a:t>≈ 1.8 ms</a:t>
+                      </a:r>
+                    </a:p>
+                  </a:txBody>
+                  <a:tcPr marL="54864" marR="54864" marT="27432" marB="27432">
+                    <a:solidFill>
+                      <a:srgbClr val="FFFFFF"/>
+                    </a:solidFill>
+                  </a:tcPr>
+                </a:tc>
+              </a:tr>
+              <a:tr h="472440">
+                <a:tc>
+                  <a:txBody>
+                    <a:bodyPr wrap="square"/>
+                    <a:lstStyle/>
+                    <a:p>
+                      <a:r>
+                        <a:rPr sz="1600" b="0">
+                          <a:solidFill>
+                            <a:srgbClr val="000000"/>
+                          </a:solidFill>
+                          <a:latin typeface="Times New Roman"/>
+                        </a:rPr>
+                        <a:t>→ per byte at 250 kbit/s</a:t>
+                      </a:r>
+                    </a:p>
+                  </a:txBody>
+                  <a:tcPr marL="54864" marR="54864" marT="27432" marB="27432">
+                    <a:solidFill>
+                      <a:srgbClr val="F2F8EE"/>
+                    </a:solidFill>
+                  </a:tcPr>
+                </a:tc>
+                <a:tc>
+                  <a:txBody>
+                    <a:bodyPr wrap="square"/>
+                    <a:lstStyle/>
+                    <a:p>
+                      <a:r>
+                        <a:rPr sz="1600" b="0">
+                          <a:solidFill>
+                            <a:srgbClr val="000000"/>
+                          </a:solidFill>
+                          <a:latin typeface="Times New Roman"/>
+                        </a:rPr>
+                        <a:t>32 µs</a:t>
+                      </a:r>
+                    </a:p>
+                  </a:txBody>
+                  <a:tcPr marL="54864" marR="54864" marT="27432" marB="27432">
+                    <a:solidFill>
+                      <a:srgbClr val="F2F8EE"/>
+                    </a:solidFill>
+                  </a:tcPr>
+                </a:tc>
+              </a:tr>
+              <a:tr h="472440">
+                <a:tc>
+                  <a:txBody>
+                    <a:bodyPr wrap="square"/>
+                    <a:lstStyle/>
+                    <a:p>
+                      <a:r>
+                        <a:rPr sz="1600" b="0">
+                          <a:solidFill>
+                            <a:srgbClr val="000000"/>
+                          </a:solidFill>
+                          <a:latin typeface="Times New Roman"/>
+                        </a:rPr>
+                        <a:t>software per frame (AES, CRC, SPI)</a:t>
+                      </a:r>
+                    </a:p>
+                  </a:txBody>
+                  <a:tcPr marL="54864" marR="54864" marT="27432" marB="27432">
+                    <a:solidFill>
+                      <a:srgbClr val="FFFFFF"/>
+                    </a:solidFill>
+                  </a:tcPr>
+                </a:tc>
+                <a:tc>
+                  <a:txBody>
+                    <a:bodyPr wrap="square"/>
+                    <a:lstStyle/>
+                    <a:p>
+                      <a:r>
+                        <a:rPr sz="1600" b="0">
+                          <a:solidFill>
+                            <a:srgbClr val="000000"/>
+                          </a:solidFill>
+                          <a:latin typeface="Times New Roman"/>
+                        </a:rPr>
+                        <a:t>≈ 1 ms</a:t>
+                      </a:r>
+                    </a:p>
+                  </a:txBody>
+                  <a:tcPr marL="54864" marR="54864" marT="27432" marB="27432">
+                    <a:solidFill>
+                      <a:srgbClr val="FFFFFF"/>
+                    </a:solidFill>
+                  </a:tcPr>
+                </a:tc>
+              </a:tr>
+            </a:tbl>
+          </a:graphicData>
+        </a:graphic>
+      </p:graphicFrame>
+      <p:graphicFrame>
+        <p:nvGraphicFramePr>
+          <p:cNvPr id="64" name="Table 63"/>
+          <p:cNvGraphicFramePr>
+            <a:graphicFrameLocks noGrp="1"/>
+          </p:cNvGraphicFramePr>
           <p:nvPr/>
-        </p:nvSpPr>
-        <p:spPr>
-          <a:xfrm>
-            <a:off x="365760" y="2011680"/>
-            <a:ext cx="11430000" cy="1097280"/>
-          </a:xfrm>
-          <a:prstGeom prst="rect">
-            <a:avLst/>
-          </a:prstGeom>
-          <a:solidFill>
-            <a:srgbClr val="F4F4F4"/>
-          </a:solidFill>
-          <a:ln>
-            <a:solidFill>
-              <a:srgbClr val="C8C8C8"/>
-            </a:solidFill>
-          </a:ln>
-          <a:effectLst/>
-        </p:spPr>
-        <p:style>
-          <a:lnRef idx="1">
-            <a:schemeClr val="accent1"/>
-          </a:lnRef>
-          <a:fillRef idx="3">
-            <a:schemeClr val="accent1"/>
-          </a:fillRef>
-          <a:effectRef idx="2">
-            <a:schemeClr val="accent1"/>
-          </a:effectRef>
-          <a:fontRef idx="minor">
-            <a:schemeClr val="lt1"/>
-          </a:fontRef>
-        </p:style>
-        <p:txBody>
-          <a:bodyPr rtlCol="0" anchor="t" wrap="none" lIns="73152" rIns="73152" tIns="73152" bIns="73152"/>
-          <a:lstStyle/>
-          <a:p>
-            <a:pPr algn="l"/>
-            <a:r>
-              <a:rPr sz="1475" b="1">
-                <a:solidFill>
-                  <a:srgbClr val="808080"/>
-                </a:solidFill>
-                <a:latin typeface="Consolas"/>
-              </a:rPr>
-              <a:t>after</a:t>
-            </a:r>
-          </a:p>
-          <a:p>
-            <a:pPr algn="l">
-              <a:lnSpc>
-                <a:spcPct val="100000"/>
-              </a:lnSpc>
-            </a:pPr>
-            <a:r>
-              <a:rPr sz="1475">
-                <a:solidFill>
-                  <a:srgbClr val="1F1F1F"/>
-                </a:solidFill>
-                <a:latin typeface="Consolas"/>
-              </a:rPr>
-              <a:t>static inline uint64_t top_mask(uint64_t x) { return (uint64_t)((int64_t)x &gt;&gt; 63); }</a:t>
-            </a:r>
-          </a:p>
-          <a:p>
-            <a:pPr algn="l">
-              <a:lnSpc>
-                <a:spcPct val="100000"/>
-              </a:lnSpc>
-            </a:pPr>
-            <a:r>
-              <a:rPr sz="1475">
-                <a:solidFill>
-                  <a:srgbClr val="1F1F1F"/>
-                </a:solidFill>
-                <a:latin typeface="Consolas"/>
-              </a:rPr>
-              <a:t>uint64_t m = top_mask(xh);       // arithmetic shift: no multiply</a:t>
-            </a:r>
-          </a:p>
-          <a:p>
-            <a:pPr algn="l">
-              <a:lnSpc>
-                <a:spcPct val="100000"/>
-              </a:lnSpc>
-            </a:pPr>
-            <a:r>
-              <a:rPr sz="1475">
-                <a:solidFill>
-                  <a:srgbClr val="1F1F1F"/>
-                </a:solidFill>
-                <a:latin typeface="Consolas"/>
-              </a:rPr>
-              <a:t>zh ^= vh &amp; m;</a:t>
-            </a:r>
-          </a:p>
-        </p:txBody>
-      </p:sp>
+        </p:nvGraphicFramePr>
+        <p:xfrm>
+          <a:off x="6309360" y="868680"/>
+          <a:ext cx="5669280" cy="2834640"/>
+        </p:xfrm>
+        <a:graphic>
+          <a:graphicData uri="http://schemas.openxmlformats.org/drawingml/2006/table">
+            <a:tbl>
+              <a:tblPr firstRow="1" bandRow="1">
+                <a:tableStyleId>{5C22544A-7EE6-4342-B048-85BDC9FD1C3A}</a:tableStyleId>
+              </a:tblPr>
+              <a:tblGrid>
+                <a:gridCol w="2468880"/>
+                <a:gridCol w="3200400"/>
+              </a:tblGrid>
+              <a:tr h="472440">
+                <a:tc>
+                  <a:txBody>
+                    <a:bodyPr wrap="square"/>
+                    <a:lstStyle/>
+                    <a:p>
+                      <a:r>
+                        <a:rPr sz="1500" b="1">
+                          <a:solidFill>
+                            <a:srgbClr val="000000"/>
+                          </a:solidFill>
+                          <a:latin typeface="Times New Roman"/>
+                        </a:rPr>
+                        <a:t>Radio setting in this code</a:t>
+                      </a:r>
+                    </a:p>
+                  </a:txBody>
+                  <a:tcPr marL="54864" marR="54864" marT="27432" marB="27432">
+                    <a:solidFill>
+                      <a:srgbClr val="C5E0B4"/>
+                    </a:solidFill>
+                  </a:tcPr>
+                </a:tc>
+                <a:tc>
+                  <a:txBody>
+                    <a:bodyPr wrap="square"/>
+                    <a:lstStyle/>
+                    <a:p>
+                      <a:r>
+                        <a:rPr sz="1500" b="1">
+                          <a:solidFill>
+                            <a:srgbClr val="000000"/>
+                          </a:solidFill>
+                          <a:latin typeface="Times New Roman"/>
+                        </a:rPr>
+                        <a:t>Value</a:t>
+                      </a:r>
+                    </a:p>
+                  </a:txBody>
+                  <a:tcPr marL="54864" marR="54864" marT="27432" marB="27432">
+                    <a:solidFill>
+                      <a:srgbClr val="C5E0B4"/>
+                    </a:solidFill>
+                  </a:tcPr>
+                </a:tc>
+              </a:tr>
+              <a:tr h="472440">
+                <a:tc>
+                  <a:txBody>
+                    <a:bodyPr wrap="square"/>
+                    <a:lstStyle/>
+                    <a:p>
+                      <a:r>
+                        <a:rPr sz="1500" b="0">
+                          <a:solidFill>
+                            <a:srgbClr val="000000"/>
+                          </a:solidFill>
+                          <a:latin typeface="Times New Roman"/>
+                        </a:rPr>
+                        <a:t>channel</a:t>
+                      </a:r>
+                    </a:p>
+                  </a:txBody>
+                  <a:tcPr marL="54864" marR="54864" marT="27432" marB="27432">
+                    <a:solidFill>
+                      <a:srgbClr val="FFFFFF"/>
+                    </a:solidFill>
+                  </a:tcPr>
+                </a:tc>
+                <a:tc>
+                  <a:txBody>
+                    <a:bodyPr wrap="square"/>
+                    <a:lstStyle/>
+                    <a:p>
+                      <a:r>
+                        <a:rPr sz="1500" b="0">
+                          <a:solidFill>
+                            <a:srgbClr val="000000"/>
+                          </a:solidFill>
+                          <a:latin typeface="Times New Roman"/>
+                        </a:rPr>
+                        <a:t>11</a:t>
+                      </a:r>
+                    </a:p>
+                  </a:txBody>
+                  <a:tcPr marL="54864" marR="54864" marT="27432" marB="27432">
+                    <a:solidFill>
+                      <a:srgbClr val="FFFFFF"/>
+                    </a:solidFill>
+                  </a:tcPr>
+                </a:tc>
+              </a:tr>
+              <a:tr h="472440">
+                <a:tc>
+                  <a:txBody>
+                    <a:bodyPr wrap="square"/>
+                    <a:lstStyle/>
+                    <a:p>
+                      <a:r>
+                        <a:rPr sz="1500" b="0">
+                          <a:solidFill>
+                            <a:srgbClr val="000000"/>
+                          </a:solidFill>
+                          <a:latin typeface="Times New Roman"/>
+                        </a:rPr>
+                        <a:t>bit rate</a:t>
+                      </a:r>
+                    </a:p>
+                  </a:txBody>
+                  <a:tcPr marL="54864" marR="54864" marT="27432" marB="27432">
+                    <a:solidFill>
+                      <a:srgbClr val="F2F8EE"/>
+                    </a:solidFill>
+                  </a:tcPr>
+                </a:tc>
+                <a:tc>
+                  <a:txBody>
+                    <a:bodyPr wrap="square"/>
+                    <a:lstStyle/>
+                    <a:p>
+                      <a:r>
+                        <a:rPr sz="1500" b="0">
+                          <a:solidFill>
+                            <a:srgbClr val="000000"/>
+                          </a:solidFill>
+                          <a:latin typeface="Times New Roman"/>
+                        </a:rPr>
+                        <a:t>250 kbit/s (turbo mode loses frames)</a:t>
+                      </a:r>
+                    </a:p>
+                  </a:txBody>
+                  <a:tcPr marL="54864" marR="54864" marT="27432" marB="27432">
+                    <a:solidFill>
+                      <a:srgbClr val="F2F8EE"/>
+                    </a:solidFill>
+                  </a:tcPr>
+                </a:tc>
+              </a:tr>
+              <a:tr h="472440">
+                <a:tc>
+                  <a:txBody>
+                    <a:bodyPr wrap="square"/>
+                    <a:lstStyle/>
+                    <a:p>
+                      <a:r>
+                        <a:rPr sz="1500" b="0">
+                          <a:solidFill>
+                            <a:srgbClr val="000000"/>
+                          </a:solidFill>
+                          <a:latin typeface="Times New Roman"/>
+                        </a:rPr>
+                        <a:t>radio SPI clock</a:t>
+                      </a:r>
+                    </a:p>
+                  </a:txBody>
+                  <a:tcPr marL="54864" marR="54864" marT="27432" marB="27432">
+                    <a:solidFill>
+                      <a:srgbClr val="FFFFFF"/>
+                    </a:solidFill>
+                  </a:tcPr>
+                </a:tc>
+                <a:tc>
+                  <a:txBody>
+                    <a:bodyPr wrap="square"/>
+                    <a:lstStyle/>
+                    <a:p>
+                      <a:r>
+                        <a:rPr sz="1500" b="0">
+                          <a:solidFill>
+                            <a:srgbClr val="000000"/>
+                          </a:solidFill>
+                          <a:latin typeface="Times New Roman"/>
+                        </a:rPr>
+                        <a:t>4.7 MHz (9.4 MHz gives bit errors)</a:t>
+                      </a:r>
+                    </a:p>
+                  </a:txBody>
+                  <a:tcPr marL="54864" marR="54864" marT="27432" marB="27432">
+                    <a:solidFill>
+                      <a:srgbClr val="FFFFFF"/>
+                    </a:solidFill>
+                  </a:tcPr>
+                </a:tc>
+              </a:tr>
+              <a:tr h="472440">
+                <a:tc>
+                  <a:txBody>
+                    <a:bodyPr wrap="square"/>
+                    <a:lstStyle/>
+                    <a:p>
+                      <a:r>
+                        <a:rPr sz="1500" b="0">
+                          <a:solidFill>
+                            <a:srgbClr val="000000"/>
+                          </a:solidFill>
+                          <a:latin typeface="Times New Roman"/>
+                        </a:rPr>
+                        <a:t>CSMA back-off</a:t>
+                      </a:r>
+                    </a:p>
+                  </a:txBody>
+                  <a:tcPr marL="54864" marR="54864" marT="27432" marB="27432">
+                    <a:solidFill>
+                      <a:srgbClr val="F2F8EE"/>
+                    </a:solidFill>
+                  </a:tcPr>
+                </a:tc>
+                <a:tc>
+                  <a:txBody>
+                    <a:bodyPr wrap="square"/>
+                    <a:lstStyle/>
+                    <a:p>
+                      <a:r>
+                        <a:rPr sz="1500" b="0">
+                          <a:solidFill>
+                            <a:srgbClr val="000000"/>
+                          </a:solidFill>
+                          <a:latin typeface="Times New Roman"/>
+                        </a:rPr>
+                        <a:t>off (only two nodes)</a:t>
+                      </a:r>
+                    </a:p>
+                  </a:txBody>
+                  <a:tcPr marL="54864" marR="54864" marT="27432" marB="27432">
+                    <a:solidFill>
+                      <a:srgbClr val="F2F8EE"/>
+                    </a:solidFill>
+                  </a:tcPr>
+                </a:tc>
+              </a:tr>
+              <a:tr h="472440">
+                <a:tc>
+                  <a:txBody>
+                    <a:bodyPr wrap="square"/>
+                    <a:lstStyle/>
+                    <a:p>
+                      <a:r>
+                        <a:rPr sz="1500" b="0">
+                          <a:solidFill>
+                            <a:srgbClr val="000000"/>
+                          </a:solidFill>
+                          <a:latin typeface="Times New Roman"/>
+                        </a:rPr>
+                        <a:t>record size</a:t>
+                      </a:r>
+                    </a:p>
+                  </a:txBody>
+                  <a:tcPr marL="54864" marR="54864" marT="27432" marB="27432">
+                    <a:solidFill>
+                      <a:srgbClr val="FFFFFF"/>
+                    </a:solidFill>
+                  </a:tcPr>
+                </a:tc>
+                <a:tc>
+                  <a:txBody>
+                    <a:bodyPr wrap="square"/>
+                    <a:lstStyle/>
+                    <a:p>
+                      <a:r>
+                        <a:rPr sz="1500" b="0">
+                          <a:solidFill>
+                            <a:srgbClr val="000000"/>
+                          </a:solidFill>
+                          <a:latin typeface="Times New Roman"/>
+                        </a:rPr>
+                        <a:t>206 B = two full frames</a:t>
+                      </a:r>
+                    </a:p>
+                  </a:txBody>
+                  <a:tcPr marL="54864" marR="54864" marT="27432" marB="27432">
+                    <a:solidFill>
+                      <a:srgbClr val="FFFFFF"/>
+                    </a:solidFill>
+                  </a:tcPr>
+                </a:tc>
+              </a:tr>
+            </a:tbl>
+          </a:graphicData>
+        </a:graphic>
+      </p:graphicFrame>
       <p:sp>
         <p:nvSpPr>
           <p:cNvPr id="65" name="TextBox 64"/>
@@ -29227,8 +29516,8 @@
         </p:nvSpPr>
         <p:spPr>
           <a:xfrm>
-            <a:off x="365760" y="3383280"/>
-            <a:ext cx="11430000" cy="2926080"/>
+            <a:off x="365760" y="3977639"/>
+            <a:ext cx="11430000" cy="2194560"/>
           </a:xfrm>
           <a:prstGeom prst="rect">
             <a:avLst/>
@@ -29248,67 +29537,13 @@
               <a:buChar char="•"/>
             </a:pPr>
             <a:r>
-              <a:rPr sz="1800" b="0">
+              <a:rPr sz="1700" b="0">
                 <a:solidFill>
                   <a:srgbClr val="000000"/>
                 </a:solidFill>
                 <a:latin typeface="Times New Roman"/>
               </a:rPr>
-              <a:t>GCC recognises </a:t>
-            </a:r>
-            <a:r>
-              <a:rPr sz="1600" b="0">
-                <a:solidFill>
-                  <a:srgbClr val="8B1A1A"/>
-                </a:solidFill>
-                <a:latin typeface="Consolas"/>
-              </a:rPr>
-              <a:t>(0 - bit) &amp; v</a:t>
-            </a:r>
-            <a:r>
-              <a:rPr sz="1800" b="0">
-                <a:solidFill>
-                  <a:srgbClr val="000000"/>
-                </a:solidFill>
-                <a:latin typeface="Times New Roman"/>
-              </a:rPr>
-              <a:t> and emits </a:t>
-            </a:r>
-            <a:r>
-              <a:rPr sz="1600" b="0">
-                <a:solidFill>
-                  <a:srgbClr val="8B1A1A"/>
-                </a:solidFill>
-                <a:latin typeface="Consolas"/>
-              </a:rPr>
-              <a:t>bit * v</a:t>
-            </a:r>
-            <a:r>
-              <a:rPr sz="1800" b="0">
-                <a:solidFill>
-                  <a:srgbClr val="000000"/>
-                </a:solidFill>
-                <a:latin typeface="Times New Roman"/>
-              </a:rPr>
-              <a:t> — usually faster. But this core's multiplier is </a:t>
-            </a:r>
-            <a:r>
-              <a:rPr sz="1800" b="1">
-                <a:solidFill>
-                  <a:srgbClr val="000000"/>
-                </a:solidFill>
-                <a:latin typeface="Times New Roman"/>
-              </a:rPr>
-              <a:t>bit-serial: ~64 cycles per mul</a:t>
-            </a:r>
-            <a:r>
-              <a:rPr sz="1800" b="0">
-                <a:solidFill>
-                  <a:srgbClr val="000000"/>
-                </a:solidFill>
-                <a:latin typeface="Times New Roman"/>
-              </a:rPr>
-              <a:t>.</a:t>
+              <a:t>A data frame costs ≈ 9.8 ms (1 MiB = 10,183 frames in 99.6 s); the radio chip sets the pace, not the software.</a:t>
             </a:r>
           </a:p>
           <a:p>
@@ -29319,13 +29554,13 @@
               <a:buChar char="•"/>
             </a:pPr>
             <a:r>
-              <a:rPr sz="1800" b="0">
+              <a:rPr sz="1700" b="0">
                 <a:solidFill>
                   <a:srgbClr val="000000"/>
                 </a:solidFill>
                 <a:latin typeface="Times New Roman"/>
               </a:rPr>
-              <a:t>Two muls per bit × 128 bits per GHASH block: 128 of every 155 cycles were multiplies.</a:t>
+              <a:t>So the way to go faster is a faster link — (4/4).</a:t>
             </a:r>
           </a:p>
           <a:p>
@@ -29336,49 +29571,13 @@
               <a:buChar char="•"/>
             </a:pPr>
             <a:r>
-              <a:rPr sz="1800" b="0">
+              <a:rPr sz="1700" b="0">
                 <a:solidFill>
                   <a:srgbClr val="000000"/>
                 </a:solidFill>
                 <a:latin typeface="Times New Roman"/>
               </a:rPr>
-              <a:t>Result: GHASH </a:t>
-            </a:r>
-            <a:r>
-              <a:rPr sz="1800" b="1">
-                <a:solidFill>
-                  <a:srgbClr val="000000"/>
-                </a:solidFill>
-                <a:latin typeface="Times New Roman"/>
-              </a:rPr>
-              <a:t>19,777 → 3,326 cycles</a:t>
-            </a:r>
-            <a:r>
-              <a:rPr sz="1800" b="0">
-                <a:solidFill>
-                  <a:srgbClr val="000000"/>
-                </a:solidFill>
-                <a:latin typeface="Times New Roman"/>
-              </a:rPr>
-              <a:t> (6×). Same trap fixed in the CRC-32 code. Check with </a:t>
-            </a:r>
-            <a:r>
-              <a:rPr sz="1600" b="0">
-                <a:solidFill>
-                  <a:srgbClr val="8B1A1A"/>
-                </a:solidFill>
-                <a:latin typeface="Consolas"/>
-              </a:rPr>
-              <a:t>objdump -d … | grep mul</a:t>
-            </a:r>
-            <a:r>
-              <a:rPr sz="1800" b="0">
-                <a:solidFill>
-                  <a:srgbClr val="000000"/>
-                </a:solidFill>
-                <a:latin typeface="Times New Roman"/>
-              </a:rPr>
-              <a:t>.</a:t>
+              <a:t>Compare your runs with a control run made at the same time: channel 11 has interference spells.</a:t>
             </a:r>
           </a:p>
         </p:txBody>
@@ -29458,18 +29657,18 @@
               </a:buClr>
             </a:pPr>
             <a:r>
-              <a:rPr lang="en-US" sz="3600" b="1" spc="-1" dirty="0">
+              <a:rPr lang="en-US" sz="2800" b="1" spc="-1" dirty="0">
                 <a:latin typeface="Times New Roman" panose="02020603050405020304" pitchFamily="18" charset="0"/>
                 <a:cs typeface="Times New Roman" panose="02020603050405020304" pitchFamily="18" charset="0"/>
               </a:rPr>
-              <a:t>5. Making It Faster </a:t>
-            </a:r>
-            <a:r>
-              <a:rPr lang="en-US" sz="3600" spc="-1" dirty="0">
+              <a:t>5. Speed: Measure and Choose a Link </a:t>
+            </a:r>
+            <a:r>
+              <a:rPr lang="en-US" sz="2800" spc="-1" dirty="0">
                 <a:latin typeface="Times New Roman" panose="02020603050405020304" pitchFamily="18" charset="0"/>
                 <a:cs typeface="Times New Roman" panose="02020603050405020304" pitchFamily="18" charset="0"/>
               </a:rPr>
-              <a:t>(3/7) Table-based AES</a:t>
+              <a:t>(3/4) Fast crypto on this core</a:t>
             </a:r>
           </a:p>
         </p:txBody>
@@ -29532,92 +29731,17 @@
           </a:p>
         </p:txBody>
       </p:sp>
-      <p:sp>
-        <p:nvSpPr>
-          <p:cNvPr id="63" name="TextBox 62"/>
-          <p:cNvSpPr txBox="1"/>
-          <p:nvPr/>
-        </p:nvSpPr>
-        <p:spPr>
-          <a:xfrm>
-            <a:off x="365760" y="868680"/>
-            <a:ext cx="11430000" cy="1645920"/>
-          </a:xfrm>
-          <a:prstGeom prst="rect">
-            <a:avLst/>
-          </a:prstGeom>
-          <a:noFill/>
-        </p:spPr>
-        <p:txBody>
-          <a:bodyPr wrap="square" anchor="t">
-            <a:spAutoFit/>
-          </a:bodyPr>
-          <a:lstStyle/>
-          <a:p>
-            <a:pPr marL="256032" indent="-219456">
-              <a:spcAft>
-                <a:spcPts val="400"/>
-              </a:spcAft>
-              <a:buChar char="•"/>
-            </a:pPr>
-            <a:r>
-              <a:rPr sz="1800" b="0">
-                <a:solidFill>
-                  <a:srgbClr val="000000"/>
-                </a:solidFill>
-                <a:latin typeface="Times New Roman"/>
-              </a:rPr>
-              <a:t>The byte-by-byte AES rounds became the 32-bit </a:t>
-            </a:r>
-            <a:r>
-              <a:rPr sz="1800" b="1">
-                <a:solidFill>
-                  <a:srgbClr val="000000"/>
-                </a:solidFill>
-                <a:latin typeface="Times New Roman"/>
-              </a:rPr>
-              <a:t>T-table</a:t>
-            </a:r>
-            <a:r>
-              <a:rPr sz="1800" b="0">
-                <a:solidFill>
-                  <a:srgbClr val="000000"/>
-                </a:solidFill>
-                <a:latin typeface="Times New Roman"/>
-              </a:rPr>
-              <a:t> form: each round is 16 table look-ups and XORs on whole columns.</a:t>
-            </a:r>
-          </a:p>
-          <a:p>
-            <a:pPr marL="256032" indent="-219456">
-              <a:spcAft>
-                <a:spcPts val="400"/>
-              </a:spcAft>
-              <a:buChar char="•"/>
-            </a:pPr>
-            <a:r>
-              <a:rPr sz="1800" b="0">
-                <a:solidFill>
-                  <a:srgbClr val="000000"/>
-                </a:solidFill>
-                <a:latin typeface="Times New Roman"/>
-              </a:rPr>
-              <a:t>One 1 KB table, built at first use from the S-box; the other three are its byte rotations.</a:t>
-            </a:r>
-          </a:p>
-        </p:txBody>
-      </p:sp>
       <p:graphicFrame>
         <p:nvGraphicFramePr>
-          <p:cNvPr id="64" name="Table 63"/>
+          <p:cNvPr id="63" name="Table 62"/>
           <p:cNvGraphicFramePr>
             <a:graphicFrameLocks noGrp="1"/>
           </p:cNvGraphicFramePr>
           <p:nvPr/>
         </p:nvGraphicFramePr>
         <p:xfrm>
-          <a:off x="365760" y="2651760"/>
-          <a:ext cx="8229600" cy="2011680"/>
+          <a:off x="365760" y="868680"/>
+          <a:ext cx="6400800" cy="1645920"/>
         </p:xfrm>
         <a:graphic>
           <a:graphicData uri="http://schemas.openxmlformats.org/drawingml/2006/table">
@@ -29626,19 +29750,39 @@
                 <a:tableStyleId>{5C22544A-7EE6-4342-B048-85BDC9FD1C3A}</a:tableStyleId>
               </a:tblPr>
               <a:tblGrid>
-                <a:gridCol w="3566160"/>
-                <a:gridCol w="1554480"/>
-                <a:gridCol w="1554480"/>
-                <a:gridCol w="1554480"/>
+                <a:gridCol w="4572000"/>
+                <a:gridCol w="1828800"/>
               </a:tblGrid>
-              <a:tr h="502920">
+              <a:tr h="411480">
                 <a:tc>
                   <a:txBody>
                     <a:bodyPr wrap="square"/>
                     <a:lstStyle/>
                     <a:p>
                       <a:r>
-                        <a:rPr sz="1700" b="1">
+                        <a:rPr sz="1600" b="1">
+                          <a:solidFill>
+                            <a:srgbClr val="000000"/>
+                          </a:solidFill>
+                          <a:latin typeface="Times New Roman"/>
+                        </a:rPr>
+                        <a:t>Measured in this code, 75 MHz</a:t>
+                      </a:r>
+                    </a:p>
+                  </a:txBody>
+                  <a:tcPr marL="54864" marR="54864" marT="27432" marB="27432">
+                    <a:solidFill>
+                      <a:srgbClr val="C5E0B4"/>
+                    </a:solidFill>
+                  </a:tcPr>
+                </a:tc>
+                <a:tc>
+                  <a:txBody>
+                    <a:bodyPr wrap="square"/>
+                    <a:lstStyle/>
+                    <a:p>
+                      <a:r>
+                        <a:rPr sz="1600" b="1">
                           <a:solidFill>
                             <a:srgbClr val="000000"/>
                           </a:solidFill>
@@ -29654,87 +29798,21 @@
                     </a:solidFill>
                   </a:tcPr>
                 </a:tc>
+              </a:tr>
+              <a:tr h="411480">
                 <a:tc>
                   <a:txBody>
                     <a:bodyPr wrap="square"/>
                     <a:lstStyle/>
                     <a:p>
                       <a:r>
-                        <a:rPr sz="1700" b="1">
+                        <a:rPr sz="1600" b="0">
                           <a:solidFill>
                             <a:srgbClr val="000000"/>
                           </a:solidFill>
                           <a:latin typeface="Times New Roman"/>
                         </a:rPr>
-                        <a:t>Before</a:t>
-                      </a:r>
-                    </a:p>
-                  </a:txBody>
-                  <a:tcPr marL="54864" marR="54864" marT="27432" marB="27432">
-                    <a:solidFill>
-                      <a:srgbClr val="C5E0B4"/>
-                    </a:solidFill>
-                  </a:tcPr>
-                </a:tc>
-                <a:tc>
-                  <a:txBody>
-                    <a:bodyPr wrap="square"/>
-                    <a:lstStyle/>
-                    <a:p>
-                      <a:r>
-                        <a:rPr sz="1700" b="1">
-                          <a:solidFill>
-                            <a:srgbClr val="000000"/>
-                          </a:solidFill>
-                          <a:latin typeface="Times New Roman"/>
-                        </a:rPr>
-                        <a:t>After</a:t>
-                      </a:r>
-                    </a:p>
-                  </a:txBody>
-                  <a:tcPr marL="54864" marR="54864" marT="27432" marB="27432">
-                    <a:solidFill>
-                      <a:srgbClr val="C5E0B4"/>
-                    </a:solidFill>
-                  </a:tcPr>
-                </a:tc>
-                <a:tc>
-                  <a:txBody>
-                    <a:bodyPr wrap="square"/>
-                    <a:lstStyle/>
-                    <a:p>
-                      <a:r>
-                        <a:rPr sz="1700" b="1">
-                          <a:solidFill>
-                            <a:srgbClr val="000000"/>
-                          </a:solidFill>
-                          <a:latin typeface="Times New Roman"/>
-                        </a:rPr>
-                        <a:t>Speed-up</a:t>
-                      </a:r>
-                    </a:p>
-                  </a:txBody>
-                  <a:tcPr marL="54864" marR="54864" marT="27432" marB="27432">
-                    <a:solidFill>
-                      <a:srgbClr val="C5E0B4"/>
-                    </a:solidFill>
-                  </a:tcPr>
-                </a:tc>
-              </a:tr>
-              <a:tr h="502920">
-                <a:tc>
-                  <a:txBody>
-                    <a:bodyPr wrap="square"/>
-                    <a:lstStyle/>
-                    <a:p>
-                      <a:r>
-                        <a:rPr sz="1700" b="0">
-                          <a:solidFill>
-                            <a:srgbClr val="000000"/>
-                          </a:solidFill>
-                          <a:latin typeface="Times New Roman"/>
-                        </a:rPr>
-                        <a:t>AES-256 block</a:t>
+                        <a:t>AES-256, one block (T-table)</a:t>
                       </a:r>
                     </a:p>
                   </a:txBody>
@@ -29750,29 +29828,7 @@
                     <a:lstStyle/>
                     <a:p>
                       <a:r>
-                        <a:rPr sz="1700" b="0">
-                          <a:solidFill>
-                            <a:srgbClr val="000000"/>
-                          </a:solidFill>
-                          <a:latin typeface="Times New Roman"/>
-                        </a:rPr>
-                        <a:t>14,123</a:t>
-                      </a:r>
-                    </a:p>
-                  </a:txBody>
-                  <a:tcPr marL="54864" marR="54864" marT="27432" marB="27432">
-                    <a:solidFill>
-                      <a:srgbClr val="FFFFFF"/>
-                    </a:solidFill>
-                  </a:tcPr>
-                </a:tc>
-                <a:tc>
-                  <a:txBody>
-                    <a:bodyPr wrap="square"/>
-                    <a:lstStyle/>
-                    <a:p>
-                      <a:r>
-                        <a:rPr sz="1700" b="0">
+                        <a:rPr sz="1600" b="0">
                           <a:solidFill>
                             <a:srgbClr val="000000"/>
                           </a:solidFill>
@@ -29788,43 +29844,21 @@
                     </a:solidFill>
                   </a:tcPr>
                 </a:tc>
+              </a:tr>
+              <a:tr h="411480">
                 <a:tc>
                   <a:txBody>
                     <a:bodyPr wrap="square"/>
                     <a:lstStyle/>
                     <a:p>
                       <a:r>
-                        <a:rPr sz="1700" b="0">
+                        <a:rPr sz="1600" b="0">
                           <a:solidFill>
                             <a:srgbClr val="000000"/>
                           </a:solidFill>
                           <a:latin typeface="Times New Roman"/>
                         </a:rPr>
-                        <a:t>6.3×</a:t>
-                      </a:r>
-                    </a:p>
-                  </a:txBody>
-                  <a:tcPr marL="54864" marR="54864" marT="27432" marB="27432">
-                    <a:solidFill>
-                      <a:srgbClr val="FFFFFF"/>
-                    </a:solidFill>
-                  </a:tcPr>
-                </a:tc>
-              </a:tr>
-              <a:tr h="502920">
-                <a:tc>
-                  <a:txBody>
-                    <a:bodyPr wrap="square"/>
-                    <a:lstStyle/>
-                    <a:p>
-                      <a:r>
-                        <a:rPr sz="1700" b="0">
-                          <a:solidFill>
-                            <a:srgbClr val="000000"/>
-                          </a:solidFill>
-                          <a:latin typeface="Times New Roman"/>
-                        </a:rPr>
-                        <a:t>GHASH multiply</a:t>
+                        <a:t>GHASH, one block multiply</a:t>
                       </a:r>
                     </a:p>
                   </a:txBody>
@@ -29840,29 +29874,7 @@
                     <a:lstStyle/>
                     <a:p>
                       <a:r>
-                        <a:rPr sz="1700" b="0">
-                          <a:solidFill>
-                            <a:srgbClr val="000000"/>
-                          </a:solidFill>
-                          <a:latin typeface="Times New Roman"/>
-                        </a:rPr>
-                        <a:t>19,777</a:t>
-                      </a:r>
-                    </a:p>
-                  </a:txBody>
-                  <a:tcPr marL="54864" marR="54864" marT="27432" marB="27432">
-                    <a:solidFill>
-                      <a:srgbClr val="F2F8EE"/>
-                    </a:solidFill>
-                  </a:tcPr>
-                </a:tc>
-                <a:tc>
-                  <a:txBody>
-                    <a:bodyPr wrap="square"/>
-                    <a:lstStyle/>
-                    <a:p>
-                      <a:r>
-                        <a:rPr sz="1700" b="0">
+                        <a:rPr sz="1600" b="0">
                           <a:solidFill>
                             <a:srgbClr val="000000"/>
                           </a:solidFill>
@@ -29878,37 +29890,15 @@
                     </a:solidFill>
                   </a:tcPr>
                 </a:tc>
+              </a:tr>
+              <a:tr h="411480">
                 <a:tc>
                   <a:txBody>
                     <a:bodyPr wrap="square"/>
                     <a:lstStyle/>
                     <a:p>
                       <a:r>
-                        <a:rPr sz="1700" b="0">
-                          <a:solidFill>
-                            <a:srgbClr val="000000"/>
-                          </a:solidFill>
-                          <a:latin typeface="Times New Roman"/>
-                        </a:rPr>
-                        <a:t>5.9×</a:t>
-                      </a:r>
-                    </a:p>
-                  </a:txBody>
-                  <a:tcPr marL="54864" marR="54864" marT="27432" marB="27432">
-                    <a:solidFill>
-                      <a:srgbClr val="F2F8EE"/>
-                    </a:solidFill>
-                  </a:tcPr>
-                </a:tc>
-              </a:tr>
-              <a:tr h="502920">
-                <a:tc>
-                  <a:txBody>
-                    <a:bodyPr wrap="square"/>
-                    <a:lstStyle/>
-                    <a:p>
-                      <a:r>
-                        <a:rPr sz="1700" b="0">
+                        <a:rPr sz="1600" b="0">
                           <a:solidFill>
                             <a:srgbClr val="000000"/>
                           </a:solidFill>
@@ -29930,57 +29920,13 @@
                     <a:lstStyle/>
                     <a:p>
                       <a:r>
-                        <a:rPr sz="1700" b="0">
-                          <a:solidFill>
-                            <a:srgbClr val="000000"/>
-                          </a:solidFill>
-                          <a:latin typeface="Times New Roman"/>
-                        </a:rPr>
-                        <a:t>490,695</a:t>
-                      </a:r>
-                    </a:p>
-                  </a:txBody>
-                  <a:tcPr marL="54864" marR="54864" marT="27432" marB="27432">
-                    <a:solidFill>
-                      <a:srgbClr val="FFFFFF"/>
-                    </a:solidFill>
-                  </a:tcPr>
-                </a:tc>
-                <a:tc>
-                  <a:txBody>
-                    <a:bodyPr wrap="square"/>
-                    <a:lstStyle/>
-                    <a:p>
-                      <a:r>
-                        <a:rPr sz="1700" b="0">
+                        <a:rPr sz="1600" b="0">
                           <a:solidFill>
                             <a:srgbClr val="000000"/>
                           </a:solidFill>
                           <a:latin typeface="Times New Roman"/>
                         </a:rPr>
                         <a:t>91,741</a:t>
-                      </a:r>
-                    </a:p>
-                  </a:txBody>
-                  <a:tcPr marL="54864" marR="54864" marT="27432" marB="27432">
-                    <a:solidFill>
-                      <a:srgbClr val="FFFFFF"/>
-                    </a:solidFill>
-                  </a:tcPr>
-                </a:tc>
-                <a:tc>
-                  <a:txBody>
-                    <a:bodyPr wrap="square"/>
-                    <a:lstStyle/>
-                    <a:p>
-                      <a:r>
-                        <a:rPr sz="1700" b="0">
-                          <a:solidFill>
-                            <a:srgbClr val="000000"/>
-                          </a:solidFill>
-                          <a:latin typeface="Times New Roman"/>
-                        </a:rPr>
-                        <a:t>5.3×</a:t>
                       </a:r>
                     </a:p>
                   </a:txBody>
@@ -29997,14 +29943,117 @@
       </p:graphicFrame>
       <p:sp>
         <p:nvSpPr>
+          <p:cNvPr id="64" name="Rectangle 63"/>
+          <p:cNvSpPr/>
+          <p:nvPr/>
+        </p:nvSpPr>
+        <p:spPr>
+          <a:xfrm>
+            <a:off x="365760" y="2697480"/>
+            <a:ext cx="11430000" cy="1005840"/>
+          </a:xfrm>
+          <a:prstGeom prst="rect">
+            <a:avLst/>
+          </a:prstGeom>
+          <a:solidFill>
+            <a:srgbClr val="F4F4F4"/>
+          </a:solidFill>
+          <a:ln>
+            <a:solidFill>
+              <a:srgbClr val="C8C8C8"/>
+            </a:solidFill>
+          </a:ln>
+          <a:effectLst/>
+        </p:spPr>
+        <p:style>
+          <a:lnRef idx="1">
+            <a:schemeClr val="accent1"/>
+          </a:lnRef>
+          <a:fillRef idx="3">
+            <a:schemeClr val="accent1"/>
+          </a:fillRef>
+          <a:effectRef idx="2">
+            <a:schemeClr val="accent1"/>
+          </a:effectRef>
+          <a:fontRef idx="minor">
+            <a:schemeClr val="lt1"/>
+          </a:fontRef>
+        </p:style>
+        <p:txBody>
+          <a:bodyPr rtlCol="0" anchor="t" wrap="none" lIns="73152" rIns="73152" tIns="73152" bIns="73152"/>
+          <a:lstStyle/>
+          <a:p>
+            <a:pPr algn="l"/>
+            <a:r>
+              <a:rPr sz="1327" b="1">
+                <a:solidFill>
+                  <a:srgbClr val="808080"/>
+                </a:solidFill>
+                <a:latin typeface="Consolas"/>
+              </a:rPr>
+              <a:t>Simplified — common/crypto/aes_gcm.c</a:t>
+            </a:r>
+          </a:p>
+          <a:p>
+            <a:pPr algn="l">
+              <a:lnSpc>
+                <a:spcPct val="100000"/>
+              </a:lnSpc>
+            </a:pPr>
+            <a:r>
+              <a:rPr sz="1327">
+                <a:solidFill>
+                  <a:srgbClr val="1F1F1F"/>
+                </a:solidFill>
+                <a:latin typeface="Consolas"/>
+              </a:rPr>
+              <a:t>static inline uint64_t top_mask(uint64_t x) { return (uint64_t)((int64_t)x &gt;&gt; 63); }</a:t>
+            </a:r>
+          </a:p>
+          <a:p>
+            <a:pPr algn="l">
+              <a:lnSpc>
+                <a:spcPct val="100000"/>
+              </a:lnSpc>
+            </a:pPr>
+            <a:r>
+              <a:rPr sz="1327">
+                <a:solidFill>
+                  <a:srgbClr val="1F1F1F"/>
+                </a:solidFill>
+                <a:latin typeface="Consolas"/>
+              </a:rPr>
+              <a:t>uint64_t m = top_mask(xh);   // all ones if the top bit is set: a shift, no multiply</a:t>
+            </a:r>
+          </a:p>
+          <a:p>
+            <a:pPr algn="l">
+              <a:lnSpc>
+                <a:spcPct val="100000"/>
+              </a:lnSpc>
+            </a:pPr>
+            <a:r>
+              <a:rPr sz="1327">
+                <a:solidFill>
+                  <a:srgbClr val="1F1F1F"/>
+                </a:solidFill>
+                <a:latin typeface="Consolas"/>
+              </a:rPr>
+              <a:t>zh ^= vh &amp; m;</a:t>
+            </a:r>
+          </a:p>
+        </p:txBody>
+      </p:sp>
+      <p:sp>
+        <p:nvSpPr>
           <p:cNvPr id="65" name="TextBox 64"/>
           <p:cNvSpPr txBox="1"/>
           <p:nvPr/>
         </p:nvSpPr>
         <p:spPr>
           <a:xfrm>
-            <a:off x="365760" y="4846320"/>
-            <a:ext cx="11430000" cy="1463040"/>
+            <a:off x="365760" y="3931920"/>
+            <a:ext cx="11430000" cy="2468880"/>
           </a:xfrm>
           <a:prstGeom prst="rect">
             <a:avLst/>
@@ -30024,43 +30073,61 @@
               <a:buChar char="•"/>
             </a:pPr>
             <a:r>
-              <a:rPr sz="1700" b="0">
+              <a:rPr sz="1600" b="0">
                 <a:solidFill>
                   <a:srgbClr val="000000"/>
                 </a:solidFill>
                 <a:latin typeface="Times New Roman"/>
               </a:rPr>
-              <a:t>All known-answer tests (NIST GCM, RFC 3610, RFC 9529) still PASS. Bulk speed on the board now: encrypt </a:t>
-            </a:r>
-            <a:r>
-              <a:rPr sz="1700" b="1">
+              <a:t>This core's multiplier is </a:t>
+            </a:r>
+            <a:r>
+              <a:rPr sz="1600" b="1">
                 <a:solidFill>
                   <a:srgbClr val="000000"/>
                 </a:solidFill>
                 <a:latin typeface="Times New Roman"/>
               </a:rPr>
-              <a:t>162 KB/s</a:t>
-            </a:r>
-            <a:r>
-              <a:rPr sz="1700" b="0">
+              <a:t>bit-serial: ~64 cycles per mul</a:t>
+            </a:r>
+            <a:r>
+              <a:rPr sz="1600" b="0">
                 <a:solidFill>
                   <a:srgbClr val="000000"/>
                 </a:solidFill>
                 <a:latin typeface="Times New Roman"/>
               </a:rPr>
-              <a:t>, decrypt </a:t>
-            </a:r>
-            <a:r>
-              <a:rPr sz="1700" b="1">
+              <a:t>. GCC turns a masked select like </a:t>
+            </a:r>
+            <a:r>
+              <a:rPr sz="1400" b="0">
+                <a:solidFill>
+                  <a:srgbClr val="8B1A1A"/>
+                </a:solidFill>
+                <a:latin typeface="Consolas"/>
+              </a:rPr>
+              <a:t>(0 - bit) &amp; v</a:t>
+            </a:r>
+            <a:r>
+              <a:rPr sz="1600" b="0">
                 <a:solidFill>
                   <a:srgbClr val="000000"/>
                 </a:solidFill>
                 <a:latin typeface="Times New Roman"/>
               </a:rPr>
-              <a:t>153 KB/s</a:t>
-            </a:r>
-            <a:r>
-              <a:rPr sz="1700" b="0">
+              <a:t> into a multiply, so the hot loops build their masks with shifts instead. Check a build: </a:t>
+            </a:r>
+            <a:r>
+              <a:rPr sz="1400" b="0">
+                <a:solidFill>
+                  <a:srgbClr val="8B1A1A"/>
+                </a:solidFill>
+                <a:latin typeface="Consolas"/>
+              </a:rPr>
+              <a:t>riscv64-unknown-elf-objdump -d &lt;elf&gt; | grep -c mul</a:t>
+            </a:r>
+            <a:r>
+              <a:rPr sz="1600" b="0">
                 <a:solidFill>
                   <a:srgbClr val="000000"/>
                 </a:solidFill>
@@ -30077,13 +30144,66 @@
               <a:buChar char="•"/>
             </a:pPr>
             <a:r>
-              <a:rPr sz="1700" b="0">
+              <a:rPr sz="1600" b="0">
                 <a:solidFill>
                   <a:srgbClr val="000000"/>
                 </a:solidFill>
                 <a:latin typeface="Times New Roman"/>
               </a:rPr>
-              <a:t>Cost: 1 KB of RAM — the largest builds still fit.</a:t>
+              <a:t>AES uses the 32-bit T-table form: one 1 KB table built at first use, 16 look-ups per round.</a:t>
+            </a:r>
+          </a:p>
+          <a:p>
+            <a:pPr marL="256032" indent="-219456">
+              <a:spcAft>
+                <a:spcPts val="400"/>
+              </a:spcAft>
+              <a:buChar char="•"/>
+            </a:pPr>
+            <a:r>
+              <a:rPr sz="1600" b="0">
+                <a:solidFill>
+                  <a:srgbClr val="000000"/>
+                </a:solidFill>
+                <a:latin typeface="Times New Roman"/>
+              </a:rPr>
+              <a:t>See it on your board: after a 1 MiB file transfer, the </a:t>
+            </a:r>
+            <a:r>
+              <a:rPr sz="1400" b="0">
+                <a:solidFill>
+                  <a:srgbClr val="8B1A1A"/>
+                </a:solidFill>
+                <a:latin typeface="Consolas"/>
+              </a:rPr>
+              <a:t>PERF encrypt</a:t>
+            </a:r>
+            <a:r>
+              <a:rPr sz="1600" b="0">
+                <a:solidFill>
+                  <a:srgbClr val="000000"/>
+                </a:solidFill>
+                <a:latin typeface="Times New Roman"/>
+              </a:rPr>
+              <a:t> / </a:t>
+            </a:r>
+            <a:r>
+              <a:rPr sz="1400" b="0">
+                <a:solidFill>
+                  <a:srgbClr val="8B1A1A"/>
+                </a:solidFill>
+                <a:latin typeface="Consolas"/>
+              </a:rPr>
+              <a:t>PERF decrypt</a:t>
+            </a:r>
+            <a:r>
+              <a:rPr sz="1600" b="0">
+                <a:solidFill>
+                  <a:srgbClr val="000000"/>
+                </a:solidFill>
+                <a:latin typeface="Times New Roman"/>
+              </a:rPr>
+              <a:t> lines show about 160 KB/s for AES-256-GCM — far above the link speed (short echo records alone show less).</a:t>
             </a:r>
           </a:p>
         </p:txBody>
@@ -30163,18 +30283,18 @@
               </a:buClr>
             </a:pPr>
             <a:r>
-              <a:rPr lang="en-US" sz="3600" b="1" spc="-1" dirty="0">
+              <a:rPr lang="en-US" sz="2400" b="1" spc="-1" dirty="0">
                 <a:latin typeface="Times New Roman" panose="02020603050405020304" pitchFamily="18" charset="0"/>
                 <a:cs typeface="Times New Roman" panose="02020603050405020304" pitchFamily="18" charset="0"/>
               </a:rPr>
-              <a:t>5. Making It Faster </a:t>
-            </a:r>
-            <a:r>
-              <a:rPr lang="en-US" sz="3600" spc="-1" dirty="0">
+              <a:t>5. Speed: Measure and Choose a Link </a:t>
+            </a:r>
+            <a:r>
+              <a:rPr lang="en-US" sz="2400" spc="-1" dirty="0">
                 <a:latin typeface="Times New Roman" panose="02020603050405020304" pitchFamily="18" charset="0"/>
                 <a:cs typeface="Times New Roman" panose="02020603050405020304" pitchFamily="18" charset="0"/>
               </a:rPr>
-              <a:t>(4/7) The radio side</a:t>
+              <a:t>(4/4) A wired link: UART1 at 921,600 baud</a:t>
             </a:r>
           </a:p>
         </p:txBody>
@@ -30247,7 +30367,7 @@
         </p:nvGraphicFramePr>
         <p:xfrm>
           <a:off x="365760" y="868680"/>
-          <a:ext cx="11430000" cy="3383280"/>
+          <a:ext cx="11430000" cy="1463040"/>
         </p:xfrm>
         <a:graphic>
           <a:graphicData uri="http://schemas.openxmlformats.org/drawingml/2006/table">
@@ -30256,24 +30376,24 @@
                 <a:tableStyleId>{5C22544A-7EE6-4342-B048-85BDC9FD1C3A}</a:tableStyleId>
               </a:tblPr>
               <a:tblGrid>
-                <a:gridCol w="4206240"/>
-                <a:gridCol w="5394960"/>
-                <a:gridCol w="1828800"/>
+                <a:gridCol w="4663440"/>
+                <a:gridCol w="3291840"/>
+                <a:gridCol w="3474720"/>
               </a:tblGrid>
-              <a:tr h="483325">
+              <a:tr h="487680">
                 <a:tc>
                   <a:txBody>
                     <a:bodyPr wrap="square"/>
                     <a:lstStyle/>
                     <a:p>
                       <a:r>
-                        <a:rPr sz="1600" b="1">
+                        <a:rPr sz="1500" b="1">
                           <a:solidFill>
                             <a:srgbClr val="000000"/>
                           </a:solidFill>
                           <a:latin typeface="Times New Roman"/>
                         </a:rPr>
-                        <a:t>Change</a:t>
+                        <a:t>TBD3, measured on the boards</a:t>
                       </a:r>
                     </a:p>
                   </a:txBody>
@@ -30289,13 +30409,13 @@
                     <a:lstStyle/>
                     <a:p>
                       <a:r>
-                        <a:rPr sz="1600" b="1">
+                        <a:rPr sz="1500" b="1">
                           <a:solidFill>
                             <a:srgbClr val="000000"/>
                           </a:solidFill>
                           <a:latin typeface="Times New Roman"/>
                         </a:rPr>
-                        <a:t>Why</a:t>
+                        <a:t>Radio (MRF24J40)</a:t>
                       </a:r>
                     </a:p>
                   </a:txBody>
@@ -30311,13 +30431,13 @@
                     <a:lstStyle/>
                     <a:p>
                       <a:r>
-                        <a:rPr sz="1600" b="1">
+                        <a:rPr sz="1500" b="1">
                           <a:solidFill>
                             <a:srgbClr val="000000"/>
                           </a:solidFill>
                           <a:latin typeface="Times New Roman"/>
                         </a:rPr>
-                        <a:t>Kept?</a:t>
+                        <a:t>UART1, 921,600 baud</a:t>
                       </a:r>
                     </a:p>
                   </a:txBody>
@@ -30328,20 +30448,20 @@
                   </a:tcPr>
                 </a:tc>
               </a:tr>
-              <a:tr h="483325">
+              <a:tr h="487680">
                 <a:tc>
                   <a:txBody>
                     <a:bodyPr wrap="square"/>
                     <a:lstStyle/>
                     <a:p>
                       <a:r>
-                        <a:rPr sz="1600" b="0">
+                        <a:rPr sz="1500" b="0">
                           <a:solidFill>
                             <a:srgbClr val="000000"/>
                           </a:solidFill>
                           <a:latin typeface="Times New Roman"/>
                         </a:rPr>
-                        <a:t>Burst SPI: whole FIFO in one command</a:t>
+                        <a:t>Handshake</a:t>
                       </a:r>
                     </a:p>
                   </a:txBody>
@@ -30357,13 +30477,13 @@
                     <a:lstStyle/>
                     <a:p>
                       <a:r>
-                        <a:rPr sz="1600" b="0">
+                        <a:rPr sz="1500" b="0">
                           <a:solidFill>
                             <a:srgbClr val="000000"/>
                           </a:solidFill>
                           <a:latin typeface="Times New Roman"/>
                         </a:rPr>
-                        <a:t>1 SPI byte per data byte instead of 3</a:t>
+                        <a:t>1.25 s</a:t>
                       </a:r>
                     </a:p>
                   </a:txBody>
@@ -30379,13 +30499,13 @@
                     <a:lstStyle/>
                     <a:p>
                       <a:r>
-                        <a:rPr sz="1600" b="0">
+                        <a:rPr sz="1500" b="0">
                           <a:solidFill>
                             <a:srgbClr val="000000"/>
                           </a:solidFill>
                           <a:latin typeface="Times New Roman"/>
                         </a:rPr>
-                        <a:t>yes</a:t>
+                        <a:t>0.77 s</a:t>
                       </a:r>
                     </a:p>
                   </a:txBody>
@@ -30396,20 +30516,20 @@
                   </a:tcPr>
                 </a:tc>
               </a:tr>
-              <a:tr h="483325">
+              <a:tr h="487680">
                 <a:tc>
                   <a:txBody>
                     <a:bodyPr wrap="square"/>
                     <a:lstStyle/>
                     <a:p>
                       <a:r>
-                        <a:rPr sz="1600" b="0">
+                        <a:rPr sz="1500" b="0">
                           <a:solidFill>
                             <a:srgbClr val="000000"/>
                           </a:solidFill>
                           <a:latin typeface="Times New Roman"/>
                         </a:rPr>
-                        <a:t>No CSMA back-off before sending</a:t>
+                        <a:t>1 MiB, SD card A → SD card B</a:t>
                       </a:r>
                     </a:p>
                   </a:txBody>
@@ -30425,13 +30545,13 @@
                     <a:lstStyle/>
                     <a:p>
                       <a:r>
-                        <a:rPr sz="1600" b="0">
+                        <a:rPr sz="1500" b="0">
                           <a:solidFill>
                             <a:srgbClr val="000000"/>
                           </a:solidFill>
                           <a:latin typeface="Times New Roman"/>
                         </a:rPr>
-                        <a:t>two nodes taking turns: no one to avoid</a:t>
+                        <a:t>99.6 s (10.5 KB/s)</a:t>
                       </a:r>
                     </a:p>
                   </a:txBody>
@@ -30447,285 +30567,13 @@
                     <a:lstStyle/>
                     <a:p>
                       <a:r>
-                        <a:rPr sz="1600" b="0">
+                        <a:rPr sz="1500" b="0">
                           <a:solidFill>
                             <a:srgbClr val="000000"/>
                           </a:solidFill>
                           <a:latin typeface="Times New Roman"/>
                         </a:rPr>
-                        <a:t>yes</a:t>
-                      </a:r>
-                    </a:p>
-                  </a:txBody>
-                  <a:tcPr marL="54864" marR="54864" marT="27432" marB="27432">
-                    <a:solidFill>
-                      <a:srgbClr val="F2F8EE"/>
-                    </a:solidFill>
-                  </a:tcPr>
-                </a:tc>
-              </a:tr>
-              <a:tr h="483325">
-                <a:tc>
-                  <a:txBody>
-                    <a:bodyPr wrap="square"/>
-                    <a:lstStyle/>
-                    <a:p>
-                      <a:r>
-                        <a:rPr sz="1600" b="0">
-                          <a:solidFill>
-                            <a:srgbClr val="000000"/>
-                          </a:solidFill>
-                          <a:latin typeface="Times New Roman"/>
-                        </a:rPr>
-                        <a:t>206-byte records</a:t>
-                      </a:r>
-                    </a:p>
-                  </a:txBody>
-                  <a:tcPr marL="54864" marR="54864" marT="27432" marB="27432">
-                    <a:solidFill>
-                      <a:srgbClr val="FFFFFF"/>
-                    </a:solidFill>
-                  </a:tcPr>
-                </a:tc>
-                <a:tc>
-                  <a:txBody>
-                    <a:bodyPr wrap="square"/>
-                    <a:lstStyle/>
-                    <a:p>
-                      <a:r>
-                        <a:rPr sz="1600" b="0">
-                          <a:solidFill>
-                            <a:srgbClr val="000000"/>
-                          </a:solidFill>
-                          <a:latin typeface="Times New Roman"/>
-                        </a:rPr>
-                        <a:t>fill both radio fragments</a:t>
-                      </a:r>
-                    </a:p>
-                  </a:txBody>
-                  <a:tcPr marL="54864" marR="54864" marT="27432" marB="27432">
-                    <a:solidFill>
-                      <a:srgbClr val="FFFFFF"/>
-                    </a:solidFill>
-                  </a:tcPr>
-                </a:tc>
-                <a:tc>
-                  <a:txBody>
-                    <a:bodyPr wrap="square"/>
-                    <a:lstStyle/>
-                    <a:p>
-                      <a:r>
-                        <a:rPr sz="1600" b="0">
-                          <a:solidFill>
-                            <a:srgbClr val="000000"/>
-                          </a:solidFill>
-                          <a:latin typeface="Times New Roman"/>
-                        </a:rPr>
-                        <a:t>yes</a:t>
-                      </a:r>
-                    </a:p>
-                  </a:txBody>
-                  <a:tcPr marL="54864" marR="54864" marT="27432" marB="27432">
-                    <a:solidFill>
-                      <a:srgbClr val="FFFFFF"/>
-                    </a:solidFill>
-                  </a:tcPr>
-                </a:tc>
-              </a:tr>
-              <a:tr h="483325">
-                <a:tc>
-                  <a:txBody>
-                    <a:bodyPr wrap="square"/>
-                    <a:lstStyle/>
-                    <a:p>
-                      <a:r>
-                        <a:rPr sz="1600" b="0">
-                          <a:solidFill>
-                            <a:srgbClr val="000000"/>
-                          </a:solidFill>
-                          <a:latin typeface="Times New Roman"/>
-                        </a:rPr>
-                        <a:t>Turbo mode 625 kbit/s</a:t>
-                      </a:r>
-                    </a:p>
-                  </a:txBody>
-                  <a:tcPr marL="54864" marR="54864" marT="27432" marB="27432">
-                    <a:solidFill>
-                      <a:srgbClr val="F2F8EE"/>
-                    </a:solidFill>
-                  </a:tcPr>
-                </a:tc>
-                <a:tc>
-                  <a:txBody>
-                    <a:bodyPr wrap="square"/>
-                    <a:lstStyle/>
-                    <a:p>
-                      <a:r>
-                        <a:rPr sz="1600" b="0">
-                          <a:solidFill>
-                            <a:srgbClr val="000000"/>
-                          </a:solidFill>
-                          <a:latin typeface="Times New Roman"/>
-                        </a:rPr>
-                        <a:t>~2/3 of frames lost on these modules</a:t>
-                      </a:r>
-                    </a:p>
-                  </a:txBody>
-                  <a:tcPr marL="54864" marR="54864" marT="27432" marB="27432">
-                    <a:solidFill>
-                      <a:srgbClr val="F2F8EE"/>
-                    </a:solidFill>
-                  </a:tcPr>
-                </a:tc>
-                <a:tc>
-                  <a:txBody>
-                    <a:bodyPr wrap="square"/>
-                    <a:lstStyle/>
-                    <a:p>
-                      <a:r>
-                        <a:rPr sz="1600" b="1">
-                          <a:solidFill>
-                            <a:srgbClr val="000000"/>
-                          </a:solidFill>
-                          <a:latin typeface="Times New Roman"/>
-                        </a:rPr>
-                        <a:t>no</a:t>
-                      </a:r>
-                    </a:p>
-                  </a:txBody>
-                  <a:tcPr marL="54864" marR="54864" marT="27432" marB="27432">
-                    <a:solidFill>
-                      <a:srgbClr val="F2F8EE"/>
-                    </a:solidFill>
-                  </a:tcPr>
-                </a:tc>
-              </a:tr>
-              <a:tr h="483325">
-                <a:tc>
-                  <a:txBody>
-                    <a:bodyPr wrap="square"/>
-                    <a:lstStyle/>
-                    <a:p>
-                      <a:r>
-                        <a:rPr sz="1600" b="0">
-                          <a:solidFill>
-                            <a:srgbClr val="000000"/>
-                          </a:solidFill>
-                          <a:latin typeface="Times New Roman"/>
-                        </a:rPr>
-                        <a:t>Channel 26 (above Wi-Fi)</a:t>
-                      </a:r>
-                    </a:p>
-                  </a:txBody>
-                  <a:tcPr marL="54864" marR="54864" marT="27432" marB="27432">
-                    <a:solidFill>
-                      <a:srgbClr val="FFFFFF"/>
-                    </a:solidFill>
-                  </a:tcPr>
-                </a:tc>
-                <a:tc>
-                  <a:txBody>
-                    <a:bodyPr wrap="square"/>
-                    <a:lstStyle/>
-                    <a:p>
-                      <a:r>
-                        <a:rPr sz="1600" b="0">
-                          <a:solidFill>
-                            <a:srgbClr val="000000"/>
-                          </a:solidFill>
-                          <a:latin typeface="Times New Roman"/>
-                        </a:rPr>
-                        <a:t>much worse than channel 11 here</a:t>
-                      </a:r>
-                    </a:p>
-                  </a:txBody>
-                  <a:tcPr marL="54864" marR="54864" marT="27432" marB="27432">
-                    <a:solidFill>
-                      <a:srgbClr val="FFFFFF"/>
-                    </a:solidFill>
-                  </a:tcPr>
-                </a:tc>
-                <a:tc>
-                  <a:txBody>
-                    <a:bodyPr wrap="square"/>
-                    <a:lstStyle/>
-                    <a:p>
-                      <a:r>
-                        <a:rPr sz="1600" b="1">
-                          <a:solidFill>
-                            <a:srgbClr val="000000"/>
-                          </a:solidFill>
-                          <a:latin typeface="Times New Roman"/>
-                        </a:rPr>
-                        <a:t>no</a:t>
-                      </a:r>
-                    </a:p>
-                  </a:txBody>
-                  <a:tcPr marL="54864" marR="54864" marT="27432" marB="27432">
-                    <a:solidFill>
-                      <a:srgbClr val="FFFFFF"/>
-                    </a:solidFill>
-                  </a:tcPr>
-                </a:tc>
-              </a:tr>
-              <a:tr h="483330">
-                <a:tc>
-                  <a:txBody>
-                    <a:bodyPr wrap="square"/>
-                    <a:lstStyle/>
-                    <a:p>
-                      <a:r>
-                        <a:rPr sz="1600" b="0">
-                          <a:solidFill>
-                            <a:srgbClr val="000000"/>
-                          </a:solidFill>
-                          <a:latin typeface="Times New Roman"/>
-                        </a:rPr>
-                        <a:t>SPI at 9.4 MHz</a:t>
-                      </a:r>
-                    </a:p>
-                  </a:txBody>
-                  <a:tcPr marL="54864" marR="54864" marT="27432" marB="27432">
-                    <a:solidFill>
-                      <a:srgbClr val="F2F8EE"/>
-                    </a:solidFill>
-                  </a:tcPr>
-                </a:tc>
-                <a:tc>
-                  <a:txBody>
-                    <a:bodyPr wrap="square"/>
-                    <a:lstStyle/>
-                    <a:p>
-                      <a:r>
-                        <a:rPr sz="1600" b="0">
-                          <a:solidFill>
-                            <a:srgbClr val="000000"/>
-                          </a:solidFill>
-                          <a:latin typeface="Times New Roman"/>
-                        </a:rPr>
-                        <a:t>byte errors in the burst test</a:t>
-                      </a:r>
-                    </a:p>
-                  </a:txBody>
-                  <a:tcPr marL="54864" marR="54864" marT="27432" marB="27432">
-                    <a:solidFill>
-                      <a:srgbClr val="F2F8EE"/>
-                    </a:solidFill>
-                  </a:tcPr>
-                </a:tc>
-                <a:tc>
-                  <a:txBody>
-                    <a:bodyPr wrap="square"/>
-                    <a:lstStyle/>
-                    <a:p>
-                      <a:r>
-                        <a:rPr sz="1600" b="1">
-                          <a:solidFill>
-                            <a:srgbClr val="000000"/>
-                          </a:solidFill>
-                          <a:latin typeface="Times New Roman"/>
-                        </a:rPr>
-                        <a:t>no</a:t>
+                        <a:t>32.2 s (32.6 KB/s)</a:t>
                       </a:r>
                     </a:p>
                   </a:txBody>
@@ -30748,8 +30596,8 @@
         </p:nvSpPr>
         <p:spPr>
           <a:xfrm>
-            <a:off x="365760" y="4480560"/>
-            <a:ext cx="11430000" cy="1371600"/>
+            <a:off x="365760" y="2606040"/>
+            <a:ext cx="11430000" cy="3657600"/>
           </a:xfrm>
           <a:prstGeom prst="rect">
             <a:avLst/>
@@ -30775,7 +30623,112 @@
                 </a:solidFill>
                 <a:latin typeface="Times New Roman"/>
               </a:rPr>
-              <a:t>Each change tested on the boards; channel 11 has interference spells, so every experiment was compared with a control run made at the same time.</a:t>
+              <a:t>Wiring: A's JB2 (TX) → B's JB1 (RX), B's JB2 (TX) → A's JB1 (RX), JB5 GND ↔ JB5 GND (Lesson 1, section 4).</a:t>
+            </a:r>
+          </a:p>
+          <a:p>
+            <a:pPr marL="256032" indent="-219456">
+              <a:spcAft>
+                <a:spcPts val="400"/>
+              </a:spcAft>
+              <a:buChar char="•"/>
+            </a:pPr>
+            <a:r>
+              <a:rPr sz="1700" b="0">
+                <a:solidFill>
+                  <a:srgbClr val="000000"/>
+                </a:solidFill>
+                <a:latin typeface="Times New Roman"/>
+              </a:rPr>
+              <a:t>Build both images with </a:t>
+            </a:r>
+            <a:r>
+              <a:rPr sz="1500" b="0">
+                <a:solidFill>
+                  <a:srgbClr val="8B1A1A"/>
+                </a:solidFill>
+                <a:latin typeface="Consolas"/>
+              </a:rPr>
+              <a:t>TRANSPORT=uart</a:t>
+            </a:r>
+            <a:r>
+              <a:rPr sz="1700" b="0">
+                <a:solidFill>
+                  <a:srgbClr val="000000"/>
+                </a:solidFill>
+                <a:latin typeface="Times New Roman"/>
+              </a:rPr>
+              <a:t>; </a:t>
+            </a:r>
+            <a:r>
+              <a:rPr sz="1500" b="0">
+                <a:solidFill>
+                  <a:srgbClr val="8B1A1A"/>
+                </a:solidFill>
+                <a:latin typeface="Consolas"/>
+              </a:rPr>
+              <a:t>EXTRA_CFLAGS=-DUART1_BAUD=&lt;baud&gt;</a:t>
+            </a:r>
+            <a:r>
+              <a:rPr sz="1700" b="0">
+                <a:solidFill>
+                  <a:srgbClr val="000000"/>
+                </a:solidFill>
+                <a:latin typeface="Times New Roman"/>
+              </a:rPr>
+              <a:t> changes the speed (both boards alike).</a:t>
+            </a:r>
+          </a:p>
+          <a:p>
+            <a:pPr marL="256032" indent="-219456">
+              <a:spcAft>
+                <a:spcPts val="400"/>
+              </a:spcAft>
+              <a:buChar char="•"/>
+            </a:pPr>
+            <a:r>
+              <a:rPr sz="1700" b="0">
+                <a:solidFill>
+                  <a:srgbClr val="000000"/>
+                </a:solidFill>
+                <a:latin typeface="Times New Roman"/>
+              </a:rPr>
+              <a:t>Flow control (</a:t>
+            </a:r>
+            <a:r>
+              <a:rPr sz="1700" b="0" i="1">
+                <a:solidFill>
+                  <a:srgbClr val="000000"/>
+                </a:solidFill>
+                <a:latin typeface="Times New Roman"/>
+              </a:rPr>
+              <a:t>edhoc_transport.c</a:t>
+            </a:r>
+            <a:r>
+              <a:rPr sz="1700" b="0">
+                <a:solidFill>
+                  <a:srgbClr val="000000"/>
+                </a:solidFill>
+                <a:latin typeface="Times New Roman"/>
+              </a:rPr>
+              <a:t>): while a board waits for a frame it sends a READY byte every 0.2 ms; the sender waits for a fresh READY, then sends the whole frame at line rate. A receiver busy with AES or the SD card cannot lose bytes.</a:t>
+            </a:r>
+          </a:p>
+          <a:p>
+            <a:pPr marL="256032" indent="-219456">
+              <a:spcAft>
+                <a:spcPts val="400"/>
+              </a:spcAft>
+              <a:buChar char="•"/>
+            </a:pPr>
+            <a:r>
+              <a:rPr sz="1700" b="0">
+                <a:solidFill>
+                  <a:srgbClr val="000000"/>
+                </a:solidFill>
+                <a:latin typeface="Times New Roman"/>
+              </a:rPr>
+              <a:t>Card to card, the SD card now takes a visible share: about 5.7 s of the 32.2 s on each board.</a:t>
             </a:r>
           </a:p>
         </p:txBody>
@@ -30800,30 +30753,19 @@
       <p:grpSpPr/>
       <p:sp>
         <p:nvSpPr>
-          <p:cNvPr id="10" name="CustomShape 6">
-            <a:extLst>
-              <a:ext uri="{FF2B5EF4-FFF2-40B4-BE49-F238E27FC236}">
-                <a16:creationId xmlns:a16="http://schemas.microsoft.com/office/drawing/2014/main" id="{CB76DC60-C0C9-436D-8956-EE4CA394869E}"/>
-              </a:ext>
-            </a:extLst>
-          </p:cNvPr>
+          <p:cNvPr id="41" name="CustomShape 3"/>
           <p:cNvSpPr/>
           <p:nvPr/>
         </p:nvSpPr>
         <p:spPr>
           <a:xfrm>
-            <a:off x="-6000" y="0"/>
-            <a:ext cx="12198000" cy="644877"/>
+            <a:off x="0" y="1277373"/>
+            <a:ext cx="12186000" cy="1014209"/>
           </a:xfrm>
           <a:prstGeom prst="rect">
             <a:avLst/>
           </a:prstGeom>
-          <a:solidFill>
-            <a:schemeClr val="accent6">
-              <a:lumMod val="40000"/>
-              <a:lumOff val="60000"/>
-            </a:schemeClr>
-          </a:solidFill>
+          <a:noFill/>
           <a:ln>
             <a:noFill/>
           </a:ln>
@@ -30846,34 +30788,98 @@
           </a:bodyPr>
           <a:lstStyle/>
           <a:p>
-            <a:pPr marL="360" algn="ctr">
+            <a:pPr algn="ctr">
               <a:lnSpc>
                 <a:spcPct val="100000"/>
               </a:lnSpc>
-              <a:buClr>
-                <a:srgbClr val="000000"/>
-              </a:buClr>
-            </a:pPr>
-            <a:r>
-              <a:rPr lang="en-US" sz="3600" b="1" spc="-1" dirty="0">
-                <a:latin typeface="Times New Roman" panose="02020603050405020304" pitchFamily="18" charset="0"/>
-                <a:cs typeface="Times New Roman" panose="02020603050405020304" pitchFamily="18" charset="0"/>
-              </a:rPr>
-              <a:t>5. Making It Faster </a:t>
-            </a:r>
-            <a:r>
-              <a:rPr lang="en-US" sz="3600" spc="-1" dirty="0">
-                <a:latin typeface="Times New Roman" panose="02020603050405020304" pitchFamily="18" charset="0"/>
-                <a:cs typeface="Times New Roman" panose="02020603050405020304" pitchFamily="18" charset="0"/>
-              </a:rPr>
-              <a:t>(5/7) Result</a:t>
-            </a:r>
+            </a:pPr>
+            <a:r>
+              <a:rPr lang="en-US" sz="6000" b="0" strike="noStrike" spc="-1" dirty="0">
+                <a:solidFill>
+                  <a:srgbClr val="000000"/>
+                </a:solidFill>
+                <a:latin typeface="Times New Roman"/>
+                <a:ea typeface="DejaVu Sans"/>
+              </a:rPr>
+              <a:t>Outline</a:t>
+            </a:r>
+            <a:endParaRPr lang="en-US" sz="6000" b="0" strike="noStrike" spc="-1" dirty="0">
+              <a:latin typeface="Arial"/>
+            </a:endParaRPr>
           </a:p>
         </p:txBody>
       </p:sp>
       <p:sp>
         <p:nvSpPr>
-          <p:cNvPr id="62" name="CustomShape 2"/>
+          <p:cNvPr id="42" name="CustomShape 4"/>
+          <p:cNvSpPr/>
+          <p:nvPr/>
+        </p:nvSpPr>
+        <p:spPr>
+          <a:xfrm>
+            <a:off x="6972480" y="105480"/>
+            <a:ext cx="5213520" cy="1110240"/>
+          </a:xfrm>
+          <a:prstGeom prst="rect">
+            <a:avLst/>
+          </a:prstGeom>
+          <a:solidFill>
+            <a:schemeClr val="bg2">
+              <a:lumMod val="75000"/>
+            </a:schemeClr>
+          </a:solidFill>
+          <a:ln>
+            <a:noFill/>
+          </a:ln>
+        </p:spPr>
+        <p:style>
+          <a:lnRef idx="2">
+            <a:schemeClr val="accent1">
+              <a:shade val="50000"/>
+            </a:schemeClr>
+          </a:lnRef>
+          <a:fillRef idx="1">
+            <a:schemeClr val="accent1"/>
+          </a:fillRef>
+          <a:effectRef idx="0">
+            <a:schemeClr val="accent1"/>
+          </a:effectRef>
+          <a:fontRef idx="minor"/>
+        </p:style>
+        <p:txBody>
+          <a:bodyPr/>
+          <a:lstStyle/>
+          <a:p>
+            <a:endParaRPr lang="en-US"/>
+          </a:p>
+        </p:txBody>
+      </p:sp>
+      <p:pic>
+        <p:nvPicPr>
+          <p:cNvPr id="43" name="Picture 4" descr="http://vlsilab.ee.uec.ac.jp/images/logo.png"/>
+          <p:cNvPicPr/>
+          <p:nvPr/>
+        </p:nvPicPr>
+        <p:blipFill>
+          <a:blip r:embed="rId2"/>
+          <a:stretch/>
+        </p:blipFill>
+        <p:spPr>
+          <a:xfrm>
+            <a:off x="7713720" y="152280"/>
+            <a:ext cx="3730320" cy="1035720"/>
+          </a:xfrm>
+          <a:prstGeom prst="rect">
+            <a:avLst/>
+          </a:prstGeom>
+          <a:ln>
+            <a:noFill/>
+          </a:ln>
+        </p:spPr>
+      </p:pic>
+      <p:sp>
+        <p:nvSpPr>
+          <p:cNvPr id="45" name="CustomShape 6"/>
           <p:cNvSpPr/>
           <p:nvPr/>
         </p:nvSpPr>
@@ -30913,7 +30919,7 @@
                 <a:spcPct val="100000"/>
               </a:lnSpc>
             </a:pPr>
-            <a:fld id="{32452110-F6D1-439F-92C4-7A3912DA20B0}" type="slidenum">
+            <a:fld id="{976D1C0D-8C0B-4FED-8F9E-AAED3AF2BED7}" type="slidenum">
               <a:rPr lang="en-US" sz="1600" b="1" strike="noStrike" spc="-1">
                 <a:solidFill>
                   <a:srgbClr val="000000"/>
@@ -30929,457 +30935,282 @@
           </a:p>
         </p:txBody>
       </p:sp>
-      <p:graphicFrame>
-        <p:nvGraphicFramePr>
-          <p:cNvPr id="63" name="Chart 62"/>
-          <p:cNvGraphicFramePr>
-            <a:graphicFrameLocks noGrp="1"/>
-          </p:cNvGraphicFramePr>
-          <p:nvPr/>
-        </p:nvGraphicFramePr>
-        <p:xfrm>
-          <a:off x="274320" y="822960"/>
-          <a:ext cx="5120640" cy="5303520"/>
-        </p:xfrm>
-        <a:graphic>
-          <a:graphicData uri="http://schemas.openxmlformats.org/drawingml/2006/chart">
-            <c:chart xmlns:c="http://schemas.openxmlformats.org/drawingml/2006/chart" r:id="rId3"/>
-          </a:graphicData>
-        </a:graphic>
-      </p:graphicFrame>
-      <p:graphicFrame>
-        <p:nvGraphicFramePr>
-          <p:cNvPr id="64" name="Table 63"/>
-          <p:cNvGraphicFramePr>
-            <a:graphicFrameLocks noGrp="1"/>
-          </p:cNvGraphicFramePr>
-          <p:nvPr/>
-        </p:nvGraphicFramePr>
-        <p:xfrm>
-          <a:off x="5669280" y="914400"/>
-          <a:ext cx="6309360" cy="2560320"/>
-        </p:xfrm>
-        <a:graphic>
-          <a:graphicData uri="http://schemas.openxmlformats.org/drawingml/2006/table">
-            <a:tbl>
-              <a:tblPr firstRow="1" bandRow="1">
-                <a:tableStyleId>{5C22544A-7EE6-4342-B048-85BDC9FD1C3A}</a:tableStyleId>
-              </a:tblPr>
-              <a:tblGrid>
-                <a:gridCol w="3017520"/>
-                <a:gridCol w="1645920"/>
-                <a:gridCol w="1645920"/>
-              </a:tblGrid>
-              <a:tr h="512064">
-                <a:tc>
-                  <a:txBody>
-                    <a:bodyPr wrap="square"/>
-                    <a:lstStyle/>
-                    <a:p>
-                      <a:r>
-                        <a:rPr sz="1600" b="1">
-                          <a:solidFill>
-                            <a:srgbClr val="000000"/>
-                          </a:solidFill>
-                          <a:latin typeface="Times New Roman"/>
-                        </a:rPr>
-                        <a:t>1 MiB, card A → card B, TBD3</a:t>
-                      </a:r>
-                    </a:p>
-                  </a:txBody>
-                  <a:tcPr marL="54864" marR="54864" marT="27432" marB="27432">
-                    <a:solidFill>
-                      <a:srgbClr val="C5E0B4"/>
-                    </a:solidFill>
-                  </a:tcPr>
-                </a:tc>
-                <a:tc>
-                  <a:txBody>
-                    <a:bodyPr wrap="square"/>
-                    <a:lstStyle/>
-                    <a:p>
-                      <a:r>
-                        <a:rPr sz="1600" b="1">
-                          <a:solidFill>
-                            <a:srgbClr val="000000"/>
-                          </a:solidFill>
-                          <a:latin typeface="Times New Roman"/>
-                        </a:rPr>
-                        <a:t>Before</a:t>
-                      </a:r>
-                    </a:p>
-                  </a:txBody>
-                  <a:tcPr marL="54864" marR="54864" marT="27432" marB="27432">
-                    <a:solidFill>
-                      <a:srgbClr val="C5E0B4"/>
-                    </a:solidFill>
-                  </a:tcPr>
-                </a:tc>
-                <a:tc>
-                  <a:txBody>
-                    <a:bodyPr wrap="square"/>
-                    <a:lstStyle/>
-                    <a:p>
-                      <a:r>
-                        <a:rPr sz="1600" b="1">
-                          <a:solidFill>
-                            <a:srgbClr val="000000"/>
-                          </a:solidFill>
-                          <a:latin typeface="Times New Roman"/>
-                        </a:rPr>
-                        <a:t>After</a:t>
-                      </a:r>
-                    </a:p>
-                  </a:txBody>
-                  <a:tcPr marL="54864" marR="54864" marT="27432" marB="27432">
-                    <a:solidFill>
-                      <a:srgbClr val="C5E0B4"/>
-                    </a:solidFill>
-                  </a:tcPr>
-                </a:tc>
-              </a:tr>
-              <a:tr h="512064">
-                <a:tc>
-                  <a:txBody>
-                    <a:bodyPr wrap="square"/>
-                    <a:lstStyle/>
-                    <a:p>
-                      <a:r>
-                        <a:rPr sz="1600" b="0">
-                          <a:solidFill>
-                            <a:srgbClr val="000000"/>
-                          </a:solidFill>
-                          <a:latin typeface="Times New Roman"/>
-                        </a:rPr>
-                        <a:t>Time</a:t>
-                      </a:r>
-                    </a:p>
-                  </a:txBody>
-                  <a:tcPr marL="54864" marR="54864" marT="27432" marB="27432">
-                    <a:solidFill>
-                      <a:srgbClr val="FFFFFF"/>
-                    </a:solidFill>
-                  </a:tcPr>
-                </a:tc>
-                <a:tc>
-                  <a:txBody>
-                    <a:bodyPr wrap="square"/>
-                    <a:lstStyle/>
-                    <a:p>
-                      <a:r>
-                        <a:rPr sz="1600" b="0">
-                          <a:solidFill>
-                            <a:srgbClr val="000000"/>
-                          </a:solidFill>
-                          <a:latin typeface="Times New Roman"/>
-                        </a:rPr>
-                        <a:t>142 s</a:t>
-                      </a:r>
-                    </a:p>
-                  </a:txBody>
-                  <a:tcPr marL="54864" marR="54864" marT="27432" marB="27432">
-                    <a:solidFill>
-                      <a:srgbClr val="FFFFFF"/>
-                    </a:solidFill>
-                  </a:tcPr>
-                </a:tc>
-                <a:tc>
-                  <a:txBody>
-                    <a:bodyPr wrap="square"/>
-                    <a:lstStyle/>
-                    <a:p>
-                      <a:r>
-                        <a:rPr sz="1600" b="0">
-                          <a:solidFill>
-                            <a:srgbClr val="000000"/>
-                          </a:solidFill>
-                          <a:latin typeface="Times New Roman"/>
-                        </a:rPr>
-                        <a:t>99.6 s</a:t>
-                      </a:r>
-                    </a:p>
-                  </a:txBody>
-                  <a:tcPr marL="54864" marR="54864" marT="27432" marB="27432">
-                    <a:solidFill>
-                      <a:srgbClr val="FFFFFF"/>
-                    </a:solidFill>
-                  </a:tcPr>
-                </a:tc>
-              </a:tr>
-              <a:tr h="512064">
-                <a:tc>
-                  <a:txBody>
-                    <a:bodyPr wrap="square"/>
-                    <a:lstStyle/>
-                    <a:p>
-                      <a:r>
-                        <a:rPr sz="1600" b="0">
-                          <a:solidFill>
-                            <a:srgbClr val="000000"/>
-                          </a:solidFill>
-                          <a:latin typeface="Times New Roman"/>
-                        </a:rPr>
-                        <a:t>Throughput</a:t>
-                      </a:r>
-                    </a:p>
-                  </a:txBody>
-                  <a:tcPr marL="54864" marR="54864" marT="27432" marB="27432">
-                    <a:solidFill>
-                      <a:srgbClr val="F2F8EE"/>
-                    </a:solidFill>
-                  </a:tcPr>
-                </a:tc>
-                <a:tc>
-                  <a:txBody>
-                    <a:bodyPr wrap="square"/>
-                    <a:lstStyle/>
-                    <a:p>
-                      <a:r>
-                        <a:rPr sz="1600" b="0">
-                          <a:solidFill>
-                            <a:srgbClr val="000000"/>
-                          </a:solidFill>
-                          <a:latin typeface="Times New Roman"/>
-                        </a:rPr>
-                        <a:t>7.37 KB/s</a:t>
-                      </a:r>
-                    </a:p>
-                  </a:txBody>
-                  <a:tcPr marL="54864" marR="54864" marT="27432" marB="27432">
-                    <a:solidFill>
-                      <a:srgbClr val="F2F8EE"/>
-                    </a:solidFill>
-                  </a:tcPr>
-                </a:tc>
-                <a:tc>
-                  <a:txBody>
-                    <a:bodyPr wrap="square"/>
-                    <a:lstStyle/>
-                    <a:p>
-                      <a:r>
-                        <a:rPr sz="1600" b="0">
-                          <a:solidFill>
-                            <a:srgbClr val="000000"/>
-                          </a:solidFill>
-                          <a:latin typeface="Times New Roman"/>
-                        </a:rPr>
-                        <a:t>10.53 KB/s</a:t>
-                      </a:r>
-                    </a:p>
-                  </a:txBody>
-                  <a:tcPr marL="54864" marR="54864" marT="27432" marB="27432">
-                    <a:solidFill>
-                      <a:srgbClr val="F2F8EE"/>
-                    </a:solidFill>
-                  </a:tcPr>
-                </a:tc>
-              </a:tr>
-              <a:tr h="512064">
-                <a:tc>
-                  <a:txBody>
-                    <a:bodyPr wrap="square"/>
-                    <a:lstStyle/>
-                    <a:p>
-                      <a:r>
-                        <a:rPr sz="1600" b="0">
-                          <a:solidFill>
-                            <a:srgbClr val="000000"/>
-                          </a:solidFill>
-                          <a:latin typeface="Times New Roman"/>
-                        </a:rPr>
-                        <a:t>Bytes wrong</a:t>
-                      </a:r>
-                    </a:p>
-                  </a:txBody>
-                  <a:tcPr marL="54864" marR="54864" marT="27432" marB="27432">
-                    <a:solidFill>
-                      <a:srgbClr val="FFFFFF"/>
-                    </a:solidFill>
-                  </a:tcPr>
-                </a:tc>
-                <a:tc>
-                  <a:txBody>
-                    <a:bodyPr wrap="square"/>
-                    <a:lstStyle/>
-                    <a:p>
-                      <a:r>
-                        <a:rPr sz="1600" b="0">
-                          <a:solidFill>
-                            <a:srgbClr val="000000"/>
-                          </a:solidFill>
-                          <a:latin typeface="Times New Roman"/>
-                        </a:rPr>
-                        <a:t>0</a:t>
-                      </a:r>
-                    </a:p>
-                  </a:txBody>
-                  <a:tcPr marL="54864" marR="54864" marT="27432" marB="27432">
-                    <a:solidFill>
-                      <a:srgbClr val="FFFFFF"/>
-                    </a:solidFill>
-                  </a:tcPr>
-                </a:tc>
-                <a:tc>
-                  <a:txBody>
-                    <a:bodyPr wrap="square"/>
-                    <a:lstStyle/>
-                    <a:p>
-                      <a:r>
-                        <a:rPr sz="1600" b="0">
-                          <a:solidFill>
-                            <a:srgbClr val="000000"/>
-                          </a:solidFill>
-                          <a:latin typeface="Times New Roman"/>
-                        </a:rPr>
-                        <a:t>0</a:t>
-                      </a:r>
-                    </a:p>
-                  </a:txBody>
-                  <a:tcPr marL="54864" marR="54864" marT="27432" marB="27432">
-                    <a:solidFill>
-                      <a:srgbClr val="FFFFFF"/>
-                    </a:solidFill>
-                  </a:tcPr>
-                </a:tc>
-              </a:tr>
-              <a:tr h="512064">
-                <a:tc>
-                  <a:txBody>
-                    <a:bodyPr wrap="square"/>
-                    <a:lstStyle/>
-                    <a:p>
-                      <a:r>
-                        <a:rPr sz="1600" b="0">
-                          <a:solidFill>
-                            <a:srgbClr val="000000"/>
-                          </a:solidFill>
-                          <a:latin typeface="Times New Roman"/>
-                        </a:rPr>
-                        <a:t>100 MiB (estimate, not measured)</a:t>
-                      </a:r>
-                    </a:p>
-                  </a:txBody>
-                  <a:tcPr marL="54864" marR="54864" marT="27432" marB="27432">
-                    <a:solidFill>
-                      <a:srgbClr val="F2F8EE"/>
-                    </a:solidFill>
-                  </a:tcPr>
-                </a:tc>
-                <a:tc>
-                  <a:txBody>
-                    <a:bodyPr wrap="square"/>
-                    <a:lstStyle/>
-                    <a:p>
-                      <a:r>
-                        <a:rPr sz="1600" b="0">
-                          <a:solidFill>
-                            <a:srgbClr val="000000"/>
-                          </a:solidFill>
-                          <a:latin typeface="Times New Roman"/>
-                        </a:rPr>
-                        <a:t>≈ 4 h</a:t>
-                      </a:r>
-                    </a:p>
-                  </a:txBody>
-                  <a:tcPr marL="54864" marR="54864" marT="27432" marB="27432">
-                    <a:solidFill>
-                      <a:srgbClr val="F2F8EE"/>
-                    </a:solidFill>
-                  </a:tcPr>
-                </a:tc>
-                <a:tc>
-                  <a:txBody>
-                    <a:bodyPr wrap="square"/>
-                    <a:lstStyle/>
-                    <a:p>
-                      <a:r>
-                        <a:rPr sz="1600" b="0">
-                          <a:solidFill>
-                            <a:srgbClr val="000000"/>
-                          </a:solidFill>
-                          <a:latin typeface="Times New Roman"/>
-                        </a:rPr>
-                        <a:t>≈ 2.8 h</a:t>
-                      </a:r>
-                    </a:p>
-                  </a:txBody>
-                  <a:tcPr marL="54864" marR="54864" marT="27432" marB="27432">
-                    <a:solidFill>
-                      <a:srgbClr val="F2F8EE"/>
-                    </a:solidFill>
-                  </a:tcPr>
-                </a:tc>
-              </a:tr>
-            </a:tbl>
-          </a:graphicData>
-        </a:graphic>
-      </p:graphicFrame>
       <p:sp>
         <p:nvSpPr>
-          <p:cNvPr id="65" name="TextBox 64"/>
-          <p:cNvSpPr txBox="1"/>
+          <p:cNvPr id="10" name="CustomShape 3">
+            <a:extLst>
+              <a:ext uri="{FF2B5EF4-FFF2-40B4-BE49-F238E27FC236}">
+                <a16:creationId xmlns:a16="http://schemas.microsoft.com/office/drawing/2014/main" id="{F22CA456-F1E3-4191-9864-00187BF37E54}"/>
+              </a:ext>
+            </a:extLst>
+          </p:cNvPr>
+          <p:cNvSpPr/>
           <p:nvPr/>
         </p:nvSpPr>
         <p:spPr>
           <a:xfrm>
-            <a:off x="5669280" y="3749039"/>
-            <a:ext cx="6309360" cy="2377440"/>
+            <a:off x="402300" y="2353236"/>
+            <a:ext cx="11381400" cy="2553091"/>
           </a:xfrm>
           <a:prstGeom prst="rect">
             <a:avLst/>
           </a:prstGeom>
           <a:noFill/>
+          <a:ln>
+            <a:noFill/>
+          </a:ln>
         </p:spPr>
+        <p:style>
+          <a:lnRef idx="0">
+            <a:scrgbClr r="0" g="0" b="0"/>
+          </a:lnRef>
+          <a:fillRef idx="0">
+            <a:scrgbClr r="0" g="0" b="0"/>
+          </a:fillRef>
+          <a:effectRef idx="0">
+            <a:scrgbClr r="0" g="0" b="0"/>
+          </a:effectRef>
+          <a:fontRef idx="minor"/>
+        </p:style>
         <p:txBody>
-          <a:bodyPr wrap="square" anchor="t">
+          <a:bodyPr wrap="square" lIns="90000" tIns="45000" rIns="90000" bIns="45000">
             <a:spAutoFit/>
           </a:bodyPr>
           <a:lstStyle/>
           <a:p>
-            <a:pPr marL="256032" indent="-219456">
-              <a:spcAft>
-                <a:spcPts val="400"/>
-              </a:spcAft>
-              <a:buChar char="•"/>
-            </a:pPr>
-            <a:r>
-              <a:rPr sz="1700" b="1">
-                <a:solidFill>
-                  <a:srgbClr val="000000"/>
-                </a:solidFill>
-                <a:latin typeface="Times New Roman"/>
-              </a:rPr>
-              <a:t>+43 %</a:t>
-            </a:r>
-            <a:r>
-              <a:rPr sz="1700" b="0">
-                <a:solidFill>
-                  <a:srgbClr val="000000"/>
-                </a:solidFill>
-                <a:latin typeface="Times New Roman"/>
-              </a:rPr>
-              <a:t>: 104 s after these changes, 99.6 s with the link fix of section 2 (Problem 3). Handshakes got a little faster too (TBD3 1.37 → 1.25 s).</a:t>
-            </a:r>
-          </a:p>
-          <a:p>
-            <a:pPr marL="256032" indent="-219456">
-              <a:spcAft>
-                <a:spcPts val="400"/>
-              </a:spcAft>
-              <a:buChar char="•"/>
-            </a:pPr>
-            <a:r>
-              <a:rPr sz="1700" b="0">
-                <a:solidFill>
-                  <a:srgbClr val="000000"/>
-                </a:solidFill>
-                <a:latin typeface="Times New Roman"/>
-              </a:rPr>
-              <a:t>Check yourself: a TIMING=1 build prints PERF encrypt / decrypt in B/s; compare with the micro-benchmark of (1/7).</a:t>
-            </a:r>
+            <a:pPr marL="1143000" indent="-1143000">
+              <a:lnSpc>
+                <a:spcPct val="100000"/>
+              </a:lnSpc>
+              <a:buFont typeface="+mj-lt"/>
+              <a:buAutoNum type="arabicPeriod"/>
+            </a:pPr>
+            <a:r>
+              <a:rPr lang="en-US" sz="2800" spc="-1" dirty="0" err="1" b="0">
+                <a:solidFill>
+                  <a:srgbClr val="808080"/>
+                </a:solidFill>
+                <a:latin typeface="Times New Roman" panose="02020603050405020304" pitchFamily="18" charset="0"/>
+                <a:ea typeface="DejaVu Sans"/>
+                <a:cs typeface="Times New Roman" panose="02020603050405020304" pitchFamily="18" charset="0"/>
+              </a:rPr>
+              <a:t>Application Channel</a:t>
+            </a:r>
+            <a:endParaRPr lang="en-US" sz="4000" b="0" strike="noStrike" spc="-1" dirty="0">
+              <a:solidFill>
+                <a:srgbClr val="000000"/>
+              </a:solidFill>
+              <a:latin typeface="Times New Roman" panose="02020603050405020304" pitchFamily="18" charset="0"/>
+              <a:ea typeface="DejaVu Sans"/>
+              <a:cs typeface="Times New Roman" panose="02020603050405020304" pitchFamily="18" charset="0"/>
+            </a:endParaRPr>
+          </a:p>
+          <a:p>
+            <a:pPr marL="1143000" indent="-1143000">
+              <a:lnSpc>
+                <a:spcPct val="100000"/>
+              </a:lnSpc>
+              <a:buFont typeface="+mj-lt"/>
+              <a:buAutoNum type="arabicPeriod"/>
+            </a:pPr>
+            <a:r>
+              <a:rPr lang="en-US" sz="2800" spc="-1" dirty="0" err="1" b="0">
+                <a:solidFill>
+                  <a:srgbClr val="808080"/>
+                </a:solidFill>
+                <a:latin typeface="Times New Roman" panose="02020603050405020304" pitchFamily="18" charset="0"/>
+                <a:ea typeface="DejaVu Sans"/>
+                <a:cs typeface="Times New Roman" panose="02020603050405020304" pitchFamily="18" charset="0"/>
+              </a:rPr>
+              <a:t>Radio Link</a:t>
+            </a:r>
+            <a:endParaRPr lang="en-US" sz="4000" b="0" strike="noStrike" spc="-1" dirty="0">
+              <a:solidFill>
+                <a:srgbClr val="000000"/>
+              </a:solidFill>
+              <a:latin typeface="Times New Roman" panose="02020603050405020304" pitchFamily="18" charset="0"/>
+              <a:ea typeface="DejaVu Sans"/>
+              <a:cs typeface="Times New Roman" panose="02020603050405020304" pitchFamily="18" charset="0"/>
+            </a:endParaRPr>
+          </a:p>
+          <a:p>
+            <a:pPr marL="1143000" indent="-1143000">
+              <a:lnSpc>
+                <a:spcPct val="100000"/>
+              </a:lnSpc>
+              <a:buFont typeface="+mj-lt"/>
+              <a:buAutoNum type="arabicPeriod"/>
+            </a:pPr>
+            <a:r>
+              <a:rPr lang="en-US" sz="2800" spc="-1" dirty="0" err="1" b="0">
+                <a:solidFill>
+                  <a:srgbClr val="808080"/>
+                </a:solidFill>
+                <a:latin typeface="Times New Roman" panose="02020603050405020304" pitchFamily="18" charset="0"/>
+                <a:ea typeface="DejaVu Sans"/>
+                <a:cs typeface="Times New Roman" panose="02020603050405020304" pitchFamily="18" charset="0"/>
+              </a:rPr>
+              <a:t>SD Card &amp; FAT32</a:t>
+            </a:r>
+            <a:endParaRPr lang="en-US" sz="4000" b="0" strike="noStrike" spc="-1" dirty="0">
+              <a:solidFill>
+                <a:srgbClr val="000000"/>
+              </a:solidFill>
+              <a:latin typeface="Times New Roman" panose="02020603050405020304" pitchFamily="18" charset="0"/>
+              <a:ea typeface="DejaVu Sans"/>
+              <a:cs typeface="Times New Roman" panose="02020603050405020304" pitchFamily="18" charset="0"/>
+            </a:endParaRPr>
+          </a:p>
+          <a:p>
+            <a:pPr marL="1143000" indent="-1143000">
+              <a:lnSpc>
+                <a:spcPct val="100000"/>
+              </a:lnSpc>
+              <a:buFont typeface="+mj-lt"/>
+              <a:buAutoNum type="arabicPeriod"/>
+            </a:pPr>
+            <a:r>
+              <a:rPr lang="en-US" sz="2800" spc="-1" dirty="0" err="1" b="0">
+                <a:solidFill>
+                  <a:srgbClr val="808080"/>
+                </a:solidFill>
+                <a:latin typeface="Times New Roman" panose="02020603050405020304" pitchFamily="18" charset="0"/>
+                <a:ea typeface="DejaVu Sans"/>
+                <a:cs typeface="Times New Roman" panose="02020603050405020304" pitchFamily="18" charset="0"/>
+              </a:rPr>
+              <a:t>End-to-End Transfer</a:t>
+            </a:r>
+            <a:endParaRPr lang="en-US" sz="4000" b="0" strike="noStrike" spc="-1" dirty="0">
+              <a:solidFill>
+                <a:srgbClr val="000000"/>
+              </a:solidFill>
+              <a:latin typeface="Times New Roman" panose="02020603050405020304" pitchFamily="18" charset="0"/>
+              <a:ea typeface="DejaVu Sans"/>
+              <a:cs typeface="Times New Roman" panose="02020603050405020304" pitchFamily="18" charset="0"/>
+            </a:endParaRPr>
+          </a:p>
+          <a:p>
+            <a:pPr marL="1143000" indent="-1143000">
+              <a:lnSpc>
+                <a:spcPct val="100000"/>
+              </a:lnSpc>
+              <a:buFont typeface="+mj-lt"/>
+              <a:buAutoNum type="arabicPeriod"/>
+            </a:pPr>
+            <a:r>
+              <a:rPr lang="en-US" sz="2800" spc="-1" dirty="0" err="1" b="0">
+                <a:solidFill>
+                  <a:srgbClr val="808080"/>
+                </a:solidFill>
+                <a:latin typeface="Times New Roman" panose="02020603050405020304" pitchFamily="18" charset="0"/>
+                <a:ea typeface="DejaVu Sans"/>
+                <a:cs typeface="Times New Roman" panose="02020603050405020304" pitchFamily="18" charset="0"/>
+              </a:rPr>
+              <a:t>Speed: Measure and Choose a Link</a:t>
+            </a:r>
+            <a:endParaRPr lang="en-US" sz="4000" b="0" strike="noStrike" spc="-1" dirty="0">
+              <a:solidFill>
+                <a:srgbClr val="000000"/>
+              </a:solidFill>
+              <a:latin typeface="Times New Roman" panose="02020603050405020304" pitchFamily="18" charset="0"/>
+              <a:ea typeface="DejaVu Sans"/>
+              <a:cs typeface="Times New Roman" panose="02020603050405020304" pitchFamily="18" charset="0"/>
+            </a:endParaRPr>
+          </a:p>
+          <a:p>
+            <a:pPr marL="1143000" indent="-1143000">
+              <a:lnSpc>
+                <a:spcPct val="100000"/>
+              </a:lnSpc>
+              <a:buFont typeface="+mj-lt"/>
+              <a:buAutoNum type="arabicPeriod"/>
+            </a:pPr>
+            <a:r>
+              <a:rPr lang="en-US" sz="2800" spc="-1" dirty="0" err="1" b="1">
+                <a:solidFill>
+                  <a:srgbClr val="37863C"/>
+                </a:solidFill>
+                <a:latin typeface="Times New Roman" panose="02020603050405020304" pitchFamily="18" charset="0"/>
+                <a:ea typeface="DejaVu Sans"/>
+                <a:cs typeface="Times New Roman" panose="02020603050405020304" pitchFamily="18" charset="0"/>
+              </a:rPr>
+              <a:t>Choose and Reproduce</a:t>
+            </a:r>
+            <a:endParaRPr lang="en-US" sz="4000" b="0" strike="noStrike" spc="-1" dirty="0">
+              <a:solidFill>
+                <a:srgbClr val="000000"/>
+              </a:solidFill>
+              <a:latin typeface="Times New Roman" panose="02020603050405020304" pitchFamily="18" charset="0"/>
+              <a:ea typeface="DejaVu Sans"/>
+              <a:cs typeface="Times New Roman" panose="02020603050405020304" pitchFamily="18" charset="0"/>
+            </a:endParaRPr>
+          </a:p>
+          <a:p>
+            <a:pPr marL="1143000" indent="-1143000">
+              <a:lnSpc>
+                <a:spcPct val="100000"/>
+              </a:lnSpc>
+              <a:buFont typeface="+mj-lt"/>
+              <a:buAutoNum type="arabicPeriod"/>
+            </a:pPr>
+            <a:r>
+              <a:rPr lang="en-US" sz="2800" spc="-1" dirty="0" err="1" b="0">
+                <a:solidFill>
+                  <a:srgbClr val="808080"/>
+                </a:solidFill>
+                <a:latin typeface="Times New Roman" panose="02020603050405020304" pitchFamily="18" charset="0"/>
+                <a:ea typeface="DejaVu Sans"/>
+                <a:cs typeface="Times New Roman" panose="02020603050405020304" pitchFamily="18" charset="0"/>
+              </a:rPr>
+              <a:t>Practice</a:t>
+            </a:r>
+            <a:endParaRPr lang="en-US" sz="4000" b="0" strike="noStrike" spc="-1" dirty="0">
+              <a:solidFill>
+                <a:srgbClr val="000000"/>
+              </a:solidFill>
+              <a:latin typeface="Times New Roman" panose="02020603050405020304" pitchFamily="18" charset="0"/>
+              <a:ea typeface="DejaVu Sans"/>
+              <a:cs typeface="Times New Roman" panose="02020603050405020304" pitchFamily="18" charset="0"/>
+            </a:endParaRPr>
           </a:p>
         </p:txBody>
       </p:sp>
+      <p:pic>
+        <p:nvPicPr>
+          <p:cNvPr id="2" name="Picture 1">
+            <a:extLst>
+              <a:ext uri="{FF2B5EF4-FFF2-40B4-BE49-F238E27FC236}">
+                <a16:creationId xmlns:a16="http://schemas.microsoft.com/office/drawing/2014/main" id="{B2A62998-F8D0-DAA3-4400-008D3F20B2EE}"/>
+              </a:ext>
+            </a:extLst>
+          </p:cNvPr>
+          <p:cNvPicPr>
+            <a:picLocks noChangeAspect="1"/>
+          </p:cNvPicPr>
+          <p:nvPr/>
+        </p:nvPicPr>
+        <p:blipFill>
+          <a:blip r:embed="rId3">
+            <a:extLst>
+              <a:ext uri="{28A0092B-C50C-407E-A947-70E740481C1C}">
+                <a14:useLocalDpi xmlns:a14="http://schemas.microsoft.com/office/drawing/2010/main" val="0"/>
+              </a:ext>
+            </a:extLst>
+          </a:blip>
+          <a:stretch>
+            <a:fillRect/>
+          </a:stretch>
+        </p:blipFill>
+        <p:spPr>
+          <a:xfrm>
+            <a:off x="-6000" y="0"/>
+            <a:ext cx="5213520" cy="1363335"/>
+          </a:xfrm>
+          <a:prstGeom prst="rect">
+            <a:avLst/>
+          </a:prstGeom>
+        </p:spPr>
+      </p:pic>
     </p:spTree>
   </p:cSld>
   <p:clrMapOvr>
@@ -31459,14 +31290,14 @@
                 <a:latin typeface="Times New Roman" panose="02020603050405020304" pitchFamily="18" charset="0"/>
                 <a:cs typeface="Times New Roman" panose="02020603050405020304" pitchFamily="18" charset="0"/>
               </a:rPr>
-              <a:t>5. Making It Faster </a:t>
+              <a:t>6. Choose and Reproduce </a:t>
             </a:r>
             <a:r>
               <a:rPr lang="en-US" sz="3600" spc="-1" dirty="0">
                 <a:latin typeface="Times New Roman" panose="02020603050405020304" pitchFamily="18" charset="0"/>
                 <a:cs typeface="Times New Roman" panose="02020603050405020304" pitchFamily="18" charset="0"/>
               </a:rPr>
-              <a:t>(6/7) Where the limit is now</a:t>
+              <a:t>(1/3) Choose a configuration</a:t>
             </a:r>
           </a:p>
         </p:txBody>
@@ -31539,7 +31370,7 @@
         </p:nvGraphicFramePr>
         <p:xfrm>
           <a:off x="365760" y="868680"/>
-          <a:ext cx="5486400" cy="1371600"/>
+          <a:ext cx="11430000" cy="4572000"/>
         </p:xfrm>
         <a:graphic>
           <a:graphicData uri="http://schemas.openxmlformats.org/drawingml/2006/table">
@@ -31548,23 +31379,24 @@
                 <a:tableStyleId>{5C22544A-7EE6-4342-B048-85BDC9FD1C3A}</a:tableStyleId>
               </a:tblPr>
               <a:tblGrid>
-                <a:gridCol w="3291840"/>
-                <a:gridCol w="2194560"/>
+                <a:gridCol w="4572000"/>
+                <a:gridCol w="5577840"/>
+                <a:gridCol w="1280160"/>
               </a:tblGrid>
-              <a:tr h="457200">
+              <a:tr h="508000">
                 <a:tc>
                   <a:txBody>
                     <a:bodyPr wrap="square"/>
                     <a:lstStyle/>
                     <a:p>
                       <a:r>
-                        <a:rPr sz="1700" b="1">
+                        <a:rPr sz="1500" b="1">
                           <a:solidFill>
                             <a:srgbClr val="000000"/>
                           </a:solidFill>
                           <a:latin typeface="Times New Roman"/>
                         </a:rPr>
-                        <a:t>Raw radio, no ACK</a:t>
+                        <a:t>If you want …</a:t>
                       </a:r>
                     </a:p>
                   </a:txBody>
@@ -31580,13 +31412,35 @@
                     <a:lstStyle/>
                     <a:p>
                       <a:r>
-                        <a:rPr sz="1700" b="1">
+                        <a:rPr sz="1500" b="1">
                           <a:solidFill>
                             <a:srgbClr val="000000"/>
                           </a:solidFill>
                           <a:latin typeface="Times New Roman"/>
                         </a:rPr>
-                        <a:t>Time per frame</a:t>
+                        <a:t>Build / run</a:t>
+                      </a:r>
+                    </a:p>
+                  </a:txBody>
+                  <a:tcPr marL="54864" marR="54864" marT="27432" marB="27432">
+                    <a:solidFill>
+                      <a:srgbClr val="C5E0B4"/>
+                    </a:solidFill>
+                  </a:tcPr>
+                </a:tc>
+                <a:tc>
+                  <a:txBody>
+                    <a:bodyPr wrap="square"/>
+                    <a:lstStyle/>
+                    <a:p>
+                      <a:r>
+                        <a:rPr sz="1500" b="1">
+                          <a:solidFill>
+                            <a:srgbClr val="000000"/>
+                          </a:solidFill>
+                          <a:latin typeface="Times New Roman"/>
+                        </a:rPr>
+                        <a:t>Lesson</a:t>
                       </a:r>
                     </a:p>
                   </a:txBody>
@@ -31597,20 +31451,20 @@
                   </a:tcPr>
                 </a:tc>
               </a:tr>
-              <a:tr h="457200">
+              <a:tr h="508000">
                 <a:tc>
                   <a:txBody>
                     <a:bodyPr wrap="square"/>
                     <a:lstStyle/>
                     <a:p>
                       <a:r>
-                        <a:rPr sz="1700" b="0">
+                        <a:rPr sz="1500" b="0">
                           <a:solidFill>
                             <a:srgbClr val="000000"/>
                           </a:solidFill>
                           <a:latin typeface="Times New Roman"/>
                         </a:rPr>
-                        <a:t>full frame (116 B payload)</a:t>
+                        <a:t>the smallest and fastest classical handshake</a:t>
                       </a:r>
                     </a:p>
                   </a:txBody>
@@ -31626,13 +31480,35 @@
                     <a:lstStyle/>
                     <a:p>
                       <a:r>
-                        <a:rPr sz="1700" b="0">
+                        <a:rPr sz="1500" b="0">
                           <a:solidFill>
                             <a:srgbClr val="000000"/>
                           </a:solidFill>
                           <a:latin typeface="Times New Roman"/>
                         </a:rPr>
-                        <a:t>6.3 ms</a:t>
+                        <a:t>edhoc-wolfssl, METHOD 3, CRYPTO_SUITE=0 or 4</a:t>
+                      </a:r>
+                    </a:p>
+                  </a:txBody>
+                  <a:tcPr marL="54864" marR="54864" marT="27432" marB="27432">
+                    <a:solidFill>
+                      <a:srgbClr val="FFFFFF"/>
+                    </a:solidFill>
+                  </a:tcPr>
+                </a:tc>
+                <a:tc>
+                  <a:txBody>
+                    <a:bodyPr wrap="square"/>
+                    <a:lstStyle/>
+                    <a:p>
+                      <a:r>
+                        <a:rPr sz="1500" b="0">
+                          <a:solidFill>
+                            <a:srgbClr val="000000"/>
+                          </a:solidFill>
+                          <a:latin typeface="Times New Roman"/>
+                        </a:rPr>
+                        <a:t>3</a:t>
                       </a:r>
                     </a:p>
                   </a:txBody>
@@ -31643,20 +31519,20 @@
                   </a:tcPr>
                 </a:tc>
               </a:tr>
-              <a:tr h="457200">
+              <a:tr h="508000">
                 <a:tc>
                   <a:txBody>
                     <a:bodyPr wrap="square"/>
                     <a:lstStyle/>
                     <a:p>
                       <a:r>
-                        <a:rPr sz="1700" b="0">
+                        <a:rPr sz="1500" b="0">
                           <a:solidFill>
                             <a:srgbClr val="000000"/>
                           </a:solidFill>
                           <a:latin typeface="Times New Roman"/>
                         </a:rPr>
-                        <a:t>tiny frame (5 B payload)</a:t>
+                        <a:t>certificates / signatures</a:t>
                       </a:r>
                     </a:p>
                   </a:txBody>
@@ -31672,13 +31548,443 @@
                     <a:lstStyle/>
                     <a:p>
                       <a:r>
-                        <a:rPr sz="1700" b="0">
+                        <a:rPr sz="1500" b="0">
                           <a:solidFill>
                             <a:srgbClr val="000000"/>
                           </a:solidFill>
                           <a:latin typeface="Times New Roman"/>
                         </a:rPr>
-                        <a:t>2.5 ms</a:t>
+                        <a:t>methods 0–2, e.g. edhoc_m0_* CRYPTO_SUITE=2</a:t>
+                      </a:r>
+                    </a:p>
+                  </a:txBody>
+                  <a:tcPr marL="54864" marR="54864" marT="27432" marB="27432">
+                    <a:solidFill>
+                      <a:srgbClr val="F2F8EE"/>
+                    </a:solidFill>
+                  </a:tcPr>
+                </a:tc>
+                <a:tc>
+                  <a:txBody>
+                    <a:bodyPr wrap="square"/>
+                    <a:lstStyle/>
+                    <a:p>
+                      <a:r>
+                        <a:rPr sz="1500" b="0">
+                          <a:solidFill>
+                            <a:srgbClr val="000000"/>
+                          </a:solidFill>
+                          <a:latin typeface="Times New Roman"/>
+                        </a:rPr>
+                        <a:t>3</a:t>
+                      </a:r>
+                    </a:p>
+                  </a:txBody>
+                  <a:tcPr marL="54864" marR="54864" marT="27432" marB="27432">
+                    <a:solidFill>
+                      <a:srgbClr val="F2F8EE"/>
+                    </a:solidFill>
+                  </a:tcPr>
+                </a:tc>
+              </a:tr>
+              <a:tr h="508000">
+                <a:tc>
+                  <a:txBody>
+                    <a:bodyPr wrap="square"/>
+                    <a:lstStyle/>
+                    <a:p>
+                      <a:r>
+                        <a:rPr sz="1500" b="0">
+                          <a:solidFill>
+                            <a:srgbClr val="000000"/>
+                          </a:solidFill>
+                          <a:latin typeface="Times New Roman"/>
+                        </a:rPr>
+                        <a:t>a byte-exact check against the standard</a:t>
+                      </a:r>
+                    </a:p>
+                  </a:txBody>
+                  <a:tcPr marL="54864" marR="54864" marT="27432" marB="27432">
+                    <a:solidFill>
+                      <a:srgbClr val="FFFFFF"/>
+                    </a:solidFill>
+                  </a:tcPr>
+                </a:tc>
+                <a:tc>
+                  <a:txBody>
+                    <a:bodyPr wrap="square"/>
+                    <a:lstStyle/>
+                    <a:p>
+                      <a:r>
+                        <a:rPr sz="1500" b="0">
+                          <a:solidFill>
+                            <a:srgbClr val="000000"/>
+                          </a:solidFill>
+                          <a:latin typeface="Times New Roman"/>
+                        </a:rPr>
+                        <a:t>make rfc9529-test</a:t>
+                      </a:r>
+                    </a:p>
+                  </a:txBody>
+                  <a:tcPr marL="54864" marR="54864" marT="27432" marB="27432">
+                    <a:solidFill>
+                      <a:srgbClr val="FFFFFF"/>
+                    </a:solidFill>
+                  </a:tcPr>
+                </a:tc>
+                <a:tc>
+                  <a:txBody>
+                    <a:bodyPr wrap="square"/>
+                    <a:lstStyle/>
+                    <a:p>
+                      <a:r>
+                        <a:rPr sz="1500" b="0">
+                          <a:solidFill>
+                            <a:srgbClr val="000000"/>
+                          </a:solidFill>
+                          <a:latin typeface="Times New Roman"/>
+                        </a:rPr>
+                        <a:t>3</a:t>
+                      </a:r>
+                    </a:p>
+                  </a:txBody>
+                  <a:tcPr marL="54864" marR="54864" marT="27432" marB="27432">
+                    <a:solidFill>
+                      <a:srgbClr val="FFFFFF"/>
+                    </a:solidFill>
+                  </a:tcPr>
+                </a:tc>
+              </a:tr>
+              <a:tr h="508000">
+                <a:tc>
+                  <a:txBody>
+                    <a:bodyPr wrap="square"/>
+                    <a:lstStyle/>
+                    <a:p>
+                      <a:r>
+                        <a:rPr sz="1500" b="0">
+                          <a:solidFill>
+                            <a:srgbClr val="000000"/>
+                          </a:solidFill>
+                          <a:latin typeface="Times New Roman"/>
+                        </a:rPr>
+                        <a:t>post-quantum key exchange</a:t>
+                      </a:r>
+                    </a:p>
+                  </a:txBody>
+                  <a:tcPr marL="54864" marR="54864" marT="27432" marB="27432">
+                    <a:solidFill>
+                      <a:srgbClr val="F2F8EE"/>
+                    </a:solidFill>
+                  </a:tcPr>
+                </a:tc>
+                <a:tc>
+                  <a:txBody>
+                    <a:bodyPr wrap="square"/>
+                    <a:lstStyle/>
+                    <a:p>
+                      <a:r>
+                        <a:rPr sz="1500" b="0">
+                          <a:solidFill>
+                            <a:srgbClr val="000000"/>
+                          </a:solidFill>
+                          <a:latin typeface="Times New Roman"/>
+                        </a:rPr>
+                        <a:t>edhoc-authkem, SUITE=TBD2</a:t>
+                      </a:r>
+                    </a:p>
+                  </a:txBody>
+                  <a:tcPr marL="54864" marR="54864" marT="27432" marB="27432">
+                    <a:solidFill>
+                      <a:srgbClr val="F2F8EE"/>
+                    </a:solidFill>
+                  </a:tcPr>
+                </a:tc>
+                <a:tc>
+                  <a:txBody>
+                    <a:bodyPr wrap="square"/>
+                    <a:lstStyle/>
+                    <a:p>
+                      <a:r>
+                        <a:rPr sz="1500" b="0">
+                          <a:solidFill>
+                            <a:srgbClr val="000000"/>
+                          </a:solidFill>
+                          <a:latin typeface="Times New Roman"/>
+                        </a:rPr>
+                        <a:t>4</a:t>
+                      </a:r>
+                    </a:p>
+                  </a:txBody>
+                  <a:tcPr marL="54864" marR="54864" marT="27432" marB="27432">
+                    <a:solidFill>
+                      <a:srgbClr val="F2F8EE"/>
+                    </a:solidFill>
+                  </a:tcPr>
+                </a:tc>
+              </a:tr>
+              <a:tr h="508000">
+                <a:tc>
+                  <a:txBody>
+                    <a:bodyPr wrap="square"/>
+                    <a:lstStyle/>
+                    <a:p>
+                      <a:r>
+                        <a:rPr sz="1500" b="0">
+                          <a:solidFill>
+                            <a:srgbClr val="000000"/>
+                          </a:solidFill>
+                          <a:latin typeface="Times New Roman"/>
+                        </a:rPr>
+                        <a:t>AES-256 + ML-KEM-1024 together</a:t>
+                      </a:r>
+                    </a:p>
+                  </a:txBody>
+                  <a:tcPr marL="54864" marR="54864" marT="27432" marB="27432">
+                    <a:solidFill>
+                      <a:srgbClr val="FFFFFF"/>
+                    </a:solidFill>
+                  </a:tcPr>
+                </a:tc>
+                <a:tc>
+                  <a:txBody>
+                    <a:bodyPr wrap="square"/>
+                    <a:lstStyle/>
+                    <a:p>
+                      <a:r>
+                        <a:rPr sz="1500" b="0">
+                          <a:solidFill>
+                            <a:srgbClr val="000000"/>
+                          </a:solidFill>
+                          <a:latin typeface="Times New Roman"/>
+                        </a:rPr>
+                        <a:t>edhoc-authkem, SUITE=TBD3</a:t>
+                      </a:r>
+                    </a:p>
+                  </a:txBody>
+                  <a:tcPr marL="54864" marR="54864" marT="27432" marB="27432">
+                    <a:solidFill>
+                      <a:srgbClr val="FFFFFF"/>
+                    </a:solidFill>
+                  </a:tcPr>
+                </a:tc>
+                <a:tc>
+                  <a:txBody>
+                    <a:bodyPr wrap="square"/>
+                    <a:lstStyle/>
+                    <a:p>
+                      <a:r>
+                        <a:rPr sz="1500" b="0">
+                          <a:solidFill>
+                            <a:srgbClr val="000000"/>
+                          </a:solidFill>
+                          <a:latin typeface="Times New Roman"/>
+                        </a:rPr>
+                        <a:t>4</a:t>
+                      </a:r>
+                    </a:p>
+                  </a:txBody>
+                  <a:tcPr marL="54864" marR="54864" marT="27432" marB="27432">
+                    <a:solidFill>
+                      <a:srgbClr val="FFFFFF"/>
+                    </a:solidFill>
+                  </a:tcPr>
+                </a:tc>
+              </a:tr>
+              <a:tr h="508000">
+                <a:tc>
+                  <a:txBody>
+                    <a:bodyPr wrap="square"/>
+                    <a:lstStyle/>
+                    <a:p>
+                      <a:r>
+                        <a:rPr sz="1500" b="0">
+                          <a:solidFill>
+                            <a:srgbClr val="000000"/>
+                          </a:solidFill>
+                          <a:latin typeface="Times New Roman"/>
+                        </a:rPr>
+                        <a:t>to move a file card to card</a:t>
+                      </a:r>
+                    </a:p>
+                  </a:txBody>
+                  <a:tcPr marL="54864" marR="54864" marT="27432" marB="27432">
+                    <a:solidFill>
+                      <a:srgbClr val="F2F8EE"/>
+                    </a:solidFill>
+                  </a:tcPr>
+                </a:tc>
+                <a:tc>
+                  <a:txBody>
+                    <a:bodyPr wrap="square"/>
+                    <a:lstStyle/>
+                    <a:p>
+                      <a:r>
+                        <a:rPr sz="1500" b="0">
+                          <a:solidFill>
+                            <a:srgbClr val="000000"/>
+                          </a:solidFill>
+                          <a:latin typeface="Times New Roman"/>
+                        </a:rPr>
+                        <a:t>EXTRA_CFLAGS=-DAPP_SD_XFER</a:t>
+                      </a:r>
+                    </a:p>
+                  </a:txBody>
+                  <a:tcPr marL="54864" marR="54864" marT="27432" marB="27432">
+                    <a:solidFill>
+                      <a:srgbClr val="F2F8EE"/>
+                    </a:solidFill>
+                  </a:tcPr>
+                </a:tc>
+                <a:tc>
+                  <a:txBody>
+                    <a:bodyPr wrap="square"/>
+                    <a:lstStyle/>
+                    <a:p>
+                      <a:r>
+                        <a:rPr sz="1500" b="0">
+                          <a:solidFill>
+                            <a:srgbClr val="000000"/>
+                          </a:solidFill>
+                          <a:latin typeface="Times New Roman"/>
+                        </a:rPr>
+                        <a:t>5</a:t>
+                      </a:r>
+                    </a:p>
+                  </a:txBody>
+                  <a:tcPr marL="54864" marR="54864" marT="27432" marB="27432">
+                    <a:solidFill>
+                      <a:srgbClr val="F2F8EE"/>
+                    </a:solidFill>
+                  </a:tcPr>
+                </a:tc>
+              </a:tr>
+              <a:tr h="508000">
+                <a:tc>
+                  <a:txBody>
+                    <a:bodyPr wrap="square"/>
+                    <a:lstStyle/>
+                    <a:p>
+                      <a:r>
+                        <a:rPr sz="1500" b="0">
+                          <a:solidFill>
+                            <a:srgbClr val="000000"/>
+                          </a:solidFill>
+                          <a:latin typeface="Times New Roman"/>
+                        </a:rPr>
+                        <a:t>a faster link than the radio</a:t>
+                      </a:r>
+                    </a:p>
+                  </a:txBody>
+                  <a:tcPr marL="54864" marR="54864" marT="27432" marB="27432">
+                    <a:solidFill>
+                      <a:srgbClr val="FFFFFF"/>
+                    </a:solidFill>
+                  </a:tcPr>
+                </a:tc>
+                <a:tc>
+                  <a:txBody>
+                    <a:bodyPr wrap="square"/>
+                    <a:lstStyle/>
+                    <a:p>
+                      <a:r>
+                        <a:rPr sz="1500" b="0">
+                          <a:solidFill>
+                            <a:srgbClr val="000000"/>
+                          </a:solidFill>
+                          <a:latin typeface="Times New Roman"/>
+                        </a:rPr>
+                        <a:t>TRANSPORT=uart, 3 wires on JB</a:t>
+                      </a:r>
+                    </a:p>
+                  </a:txBody>
+                  <a:tcPr marL="54864" marR="54864" marT="27432" marB="27432">
+                    <a:solidFill>
+                      <a:srgbClr val="FFFFFF"/>
+                    </a:solidFill>
+                  </a:tcPr>
+                </a:tc>
+                <a:tc>
+                  <a:txBody>
+                    <a:bodyPr wrap="square"/>
+                    <a:lstStyle/>
+                    <a:p>
+                      <a:r>
+                        <a:rPr sz="1500" b="0">
+                          <a:solidFill>
+                            <a:srgbClr val="000000"/>
+                          </a:solidFill>
+                          <a:latin typeface="Times New Roman"/>
+                        </a:rPr>
+                        <a:t>5</a:t>
+                      </a:r>
+                    </a:p>
+                  </a:txBody>
+                  <a:tcPr marL="54864" marR="54864" marT="27432" marB="27432">
+                    <a:solidFill>
+                      <a:srgbClr val="FFFFFF"/>
+                    </a:solidFill>
+                  </a:tcPr>
+                </a:tc>
+              </a:tr>
+              <a:tr h="508000">
+                <a:tc>
+                  <a:txBody>
+                    <a:bodyPr wrap="square"/>
+                    <a:lstStyle/>
+                    <a:p>
+                      <a:r>
+                        <a:rPr sz="1500" b="0">
+                          <a:solidFill>
+                            <a:srgbClr val="000000"/>
+                          </a:solidFill>
+                          <a:latin typeface="Times New Roman"/>
+                        </a:rPr>
+                        <a:t>time per message step / every value</a:t>
+                      </a:r>
+                    </a:p>
+                  </a:txBody>
+                  <a:tcPr marL="54864" marR="54864" marT="27432" marB="27432">
+                    <a:solidFill>
+                      <a:srgbClr val="F2F8EE"/>
+                    </a:solidFill>
+                  </a:tcPr>
+                </a:tc>
+                <a:tc>
+                  <a:txBody>
+                    <a:bodyPr wrap="square"/>
+                    <a:lstStyle/>
+                    <a:p>
+                      <a:r>
+                        <a:rPr sz="1500" b="0">
+                          <a:solidFill>
+                            <a:srgbClr val="000000"/>
+                          </a:solidFill>
+                          <a:latin typeface="Times New Roman"/>
+                        </a:rPr>
+                        <a:t>TIMING=1 / DEBUG=1 (not both for timing)</a:t>
+                      </a:r>
+                    </a:p>
+                  </a:txBody>
+                  <a:tcPr marL="54864" marR="54864" marT="27432" marB="27432">
+                    <a:solidFill>
+                      <a:srgbClr val="F2F8EE"/>
+                    </a:solidFill>
+                  </a:tcPr>
+                </a:tc>
+                <a:tc>
+                  <a:txBody>
+                    <a:bodyPr wrap="square"/>
+                    <a:lstStyle/>
+                    <a:p>
+                      <a:r>
+                        <a:rPr sz="1500" b="0">
+                          <a:solidFill>
+                            <a:srgbClr val="000000"/>
+                          </a:solidFill>
+                          <a:latin typeface="Times New Roman"/>
+                        </a:rPr>
+                        <a:t>3, 4</a:t>
                       </a:r>
                     </a:p>
                   </a:txBody>
@@ -31701,8 +32007,8 @@
         </p:nvSpPr>
         <p:spPr>
           <a:xfrm>
-            <a:off x="365760" y="2468880"/>
-            <a:ext cx="11430000" cy="3657600"/>
+            <a:off x="365760" y="5623560"/>
+            <a:ext cx="11430000" cy="548640"/>
           </a:xfrm>
           <a:prstGeom prst="rect">
             <a:avLst/>
@@ -31715,89 +32021,19 @@
           </a:bodyPr>
           <a:lstStyle/>
           <a:p>
-            <a:pPr marL="256032" indent="-219456">
+            <a:pPr>
               <a:spcAft>
                 <a:spcPts val="400"/>
               </a:spcAft>
-              <a:buChar char="•"/>
-            </a:pPr>
-            <a:r>
-              <a:rPr sz="1800" b="0">
-                <a:solidFill>
-                  <a:srgbClr val="000000"/>
+            </a:pPr>
+            <a:r>
+              <a:rPr sz="1600" b="0">
+                <a:solidFill>
+                  <a:srgbClr val="808080"/>
                 </a:solidFill>
                 <a:latin typeface="Times New Roman"/>
               </a:rPr>
-              <a:t>From the slope: 32 µs per byte (250 kbit/s) plus </a:t>
-            </a:r>
-            <a:r>
-              <a:rPr sz="1800" b="1">
-                <a:solidFill>
-                  <a:srgbClr val="000000"/>
-                </a:solidFill>
-                <a:latin typeface="Times New Roman"/>
-              </a:rPr>
-              <a:t>≈ 1.8 ms fixed per frame inside the radio chip</a:t>
-            </a:r>
-            <a:r>
-              <a:rPr sz="1800" b="0">
-                <a:solidFill>
-                  <a:srgbClr val="000000"/>
-                </a:solidFill>
-                <a:latin typeface="Times New Roman"/>
-              </a:rPr>
-              <a:t>.</a:t>
-            </a:r>
-          </a:p>
-          <a:p>
-            <a:pPr marL="256032" indent="-219456">
-              <a:spcAft>
-                <a:spcPts val="400"/>
-              </a:spcAft>
-              <a:buChar char="•"/>
-            </a:pPr>
-            <a:r>
-              <a:rPr sz="1800" b="0">
-                <a:solidFill>
-                  <a:srgbClr val="000000"/>
-                </a:solidFill>
-                <a:latin typeface="Times New Roman"/>
-              </a:rPr>
-              <a:t>Software is now ~1 ms of the ~9 ms per frame. The radio chip sets the speed.</a:t>
-            </a:r>
-          </a:p>
-          <a:p>
-            <a:pPr marL="256032" indent="-219456">
-              <a:spcAft>
-                <a:spcPts val="400"/>
-              </a:spcAft>
-              <a:buChar char="•"/>
-            </a:pPr>
-            <a:r>
-              <a:rPr sz="1800" b="0">
-                <a:solidFill>
-                  <a:srgbClr val="000000"/>
-                </a:solidFill>
-                <a:latin typeface="Times New Roman"/>
-              </a:rPr>
-              <a:t>A sliding window could save the ~19 % spent waiting for 'A' — risky with a one-frame receive buffer (Problem 3 in section 2 shows why).</a:t>
-            </a:r>
-          </a:p>
-          <a:p>
-            <a:pPr marL="256032" indent="-219456">
-              <a:spcAft>
-                <a:spcPts val="400"/>
-              </a:spcAft>
-              <a:buChar char="•"/>
-            </a:pPr>
-            <a:r>
-              <a:rPr sz="1800" b="0">
-                <a:solidFill>
-                  <a:srgbClr val="000000"/>
-                </a:solidFill>
-                <a:latin typeface="Times New Roman"/>
-              </a:rPr>
-              <a:t>Faster needs a faster link: three wires between the PMOD JB ports give 3× the radio's speed (next slide).</a:t>
+              <a:t>Every row runs on the same bitstream; only the firmware build changes.</a:t>
             </a:r>
           </a:p>
         </p:txBody>
@@ -31877,18 +32113,18 @@
               </a:buClr>
             </a:pPr>
             <a:r>
-              <a:rPr lang="en-US" sz="3000" b="1" spc="-1" dirty="0">
+              <a:rPr lang="en-US" sz="2600" b="1" spc="-1" dirty="0">
                 <a:latin typeface="Times New Roman" panose="02020603050405020304" pitchFamily="18" charset="0"/>
                 <a:cs typeface="Times New Roman" panose="02020603050405020304" pitchFamily="18" charset="0"/>
               </a:rPr>
-              <a:t>5. Making It Faster </a:t>
-            </a:r>
-            <a:r>
-              <a:rPr lang="en-US" sz="3000" spc="-1" dirty="0">
+              <a:t>6. Choose and Reproduce </a:t>
+            </a:r>
+            <a:r>
+              <a:rPr lang="en-US" sz="2600" spc="-1" dirty="0">
                 <a:latin typeface="Times New Roman" panose="02020603050405020304" pitchFamily="18" charset="0"/>
                 <a:cs typeface="Times New Roman" panose="02020603050405020304" pitchFamily="18" charset="0"/>
               </a:rPr>
-              <a:t>(7/7) A wired link: UART1 at 921,600 baud</a:t>
+              <a:t>(2/3) Limits to know before you reuse this code</a:t>
             </a:r>
           </a:p>
         </p:txBody>
@@ -31961,1962 +32197,7 @@
         </p:nvGraphicFramePr>
         <p:xfrm>
           <a:off x="365760" y="868680"/>
-          <a:ext cx="11430000" cy="2011680"/>
-        </p:xfrm>
-        <a:graphic>
-          <a:graphicData uri="http://schemas.openxmlformats.org/drawingml/2006/table">
-            <a:tbl>
-              <a:tblPr firstRow="1" bandRow="1">
-                <a:tableStyleId>{5C22544A-7EE6-4342-B048-85BDC9FD1C3A}</a:tableStyleId>
-              </a:tblPr>
-              <a:tblGrid>
-                <a:gridCol w="3291840"/>
-                <a:gridCol w="2377440"/>
-                <a:gridCol w="2834640"/>
-                <a:gridCol w="2926080"/>
-              </a:tblGrid>
-              <a:tr h="502920">
-                <a:tc>
-                  <a:txBody>
-                    <a:bodyPr wrap="square"/>
-                    <a:lstStyle/>
-                    <a:p>
-                      <a:r>
-                        <a:rPr sz="1500" b="1">
-                          <a:solidFill>
-                            <a:srgbClr val="000000"/>
-                          </a:solidFill>
-                          <a:latin typeface="Times New Roman"/>
-                        </a:rPr>
-                        <a:t>TBD3, measured on the boards</a:t>
-                      </a:r>
-                    </a:p>
-                  </a:txBody>
-                  <a:tcPr marL="54864" marR="54864" marT="27432" marB="27432">
-                    <a:solidFill>
-                      <a:srgbClr val="C5E0B4"/>
-                    </a:solidFill>
-                  </a:tcPr>
-                </a:tc>
-                <a:tc>
-                  <a:txBody>
-                    <a:bodyPr wrap="square"/>
-                    <a:lstStyle/>
-                    <a:p>
-                      <a:r>
-                        <a:rPr sz="1500" b="1">
-                          <a:solidFill>
-                            <a:srgbClr val="000000"/>
-                          </a:solidFill>
-                          <a:latin typeface="Times New Roman"/>
-                        </a:rPr>
-                        <a:t>Radio (MRF24J40)</a:t>
-                      </a:r>
-                    </a:p>
-                  </a:txBody>
-                  <a:tcPr marL="54864" marR="54864" marT="27432" marB="27432">
-                    <a:solidFill>
-                      <a:srgbClr val="C5E0B4"/>
-                    </a:solidFill>
-                  </a:tcPr>
-                </a:tc>
-                <a:tc>
-                  <a:txBody>
-                    <a:bodyPr wrap="square"/>
-                    <a:lstStyle/>
-                    <a:p>
-                      <a:r>
-                        <a:rPr sz="1500" b="1">
-                          <a:solidFill>
-                            <a:srgbClr val="000000"/>
-                          </a:solidFill>
-                          <a:latin typeface="Times New Roman"/>
-                        </a:rPr>
-                        <a:t>UART, 57,600 baud, byte pacing</a:t>
-                      </a:r>
-                    </a:p>
-                  </a:txBody>
-                  <a:tcPr marL="54864" marR="54864" marT="27432" marB="27432">
-                    <a:solidFill>
-                      <a:srgbClr val="C5E0B4"/>
-                    </a:solidFill>
-                  </a:tcPr>
-                </a:tc>
-                <a:tc>
-                  <a:txBody>
-                    <a:bodyPr wrap="square"/>
-                    <a:lstStyle/>
-                    <a:p>
-                      <a:r>
-                        <a:rPr sz="1500" b="1">
-                          <a:solidFill>
-                            <a:srgbClr val="000000"/>
-                          </a:solidFill>
-                          <a:latin typeface="Times New Roman"/>
-                        </a:rPr>
-                        <a:t>UART, 921,600 baud, flow control</a:t>
-                      </a:r>
-                    </a:p>
-                  </a:txBody>
-                  <a:tcPr marL="54864" marR="54864" marT="27432" marB="27432">
-                    <a:solidFill>
-                      <a:srgbClr val="C5E0B4"/>
-                    </a:solidFill>
-                  </a:tcPr>
-                </a:tc>
-              </a:tr>
-              <a:tr h="502920">
-                <a:tc>
-                  <a:txBody>
-                    <a:bodyPr wrap="square"/>
-                    <a:lstStyle/>
-                    <a:p>
-                      <a:r>
-                        <a:rPr sz="1500" b="0">
-                          <a:solidFill>
-                            <a:srgbClr val="000000"/>
-                          </a:solidFill>
-                          <a:latin typeface="Times New Roman"/>
-                        </a:rPr>
-                        <a:t>Handshake</a:t>
-                      </a:r>
-                    </a:p>
-                  </a:txBody>
-                  <a:tcPr marL="54864" marR="54864" marT="27432" marB="27432">
-                    <a:solidFill>
-                      <a:srgbClr val="FFFFFF"/>
-                    </a:solidFill>
-                  </a:tcPr>
-                </a:tc>
-                <a:tc>
-                  <a:txBody>
-                    <a:bodyPr wrap="square"/>
-                    <a:lstStyle/>
-                    <a:p>
-                      <a:r>
-                        <a:rPr sz="1500" b="0">
-                          <a:solidFill>
-                            <a:srgbClr val="000000"/>
-                          </a:solidFill>
-                          <a:latin typeface="Times New Roman"/>
-                        </a:rPr>
-                        <a:t>1.25 s</a:t>
-                      </a:r>
-                    </a:p>
-                  </a:txBody>
-                  <a:tcPr marL="54864" marR="54864" marT="27432" marB="27432">
-                    <a:solidFill>
-                      <a:srgbClr val="FFFFFF"/>
-                    </a:solidFill>
-                  </a:tcPr>
-                </a:tc>
-                <a:tc>
-                  <a:txBody>
-                    <a:bodyPr wrap="square"/>
-                    <a:lstStyle/>
-                    <a:p>
-                      <a:r>
-                        <a:rPr sz="1500" b="0">
-                          <a:solidFill>
-                            <a:srgbClr val="000000"/>
-                          </a:solidFill>
-                          <a:latin typeface="Times New Roman"/>
-                        </a:rPr>
-                        <a:t>3.07 s</a:t>
-                      </a:r>
-                    </a:p>
-                  </a:txBody>
-                  <a:tcPr marL="54864" marR="54864" marT="27432" marB="27432">
-                    <a:solidFill>
-                      <a:srgbClr val="FFFFFF"/>
-                    </a:solidFill>
-                  </a:tcPr>
-                </a:tc>
-                <a:tc>
-                  <a:txBody>
-                    <a:bodyPr wrap="square"/>
-                    <a:lstStyle/>
-                    <a:p>
-                      <a:r>
-                        <a:rPr sz="1500" b="0">
-                          <a:solidFill>
-                            <a:srgbClr val="000000"/>
-                          </a:solidFill>
-                          <a:latin typeface="Times New Roman"/>
-                        </a:rPr>
-                        <a:t>0.77 s</a:t>
-                      </a:r>
-                    </a:p>
-                  </a:txBody>
-                  <a:tcPr marL="54864" marR="54864" marT="27432" marB="27432">
-                    <a:solidFill>
-                      <a:srgbClr val="FFFFFF"/>
-                    </a:solidFill>
-                  </a:tcPr>
-                </a:tc>
-              </a:tr>
-              <a:tr h="502920">
-                <a:tc>
-                  <a:txBody>
-                    <a:bodyPr wrap="square"/>
-                    <a:lstStyle/>
-                    <a:p>
-                      <a:r>
-                        <a:rPr sz="1500" b="0">
-                          <a:solidFill>
-                            <a:srgbClr val="000000"/>
-                          </a:solidFill>
-                          <a:latin typeface="Times New Roman"/>
-                        </a:rPr>
-                        <a:t>256 KiB generated data</a:t>
-                      </a:r>
-                    </a:p>
-                  </a:txBody>
-                  <a:tcPr marL="54864" marR="54864" marT="27432" marB="27432">
-                    <a:solidFill>
-                      <a:srgbClr val="F2F8EE"/>
-                    </a:solidFill>
-                  </a:tcPr>
-                </a:tc>
-                <a:tc>
-                  <a:txBody>
-                    <a:bodyPr wrap="square"/>
-                    <a:lstStyle/>
-                    <a:p>
-                      <a:r>
-                        <a:rPr sz="1500" b="0">
-                          <a:solidFill>
-                            <a:srgbClr val="000000"/>
-                          </a:solidFill>
-                          <a:latin typeface="Times New Roman"/>
-                        </a:rPr>
-                        <a:t>—</a:t>
-                      </a:r>
-                    </a:p>
-                  </a:txBody>
-                  <a:tcPr marL="54864" marR="54864" marT="27432" marB="27432">
-                    <a:solidFill>
-                      <a:srgbClr val="F2F8EE"/>
-                    </a:solidFill>
-                  </a:tcPr>
-                </a:tc>
-                <a:tc>
-                  <a:txBody>
-                    <a:bodyPr wrap="square"/>
-                    <a:lstStyle/>
-                    <a:p>
-                      <a:r>
-                        <a:rPr sz="1500" b="0">
-                          <a:solidFill>
-                            <a:srgbClr val="000000"/>
-                          </a:solidFill>
-                          <a:latin typeface="Times New Roman"/>
-                        </a:rPr>
-                        <a:t>2.4 KB/s</a:t>
-                      </a:r>
-                    </a:p>
-                  </a:txBody>
-                  <a:tcPr marL="54864" marR="54864" marT="27432" marB="27432">
-                    <a:solidFill>
-                      <a:srgbClr val="F2F8EE"/>
-                    </a:solidFill>
-                  </a:tcPr>
-                </a:tc>
-                <a:tc>
-                  <a:txBody>
-                    <a:bodyPr wrap="square"/>
-                    <a:lstStyle/>
-                    <a:p>
-                      <a:r>
-                        <a:rPr sz="1500" b="0">
-                          <a:solidFill>
-                            <a:srgbClr val="000000"/>
-                          </a:solidFill>
-                          <a:latin typeface="Times New Roman"/>
-                        </a:rPr>
-                        <a:t>49.5 KB/s</a:t>
-                      </a:r>
-                    </a:p>
-                  </a:txBody>
-                  <a:tcPr marL="54864" marR="54864" marT="27432" marB="27432">
-                    <a:solidFill>
-                      <a:srgbClr val="F2F8EE"/>
-                    </a:solidFill>
-                  </a:tcPr>
-                </a:tc>
-              </a:tr>
-              <a:tr h="502920">
-                <a:tc>
-                  <a:txBody>
-                    <a:bodyPr wrap="square"/>
-                    <a:lstStyle/>
-                    <a:p>
-                      <a:r>
-                        <a:rPr sz="1500" b="0">
-                          <a:solidFill>
-                            <a:srgbClr val="000000"/>
-                          </a:solidFill>
-                          <a:latin typeface="Times New Roman"/>
-                        </a:rPr>
-                        <a:t>1 MiB, SD card A → SD card B</a:t>
-                      </a:r>
-                    </a:p>
-                  </a:txBody>
-                  <a:tcPr marL="54864" marR="54864" marT="27432" marB="27432">
-                    <a:solidFill>
-                      <a:srgbClr val="FFFFFF"/>
-                    </a:solidFill>
-                  </a:tcPr>
-                </a:tc>
-                <a:tc>
-                  <a:txBody>
-                    <a:bodyPr wrap="square"/>
-                    <a:lstStyle/>
-                    <a:p>
-                      <a:r>
-                        <a:rPr sz="1500" b="0">
-                          <a:solidFill>
-                            <a:srgbClr val="000000"/>
-                          </a:solidFill>
-                          <a:latin typeface="Times New Roman"/>
-                        </a:rPr>
-                        <a:t>99.6 s (10.5 KB/s)</a:t>
-                      </a:r>
-                    </a:p>
-                  </a:txBody>
-                  <a:tcPr marL="54864" marR="54864" marT="27432" marB="27432">
-                    <a:solidFill>
-                      <a:srgbClr val="FFFFFF"/>
-                    </a:solidFill>
-                  </a:tcPr>
-                </a:tc>
-                <a:tc>
-                  <a:txBody>
-                    <a:bodyPr wrap="square"/>
-                    <a:lstStyle/>
-                    <a:p>
-                      <a:r>
-                        <a:rPr sz="1500" b="0">
-                          <a:solidFill>
-                            <a:srgbClr val="000000"/>
-                          </a:solidFill>
-                          <a:latin typeface="Times New Roman"/>
-                        </a:rPr>
-                        <a:t>—</a:t>
-                      </a:r>
-                    </a:p>
-                  </a:txBody>
-                  <a:tcPr marL="54864" marR="54864" marT="27432" marB="27432">
-                    <a:solidFill>
-                      <a:srgbClr val="FFFFFF"/>
-                    </a:solidFill>
-                  </a:tcPr>
-                </a:tc>
-                <a:tc>
-                  <a:txBody>
-                    <a:bodyPr wrap="square"/>
-                    <a:lstStyle/>
-                    <a:p>
-                      <a:r>
-                        <a:rPr sz="1500" b="0">
-                          <a:solidFill>
-                            <a:srgbClr val="000000"/>
-                          </a:solidFill>
-                          <a:latin typeface="Times New Roman"/>
-                        </a:rPr>
-                        <a:t>32.2 s (32.6 KB/s)</a:t>
-                      </a:r>
-                    </a:p>
-                  </a:txBody>
-                  <a:tcPr marL="54864" marR="54864" marT="27432" marB="27432">
-                    <a:solidFill>
-                      <a:srgbClr val="FFFFFF"/>
-                    </a:solidFill>
-                  </a:tcPr>
-                </a:tc>
-              </a:tr>
-            </a:tbl>
-          </a:graphicData>
-        </a:graphic>
-      </p:graphicFrame>
-      <p:sp>
-        <p:nvSpPr>
-          <p:cNvPr id="64" name="TextBox 63"/>
-          <p:cNvSpPr txBox="1"/>
-          <p:nvPr/>
-        </p:nvSpPr>
-        <p:spPr>
-          <a:xfrm>
-            <a:off x="365760" y="3108960"/>
-            <a:ext cx="11430000" cy="3200400"/>
-          </a:xfrm>
-          <a:prstGeom prst="rect">
-            <a:avLst/>
-          </a:prstGeom>
-          <a:noFill/>
-        </p:spPr>
-        <p:txBody>
-          <a:bodyPr wrap="square" anchor="t">
-            <a:spAutoFit/>
-          </a:bodyPr>
-          <a:lstStyle/>
-          <a:p>
-            <a:pPr marL="256032" indent="-219456">
-              <a:spcAft>
-                <a:spcPts val="400"/>
-              </a:spcAft>
-              <a:buChar char="•"/>
-            </a:pPr>
-            <a:r>
-              <a:rPr sz="1600" b="0">
-                <a:solidFill>
-                  <a:srgbClr val="000000"/>
-                </a:solidFill>
-                <a:latin typeface="Times New Roman"/>
-              </a:rPr>
-              <a:t>Wiring: A's JB2 (TX) → B's JB1 (RX), B's JB2 (TX) → A's JB1 (RX), JB5 GND ↔ JB5 GND (Lesson 1, section 4). Build both images with </a:t>
-            </a:r>
-            <a:r>
-              <a:rPr sz="1400" b="0">
-                <a:solidFill>
-                  <a:srgbClr val="8B1A1A"/>
-                </a:solidFill>
-                <a:latin typeface="Consolas"/>
-              </a:rPr>
-              <a:t>TRANSPORT=uart</a:t>
-            </a:r>
-            <a:r>
-              <a:rPr sz="1600" b="0">
-                <a:solidFill>
-                  <a:srgbClr val="000000"/>
-                </a:solidFill>
-                <a:latin typeface="Times New Roman"/>
-              </a:rPr>
-              <a:t>; </a:t>
-            </a:r>
-            <a:r>
-              <a:rPr sz="1400" b="0">
-                <a:solidFill>
-                  <a:srgbClr val="8B1A1A"/>
-                </a:solidFill>
-                <a:latin typeface="Consolas"/>
-              </a:rPr>
-              <a:t>EXTRA_CFLAGS=-DUART1_BAUD=&lt;baud&gt;</a:t>
-            </a:r>
-            <a:r>
-              <a:rPr sz="1600" b="0">
-                <a:solidFill>
-                  <a:srgbClr val="000000"/>
-                </a:solidFill>
-                <a:latin typeface="Times New Roman"/>
-              </a:rPr>
-              <a:t> changes the speed (both boards alike).</a:t>
-            </a:r>
-          </a:p>
-          <a:p>
-            <a:pPr marL="256032" indent="-219456">
-              <a:spcAft>
-                <a:spcPts val="400"/>
-              </a:spcAft>
-              <a:buChar char="•"/>
-            </a:pPr>
-            <a:r>
-              <a:rPr sz="1600" b="0">
-                <a:solidFill>
-                  <a:srgbClr val="000000"/>
-                </a:solidFill>
-                <a:latin typeface="Times New Roman"/>
-              </a:rPr>
-              <a:t>The receiver polls UART1 and is busy between frames (AEAD, SD writes), so a sender that just transmits loses bytes. The first version waited after </a:t>
-            </a:r>
-            <a:r>
-              <a:rPr sz="1600" b="1">
-                <a:solidFill>
-                  <a:srgbClr val="000000"/>
-                </a:solidFill>
-                <a:latin typeface="Times New Roman"/>
-              </a:rPr>
-              <a:t>every byte</a:t>
-            </a:r>
-            <a:r>
-              <a:rPr sz="1600" b="0">
-                <a:solidFill>
-                  <a:srgbClr val="000000"/>
-                </a:solidFill>
-                <a:latin typeface="Times New Roman"/>
-              </a:rPr>
-              <a:t>.</a:t>
-            </a:r>
-          </a:p>
-          <a:p>
-            <a:pPr marL="256032" indent="-219456">
-              <a:spcAft>
-                <a:spcPts val="400"/>
-              </a:spcAft>
-              <a:buChar char="•"/>
-            </a:pPr>
-            <a:r>
-              <a:rPr sz="1600" b="0">
-                <a:solidFill>
-                  <a:srgbClr val="000000"/>
-                </a:solidFill>
-                <a:latin typeface="Times New Roman"/>
-              </a:rPr>
-              <a:t>Now the receiver sends one READY byte every 0.2 ms while it waits for a frame; the sender drops old READYs, waits for a fresh one, then sends the frame at line rate (</a:t>
-            </a:r>
-            <a:r>
-              <a:rPr sz="1600" b="0" i="1">
-                <a:solidFill>
-                  <a:srgbClr val="000000"/>
-                </a:solidFill>
-                <a:latin typeface="Times New Roman"/>
-              </a:rPr>
-              <a:t>edhoc_transport.c</a:t>
-            </a:r>
-            <a:r>
-              <a:rPr sz="1600" b="0">
-                <a:solidFill>
-                  <a:srgbClr val="000000"/>
-                </a:solidFill>
-                <a:latin typeface="Times New Roman"/>
-              </a:rPr>
-              <a:t>). With that, the baud rate sets the pace.</a:t>
-            </a:r>
-          </a:p>
-          <a:p>
-            <a:pPr marL="256032" indent="-219456">
-              <a:spcAft>
-                <a:spcPts val="400"/>
-              </a:spcAft>
-              <a:buChar char="•"/>
-            </a:pPr>
-            <a:r>
-              <a:rPr sz="1600" b="0">
-                <a:solidFill>
-                  <a:srgbClr val="000000"/>
-                </a:solidFill>
-                <a:latin typeface="Times New Roman"/>
-              </a:rPr>
-              <a:t>Card to card, AES and the SD card now take a larger share: 5.7 s of the 32.2 s is SD access on each board.</a:t>
-            </a:r>
-          </a:p>
-        </p:txBody>
-      </p:sp>
-    </p:spTree>
-  </p:cSld>
-  <p:clrMapOvr>
-    <a:masterClrMapping/>
-  </p:clrMapOvr>
-</p:sld>
-</file>
-
-<file path=ppt/slides/slide51.xml><?xml version="1.0" encoding="utf-8"?>
-<p:sld xmlns:a="http://schemas.openxmlformats.org/drawingml/2006/main" xmlns:p="http://schemas.openxmlformats.org/presentationml/2006/main" xmlns:r="http://schemas.openxmlformats.org/officeDocument/2006/relationships">
-  <p:cSld>
-    <p:spTree>
-      <p:nvGrpSpPr>
-        <p:cNvPr id="1" name=""/>
-        <p:cNvGrpSpPr/>
-        <p:nvPr/>
-      </p:nvGrpSpPr>
-      <p:grpSpPr/>
-      <p:sp>
-        <p:nvSpPr>
-          <p:cNvPr id="41" name="CustomShape 3"/>
-          <p:cNvSpPr/>
-          <p:nvPr/>
-        </p:nvSpPr>
-        <p:spPr>
-          <a:xfrm>
-            <a:off x="0" y="1277373"/>
-            <a:ext cx="12186000" cy="1014209"/>
-          </a:xfrm>
-          <a:prstGeom prst="rect">
-            <a:avLst/>
-          </a:prstGeom>
-          <a:noFill/>
-          <a:ln>
-            <a:noFill/>
-          </a:ln>
-        </p:spPr>
-        <p:style>
-          <a:lnRef idx="0">
-            <a:scrgbClr r="0" g="0" b="0"/>
-          </a:lnRef>
-          <a:fillRef idx="0">
-            <a:scrgbClr r="0" g="0" b="0"/>
-          </a:fillRef>
-          <a:effectRef idx="0">
-            <a:scrgbClr r="0" g="0" b="0"/>
-          </a:effectRef>
-          <a:fontRef idx="minor"/>
-        </p:style>
-        <p:txBody>
-          <a:bodyPr wrap="square" lIns="90000" tIns="45000" rIns="90000" bIns="45000">
-            <a:spAutoFit/>
-          </a:bodyPr>
-          <a:lstStyle/>
-          <a:p>
-            <a:pPr algn="ctr">
-              <a:lnSpc>
-                <a:spcPct val="100000"/>
-              </a:lnSpc>
-            </a:pPr>
-            <a:r>
-              <a:rPr lang="en-US" sz="6000" b="0" strike="noStrike" spc="-1" dirty="0">
-                <a:solidFill>
-                  <a:srgbClr val="000000"/>
-                </a:solidFill>
-                <a:latin typeface="Times New Roman"/>
-                <a:ea typeface="DejaVu Sans"/>
-              </a:rPr>
-              <a:t>Outline</a:t>
-            </a:r>
-            <a:endParaRPr lang="en-US" sz="6000" b="0" strike="noStrike" spc="-1" dirty="0">
-              <a:latin typeface="Arial"/>
-            </a:endParaRPr>
-          </a:p>
-        </p:txBody>
-      </p:sp>
-      <p:sp>
-        <p:nvSpPr>
-          <p:cNvPr id="42" name="CustomShape 4"/>
-          <p:cNvSpPr/>
-          <p:nvPr/>
-        </p:nvSpPr>
-        <p:spPr>
-          <a:xfrm>
-            <a:off x="6972480" y="105480"/>
-            <a:ext cx="5213520" cy="1110240"/>
-          </a:xfrm>
-          <a:prstGeom prst="rect">
-            <a:avLst/>
-          </a:prstGeom>
-          <a:solidFill>
-            <a:schemeClr val="bg2">
-              <a:lumMod val="75000"/>
-            </a:schemeClr>
-          </a:solidFill>
-          <a:ln>
-            <a:noFill/>
-          </a:ln>
-        </p:spPr>
-        <p:style>
-          <a:lnRef idx="2">
-            <a:schemeClr val="accent1">
-              <a:shade val="50000"/>
-            </a:schemeClr>
-          </a:lnRef>
-          <a:fillRef idx="1">
-            <a:schemeClr val="accent1"/>
-          </a:fillRef>
-          <a:effectRef idx="0">
-            <a:schemeClr val="accent1"/>
-          </a:effectRef>
-          <a:fontRef idx="minor"/>
-        </p:style>
-        <p:txBody>
-          <a:bodyPr/>
-          <a:lstStyle/>
-          <a:p>
-            <a:endParaRPr lang="en-US"/>
-          </a:p>
-        </p:txBody>
-      </p:sp>
-      <p:pic>
-        <p:nvPicPr>
-          <p:cNvPr id="43" name="Picture 4" descr="http://vlsilab.ee.uec.ac.jp/images/logo.png"/>
-          <p:cNvPicPr/>
-          <p:nvPr/>
-        </p:nvPicPr>
-        <p:blipFill>
-          <a:blip r:embed="rId2"/>
-          <a:stretch/>
-        </p:blipFill>
-        <p:spPr>
-          <a:xfrm>
-            <a:off x="7713720" y="152280"/>
-            <a:ext cx="3730320" cy="1035720"/>
-          </a:xfrm>
-          <a:prstGeom prst="rect">
-            <a:avLst/>
-          </a:prstGeom>
-          <a:ln>
-            <a:noFill/>
-          </a:ln>
-        </p:spPr>
-      </p:pic>
-      <p:sp>
-        <p:nvSpPr>
-          <p:cNvPr id="45" name="CustomShape 6"/>
-          <p:cNvSpPr/>
-          <p:nvPr/>
-        </p:nvSpPr>
-        <p:spPr>
-          <a:xfrm>
-            <a:off x="11291400" y="6492960"/>
-            <a:ext cx="894600" cy="358920"/>
-          </a:xfrm>
-          <a:prstGeom prst="rect">
-            <a:avLst/>
-          </a:prstGeom>
-          <a:noFill/>
-          <a:ln>
-            <a:noFill/>
-          </a:ln>
-        </p:spPr>
-        <p:style>
-          <a:lnRef idx="0">
-            <a:scrgbClr r="0" g="0" b="0"/>
-          </a:lnRef>
-          <a:fillRef idx="0">
-            <a:scrgbClr r="0" g="0" b="0"/>
-          </a:fillRef>
-          <a:effectRef idx="0">
-            <a:scrgbClr r="0" g="0" b="0"/>
-          </a:effectRef>
-          <a:fontRef idx="minor"/>
-        </p:style>
-        <p:txBody>
-          <a:bodyPr lIns="90000" tIns="45000" rIns="90000" bIns="45000" anchor="ctr">
-            <a:noAutofit/>
-          </a:bodyPr>
-          <a:lstStyle/>
-          <a:p>
-            <a:pPr algn="ctr">
-              <a:lnSpc>
-                <a:spcPct val="100000"/>
-              </a:lnSpc>
-            </a:pPr>
-            <a:fld id="{976D1C0D-8C0B-4FED-8F9E-AAED3AF2BED7}" type="slidenum">
-              <a:rPr lang="en-US" sz="1600" b="1" strike="noStrike" spc="-1">
-                <a:solidFill>
-                  <a:srgbClr val="000000"/>
-                </a:solidFill>
-                <a:latin typeface="Times New Roman"/>
-                <a:ea typeface="DejaVu Sans"/>
-              </a:rPr>
-              <a:t>45</a:t>
-            </a:fld>
-            <a:endParaRPr lang="en-US" sz="1600" b="0" strike="noStrike" spc="-1">
-              <a:latin typeface="Arial"/>
-            </a:endParaRPr>
-          </a:p>
-        </p:txBody>
-      </p:sp>
-      <p:sp>
-        <p:nvSpPr>
-          <p:cNvPr id="10" name="CustomShape 3">
-            <a:extLst>
-              <a:ext uri="{FF2B5EF4-FFF2-40B4-BE49-F238E27FC236}">
-                <a16:creationId xmlns:a16="http://schemas.microsoft.com/office/drawing/2014/main" id="{F22CA456-F1E3-4191-9864-00187BF37E54}"/>
-              </a:ext>
-            </a:extLst>
-          </p:cNvPr>
-          <p:cNvSpPr/>
-          <p:nvPr/>
-        </p:nvSpPr>
-        <p:spPr>
-          <a:xfrm>
-            <a:off x="402300" y="2353236"/>
-            <a:ext cx="11381400" cy="2553091"/>
-          </a:xfrm>
-          <a:prstGeom prst="rect">
-            <a:avLst/>
-          </a:prstGeom>
-          <a:noFill/>
-          <a:ln>
-            <a:noFill/>
-          </a:ln>
-        </p:spPr>
-        <p:style>
-          <a:lnRef idx="0">
-            <a:scrgbClr r="0" g="0" b="0"/>
-          </a:lnRef>
-          <a:fillRef idx="0">
-            <a:scrgbClr r="0" g="0" b="0"/>
-          </a:fillRef>
-          <a:effectRef idx="0">
-            <a:scrgbClr r="0" g="0" b="0"/>
-          </a:effectRef>
-          <a:fontRef idx="minor"/>
-        </p:style>
-        <p:txBody>
-          <a:bodyPr wrap="square" lIns="90000" tIns="45000" rIns="90000" bIns="45000">
-            <a:spAutoFit/>
-          </a:bodyPr>
-          <a:lstStyle/>
-          <a:p>
-            <a:pPr marL="1143000" indent="-1143000">
-              <a:lnSpc>
-                <a:spcPct val="100000"/>
-              </a:lnSpc>
-              <a:buFont typeface="+mj-lt"/>
-              <a:buAutoNum type="arabicPeriod"/>
-            </a:pPr>
-            <a:r>
-              <a:rPr lang="en-US" sz="2800" spc="-1" dirty="0" err="1" b="0">
-                <a:solidFill>
-                  <a:srgbClr val="808080"/>
-                </a:solidFill>
-                <a:latin typeface="Times New Roman" panose="02020603050405020304" pitchFamily="18" charset="0"/>
-                <a:ea typeface="DejaVu Sans"/>
-                <a:cs typeface="Times New Roman" panose="02020603050405020304" pitchFamily="18" charset="0"/>
-              </a:rPr>
-              <a:t>Application Channel</a:t>
-            </a:r>
-            <a:endParaRPr lang="en-US" sz="4000" b="0" strike="noStrike" spc="-1" dirty="0">
-              <a:solidFill>
-                <a:srgbClr val="000000"/>
-              </a:solidFill>
-              <a:latin typeface="Times New Roman" panose="02020603050405020304" pitchFamily="18" charset="0"/>
-              <a:ea typeface="DejaVu Sans"/>
-              <a:cs typeface="Times New Roman" panose="02020603050405020304" pitchFamily="18" charset="0"/>
-            </a:endParaRPr>
-          </a:p>
-          <a:p>
-            <a:pPr marL="1143000" indent="-1143000">
-              <a:lnSpc>
-                <a:spcPct val="100000"/>
-              </a:lnSpc>
-              <a:buFont typeface="+mj-lt"/>
-              <a:buAutoNum type="arabicPeriod"/>
-            </a:pPr>
-            <a:r>
-              <a:rPr lang="en-US" sz="2800" spc="-1" dirty="0" err="1" b="0">
-                <a:solidFill>
-                  <a:srgbClr val="808080"/>
-                </a:solidFill>
-                <a:latin typeface="Times New Roman" panose="02020603050405020304" pitchFamily="18" charset="0"/>
-                <a:ea typeface="DejaVu Sans"/>
-                <a:cs typeface="Times New Roman" panose="02020603050405020304" pitchFamily="18" charset="0"/>
-              </a:rPr>
-              <a:t>Radio Link</a:t>
-            </a:r>
-            <a:endParaRPr lang="en-US" sz="4000" b="0" strike="noStrike" spc="-1" dirty="0">
-              <a:solidFill>
-                <a:srgbClr val="000000"/>
-              </a:solidFill>
-              <a:latin typeface="Times New Roman" panose="02020603050405020304" pitchFamily="18" charset="0"/>
-              <a:ea typeface="DejaVu Sans"/>
-              <a:cs typeface="Times New Roman" panose="02020603050405020304" pitchFamily="18" charset="0"/>
-            </a:endParaRPr>
-          </a:p>
-          <a:p>
-            <a:pPr marL="1143000" indent="-1143000">
-              <a:lnSpc>
-                <a:spcPct val="100000"/>
-              </a:lnSpc>
-              <a:buFont typeface="+mj-lt"/>
-              <a:buAutoNum type="arabicPeriod"/>
-            </a:pPr>
-            <a:r>
-              <a:rPr lang="en-US" sz="2800" spc="-1" dirty="0" err="1" b="0">
-                <a:solidFill>
-                  <a:srgbClr val="808080"/>
-                </a:solidFill>
-                <a:latin typeface="Times New Roman" panose="02020603050405020304" pitchFamily="18" charset="0"/>
-                <a:ea typeface="DejaVu Sans"/>
-                <a:cs typeface="Times New Roman" panose="02020603050405020304" pitchFamily="18" charset="0"/>
-              </a:rPr>
-              <a:t>SD Card &amp; FAT32</a:t>
-            </a:r>
-            <a:endParaRPr lang="en-US" sz="4000" b="0" strike="noStrike" spc="-1" dirty="0">
-              <a:solidFill>
-                <a:srgbClr val="000000"/>
-              </a:solidFill>
-              <a:latin typeface="Times New Roman" panose="02020603050405020304" pitchFamily="18" charset="0"/>
-              <a:ea typeface="DejaVu Sans"/>
-              <a:cs typeface="Times New Roman" panose="02020603050405020304" pitchFamily="18" charset="0"/>
-            </a:endParaRPr>
-          </a:p>
-          <a:p>
-            <a:pPr marL="1143000" indent="-1143000">
-              <a:lnSpc>
-                <a:spcPct val="100000"/>
-              </a:lnSpc>
-              <a:buFont typeface="+mj-lt"/>
-              <a:buAutoNum type="arabicPeriod"/>
-            </a:pPr>
-            <a:r>
-              <a:rPr lang="en-US" sz="2800" spc="-1" dirty="0" err="1" b="0">
-                <a:solidFill>
-                  <a:srgbClr val="808080"/>
-                </a:solidFill>
-                <a:latin typeface="Times New Roman" panose="02020603050405020304" pitchFamily="18" charset="0"/>
-                <a:ea typeface="DejaVu Sans"/>
-                <a:cs typeface="Times New Roman" panose="02020603050405020304" pitchFamily="18" charset="0"/>
-              </a:rPr>
-              <a:t>End-to-End Transfer</a:t>
-            </a:r>
-            <a:endParaRPr lang="en-US" sz="4000" b="0" strike="noStrike" spc="-1" dirty="0">
-              <a:solidFill>
-                <a:srgbClr val="000000"/>
-              </a:solidFill>
-              <a:latin typeface="Times New Roman" panose="02020603050405020304" pitchFamily="18" charset="0"/>
-              <a:ea typeface="DejaVu Sans"/>
-              <a:cs typeface="Times New Roman" panose="02020603050405020304" pitchFamily="18" charset="0"/>
-            </a:endParaRPr>
-          </a:p>
-          <a:p>
-            <a:pPr marL="1143000" indent="-1143000">
-              <a:lnSpc>
-                <a:spcPct val="100000"/>
-              </a:lnSpc>
-              <a:buFont typeface="+mj-lt"/>
-              <a:buAutoNum type="arabicPeriod"/>
-            </a:pPr>
-            <a:r>
-              <a:rPr lang="en-US" sz="2800" spc="-1" dirty="0" err="1" b="0">
-                <a:solidFill>
-                  <a:srgbClr val="808080"/>
-                </a:solidFill>
-                <a:latin typeface="Times New Roman" panose="02020603050405020304" pitchFamily="18" charset="0"/>
-                <a:ea typeface="DejaVu Sans"/>
-                <a:cs typeface="Times New Roman" panose="02020603050405020304" pitchFamily="18" charset="0"/>
-              </a:rPr>
-              <a:t>Making It Faster</a:t>
-            </a:r>
-            <a:endParaRPr lang="en-US" sz="4000" b="0" strike="noStrike" spc="-1" dirty="0">
-              <a:solidFill>
-                <a:srgbClr val="000000"/>
-              </a:solidFill>
-              <a:latin typeface="Times New Roman" panose="02020603050405020304" pitchFamily="18" charset="0"/>
-              <a:ea typeface="DejaVu Sans"/>
-              <a:cs typeface="Times New Roman" panose="02020603050405020304" pitchFamily="18" charset="0"/>
-            </a:endParaRPr>
-          </a:p>
-          <a:p>
-            <a:pPr marL="1143000" indent="-1143000">
-              <a:lnSpc>
-                <a:spcPct val="100000"/>
-              </a:lnSpc>
-              <a:buFont typeface="+mj-lt"/>
-              <a:buAutoNum type="arabicPeriod"/>
-            </a:pPr>
-            <a:r>
-              <a:rPr lang="en-US" sz="2800" spc="-1" dirty="0" err="1" b="1">
-                <a:solidFill>
-                  <a:srgbClr val="37863C"/>
-                </a:solidFill>
-                <a:latin typeface="Times New Roman" panose="02020603050405020304" pitchFamily="18" charset="0"/>
-                <a:ea typeface="DejaVu Sans"/>
-                <a:cs typeface="Times New Roman" panose="02020603050405020304" pitchFamily="18" charset="0"/>
-              </a:rPr>
-              <a:t>Questions Behind the Project</a:t>
-            </a:r>
-            <a:endParaRPr lang="en-US" sz="4000" b="0" strike="noStrike" spc="-1" dirty="0">
-              <a:solidFill>
-                <a:srgbClr val="000000"/>
-              </a:solidFill>
-              <a:latin typeface="Times New Roman" panose="02020603050405020304" pitchFamily="18" charset="0"/>
-              <a:ea typeface="DejaVu Sans"/>
-              <a:cs typeface="Times New Roman" panose="02020603050405020304" pitchFamily="18" charset="0"/>
-            </a:endParaRPr>
-          </a:p>
-          <a:p>
-            <a:pPr marL="1143000" indent="-1143000">
-              <a:lnSpc>
-                <a:spcPct val="100000"/>
-              </a:lnSpc>
-              <a:buFont typeface="+mj-lt"/>
-              <a:buAutoNum type="arabicPeriod"/>
-            </a:pPr>
-            <a:r>
-              <a:rPr lang="en-US" sz="2800" spc="-1" dirty="0" err="1" b="0">
-                <a:solidFill>
-                  <a:srgbClr val="808080"/>
-                </a:solidFill>
-                <a:latin typeface="Times New Roman" panose="02020603050405020304" pitchFamily="18" charset="0"/>
-                <a:ea typeface="DejaVu Sans"/>
-                <a:cs typeface="Times New Roman" panose="02020603050405020304" pitchFamily="18" charset="0"/>
-              </a:rPr>
-              <a:t>Practice</a:t>
-            </a:r>
-            <a:endParaRPr lang="en-US" sz="4000" b="0" strike="noStrike" spc="-1" dirty="0">
-              <a:solidFill>
-                <a:srgbClr val="000000"/>
-              </a:solidFill>
-              <a:latin typeface="Times New Roman" panose="02020603050405020304" pitchFamily="18" charset="0"/>
-              <a:ea typeface="DejaVu Sans"/>
-              <a:cs typeface="Times New Roman" panose="02020603050405020304" pitchFamily="18" charset="0"/>
-            </a:endParaRPr>
-          </a:p>
-        </p:txBody>
-      </p:sp>
-      <p:pic>
-        <p:nvPicPr>
-          <p:cNvPr id="2" name="Picture 1">
-            <a:extLst>
-              <a:ext uri="{FF2B5EF4-FFF2-40B4-BE49-F238E27FC236}">
-                <a16:creationId xmlns:a16="http://schemas.microsoft.com/office/drawing/2014/main" id="{B2A62998-F8D0-DAA3-4400-008D3F20B2EE}"/>
-              </a:ext>
-            </a:extLst>
-          </p:cNvPr>
-          <p:cNvPicPr>
-            <a:picLocks noChangeAspect="1"/>
-          </p:cNvPicPr>
-          <p:nvPr/>
-        </p:nvPicPr>
-        <p:blipFill>
-          <a:blip r:embed="rId3">
-            <a:extLst>
-              <a:ext uri="{28A0092B-C50C-407E-A947-70E740481C1C}">
-                <a14:useLocalDpi xmlns:a14="http://schemas.microsoft.com/office/drawing/2010/main" val="0"/>
-              </a:ext>
-            </a:extLst>
-          </a:blip>
-          <a:stretch>
-            <a:fillRect/>
-          </a:stretch>
-        </p:blipFill>
-        <p:spPr>
-          <a:xfrm>
-            <a:off x="-6000" y="0"/>
-            <a:ext cx="5213520" cy="1363335"/>
-          </a:xfrm>
-          <a:prstGeom prst="rect">
-            <a:avLst/>
-          </a:prstGeom>
-        </p:spPr>
-      </p:pic>
-    </p:spTree>
-  </p:cSld>
-  <p:clrMapOvr>
-    <a:masterClrMapping/>
-  </p:clrMapOvr>
-</p:sld>
-</file>
-
-<file path=ppt/slides/slide52.xml><?xml version="1.0" encoding="utf-8"?>
-<p:sld xmlns:a="http://schemas.openxmlformats.org/drawingml/2006/main" xmlns:p="http://schemas.openxmlformats.org/presentationml/2006/main" xmlns:r="http://schemas.openxmlformats.org/officeDocument/2006/relationships">
-  <p:cSld>
-    <p:spTree>
-      <p:nvGrpSpPr>
-        <p:cNvPr id="1" name=""/>
-        <p:cNvGrpSpPr/>
-        <p:nvPr/>
-      </p:nvGrpSpPr>
-      <p:grpSpPr/>
-      <p:sp>
-        <p:nvSpPr>
-          <p:cNvPr id="10" name="CustomShape 6">
-            <a:extLst>
-              <a:ext uri="{FF2B5EF4-FFF2-40B4-BE49-F238E27FC236}">
-                <a16:creationId xmlns:a16="http://schemas.microsoft.com/office/drawing/2014/main" id="{CB76DC60-C0C9-436D-8956-EE4CA394869E}"/>
-              </a:ext>
-            </a:extLst>
-          </p:cNvPr>
-          <p:cNvSpPr/>
-          <p:nvPr/>
-        </p:nvSpPr>
-        <p:spPr>
-          <a:xfrm>
-            <a:off x="-6000" y="0"/>
-            <a:ext cx="12198000" cy="644877"/>
-          </a:xfrm>
-          <a:prstGeom prst="rect">
-            <a:avLst/>
-          </a:prstGeom>
-          <a:solidFill>
-            <a:schemeClr val="accent6">
-              <a:lumMod val="40000"/>
-              <a:lumOff val="60000"/>
-            </a:schemeClr>
-          </a:solidFill>
-          <a:ln>
-            <a:noFill/>
-          </a:ln>
-        </p:spPr>
-        <p:style>
-          <a:lnRef idx="0">
-            <a:scrgbClr r="0" g="0" b="0"/>
-          </a:lnRef>
-          <a:fillRef idx="0">
-            <a:scrgbClr r="0" g="0" b="0"/>
-          </a:fillRef>
-          <a:effectRef idx="0">
-            <a:scrgbClr r="0" g="0" b="0"/>
-          </a:effectRef>
-          <a:fontRef idx="minor"/>
-        </p:style>
-        <p:txBody>
-          <a:bodyPr wrap="square" lIns="90000" tIns="45000" rIns="90000" bIns="45000">
-            <a:spAutoFit/>
-          </a:bodyPr>
-          <a:lstStyle/>
-          <a:p>
-            <a:pPr marL="360" algn="ctr">
-              <a:lnSpc>
-                <a:spcPct val="100000"/>
-              </a:lnSpc>
-              <a:buClr>
-                <a:srgbClr val="000000"/>
-              </a:buClr>
-            </a:pPr>
-            <a:r>
-              <a:rPr lang="en-US" sz="2400" b="1" spc="-1" dirty="0">
-                <a:latin typeface="Times New Roman" panose="02020603050405020304" pitchFamily="18" charset="0"/>
-                <a:cs typeface="Times New Roman" panose="02020603050405020304" pitchFamily="18" charset="0"/>
-              </a:rPr>
-              <a:t>6. Questions Behind the Project </a:t>
-            </a:r>
-            <a:r>
-              <a:rPr lang="en-US" sz="2400" spc="-1" dirty="0">
-                <a:latin typeface="Times New Roman" panose="02020603050405020304" pitchFamily="18" charset="0"/>
-                <a:cs typeface="Times New Roman" panose="02020603050405020304" pitchFamily="18" charset="0"/>
-              </a:rPr>
-              <a:t>(1/3) The questions, and where they are answered</a:t>
-            </a:r>
-          </a:p>
-        </p:txBody>
-      </p:sp>
-      <p:sp>
-        <p:nvSpPr>
-          <p:cNvPr id="62" name="CustomShape 2"/>
-          <p:cNvSpPr/>
-          <p:nvPr/>
-        </p:nvSpPr>
-        <p:spPr>
-          <a:xfrm>
-            <a:off x="11291400" y="6492960"/>
-            <a:ext cx="894600" cy="358920"/>
-          </a:xfrm>
-          <a:prstGeom prst="rect">
-            <a:avLst/>
-          </a:prstGeom>
-          <a:noFill/>
-          <a:ln>
-            <a:noFill/>
-          </a:ln>
-        </p:spPr>
-        <p:style>
-          <a:lnRef idx="0">
-            <a:scrgbClr r="0" g="0" b="0"/>
-          </a:lnRef>
-          <a:fillRef idx="0">
-            <a:scrgbClr r="0" g="0" b="0"/>
-          </a:fillRef>
-          <a:effectRef idx="0">
-            <a:scrgbClr r="0" g="0" b="0"/>
-          </a:effectRef>
-          <a:fontRef idx="minor"/>
-        </p:style>
-        <p:txBody>
-          <a:bodyPr lIns="90000" tIns="45000" rIns="90000" bIns="45000" anchor="ctr">
-            <a:noAutofit/>
-          </a:bodyPr>
-          <a:lstStyle/>
-          <a:p>
-            <a:pPr algn="ctr">
-              <a:lnSpc>
-                <a:spcPct val="100000"/>
-              </a:lnSpc>
-            </a:pPr>
-            <a:fld id="{32452110-F6D1-439F-92C4-7A3912DA20B0}" type="slidenum">
-              <a:rPr lang="en-US" sz="1600" b="1" strike="noStrike" spc="-1">
-                <a:solidFill>
-                  <a:srgbClr val="000000"/>
-                </a:solidFill>
-                <a:latin typeface="Times New Roman"/>
-                <a:ea typeface="DejaVu Sans"/>
-              </a:rPr>
-              <a:t>46</a:t>
-            </a:fld>
-            <a:endParaRPr lang="en-US" sz="1600" b="0" strike="noStrike" spc="-1">
-              <a:latin typeface="Arial"/>
-            </a:endParaRPr>
-          </a:p>
-        </p:txBody>
-      </p:sp>
-      <p:graphicFrame>
-        <p:nvGraphicFramePr>
-          <p:cNvPr id="63" name="Table 62"/>
-          <p:cNvGraphicFramePr>
-            <a:graphicFrameLocks noGrp="1"/>
-          </p:cNvGraphicFramePr>
-          <p:nvPr/>
-        </p:nvGraphicFramePr>
-        <p:xfrm>
-          <a:off x="365760" y="868680"/>
-          <a:ext cx="11430000" cy="4389120"/>
-        </p:xfrm>
-        <a:graphic>
-          <a:graphicData uri="http://schemas.openxmlformats.org/drawingml/2006/table">
-            <a:tbl>
-              <a:tblPr firstRow="1" bandRow="1">
-                <a:tableStyleId>{5C22544A-7EE6-4342-B048-85BDC9FD1C3A}</a:tableStyleId>
-              </a:tblPr>
-              <a:tblGrid>
-                <a:gridCol w="4572000"/>
-                <a:gridCol w="5669280"/>
-                <a:gridCol w="1188720"/>
-              </a:tblGrid>
-              <a:tr h="548640">
-                <a:tc>
-                  <a:txBody>
-                    <a:bodyPr wrap="square"/>
-                    <a:lstStyle/>
-                    <a:p>
-                      <a:r>
-                        <a:rPr sz="1500" b="1">
-                          <a:solidFill>
-                            <a:srgbClr val="000000"/>
-                          </a:solidFill>
-                          <a:latin typeface="Times New Roman"/>
-                        </a:rPr>
-                        <a:t>Question</a:t>
-                      </a:r>
-                    </a:p>
-                  </a:txBody>
-                  <a:tcPr marL="54864" marR="54864" marT="27432" marB="27432">
-                    <a:solidFill>
-                      <a:srgbClr val="C5E0B4"/>
-                    </a:solidFill>
-                  </a:tcPr>
-                </a:tc>
-                <a:tc>
-                  <a:txBody>
-                    <a:bodyPr wrap="square"/>
-                    <a:lstStyle/>
-                    <a:p>
-                      <a:r>
-                        <a:rPr sz="1500" b="1">
-                          <a:solidFill>
-                            <a:srgbClr val="000000"/>
-                          </a:solidFill>
-                          <a:latin typeface="Times New Roman"/>
-                        </a:rPr>
-                        <a:t>Short answer</a:t>
-                      </a:r>
-                    </a:p>
-                  </a:txBody>
-                  <a:tcPr marL="54864" marR="54864" marT="27432" marB="27432">
-                    <a:solidFill>
-                      <a:srgbClr val="C5E0B4"/>
-                    </a:solidFill>
-                  </a:tcPr>
-                </a:tc>
-                <a:tc>
-                  <a:txBody>
-                    <a:bodyPr wrap="square"/>
-                    <a:lstStyle/>
-                    <a:p>
-                      <a:r>
-                        <a:rPr sz="1500" b="1">
-                          <a:solidFill>
-                            <a:srgbClr val="000000"/>
-                          </a:solidFill>
-                          <a:latin typeface="Times New Roman"/>
-                        </a:rPr>
-                        <a:t>Lesson</a:t>
-                      </a:r>
-                    </a:p>
-                  </a:txBody>
-                  <a:tcPr marL="54864" marR="54864" marT="27432" marB="27432">
-                    <a:solidFill>
-                      <a:srgbClr val="C5E0B4"/>
-                    </a:solidFill>
-                  </a:tcPr>
-                </a:tc>
-              </a:tr>
-              <a:tr h="548640">
-                <a:tc>
-                  <a:txBody>
-                    <a:bodyPr wrap="square"/>
-                    <a:lstStyle/>
-                    <a:p>
-                      <a:r>
-                        <a:rPr sz="1500" b="0">
-                          <a:solidFill>
-                            <a:srgbClr val="000000"/>
-                          </a:solidFill>
-                          <a:latin typeface="Times New Roman"/>
-                        </a:rPr>
-                        <a:t>Does EDHOC fit a small Rocket SoC with 32 KiB?</a:t>
-                      </a:r>
-                    </a:p>
-                  </a:txBody>
-                  <a:tcPr marL="54864" marR="54864" marT="27432" marB="27432">
-                    <a:solidFill>
-                      <a:srgbClr val="FFFFFF"/>
-                    </a:solidFill>
-                  </a:tcPr>
-                </a:tc>
-                <a:tc>
-                  <a:txBody>
-                    <a:bodyPr wrap="square"/>
-                    <a:lstStyle/>
-                    <a:p>
-                      <a:r>
-                        <a:rPr sz="1500" b="0">
-                          <a:solidFill>
-                            <a:srgbClr val="000000"/>
-                          </a:solidFill>
-                          <a:latin typeface="Times New Roman"/>
-                        </a:rPr>
-                        <a:t>in this revision only suite 4, method 3, initiator fits (229 B spare); the rest need up to 61.5 KB → 64 KiB</a:t>
-                      </a:r>
-                    </a:p>
-                  </a:txBody>
-                  <a:tcPr marL="54864" marR="54864" marT="27432" marB="27432">
-                    <a:solidFill>
-                      <a:srgbClr val="FFFFFF"/>
-                    </a:solidFill>
-                  </a:tcPr>
-                </a:tc>
-                <a:tc>
-                  <a:txBody>
-                    <a:bodyPr wrap="square"/>
-                    <a:lstStyle/>
-                    <a:p>
-                      <a:r>
-                        <a:rPr sz="1500" b="0">
-                          <a:solidFill>
-                            <a:srgbClr val="000000"/>
-                          </a:solidFill>
-                          <a:latin typeface="Times New Roman"/>
-                        </a:rPr>
-                        <a:t>1, 2</a:t>
-                      </a:r>
-                    </a:p>
-                  </a:txBody>
-                  <a:tcPr marL="54864" marR="54864" marT="27432" marB="27432">
-                    <a:solidFill>
-                      <a:srgbClr val="FFFFFF"/>
-                    </a:solidFill>
-                  </a:tcPr>
-                </a:tc>
-              </a:tr>
-              <a:tr h="548640">
-                <a:tc>
-                  <a:txBody>
-                    <a:bodyPr wrap="square"/>
-                    <a:lstStyle/>
-                    <a:p>
-                      <a:r>
-                        <a:rPr sz="1500" b="0">
-                          <a:solidFill>
-                            <a:srgbClr val="000000"/>
-                          </a:solidFill>
-                          <a:latin typeface="Times New Roman"/>
-                        </a:rPr>
-                        <a:t>Why not 100 MHz?</a:t>
-                      </a:r>
-                    </a:p>
-                  </a:txBody>
-                  <a:tcPr marL="54864" marR="54864" marT="27432" marB="27432">
-                    <a:solidFill>
-                      <a:srgbClr val="F2F8EE"/>
-                    </a:solidFill>
-                  </a:tcPr>
-                </a:tc>
-                <a:tc>
-                  <a:txBody>
-                    <a:bodyPr wrap="square"/>
-                    <a:lstStyle/>
-                    <a:p>
-                      <a:r>
-                        <a:rPr sz="1500" b="0">
-                          <a:solidFill>
-                            <a:srgbClr val="000000"/>
-                          </a:solidFill>
-                          <a:latin typeface="Times New Roman"/>
-                        </a:rPr>
-                        <a:t>this implementation failed timing at 100 MHz and closes at 75 MHz</a:t>
-                      </a:r>
-                    </a:p>
-                  </a:txBody>
-                  <a:tcPr marL="54864" marR="54864" marT="27432" marB="27432">
-                    <a:solidFill>
-                      <a:srgbClr val="F2F8EE"/>
-                    </a:solidFill>
-                  </a:tcPr>
-                </a:tc>
-                <a:tc>
-                  <a:txBody>
-                    <a:bodyPr wrap="square"/>
-                    <a:lstStyle/>
-                    <a:p>
-                      <a:r>
-                        <a:rPr sz="1500" b="0">
-                          <a:solidFill>
-                            <a:srgbClr val="000000"/>
-                          </a:solidFill>
-                          <a:latin typeface="Times New Roman"/>
-                        </a:rPr>
-                        <a:t>1</a:t>
-                      </a:r>
-                    </a:p>
-                  </a:txBody>
-                  <a:tcPr marL="54864" marR="54864" marT="27432" marB="27432">
-                    <a:solidFill>
-                      <a:srgbClr val="F2F8EE"/>
-                    </a:solidFill>
-                  </a:tcPr>
-                </a:tc>
-              </a:tr>
-              <a:tr h="548640">
-                <a:tc>
-                  <a:txBody>
-                    <a:bodyPr wrap="square"/>
-                    <a:lstStyle/>
-                    <a:p>
-                      <a:r>
-                        <a:rPr sz="1500" b="0">
-                          <a:solidFill>
-                            <a:srgbClr val="000000"/>
-                          </a:solidFill>
-                          <a:latin typeface="Times New Roman"/>
-                        </a:rPr>
-                        <a:t>Do all methods and suites work?</a:t>
-                      </a:r>
-                    </a:p>
-                  </a:txBody>
-                  <a:tcPr marL="54864" marR="54864" marT="27432" marB="27432">
-                    <a:solidFill>
-                      <a:srgbClr val="FFFFFF"/>
-                    </a:solidFill>
-                  </a:tcPr>
-                </a:tc>
-                <a:tc>
-                  <a:txBody>
-                    <a:bodyPr wrap="square"/>
-                    <a:lstStyle/>
-                    <a:p>
-                      <a:r>
-                        <a:rPr sz="1500" b="0">
-                          <a:solidFill>
-                            <a:srgbClr val="000000"/>
-                          </a:solidFill>
-                          <a:latin typeface="Times New Roman"/>
-                        </a:rPr>
-                        <a:t>methods 0–3 × 9 suites run on two boards; the two RFC 9529 traces match byte for byte</a:t>
-                      </a:r>
-                    </a:p>
-                  </a:txBody>
-                  <a:tcPr marL="54864" marR="54864" marT="27432" marB="27432">
-                    <a:solidFill>
-                      <a:srgbClr val="FFFFFF"/>
-                    </a:solidFill>
-                  </a:tcPr>
-                </a:tc>
-                <a:tc>
-                  <a:txBody>
-                    <a:bodyPr wrap="square"/>
-                    <a:lstStyle/>
-                    <a:p>
-                      <a:r>
-                        <a:rPr sz="1500" b="0">
-                          <a:solidFill>
-                            <a:srgbClr val="000000"/>
-                          </a:solidFill>
-                          <a:latin typeface="Times New Roman"/>
-                        </a:rPr>
-                        <a:t>3</a:t>
-                      </a:r>
-                    </a:p>
-                  </a:txBody>
-                  <a:tcPr marL="54864" marR="54864" marT="27432" marB="27432">
-                    <a:solidFill>
-                      <a:srgbClr val="FFFFFF"/>
-                    </a:solidFill>
-                  </a:tcPr>
-                </a:tc>
-              </a:tr>
-              <a:tr h="548640">
-                <a:tc>
-                  <a:txBody>
-                    <a:bodyPr wrap="square"/>
-                    <a:lstStyle/>
-                    <a:p>
-                      <a:r>
-                        <a:rPr sz="1500" b="0">
-                          <a:solidFill>
-                            <a:srgbClr val="000000"/>
-                          </a:solidFill>
-                          <a:latin typeface="Times New Roman"/>
-                        </a:rPr>
-                        <a:t>Does post-quantum EDHOC need a PSK?</a:t>
-                      </a:r>
-                    </a:p>
-                  </a:txBody>
-                  <a:tcPr marL="54864" marR="54864" marT="27432" marB="27432">
-                    <a:solidFill>
-                      <a:srgbClr val="F2F8EE"/>
-                    </a:solidFill>
-                  </a:tcPr>
-                </a:tc>
-                <a:tc>
-                  <a:txBody>
-                    <a:bodyPr wrap="square"/>
-                    <a:lstStyle/>
-                    <a:p>
-                      <a:r>
-                        <a:rPr sz="1500" b="0">
-                          <a:solidFill>
-                            <a:srgbClr val="000000"/>
-                          </a:solidFill>
-                          <a:latin typeface="Times New Roman"/>
-                        </a:rPr>
-                        <a:t>no shared PSK; still trusted credentials and long-term ML-KEM private keys</a:t>
-                      </a:r>
-                    </a:p>
-                  </a:txBody>
-                  <a:tcPr marL="54864" marR="54864" marT="27432" marB="27432">
-                    <a:solidFill>
-                      <a:srgbClr val="F2F8EE"/>
-                    </a:solidFill>
-                  </a:tcPr>
-                </a:tc>
-                <a:tc>
-                  <a:txBody>
-                    <a:bodyPr wrap="square"/>
-                    <a:lstStyle/>
-                    <a:p>
-                      <a:r>
-                        <a:rPr sz="1500" b="0">
-                          <a:solidFill>
-                            <a:srgbClr val="000000"/>
-                          </a:solidFill>
-                          <a:latin typeface="Times New Roman"/>
-                        </a:rPr>
-                        <a:t>4</a:t>
-                      </a:r>
-                    </a:p>
-                  </a:txBody>
-                  <a:tcPr marL="54864" marR="54864" marT="27432" marB="27432">
-                    <a:solidFill>
-                      <a:srgbClr val="F2F8EE"/>
-                    </a:solidFill>
-                  </a:tcPr>
-                </a:tc>
-              </a:tr>
-              <a:tr h="548640">
-                <a:tc>
-                  <a:txBody>
-                    <a:bodyPr wrap="square"/>
-                    <a:lstStyle/>
-                    <a:p>
-                      <a:r>
-                        <a:rPr sz="1500" b="0">
-                          <a:solidFill>
-                            <a:srgbClr val="000000"/>
-                          </a:solidFill>
-                          <a:latin typeface="Times New Roman"/>
-                        </a:rPr>
-                        <a:t>Is there a highest-security option?</a:t>
-                      </a:r>
-                    </a:p>
-                  </a:txBody>
-                  <a:tcPr marL="54864" marR="54864" marT="27432" marB="27432">
-                    <a:solidFill>
-                      <a:srgbClr val="FFFFFF"/>
-                    </a:solidFill>
-                  </a:tcPr>
-                </a:tc>
-                <a:tc>
-                  <a:txBody>
-                    <a:bodyPr wrap="square"/>
-                    <a:lstStyle/>
-                    <a:p>
-                      <a:r>
-                        <a:rPr sz="1500" b="0">
-                          <a:solidFill>
-                            <a:srgbClr val="000000"/>
-                          </a:solidFill>
-                          <a:latin typeface="Times New Roman"/>
-                        </a:rPr>
-                        <a:t>TBD3, the strongest configured here: AES-256-GCM + ML-KEM-1024 + SHA-384</a:t>
-                      </a:r>
-                    </a:p>
-                  </a:txBody>
-                  <a:tcPr marL="54864" marR="54864" marT="27432" marB="27432">
-                    <a:solidFill>
-                      <a:srgbClr val="FFFFFF"/>
-                    </a:solidFill>
-                  </a:tcPr>
-                </a:tc>
-                <a:tc>
-                  <a:txBody>
-                    <a:bodyPr wrap="square"/>
-                    <a:lstStyle/>
-                    <a:p>
-                      <a:r>
-                        <a:rPr sz="1500" b="0">
-                          <a:solidFill>
-                            <a:srgbClr val="000000"/>
-                          </a:solidFill>
-                          <a:latin typeface="Times New Roman"/>
-                        </a:rPr>
-                        <a:t>4</a:t>
-                      </a:r>
-                    </a:p>
-                  </a:txBody>
-                  <a:tcPr marL="54864" marR="54864" marT="27432" marB="27432">
-                    <a:solidFill>
-                      <a:srgbClr val="FFFFFF"/>
-                    </a:solidFill>
-                  </a:tcPr>
-                </a:tc>
-              </a:tr>
-              <a:tr h="548640">
-                <a:tc>
-                  <a:txBody>
-                    <a:bodyPr wrap="square"/>
-                    <a:lstStyle/>
-                    <a:p>
-                      <a:r>
-                        <a:rPr sz="1500" b="0">
-                          <a:solidFill>
-                            <a:srgbClr val="000000"/>
-                          </a:solidFill>
-                          <a:latin typeface="Times New Roman"/>
-                        </a:rPr>
-                        <a:t>Where do large files live, how much RAM?</a:t>
-                      </a:r>
-                    </a:p>
-                  </a:txBody>
-                  <a:tcPr marL="54864" marR="54864" marT="27432" marB="27432">
-                    <a:solidFill>
-                      <a:srgbClr val="F2F8EE"/>
-                    </a:solidFill>
-                  </a:tcPr>
-                </a:tc>
-                <a:tc>
-                  <a:txBody>
-                    <a:bodyPr wrap="square"/>
-                    <a:lstStyle/>
-                    <a:p>
-                      <a:r>
-                        <a:rPr sz="1500" b="0">
-                          <a:solidFill>
-                            <a:srgbClr val="000000"/>
-                          </a:solidFill>
-                          <a:latin typeface="Times New Roman"/>
-                        </a:rPr>
-                        <a:t>FAT32 on the SD card, streamed: RAM use is flat</a:t>
-                      </a:r>
-                    </a:p>
-                  </a:txBody>
-                  <a:tcPr marL="54864" marR="54864" marT="27432" marB="27432">
-                    <a:solidFill>
-                      <a:srgbClr val="F2F8EE"/>
-                    </a:solidFill>
-                  </a:tcPr>
-                </a:tc>
-                <a:tc>
-                  <a:txBody>
-                    <a:bodyPr wrap="square"/>
-                    <a:lstStyle/>
-                    <a:p>
-                      <a:r>
-                        <a:rPr sz="1500" b="0">
-                          <a:solidFill>
-                            <a:srgbClr val="000000"/>
-                          </a:solidFill>
-                          <a:latin typeface="Times New Roman"/>
-                        </a:rPr>
-                        <a:t>5</a:t>
-                      </a:r>
-                    </a:p>
-                  </a:txBody>
-                  <a:tcPr marL="54864" marR="54864" marT="27432" marB="27432">
-                    <a:solidFill>
-                      <a:srgbClr val="F2F8EE"/>
-                    </a:solidFill>
-                  </a:tcPr>
-                </a:tc>
-              </a:tr>
-              <a:tr h="548640">
-                <a:tc>
-                  <a:txBody>
-                    <a:bodyPr wrap="square"/>
-                    <a:lstStyle/>
-                    <a:p>
-                      <a:r>
-                        <a:rPr sz="1500" b="0">
-                          <a:solidFill>
-                            <a:srgbClr val="000000"/>
-                          </a:solidFill>
-                          <a:latin typeface="Times New Roman"/>
-                        </a:rPr>
-                        <a:t>How long does each step take?</a:t>
-                      </a:r>
-                    </a:p>
-                  </a:txBody>
-                  <a:tcPr marL="54864" marR="54864" marT="27432" marB="27432">
-                    <a:solidFill>
-                      <a:srgbClr val="FFFFFF"/>
-                    </a:solidFill>
-                  </a:tcPr>
-                </a:tc>
-                <a:tc>
-                  <a:txBody>
-                    <a:bodyPr wrap="square"/>
-                    <a:lstStyle/>
-                    <a:p>
-                      <a:r>
-                        <a:rPr sz="1500" b="0">
-                          <a:solidFill>
-                            <a:srgbClr val="000000"/>
-                          </a:solidFill>
-                          <a:latin typeface="Times New Roman"/>
-                        </a:rPr>
-                        <a:t>TIMING=1 prints PERF lines per step</a:t>
-                      </a:r>
-                    </a:p>
-                  </a:txBody>
-                  <a:tcPr marL="54864" marR="54864" marT="27432" marB="27432">
-                    <a:solidFill>
-                      <a:srgbClr val="FFFFFF"/>
-                    </a:solidFill>
-                  </a:tcPr>
-                </a:tc>
-                <a:tc>
-                  <a:txBody>
-                    <a:bodyPr wrap="square"/>
-                    <a:lstStyle/>
-                    <a:p>
-                      <a:r>
-                        <a:rPr sz="1500" b="0">
-                          <a:solidFill>
-                            <a:srgbClr val="000000"/>
-                          </a:solidFill>
-                          <a:latin typeface="Times New Roman"/>
-                        </a:rPr>
-                        <a:t>3, 4, 5</a:t>
-                      </a:r>
-                    </a:p>
-                  </a:txBody>
-                  <a:tcPr marL="54864" marR="54864" marT="27432" marB="27432">
-                    <a:solidFill>
-                      <a:srgbClr val="FFFFFF"/>
-                    </a:solidFill>
-                  </a:tcPr>
-                </a:tc>
-              </a:tr>
-            </a:tbl>
-          </a:graphicData>
-        </a:graphic>
-      </p:graphicFrame>
-      <p:sp>
-        <p:nvSpPr>
-          <p:cNvPr id="64" name="TextBox 63"/>
-          <p:cNvSpPr txBox="1"/>
-          <p:nvPr/>
-        </p:nvSpPr>
-        <p:spPr>
-          <a:xfrm>
-            <a:off x="365760" y="5394960"/>
-            <a:ext cx="11430000" cy="731520"/>
-          </a:xfrm>
-          <a:prstGeom prst="rect">
-            <a:avLst/>
-          </a:prstGeom>
-          <a:noFill/>
-        </p:spPr>
-        <p:txBody>
-          <a:bodyPr wrap="square" anchor="t">
-            <a:spAutoFit/>
-          </a:bodyPr>
-          <a:lstStyle/>
-          <a:p>
-            <a:pPr>
-              <a:spcAft>
-                <a:spcPts val="400"/>
-              </a:spcAft>
-            </a:pPr>
-            <a:r>
-              <a:rPr sz="1600" b="0">
-                <a:solidFill>
-                  <a:srgbClr val="808080"/>
-                </a:solidFill>
-                <a:latin typeface="Times New Roman"/>
-              </a:rPr>
-              <a:t>The questions were asked during the project; </a:t>
-            </a:r>
-            <a:r>
-              <a:rPr sz="1600" b="0" i="1">
-                <a:solidFill>
-                  <a:srgbClr val="808080"/>
-                </a:solidFill>
-                <a:latin typeface="Times New Roman"/>
-              </a:rPr>
-              <a:t>deviations.txt</a:t>
-            </a:r>
-            <a:r>
-              <a:rPr sz="1600" b="0">
-                <a:solidFill>
-                  <a:srgbClr val="808080"/>
-                </a:solidFill>
-                <a:latin typeface="Times New Roman"/>
-              </a:rPr>
-              <a:t> keeps the dated questions and answers.</a:t>
-            </a:r>
-          </a:p>
-        </p:txBody>
-      </p:sp>
-    </p:spTree>
-  </p:cSld>
-  <p:clrMapOvr>
-    <a:masterClrMapping/>
-  </p:clrMapOvr>
-</p:sld>
-</file>
-
-<file path=ppt/slides/slide53.xml><?xml version="1.0" encoding="utf-8"?>
-<p:sld xmlns:a="http://schemas.openxmlformats.org/drawingml/2006/main" xmlns:p="http://schemas.openxmlformats.org/presentationml/2006/main" xmlns:r="http://schemas.openxmlformats.org/officeDocument/2006/relationships">
-  <p:cSld>
-    <p:spTree>
-      <p:nvGrpSpPr>
-        <p:cNvPr id="1" name=""/>
-        <p:cNvGrpSpPr/>
-        <p:nvPr/>
-      </p:nvGrpSpPr>
-      <p:grpSpPr/>
-      <p:sp>
-        <p:nvSpPr>
-          <p:cNvPr id="10" name="CustomShape 6">
-            <a:extLst>
-              <a:ext uri="{FF2B5EF4-FFF2-40B4-BE49-F238E27FC236}">
-                <a16:creationId xmlns:a16="http://schemas.microsoft.com/office/drawing/2014/main" id="{CB76DC60-C0C9-436D-8956-EE4CA394869E}"/>
-              </a:ext>
-            </a:extLst>
-          </p:cNvPr>
-          <p:cNvSpPr/>
-          <p:nvPr/>
-        </p:nvSpPr>
-        <p:spPr>
-          <a:xfrm>
-            <a:off x="-6000" y="0"/>
-            <a:ext cx="12198000" cy="644877"/>
-          </a:xfrm>
-          <a:prstGeom prst="rect">
-            <a:avLst/>
-          </a:prstGeom>
-          <a:solidFill>
-            <a:schemeClr val="accent6">
-              <a:lumMod val="40000"/>
-              <a:lumOff val="60000"/>
-            </a:schemeClr>
-          </a:solidFill>
-          <a:ln>
-            <a:noFill/>
-          </a:ln>
-        </p:spPr>
-        <p:style>
-          <a:lnRef idx="0">
-            <a:scrgbClr r="0" g="0" b="0"/>
-          </a:lnRef>
-          <a:fillRef idx="0">
-            <a:scrgbClr r="0" g="0" b="0"/>
-          </a:fillRef>
-          <a:effectRef idx="0">
-            <a:scrgbClr r="0" g="0" b="0"/>
-          </a:effectRef>
-          <a:fontRef idx="minor"/>
-        </p:style>
-        <p:txBody>
-          <a:bodyPr wrap="square" lIns="90000" tIns="45000" rIns="90000" bIns="45000">
-            <a:spAutoFit/>
-          </a:bodyPr>
-          <a:lstStyle/>
-          <a:p>
-            <a:pPr marL="360" algn="ctr">
-              <a:lnSpc>
-                <a:spcPct val="100000"/>
-              </a:lnSpc>
-              <a:buClr>
-                <a:srgbClr val="000000"/>
-              </a:buClr>
-            </a:pPr>
-            <a:r>
-              <a:rPr lang="en-US" sz="2400" b="1" spc="-1" dirty="0">
-                <a:latin typeface="Times New Roman" panose="02020603050405020304" pitchFamily="18" charset="0"/>
-                <a:cs typeface="Times New Roman" panose="02020603050405020304" pitchFamily="18" charset="0"/>
-              </a:rPr>
-              <a:t>6. Questions Behind the Project </a:t>
-            </a:r>
-            <a:r>
-              <a:rPr lang="en-US" sz="2400" spc="-1" dirty="0">
-                <a:latin typeface="Times New Roman" panose="02020603050405020304" pitchFamily="18" charset="0"/>
-                <a:cs typeface="Times New Roman" panose="02020603050405020304" pitchFamily="18" charset="0"/>
-              </a:rPr>
-              <a:t>(2/3) Limits to know before you reuse this code</a:t>
-            </a:r>
-          </a:p>
-        </p:txBody>
-      </p:sp>
-      <p:sp>
-        <p:nvSpPr>
-          <p:cNvPr id="62" name="CustomShape 2"/>
-          <p:cNvSpPr/>
-          <p:nvPr/>
-        </p:nvSpPr>
-        <p:spPr>
-          <a:xfrm>
-            <a:off x="11291400" y="6492960"/>
-            <a:ext cx="894600" cy="358920"/>
-          </a:xfrm>
-          <a:prstGeom prst="rect">
-            <a:avLst/>
-          </a:prstGeom>
-          <a:noFill/>
-          <a:ln>
-            <a:noFill/>
-          </a:ln>
-        </p:spPr>
-        <p:style>
-          <a:lnRef idx="0">
-            <a:scrgbClr r="0" g="0" b="0"/>
-          </a:lnRef>
-          <a:fillRef idx="0">
-            <a:scrgbClr r="0" g="0" b="0"/>
-          </a:fillRef>
-          <a:effectRef idx="0">
-            <a:scrgbClr r="0" g="0" b="0"/>
-          </a:effectRef>
-          <a:fontRef idx="minor"/>
-        </p:style>
-        <p:txBody>
-          <a:bodyPr lIns="90000" tIns="45000" rIns="90000" bIns="45000" anchor="ctr">
-            <a:noAutofit/>
-          </a:bodyPr>
-          <a:lstStyle/>
-          <a:p>
-            <a:pPr algn="ctr">
-              <a:lnSpc>
-                <a:spcPct val="100000"/>
-              </a:lnSpc>
-            </a:pPr>
-            <a:fld id="{32452110-F6D1-439F-92C4-7A3912DA20B0}" type="slidenum">
-              <a:rPr lang="en-US" sz="1600" b="1" strike="noStrike" spc="-1">
-                <a:solidFill>
-                  <a:srgbClr val="000000"/>
-                </a:solidFill>
-                <a:latin typeface="Times New Roman"/>
-                <a:ea typeface="DejaVu Sans"/>
-              </a:rPr>
-              <a:t>47</a:t>
-            </a:fld>
-            <a:endParaRPr lang="en-US" sz="1600" b="0" strike="noStrike" spc="-1">
-              <a:latin typeface="Arial"/>
-            </a:endParaRPr>
-          </a:p>
-        </p:txBody>
-      </p:sp>
-      <p:graphicFrame>
-        <p:nvGraphicFramePr>
-          <p:cNvPr id="63" name="Table 62"/>
-          <p:cNvGraphicFramePr>
-            <a:graphicFrameLocks noGrp="1"/>
-          </p:cNvGraphicFramePr>
-          <p:nvPr/>
-        </p:nvGraphicFramePr>
-        <p:xfrm>
-          <a:off x="365760" y="868680"/>
-          <a:ext cx="11429999" cy="4023360"/>
+          <a:ext cx="11429999" cy="3108960"/>
         </p:xfrm>
         <a:graphic>
           <a:graphicData uri="http://schemas.openxmlformats.org/drawingml/2006/table">
@@ -33929,7 +32210,7 @@
                 <a:gridCol w="4389120"/>
                 <a:gridCol w="3749039"/>
               </a:tblGrid>
-              <a:tr h="574765">
+              <a:tr h="621792">
                 <a:tc>
                   <a:txBody>
                     <a:bodyPr wrap="square"/>
@@ -33997,7 +32278,7 @@
                   </a:tcPr>
                 </a:tc>
               </a:tr>
-              <a:tr h="574765">
+              <a:tr h="621792">
                 <a:tc>
                   <a:txBody>
                     <a:bodyPr wrap="square"/>
@@ -34065,7 +32346,7 @@
                   </a:tcPr>
                 </a:tc>
               </a:tr>
-              <a:tr h="574765">
+              <a:tr h="621792">
                 <a:tc>
                   <a:txBody>
                     <a:bodyPr wrap="square"/>
@@ -34133,7 +32414,7 @@
                   </a:tcPr>
                 </a:tc>
               </a:tr>
-              <a:tr h="574765">
+              <a:tr h="621792">
                 <a:tc>
                   <a:txBody>
                     <a:bodyPr wrap="square"/>
@@ -34201,7 +32482,7 @@
                   </a:tcPr>
                 </a:tc>
               </a:tr>
-              <a:tr h="574765">
+              <a:tr h="621792">
                 <a:tc>
                   <a:txBody>
                     <a:bodyPr wrap="square"/>
@@ -34269,142 +32550,6 @@
                   </a:tcPr>
                 </a:tc>
               </a:tr>
-              <a:tr h="574765">
-                <a:tc>
-                  <a:txBody>
-                    <a:bodyPr wrap="square"/>
-                    <a:lstStyle/>
-                    <a:p>
-                      <a:r>
-                        <a:rPr sz="1500" b="0">
-                          <a:solidFill>
-                            <a:srgbClr val="000000"/>
-                          </a:solidFill>
-                          <a:latin typeface="Times New Roman"/>
-                        </a:rPr>
-                        <a:t>32 KiB chips</a:t>
-                      </a:r>
-                    </a:p>
-                  </a:txBody>
-                  <a:tcPr marL="54864" marR="54864" marT="27432" marB="27432">
-                    <a:solidFill>
-                      <a:srgbClr val="FFFFFF"/>
-                    </a:solidFill>
-                  </a:tcPr>
-                </a:tc>
-                <a:tc>
-                  <a:txBody>
-                    <a:bodyPr wrap="square"/>
-                    <a:lstStyle/>
-                    <a:p>
-                      <a:r>
-                        <a:rPr sz="1500" b="0">
-                          <a:solidFill>
-                            <a:srgbClr val="000000"/>
-                          </a:solidFill>
-                          <a:latin typeface="Times New Roman"/>
-                        </a:rPr>
-                        <a:t>only suite 4, method 3, initiator fits; its responder is 69 B over</a:t>
-                      </a:r>
-                    </a:p>
-                  </a:txBody>
-                  <a:tcPr marL="54864" marR="54864" marT="27432" marB="27432">
-                    <a:solidFill>
-                      <a:srgbClr val="FFFFFF"/>
-                    </a:solidFill>
-                  </a:tcPr>
-                </a:tc>
-                <a:tc>
-                  <a:txBody>
-                    <a:bodyPr wrap="square"/>
-                    <a:lstStyle/>
-                    <a:p>
-                      <a:r>
-                        <a:rPr sz="1500" b="0">
-                          <a:solidFill>
-                            <a:srgbClr val="000000"/>
-                          </a:solidFill>
-                          <a:latin typeface="Times New Roman"/>
-                        </a:rPr>
-                        <a:t>use those builds, or give the chip more RAM</a:t>
-                      </a:r>
-                    </a:p>
-                  </a:txBody>
-                  <a:tcPr marL="54864" marR="54864" marT="27432" marB="27432">
-                    <a:solidFill>
-                      <a:srgbClr val="FFFFFF"/>
-                    </a:solidFill>
-                  </a:tcPr>
-                </a:tc>
-              </a:tr>
-              <a:tr h="574770">
-                <a:tc>
-                  <a:txBody>
-                    <a:bodyPr wrap="square"/>
-                    <a:lstStyle/>
-                    <a:p>
-                      <a:r>
-                        <a:rPr sz="1500" b="0">
-                          <a:solidFill>
-                            <a:srgbClr val="000000"/>
-                          </a:solidFill>
-                          <a:latin typeface="Times New Roman"/>
-                        </a:rPr>
-                        <a:t>Boot from SD after power-up</a:t>
-                      </a:r>
-                    </a:p>
-                  </a:txBody>
-                  <a:tcPr marL="54864" marR="54864" marT="27432" marB="27432">
-                    <a:solidFill>
-                      <a:srgbClr val="F2F8EE"/>
-                    </a:solidFill>
-                  </a:tcPr>
-                </a:tc>
-                <a:tc>
-                  <a:txBody>
-                    <a:bodyPr wrap="square"/>
-                    <a:lstStyle/>
-                    <a:p>
-                      <a:r>
-                        <a:rPr sz="1500" b="0">
-                          <a:solidFill>
-                            <a:srgbClr val="000000"/>
-                          </a:solidFill>
-                          <a:latin typeface="Times New Roman"/>
-                        </a:rPr>
-                        <a:t>the boot ROM sends CMD0 only once</a:t>
-                      </a:r>
-                    </a:p>
-                  </a:txBody>
-                  <a:tcPr marL="54864" marR="54864" marT="27432" marB="27432">
-                    <a:solidFill>
-                      <a:srgbClr val="F2F8EE"/>
-                    </a:solidFill>
-                  </a:tcPr>
-                </a:tc>
-                <a:tc>
-                  <a:txBody>
-                    <a:bodyPr wrap="square"/>
-                    <a:lstStyle/>
-                    <a:p>
-                      <a:r>
-                        <a:rPr sz="1500" b="0">
-                          <a:solidFill>
-                            <a:srgbClr val="000000"/>
-                          </a:solidFill>
-                          <a:latin typeface="Times New Roman"/>
-                        </a:rPr>
-                        <a:t>load over JTAG (Lesson 2), or add a CMD0 retry to sdboot and rebuild the bitstream</a:t>
-                      </a:r>
-                    </a:p>
-                  </a:txBody>
-                  <a:tcPr marL="54864" marR="54864" marT="27432" marB="27432">
-                    <a:solidFill>
-                      <a:srgbClr val="F2F8EE"/>
-                    </a:solidFill>
-                  </a:tcPr>
-                </a:tc>
-              </a:tr>
             </a:tbl>
           </a:graphicData>
         </a:graphic>
@@ -34417,7 +32562,7 @@
 </p:sld>
 </file>
 
-<file path=ppt/slides/slide54.xml><?xml version="1.0" encoding="utf-8"?>
+<file path=ppt/slides/slide51.xml><?xml version="1.0" encoding="utf-8"?>
 <p:sld xmlns:a="http://schemas.openxmlformats.org/drawingml/2006/main" xmlns:p="http://schemas.openxmlformats.org/presentationml/2006/main" xmlns:r="http://schemas.openxmlformats.org/officeDocument/2006/relationships">
   <p:cSld>
     <p:spTree>
@@ -34484,14 +32629,14 @@
               </a:buClr>
             </a:pPr>
             <a:r>
-              <a:rPr lang="en-US" sz="3200" b="1" spc="-1" dirty="0">
+              <a:rPr lang="en-US" sz="3600" b="1" spc="-1" dirty="0">
                 <a:latin typeface="Times New Roman" panose="02020603050405020304" pitchFamily="18" charset="0"/>
                 <a:cs typeface="Times New Roman" panose="02020603050405020304" pitchFamily="18" charset="0"/>
               </a:rPr>
-              <a:t>6. Questions Behind the Project </a:t>
-            </a:r>
-            <a:r>
-              <a:rPr lang="en-US" sz="3200" spc="-1" dirty="0">
+              <a:t>6. Choose and Reproduce </a:t>
+            </a:r>
+            <a:r>
+              <a:rPr lang="en-US" sz="3600" spc="-1" dirty="0">
                 <a:latin typeface="Times New Roman" panose="02020603050405020304" pitchFamily="18" charset="0"/>
                 <a:cs typeface="Times New Roman" panose="02020603050405020304" pitchFamily="18" charset="0"/>
               </a:rPr>
@@ -34550,7 +32695,7 @@
                 <a:latin typeface="Times New Roman"/>
                 <a:ea typeface="DejaVu Sans"/>
               </a:rPr>
-              <a:t>48</a:t>
+              <a:t>45</a:t>
             </a:fld>
             <a:endParaRPr lang="en-US" sz="1600" b="0" strike="noStrike" spc="-1">
               <a:latin typeface="Arial"/>
@@ -35067,7 +33212,7 @@
 </p:sld>
 </file>
 
-<file path=ppt/slides/slide55.xml><?xml version="1.0" encoding="utf-8"?>
+<file path=ppt/slides/slide52.xml><?xml version="1.0" encoding="utf-8"?>
 <p:sld xmlns:a="http://schemas.openxmlformats.org/drawingml/2006/main" xmlns:p="http://schemas.openxmlformats.org/presentationml/2006/main" xmlns:r="http://schemas.openxmlformats.org/officeDocument/2006/relationships">
   <p:cSld>
     <p:spTree>
@@ -35253,7 +33398,7 @@
                 <a:latin typeface="Times New Roman"/>
                 <a:ea typeface="DejaVu Sans"/>
               </a:rPr>
-              <a:t>49</a:t>
+              <a:t>46</a:t>
             </a:fld>
             <a:endParaRPr lang="en-US" sz="1600" b="0" strike="noStrike" spc="-1">
               <a:latin typeface="Arial"/>
@@ -35432,7 +33577,7 @@
                 <a:ea typeface="DejaVu Sans"/>
                 <a:cs typeface="Times New Roman" panose="02020603050405020304" pitchFamily="18" charset="0"/>
               </a:rPr>
-              <a:t>Making It Faster</a:t>
+              <a:t>Speed: Measure and Choose a Link</a:t>
             </a:r>
             <a:endParaRPr lang="en-US" sz="4000" b="0" strike="noStrike" spc="-1" dirty="0">
               <a:solidFill>
@@ -35460,7 +33605,7 @@
                 <a:ea typeface="DejaVu Sans"/>
                 <a:cs typeface="Times New Roman" panose="02020603050405020304" pitchFamily="18" charset="0"/>
               </a:rPr>
-              <a:t>Questions Behind the Project</a:t>
+              <a:t>Choose and Reproduce</a:t>
             </a:r>
             <a:endParaRPr lang="en-US" sz="4000" b="0" strike="noStrike" spc="-1" dirty="0">
               <a:solidFill>
@@ -35545,7 +33690,7 @@
 </p:sld>
 </file>
 
-<file path=ppt/slides/slide56.xml><?xml version="1.0" encoding="utf-8"?>
+<file path=ppt/slides/slide53.xml><?xml version="1.0" encoding="utf-8"?>
 <p:sld xmlns:a="http://schemas.openxmlformats.org/drawingml/2006/main" xmlns:p="http://schemas.openxmlformats.org/presentationml/2006/main" xmlns:r="http://schemas.openxmlformats.org/officeDocument/2006/relationships">
   <p:cSld>
     <p:spTree>
@@ -35678,7 +33823,7 @@
                 <a:latin typeface="Times New Roman"/>
                 <a:ea typeface="DejaVu Sans"/>
               </a:rPr>
-              <a:t>50</a:t>
+              <a:t>47</a:t>
             </a:fld>
             <a:endParaRPr lang="en-US" sz="1600" b="0" strike="noStrike" spc="-1">
               <a:latin typeface="Arial"/>
@@ -35997,7 +34142,7 @@
 </p:sld>
 </file>
 
-<file path=ppt/slides/slide57.xml><?xml version="1.0" encoding="utf-8"?>
+<file path=ppt/slides/slide54.xml><?xml version="1.0" encoding="utf-8"?>
 <p:sld xmlns:a="http://schemas.openxmlformats.org/drawingml/2006/main" xmlns:p="http://schemas.openxmlformats.org/presentationml/2006/main" xmlns:r="http://schemas.openxmlformats.org/officeDocument/2006/relationships">
   <p:cSld>
     <p:spTree>
@@ -36130,7 +34275,7 @@
                 <a:latin typeface="Times New Roman"/>
                 <a:ea typeface="DejaVu Sans"/>
               </a:rPr>
-              <a:t>51</a:t>
+              <a:t>48</a:t>
             </a:fld>
             <a:endParaRPr lang="en-US" sz="1600" b="0" strike="noStrike" spc="-1">
               <a:latin typeface="Arial"/>
@@ -36220,7 +34365,7 @@
 </p:sld>
 </file>
 
-<file path=ppt/slides/slide58.xml><?xml version="1.0" encoding="utf-8"?>
+<file path=ppt/slides/slide55.xml><?xml version="1.0" encoding="utf-8"?>
 <p:sld xmlns:a="http://schemas.openxmlformats.org/drawingml/2006/main" xmlns:p="http://schemas.openxmlformats.org/presentationml/2006/main" xmlns:r="http://schemas.openxmlformats.org/officeDocument/2006/relationships">
   <p:cSld>
     <p:spTree>
@@ -36353,7 +34498,7 @@
                 <a:latin typeface="Times New Roman"/>
                 <a:ea typeface="DejaVu Sans"/>
               </a:rPr>
-              <a:t>52</a:t>
+              <a:t>49</a:t>
             </a:fld>
             <a:endParaRPr lang="en-US" sz="1600" b="0" strike="noStrike" spc="-1">
               <a:latin typeface="Arial"/>
@@ -36761,7 +34906,7 @@
 </p:sld>
 </file>
 
-<file path=ppt/slides/slide59.xml><?xml version="1.0" encoding="utf-8"?>
+<file path=ppt/slides/slide56.xml><?xml version="1.0" encoding="utf-8"?>
 <p:sld xmlns:a="http://schemas.openxmlformats.org/drawingml/2006/main" xmlns:p="http://schemas.openxmlformats.org/presentationml/2006/main" xmlns:r="http://schemas.openxmlformats.org/officeDocument/2006/relationships">
   <p:cSld>
     <p:spTree>
@@ -36889,7 +35034,7 @@
                 <a:latin typeface="Times New Roman"/>
                 <a:ea typeface="DejaVu Sans"/>
               </a:rPr>
-              <a:t>53</a:t>
+              <a:t>50</a:t>
             </a:fld>
             <a:endParaRPr lang="en-US" sz="1600" b="0" strike="noStrike" spc="-1">
               <a:latin typeface="Arial"/>
@@ -36983,7 +35128,7 @@
                 </a:solidFill>
                 <a:latin typeface="Times New Roman"/>
               </a:rPr>
-              <a:t>Radio link made reliable with a CRC per frame, a 2-second radio watchdog and reading the FIFO while repeating; SD driver fixed (CMD0 retry, busy wait, late write reply).</a:t>
+              <a:t>The radio link checks every frame (CRC-16), re-initialises a stuck radio after 2 s and keeps listening while it repeats; the RF: line shows all three.</a:t>
             </a:r>
           </a:p>
           <a:p>
@@ -37011,7 +35156,7 @@
                 </a:solidFill>
                 <a:latin typeface="Times New Roman"/>
               </a:rPr>
-              <a:t>1 MiB card to card with TBD3: 99.6 s, 0 bytes wrong; +43 % after removing hidden multiplies, table AES and the link fix.</a:t>
+              <a:t>1 MiB card to card with TBD3: 99.6 s by radio, 32.2 s over 3 UART wires; verify with the byte count and the read-back.</a:t>
             </a:r>
           </a:p>
           <a:p>
@@ -37130,7 +35275,7 @@
 </p:sld>
 </file>
 
-<file path=ppt/slides/slide60.xml><?xml version="1.0" encoding="utf-8"?>
+<file path=ppt/slides/slide57.xml><?xml version="1.0" encoding="utf-8"?>
 <p:sld xmlns:a="http://schemas.openxmlformats.org/drawingml/2006/main" xmlns:p="http://schemas.openxmlformats.org/presentationml/2006/main" xmlns:r="http://schemas.openxmlformats.org/officeDocument/2006/relationships">
   <p:cSld>
     <p:spTree>
@@ -37294,7 +35439,7 @@
                 <a:latin typeface="Times New Roman"/>
                 <a:ea typeface="DejaVu Sans"/>
               </a:rPr>
-              <a:t>54</a:t>
+              <a:t>51</a:t>
             </a:fld>
             <a:endParaRPr lang="en-US" sz="1600" b="0" strike="noStrike" spc="-1">
               <a:latin typeface="Arial"/>
@@ -38273,7 +36418,7 @@
                 </a:solidFill>
                 <a:latin typeface="Times New Roman"/>
               </a:rPr>
-              <a:t>Make the radio link and the SD card reliable — and learn from the bugs we hit.</a:t>
+              <a:t>Read the radio and SD diagnostics, and know what to do when a transfer fails.</a:t>
             </a:r>
           </a:p>
           <a:p>
@@ -38287,7 +36432,7 @@
                 </a:solidFill>
                 <a:latin typeface="Times New Roman"/>
               </a:rPr>
-              <a:t>Measure where the time goes, make it faster (radio, then a 3× faster wired link), and see how each question behind the project was answered.</a:t>
+              <a:t>Measure the speed yourself, choose the radio or the 3× faster wired link, and reproduce every result of the course.</a:t>
             </a:r>
           </a:p>
           <a:p>
@@ -38712,7 +36857,7 @@
                 <a:ea typeface="DejaVu Sans"/>
                 <a:cs typeface="Times New Roman" panose="02020603050405020304" pitchFamily="18" charset="0"/>
               </a:rPr>
-              <a:t>Making It Faster</a:t>
+              <a:t>Speed: Measure and Choose a Link</a:t>
             </a:r>
             <a:endParaRPr lang="en-US" sz="4000" b="0" strike="noStrike" spc="-1" dirty="0">
               <a:solidFill>
@@ -38740,7 +36885,7 @@
                 <a:ea typeface="DejaVu Sans"/>
                 <a:cs typeface="Times New Roman" panose="02020603050405020304" pitchFamily="18" charset="0"/>
               </a:rPr>
-              <a:t>Questions Behind the Project</a:t>
+              <a:t>Choose and Reproduce</a:t>
             </a:r>
             <a:endParaRPr lang="en-US" sz="4000" b="0" strike="noStrike" spc="-1" dirty="0">
               <a:solidFill>

--- a/fpga/sw/export/docs/slides/05_Secure_file_transfer_and_results.pptx
+++ b/fpga/sw/export/docs/slides/05_Secure_file_transfer_and_results.pptx
@@ -31690,7 +31690,7 @@
                           </a:solidFill>
                           <a:latin typeface="Times New Roman"/>
                         </a:rPr>
-                        <a:t>edhoc-authkem, SUITE=TBD2</a:t>
+                        <a:t>edhoc-authkem, SUITE=TBD2 (default) → build/</a:t>
                       </a:r>
                     </a:p>
                   </a:txBody>
@@ -31758,7 +31758,7 @@
                           </a:solidFill>
                           <a:latin typeface="Times New Roman"/>
                         </a:rPr>
-                        <a:t>edhoc-authkem, SUITE=TBD3</a:t>
+                        <a:t>edhoc-authkem, SUITE=TBD3 → build-tbd3/</a:t>
                       </a:r>
                     </a:p>
                   </a:txBody>

--- a/fpga/sw/export/docs/slides/05_Secure_file_transfer_and_results.pptx
+++ b/fpga/sw/export/docs/slides/05_Secure_file_transfer_and_results.pptx
@@ -32807,7 +32807,7 @@
                           </a:solidFill>
                           <a:latin typeface="Times New Roman"/>
                         </a:rPr>
-                        <a:t>1. Clone (Lesson 1, section 1, (5/8)), build the bitstream, program both boards</a:t>
+                        <a:t>1. Set up (Lesson 1, section 1, (5/11)–(8/11)), build the bitstream, program both boards</a:t>
                       </a:r>
                     </a:p>
                   </a:txBody>

--- a/fpga/sw/export/docs/slides/05_Secure_file_transfer_and_results.pptx
+++ b/fpga/sw/export/docs/slides/05_Secure_file_transfer_and_results.pptx
@@ -16495,7 +16495,7 @@
                 </a:solidFill>
                 <a:latin typeface="Consolas"/>
               </a:rPr>
-              <a:t>sudo fpga/sw/export/tools/mksd.sh /dev/sdX   # erases the card: MBR + 32 MiB boot + FAT32</a:t>
+              <a:t>sudo $REPO/fpga/sw/export/tools/mksd.sh /dev/sdX   # erases the card: MBR + 32 MiB boot + FAT32</a:t>
             </a:r>
           </a:p>
           <a:p>
@@ -16582,7 +16582,7 @@
                 </a:solidFill>
                 <a:latin typeface="Consolas"/>
               </a:rPr>
-              <a:t>cd fpga/sw/export/tests</a:t>
+              <a:t>cd $REPO/fpga/sw/export/tests</a:t>
             </a:r>
           </a:p>
           <a:p>
@@ -21256,7 +21256,7 @@
         <p:spPr>
           <a:xfrm>
             <a:off x="365760" y="868680"/>
-            <a:ext cx="7315200" cy="2618232"/>
+            <a:ext cx="7315200" cy="2214999"/>
           </a:xfrm>
           <a:prstGeom prst="rect">
             <a:avLst/>
@@ -21291,13 +21291,13 @@
           <a:p>
             <a:pPr algn="l"/>
             <a:r>
-              <a:rPr sz="1300" b="1">
+              <a:rPr sz="1083" b="1">
                 <a:solidFill>
                   <a:srgbClr val="AAAAAA"/>
                 </a:solidFill>
                 <a:latin typeface="Consolas"/>
               </a:rPr>
-              <a:t>cd tests &amp;&amp; make fat32-host-test   (excerpt of 15 checks)</a:t>
+              <a:t>cd $REPO/fpga/sw/export/tests; source ~/edhoc-venv/bin/activate; make fat32-host-test</a:t>
             </a:r>
           </a:p>
           <a:p>
@@ -21307,7 +21307,7 @@
               </a:lnSpc>
             </a:pPr>
             <a:r>
-              <a:rPr sz="1300">
+              <a:rPr sz="1083">
                 <a:solidFill>
                   <a:srgbClr val="8BE98B"/>
                 </a:solidFill>
@@ -21323,7 +21323,7 @@
               </a:lnSpc>
             </a:pPr>
             <a:r>
-              <a:rPr sz="1300">
+              <a:rPr sz="1083">
                 <a:solidFill>
                   <a:srgbClr val="8BE98B"/>
                 </a:solidFill>
@@ -21339,7 +21339,7 @@
               </a:lnSpc>
             </a:pPr>
             <a:r>
-              <a:rPr sz="1300">
+              <a:rPr sz="1083">
                 <a:solidFill>
                   <a:srgbClr val="8BE98B"/>
                 </a:solidFill>
@@ -21355,7 +21355,7 @@
               </a:lnSpc>
             </a:pPr>
             <a:r>
-              <a:rPr sz="1300">
+              <a:rPr sz="1083">
                 <a:solidFill>
                   <a:srgbClr val="8BE98B"/>
                 </a:solidFill>
@@ -21371,7 +21371,7 @@
               </a:lnSpc>
             </a:pPr>
             <a:r>
-              <a:rPr sz="1300">
+              <a:rPr sz="1083">
                 <a:solidFill>
                   <a:srgbClr val="8BE98B"/>
                 </a:solidFill>
@@ -21387,7 +21387,7 @@
               </a:lnSpc>
             </a:pPr>
             <a:r>
-              <a:rPr sz="1300">
+              <a:rPr sz="1083">
                 <a:solidFill>
                   <a:srgbClr val="8BE98B"/>
                 </a:solidFill>
@@ -21403,7 +21403,7 @@
               </a:lnSpc>
             </a:pPr>
             <a:r>
-              <a:rPr sz="1300">
+              <a:rPr sz="1083">
                 <a:solidFill>
                   <a:srgbClr val="8BE98B"/>
                 </a:solidFill>
@@ -21419,7 +21419,7 @@
               </a:lnSpc>
             </a:pPr>
             <a:r>
-              <a:rPr sz="1300">
+              <a:rPr sz="1083">
                 <a:solidFill>
                   <a:srgbClr val="8BE98B"/>
                 </a:solidFill>
@@ -21435,7 +21435,7 @@
               </a:lnSpc>
             </a:pPr>
             <a:r>
-              <a:rPr sz="1300">
+              <a:rPr sz="1083">
                 <a:solidFill>
                   <a:srgbClr val="8BE98B"/>
                 </a:solidFill>
@@ -21451,7 +21451,7 @@
               </a:lnSpc>
             </a:pPr>
             <a:r>
-              <a:rPr sz="1300">
+              <a:rPr sz="1083">
                 <a:solidFill>
                   <a:srgbClr val="8BE98B"/>
                 </a:solidFill>
@@ -21467,7 +21467,7 @@
               </a:lnSpc>
             </a:pPr>
             <a:r>
-              <a:rPr sz="1300">
+              <a:rPr sz="1083">
                 <a:solidFill>
                   <a:srgbClr val="8BE98B"/>
                 </a:solidFill>
@@ -25122,7 +25122,7 @@
                 </a:solidFill>
                 <a:latin typeface="Consolas"/>
               </a:rPr>
-              <a:t>Run this — from the repository root</a:t>
+              <a:t>Run this</a:t>
             </a:r>
           </a:p>
           <a:p>
@@ -25138,7 +25138,7 @@
                 </a:solidFill>
                 <a:latin typeface="Consolas"/>
               </a:rPr>
-              <a:t>cd fpga/sw/export/edhoc-authkem</a:t>
+              <a:t>cd $REPO/fpga/sw/export/edhoc-authkem</a:t>
             </a:r>
           </a:p>
           <a:p>
@@ -28314,7 +28314,7 @@
                 </a:solidFill>
                 <a:latin typeface="Consolas"/>
               </a:rPr>
-              <a:t>Run this — from the repository root (add TRANSPORT=uart for the wired link)</a:t>
+              <a:t>Run this (add TRANSPORT=uart for the wired link)</a:t>
             </a:r>
           </a:p>
           <a:p>
@@ -28330,7 +28330,7 @@
                 </a:solidFill>
                 <a:latin typeface="Consolas"/>
               </a:rPr>
-              <a:t>cd fpga/sw/export/edhoc-authkem</a:t>
+              <a:t>cd $REPO/fpga/sw/export/edhoc-authkem</a:t>
             </a:r>
           </a:p>
           <a:p>
@@ -32807,7 +32807,7 @@
                           </a:solidFill>
                           <a:latin typeface="Times New Roman"/>
                         </a:rPr>
-                        <a:t>1. Set up (Lesson 1, section 1, (5/11)–(8/11)), build the bitstream, program both boards</a:t>
+                        <a:t>1. Set up (Lesson 1, section 1, (6/12)–(10/12)), build the bitstream, program both boards</a:t>
                       </a:r>
                     </a:p>
                   </a:txBody>

--- a/fpga/sw/export/docs/slides/05_Secure_file_transfer_and_results.pptx
+++ b/fpga/sw/export/docs/slides/05_Secure_file_transfer_and_results.pptx
@@ -13286,18 +13286,18 @@
               </a:buClr>
             </a:pPr>
             <a:r>
-              <a:rPr lang="en-US" sz="2700" b="1" spc="-1" dirty="0">
+              <a:rPr lang="en-US" sz="3500" b="1" spc="-1" dirty="0">
                 <a:latin typeface="Times New Roman" panose="02020603050405020304" pitchFamily="18" charset="0"/>
                 <a:cs typeface="Times New Roman" panose="02020603050405020304" pitchFamily="18" charset="0"/>
               </a:rPr>
               <a:t>2. Radio Link </a:t>
             </a:r>
             <a:r>
-              <a:rPr lang="en-US" sz="2700" spc="-1" dirty="0">
+              <a:rPr lang="en-US" sz="3500" spc="-1" dirty="0">
                 <a:latin typeface="Times New Roman" panose="02020603050405020304" pitchFamily="18" charset="0"/>
                 <a:cs typeface="Times New Roman" panose="02020603050405020304" pitchFamily="18" charset="0"/>
               </a:rPr>
-              <a:t>(5/8) If a long transfer fails with an AEAD error (113)</a:t>
+              <a:t>(5/8) AEAD error 113 on a long transfer</a:t>
             </a:r>
           </a:p>
         </p:txBody>
@@ -13737,18 +13737,18 @@
               </a:buClr>
             </a:pPr>
             <a:r>
-              <a:rPr lang="en-US" sz="3300" b="1" spc="-1" dirty="0">
+              <a:rPr lang="en-US" sz="3500" b="1" spc="-1" dirty="0">
                 <a:latin typeface="Times New Roman" panose="02020603050405020304" pitchFamily="18" charset="0"/>
                 <a:cs typeface="Times New Roman" panose="02020603050405020304" pitchFamily="18" charset="0"/>
               </a:rPr>
               <a:t>2. Radio Link </a:t>
             </a:r>
             <a:r>
-              <a:rPr lang="en-US" sz="3300" spc="-1" dirty="0">
+              <a:rPr lang="en-US" sz="3500" spc="-1" dirty="0">
                 <a:latin typeface="Times New Roman" panose="02020603050405020304" pitchFamily="18" charset="0"/>
                 <a:cs typeface="Times New Roman" panose="02020603050405020304" pitchFamily="18" charset="0"/>
               </a:rPr>
-              <a:t>(6/8) If one board stops hearing the other</a:t>
+              <a:t>(6/8) One board stops hearing the other</a:t>
             </a:r>
           </a:p>
         </p:txBody>
@@ -14142,18 +14142,18 @@
               </a:buClr>
             </a:pPr>
             <a:r>
-              <a:rPr lang="en-US" sz="2700" b="1" spc="-1" dirty="0">
+              <a:rPr lang="en-US" sz="3600" b="1" spc="-1" dirty="0">
                 <a:latin typeface="Times New Roman" panose="02020603050405020304" pitchFamily="18" charset="0"/>
                 <a:cs typeface="Times New Roman" panose="02020603050405020304" pitchFamily="18" charset="0"/>
               </a:rPr>
               <a:t>2. Radio Link </a:t>
             </a:r>
             <a:r>
-              <a:rPr lang="en-US" sz="2700" spc="-1" dirty="0">
+              <a:rPr lang="en-US" sz="3600" spc="-1" dirty="0">
                 <a:latin typeface="Times New Roman" panose="02020603050405020304" pitchFamily="18" charset="0"/>
                 <a:cs typeface="Times New Roman" panose="02020603050405020304" pitchFamily="18" charset="0"/>
               </a:rPr>
-              <a:t>(7/8) If both boards keep repeating after the handshake</a:t>
+              <a:t>(7/8) Repeats after the handshake</a:t>
             </a:r>
           </a:p>
         </p:txBody>
@@ -19490,18 +19490,18 @@
               </a:buClr>
             </a:pPr>
             <a:r>
-              <a:rPr lang="en-US" sz="3000" b="1" spc="-1" dirty="0">
+              <a:rPr lang="en-US" sz="3600" b="1" spc="-1" dirty="0">
                 <a:latin typeface="Times New Roman" panose="02020603050405020304" pitchFamily="18" charset="0"/>
                 <a:cs typeface="Times New Roman" panose="02020603050405020304" pitchFamily="18" charset="0"/>
               </a:rPr>
               <a:t>3. SD Card &amp; FAT32 </a:t>
             </a:r>
             <a:r>
-              <a:rPr lang="en-US" sz="3000" spc="-1" dirty="0">
+              <a:rPr lang="en-US" sz="3600" spc="-1" dirty="0">
                 <a:latin typeface="Times New Roman" panose="02020603050405020304" pitchFamily="18" charset="0"/>
                 <a:cs typeface="Times New Roman" panose="02020603050405020304" pitchFamily="18" charset="0"/>
               </a:rPr>
-              <a:t>(6/9) If an SD write is reported as failed</a:t>
+              <a:t>(6/9) SD write failures</a:t>
             </a:r>
           </a:p>
         </p:txBody>
@@ -26488,18 +26488,18 @@
               </a:buClr>
             </a:pPr>
             <a:r>
-              <a:rPr lang="en-US" sz="3200" b="1" spc="-1" dirty="0">
+              <a:rPr lang="en-US" sz="3400" b="1" spc="-1" dirty="0">
                 <a:latin typeface="Times New Roman" panose="02020603050405020304" pitchFamily="18" charset="0"/>
                 <a:cs typeface="Times New Roman" panose="02020603050405020304" pitchFamily="18" charset="0"/>
               </a:rPr>
               <a:t>4. End-to-End Transfer </a:t>
             </a:r>
             <a:r>
-              <a:rPr lang="en-US" sz="3200" spc="-1" dirty="0">
+              <a:rPr lang="en-US" sz="3400" spc="-1" dirty="0">
                 <a:latin typeface="Times New Roman" panose="02020603050405020304" pitchFamily="18" charset="0"/>
                 <a:cs typeface="Times New Roman" panose="02020603050405020304" pitchFamily="18" charset="0"/>
               </a:rPr>
-              <a:t>(7/8) If board B says “not stored”</a:t>
+              <a:t>(7/8) Board B says “not stored”</a:t>
             </a:r>
           </a:p>
         </p:txBody>
